--- a/docs/2026-2학기-통계독서탐구-수행평가/발표예시-간호.pptx
+++ b/docs/2026-2학기-통계독서탐구-수행평가/발표예시-간호.pptx
@@ -9,9 +9,13 @@
     <p:sldId id="257" r:id="rId3"/>
     <p:sldId id="258" r:id="rId4"/>
     <p:sldId id="259" r:id="rId5"/>
+    <p:sldId id="260" r:id="rId6"/>
+    <p:sldId id="261" r:id="rId7"/>
+    <p:sldId id="262" r:id="rId8"/>
+    <p:sldId id="263" r:id="rId9"/>
   </p:sldIdLst>
   <p:notesMasterIdLst>
-    <p:notesMasterId r:id="rId6"/>
+    <p:notesMasterId r:id="rId10"/>
   </p:notesMasterIdLst>
   <p:sldSz cx="9144000" cy="5143500"/>
   <p:notesSz cx="5143500" cy="9144000"/>
@@ -110,12 +114,16 @@
   <p:extLst>
     <p:ext uri="{521415D9-36F7-43E2-AB2F-B90AF26B5E84}">
       <p14:sectionLst xmlns:p14="http://schemas.microsoft.com/office/powerpoint/2010/main">
-        <p14:section name="발표" id="{35f25345-19f9-ae9b-b4a9-4b1ee08d6b9d}">
+        <p14:section name="발표" id="{a29a602f-50a3-b39b-90fd-3dff5ac32301}">
           <p14:sldIdLst>
             <p14:sldId id="256"/>
             <p14:sldId id="257"/>
             <p14:sldId id="258"/>
             <p14:sldId id="259"/>
+            <p14:sldId id="260"/>
+            <p14:sldId id="261"/>
+            <p14:sldId id="262"/>
+            <p14:sldId id="263"/>
           </p14:sldIdLst>
         </p14:section>
       </p14:sectionLst>
@@ -139,7 +147,7 @@
           <a:lstStyle/>
           <a:p>
             <a:pPr>
-              <a:defRPr sz="1200" b="0" i="0" u="none" strike="noStrike">
+              <a:defRPr sz="1050" b="0" i="0" u="none" strike="noStrike">
                 <a:solidFill>
                   <a:srgbClr val="1B211D"/>
                 </a:solidFill>
@@ -147,7 +155,7 @@
               </a:defRPr>
             </a:pPr>
             <a:r>
-              <a:rPr sz="1200" b="0" i="0" u="none" strike="noStrike">
+              <a:rPr sz="1050" b="0" i="0" u="none" strike="noStrike">
                 <a:solidFill>
                   <a:srgbClr val="1B211D"/>
                 </a:solidFill>
@@ -201,7 +209,7 @@
               <a:lstStyle/>
               <a:p>
                 <a:pPr>
-                  <a:defRPr b="0" i="0" strike="noStrike" sz="950" u="none">
+                  <a:defRPr b="0" i="0" strike="noStrike" sz="850" u="none">
                     <a:solidFill>
                       <a:srgbClr val="1B211D"/>
                     </a:solidFill>
@@ -221,7 +229,7 @@
           </c:dLbls>
           <c:marker>
             <c:symbol val="circle"/>
-            <c:size val="7"/>
+            <c:size val="6"/>
             <c:spPr>
               <a:solidFill>
                 <a:srgbClr val="2A78D6"/>
@@ -322,7 +330,7 @@
               <a:lstStyle/>
               <a:p>
                 <a:pPr>
-                  <a:defRPr b="0" i="0" strike="noStrike" sz="950" u="none">
+                  <a:defRPr b="0" i="0" strike="noStrike" sz="850" u="none">
                     <a:solidFill>
                       <a:srgbClr val="1B211D"/>
                     </a:solidFill>
@@ -342,7 +350,7 @@
           </c:dLbls>
           <c:marker>
             <c:symbol val="circle"/>
-            <c:size val="7"/>
+            <c:size val="6"/>
             <c:spPr>
               <a:solidFill>
                 <a:srgbClr val="EB6834"/>
@@ -415,7 +423,7 @@
             <a:lstStyle/>
             <a:p>
               <a:pPr>
-                <a:defRPr b="0" i="0" strike="noStrike" sz="950" u="none">
+                <a:defRPr b="0" i="0" strike="noStrike" sz="850" u="none">
                   <a:solidFill>
                     <a:srgbClr val="1B211D"/>
                   </a:solidFill>
@@ -463,7 +471,7 @@
           <a:lstStyle/>
           <a:p>
             <a:pPr>
-              <a:defRPr sz="1000" b="0" i="0" u="none" strike="noStrike">
+              <a:defRPr sz="900" b="0" i="0" u="none" strike="noStrike">
                 <a:solidFill>
                   <a:srgbClr val="52514E"/>
                 </a:solidFill>
@@ -517,7 +525,7 @@
           <a:lstStyle/>
           <a:p>
             <a:pPr>
-              <a:defRPr sz="1000" b="0" i="0" u="none" strike="noStrike">
+              <a:defRPr sz="900" b="0" i="0" u="none" strike="noStrike">
                 <a:solidFill>
                   <a:srgbClr val="52514E"/>
                 </a:solidFill>
@@ -548,7 +556,7 @@
         <a:lstStyle/>
         <a:p>
           <a:pPr>
-            <a:defRPr sz="1000">
+            <a:defRPr sz="900">
               <a:solidFill>
                 <a:srgbClr val="52514E"/>
               </a:solidFill>
@@ -971,7 +979,7 @@
           <a:p>
             <a:r>
               <a:rPr lang="en-US" dirty="0"/>
-              <a:t>[20초] 안녕하세요, 2학년 ○반 ○번 ○○○입니다. 제 주장은 '고등학생의 아침 결식은 해마다 늘고 있으니 학교가 등교 후 먹을 수 있는 간단한 아침을 제공해야 한다'입니다. 참고한 책은 한스 로슬링의 《팩트풀니스》입니다. 의사인 저자는 느낌 대신 숫자로 보라고 했고, 저도 '요즘 애들은 아침을 안 먹는다'는 말을 숫자로 확인했습니다.</a:t>
+              <a:t/>
             </a:r>
             <a:endParaRPr lang="en-US" dirty="0"/>
           </a:p>
@@ -1059,7 +1067,7 @@
           <a:p>
             <a:r>
               <a:rPr lang="en-US" dirty="0"/>
-              <a:t>[40초] 자료는 질병관리청의 청소년건강행태조사입니다. 매년 전국 800개 중·고등학교 약 6만 명을 뽑아 조사하는 표본조사이므로, 이 숫자는 표본에서 나온 비율을 전체로 미루어 본 것입니다. 원자료에서 주 5일 이상 아침을 거른 비율을 남학생과 여학생으로 나눠 2021년부터 2025년까지 다섯 해만 골라 표로 만들었습니다. 화면은 조사 누리집의 통계표입니다.</a:t>
+              <a:t/>
             </a:r>
             <a:endParaRPr lang="en-US" dirty="0"/>
           </a:p>
@@ -1147,7 +1155,7 @@
           <a:p>
             <a:r>
               <a:rPr lang="en-US" dirty="0"/>
-              <a:t>[40초] 두 선 모두 오른쪽으로 올라갑니다. 여학생은 2021년 39.1%에서 2025년 45.3%로 6.2%p, 남학생은 37.0%에서 41.9%로 4.9%p 늘었고, 여학생이 매년 더 높습니다. 저는 잠이 부족해서 아침에 먹기보다 자는 쪽을 택한다고 봅니다. 같은 조사에서 잠을 충분히 잔다고 느끼는 비율이 2024년 남학생 27.1%, 여학생 16.5%뿐이었고, 결식률이 높은 여학생이 수면 충족률도 낮았습니다.</a:t>
+              <a:t/>
             </a:r>
             <a:endParaRPr lang="en-US" dirty="0"/>
           </a:p>
@@ -1235,7 +1243,7 @@
           <a:p>
             <a:r>
               <a:rPr lang="en-US" dirty="0"/>
-              <a:t>[20초] 정리하면, 아침 결식은 10명 중 4명을 넘고 5년째 늘며 여학생이 더 높습니다. 그래서 집에서 먹으라는 교육보다 등교 후 학교에서 먹을 수 있는 아침이 현실적이라고 주장합니다. 간호사가 되면 환자의 생활 습관을 이렇게 숫자로 묻고 싶습니다. 이상입니다.</a:t>
+              <a:t/>
             </a:r>
             <a:endParaRPr lang="en-US" dirty="0"/>
           </a:p>
@@ -1259,6 +1267,358 @@
             <a:fld id="{F7021451-1387-4CA6-816F-3879F97B5CBC}" type="slidenum">
               <a:rPr lang="en-US"/>
               <a:t>4</a:t>
+            </a:fld>
+            <a:endParaRPr lang="en-US"/>
+          </a:p>
+        </p:txBody>
+      </p:sp>
+    </p:spTree>
+    <p:extLst>
+      <p:ext uri="{BB962C8B-B14F-4D97-AF65-F5344CB8AC3E}">
+        <p14:creationId xmlns:p14="http://schemas.microsoft.com/office/powerpoint/2010/main" val="1024086991"/>
+      </p:ext>
+    </p:extLst>
+  </p:cSld>
+  <p:clrMapOvr>
+    <a:masterClrMapping/>
+  </p:clrMapOvr>
+</p:notes>
+</file>
+
+<file path=ppt/notesSlides/notesSlide5.xml><?xml version="1.0" encoding="utf-8"?>
+<p:notes xmlns:a="http://schemas.openxmlformats.org/drawingml/2006/main" xmlns:r="http://schemas.openxmlformats.org/officeDocument/2006/relationships" xmlns:p="http://schemas.openxmlformats.org/presentationml/2006/main">
+  <p:cSld>
+    <p:spTree>
+      <p:nvGrpSpPr>
+        <p:cNvPr id="1" name=""/>
+        <p:cNvGrpSpPr/>
+        <p:nvPr/>
+      </p:nvGrpSpPr>
+      <p:grpSpPr>
+        <a:xfrm>
+          <a:off x="0" y="0"/>
+          <a:ext cx="0" cy="0"/>
+          <a:chOff x="0" y="0"/>
+          <a:chExt cx="0" cy="0"/>
+        </a:xfrm>
+      </p:grpSpPr>
+      <p:sp>
+        <p:nvSpPr>
+          <p:cNvPr id="2" name="Slide Image Placeholder 1"/>
+          <p:cNvSpPr>
+            <a:spLocks noGrp="1" noRot="1" noChangeAspect="1"/>
+          </p:cNvSpPr>
+          <p:nvPr>
+            <p:ph type="sldImg"/>
+          </p:nvPr>
+        </p:nvSpPr>
+        <p:spPr/>
+      </p:sp>
+      <p:sp>
+        <p:nvSpPr>
+          <p:cNvPr id="3" name="Notes Placeholder 2"/>
+          <p:cNvSpPr>
+            <a:spLocks noGrp="1"/>
+          </p:cNvSpPr>
+          <p:nvPr>
+            <p:ph type="body" idx="1"/>
+          </p:nvPr>
+        </p:nvSpPr>
+        <p:spPr/>
+        <p:txBody>
+          <a:bodyPr/>
+          <a:lstStyle/>
+          <a:p>
+            <a:r>
+              <a:rPr lang="en-US" dirty="0"/>
+              <a:t/>
+            </a:r>
+            <a:endParaRPr lang="en-US" dirty="0"/>
+          </a:p>
+        </p:txBody>
+      </p:sp>
+      <p:sp>
+        <p:nvSpPr>
+          <p:cNvPr id="4" name="Slide Number Placeholder 3"/>
+          <p:cNvSpPr>
+            <a:spLocks noGrp="1"/>
+          </p:cNvSpPr>
+          <p:nvPr>
+            <p:ph type="sldNum" sz="quarter" idx="10"/>
+          </p:nvPr>
+        </p:nvSpPr>
+        <p:spPr/>
+        <p:txBody>
+          <a:bodyPr/>
+          <a:lstStyle/>
+          <a:p>
+            <a:fld id="{F7021451-1387-4CA6-816F-3879F97B5CBC}" type="slidenum">
+              <a:rPr lang="en-US"/>
+              <a:t>5</a:t>
+            </a:fld>
+            <a:endParaRPr lang="en-US"/>
+          </a:p>
+        </p:txBody>
+      </p:sp>
+    </p:spTree>
+    <p:extLst>
+      <p:ext uri="{BB962C8B-B14F-4D97-AF65-F5344CB8AC3E}">
+        <p14:creationId xmlns:p14="http://schemas.microsoft.com/office/powerpoint/2010/main" val="1024086991"/>
+      </p:ext>
+    </p:extLst>
+  </p:cSld>
+  <p:clrMapOvr>
+    <a:masterClrMapping/>
+  </p:clrMapOvr>
+</p:notes>
+</file>
+
+<file path=ppt/notesSlides/notesSlide6.xml><?xml version="1.0" encoding="utf-8"?>
+<p:notes xmlns:a="http://schemas.openxmlformats.org/drawingml/2006/main" xmlns:r="http://schemas.openxmlformats.org/officeDocument/2006/relationships" xmlns:p="http://schemas.openxmlformats.org/presentationml/2006/main">
+  <p:cSld>
+    <p:spTree>
+      <p:nvGrpSpPr>
+        <p:cNvPr id="1" name=""/>
+        <p:cNvGrpSpPr/>
+        <p:nvPr/>
+      </p:nvGrpSpPr>
+      <p:grpSpPr>
+        <a:xfrm>
+          <a:off x="0" y="0"/>
+          <a:ext cx="0" cy="0"/>
+          <a:chOff x="0" y="0"/>
+          <a:chExt cx="0" cy="0"/>
+        </a:xfrm>
+      </p:grpSpPr>
+      <p:sp>
+        <p:nvSpPr>
+          <p:cNvPr id="2" name="Slide Image Placeholder 1"/>
+          <p:cNvSpPr>
+            <a:spLocks noGrp="1" noRot="1" noChangeAspect="1"/>
+          </p:cNvSpPr>
+          <p:nvPr>
+            <p:ph type="sldImg"/>
+          </p:nvPr>
+        </p:nvSpPr>
+        <p:spPr/>
+      </p:sp>
+      <p:sp>
+        <p:nvSpPr>
+          <p:cNvPr id="3" name="Notes Placeholder 2"/>
+          <p:cNvSpPr>
+            <a:spLocks noGrp="1"/>
+          </p:cNvSpPr>
+          <p:nvPr>
+            <p:ph type="body" idx="1"/>
+          </p:nvPr>
+        </p:nvSpPr>
+        <p:spPr/>
+        <p:txBody>
+          <a:bodyPr/>
+          <a:lstStyle/>
+          <a:p>
+            <a:r>
+              <a:rPr lang="en-US" dirty="0"/>
+              <a:t/>
+            </a:r>
+            <a:endParaRPr lang="en-US" dirty="0"/>
+          </a:p>
+        </p:txBody>
+      </p:sp>
+      <p:sp>
+        <p:nvSpPr>
+          <p:cNvPr id="4" name="Slide Number Placeholder 3"/>
+          <p:cNvSpPr>
+            <a:spLocks noGrp="1"/>
+          </p:cNvSpPr>
+          <p:nvPr>
+            <p:ph type="sldNum" sz="quarter" idx="10"/>
+          </p:nvPr>
+        </p:nvSpPr>
+        <p:spPr/>
+        <p:txBody>
+          <a:bodyPr/>
+          <a:lstStyle/>
+          <a:p>
+            <a:fld id="{F7021451-1387-4CA6-816F-3879F97B5CBC}" type="slidenum">
+              <a:rPr lang="en-US"/>
+              <a:t>6</a:t>
+            </a:fld>
+            <a:endParaRPr lang="en-US"/>
+          </a:p>
+        </p:txBody>
+      </p:sp>
+    </p:spTree>
+    <p:extLst>
+      <p:ext uri="{BB962C8B-B14F-4D97-AF65-F5344CB8AC3E}">
+        <p14:creationId xmlns:p14="http://schemas.microsoft.com/office/powerpoint/2010/main" val="1024086991"/>
+      </p:ext>
+    </p:extLst>
+  </p:cSld>
+  <p:clrMapOvr>
+    <a:masterClrMapping/>
+  </p:clrMapOvr>
+</p:notes>
+</file>
+
+<file path=ppt/notesSlides/notesSlide7.xml><?xml version="1.0" encoding="utf-8"?>
+<p:notes xmlns:a="http://schemas.openxmlformats.org/drawingml/2006/main" xmlns:r="http://schemas.openxmlformats.org/officeDocument/2006/relationships" xmlns:p="http://schemas.openxmlformats.org/presentationml/2006/main">
+  <p:cSld>
+    <p:spTree>
+      <p:nvGrpSpPr>
+        <p:cNvPr id="1" name=""/>
+        <p:cNvGrpSpPr/>
+        <p:nvPr/>
+      </p:nvGrpSpPr>
+      <p:grpSpPr>
+        <a:xfrm>
+          <a:off x="0" y="0"/>
+          <a:ext cx="0" cy="0"/>
+          <a:chOff x="0" y="0"/>
+          <a:chExt cx="0" cy="0"/>
+        </a:xfrm>
+      </p:grpSpPr>
+      <p:sp>
+        <p:nvSpPr>
+          <p:cNvPr id="2" name="Slide Image Placeholder 1"/>
+          <p:cNvSpPr>
+            <a:spLocks noGrp="1" noRot="1" noChangeAspect="1"/>
+          </p:cNvSpPr>
+          <p:nvPr>
+            <p:ph type="sldImg"/>
+          </p:nvPr>
+        </p:nvSpPr>
+        <p:spPr/>
+      </p:sp>
+      <p:sp>
+        <p:nvSpPr>
+          <p:cNvPr id="3" name="Notes Placeholder 2"/>
+          <p:cNvSpPr>
+            <a:spLocks noGrp="1"/>
+          </p:cNvSpPr>
+          <p:nvPr>
+            <p:ph type="body" idx="1"/>
+          </p:nvPr>
+        </p:nvSpPr>
+        <p:spPr/>
+        <p:txBody>
+          <a:bodyPr/>
+          <a:lstStyle/>
+          <a:p>
+            <a:r>
+              <a:rPr lang="en-US" dirty="0"/>
+              <a:t/>
+            </a:r>
+            <a:endParaRPr lang="en-US" dirty="0"/>
+          </a:p>
+        </p:txBody>
+      </p:sp>
+      <p:sp>
+        <p:nvSpPr>
+          <p:cNvPr id="4" name="Slide Number Placeholder 3"/>
+          <p:cNvSpPr>
+            <a:spLocks noGrp="1"/>
+          </p:cNvSpPr>
+          <p:nvPr>
+            <p:ph type="sldNum" sz="quarter" idx="10"/>
+          </p:nvPr>
+        </p:nvSpPr>
+        <p:spPr/>
+        <p:txBody>
+          <a:bodyPr/>
+          <a:lstStyle/>
+          <a:p>
+            <a:fld id="{F7021451-1387-4CA6-816F-3879F97B5CBC}" type="slidenum">
+              <a:rPr lang="en-US"/>
+              <a:t>7</a:t>
+            </a:fld>
+            <a:endParaRPr lang="en-US"/>
+          </a:p>
+        </p:txBody>
+      </p:sp>
+    </p:spTree>
+    <p:extLst>
+      <p:ext uri="{BB962C8B-B14F-4D97-AF65-F5344CB8AC3E}">
+        <p14:creationId xmlns:p14="http://schemas.microsoft.com/office/powerpoint/2010/main" val="1024086991"/>
+      </p:ext>
+    </p:extLst>
+  </p:cSld>
+  <p:clrMapOvr>
+    <a:masterClrMapping/>
+  </p:clrMapOvr>
+</p:notes>
+</file>
+
+<file path=ppt/notesSlides/notesSlide8.xml><?xml version="1.0" encoding="utf-8"?>
+<p:notes xmlns:a="http://schemas.openxmlformats.org/drawingml/2006/main" xmlns:r="http://schemas.openxmlformats.org/officeDocument/2006/relationships" xmlns:p="http://schemas.openxmlformats.org/presentationml/2006/main">
+  <p:cSld>
+    <p:spTree>
+      <p:nvGrpSpPr>
+        <p:cNvPr id="1" name=""/>
+        <p:cNvGrpSpPr/>
+        <p:nvPr/>
+      </p:nvGrpSpPr>
+      <p:grpSpPr>
+        <a:xfrm>
+          <a:off x="0" y="0"/>
+          <a:ext cx="0" cy="0"/>
+          <a:chOff x="0" y="0"/>
+          <a:chExt cx="0" cy="0"/>
+        </a:xfrm>
+      </p:grpSpPr>
+      <p:sp>
+        <p:nvSpPr>
+          <p:cNvPr id="2" name="Slide Image Placeholder 1"/>
+          <p:cNvSpPr>
+            <a:spLocks noGrp="1" noRot="1" noChangeAspect="1"/>
+          </p:cNvSpPr>
+          <p:nvPr>
+            <p:ph type="sldImg"/>
+          </p:nvPr>
+        </p:nvSpPr>
+        <p:spPr/>
+      </p:sp>
+      <p:sp>
+        <p:nvSpPr>
+          <p:cNvPr id="3" name="Notes Placeholder 2"/>
+          <p:cNvSpPr>
+            <a:spLocks noGrp="1"/>
+          </p:cNvSpPr>
+          <p:nvPr>
+            <p:ph type="body" idx="1"/>
+          </p:nvPr>
+        </p:nvSpPr>
+        <p:spPr/>
+        <p:txBody>
+          <a:bodyPr/>
+          <a:lstStyle/>
+          <a:p>
+            <a:r>
+              <a:rPr lang="en-US" dirty="0"/>
+              <a:t/>
+            </a:r>
+            <a:endParaRPr lang="en-US" dirty="0"/>
+          </a:p>
+        </p:txBody>
+      </p:sp>
+      <p:sp>
+        <p:nvSpPr>
+          <p:cNvPr id="4" name="Slide Number Placeholder 3"/>
+          <p:cNvSpPr>
+            <a:spLocks noGrp="1"/>
+          </p:cNvSpPr>
+          <p:nvPr>
+            <p:ph type="sldNum" sz="quarter" idx="10"/>
+          </p:nvPr>
+        </p:nvSpPr>
+        <p:spPr/>
+        <p:txBody>
+          <a:bodyPr/>
+          <a:lstStyle/>
+          <a:p>
+            <a:fld id="{F7021451-1387-4CA6-816F-3879F97B5CBC}" type="slidenum">
+              <a:rPr lang="en-US"/>
+              <a:t>8</a:t>
             </a:fld>
             <a:endParaRPr lang="en-US"/>
           </a:p>
@@ -1408,7 +1768,7 @@
                   <a:schemeClr val="accent3"/>
                 </a:solidFill>
               </a:rPr>
-              <a:t>통계독서탐구 · 2학년 확률과 통계 수행평가 · 2분 발표</a:t>
+              <a:t>통계독서탐구 · 2학년 확률과 통계 수행평가</a:t>
             </a:r>
             <a:endParaRPr lang="en-US" sz="900" dirty="0"/>
           </a:p>
@@ -1454,6 +1814,166 @@
             <a:fld id="{F7021451-1387-4CA6-816F-3879F97B5CBC}" type="slidenum">
               <a:rPr b="0" lang="en-US"/>
               <a:t>1002</a:t>
+            </a:fld>
+            <a:endParaRPr lang="en-US"/>
+          </a:p>
+        </p:txBody>
+      </p:sp>
+    </p:spTree>
+  </p:cSld>
+  <p:clrMapOvr>
+    <a:masterClrMapping/>
+  </p:clrMapOvr>
+</p:sldLayout>
+</file>
+
+<file path=ppt/slideLayouts/slideLayout3.xml><?xml version="1.0" encoding="utf-8"?>
+<p:sldLayout xmlns:a="http://schemas.openxmlformats.org/drawingml/2006/main" xmlns:r="http://schemas.openxmlformats.org/officeDocument/2006/relationships" xmlns:p="http://schemas.openxmlformats.org/presentationml/2006/main" preserve="1">
+  <p:cSld name="EXPLAIN">
+    <p:bg>
+      <p:bgPr>
+        <a:solidFill>
+          <a:srgbClr val="EEF3EF"/>
+        </a:solidFill>
+      </p:bgPr>
+    </p:bg>
+    <p:spTree>
+      <p:nvGrpSpPr>
+        <p:cNvPr id="1" name=""/>
+        <p:cNvGrpSpPr/>
+        <p:nvPr/>
+      </p:nvGrpSpPr>
+      <p:grpSpPr>
+        <a:xfrm>
+          <a:off x="0" y="0"/>
+          <a:ext cx="0" cy="0"/>
+          <a:chOff x="0" y="0"/>
+          <a:chExt cx="0" cy="0"/>
+        </a:xfrm>
+      </p:grpSpPr>
+      <p:sp>
+        <p:nvSpPr>
+          <p:cNvPr id="2" name="Text 0"/>
+          <p:cNvSpPr/>
+          <p:nvPr>
+            <p:ph idx="100" type="title" hasCustomPrompt="1"/>
+          </p:nvPr>
+        </p:nvSpPr>
+        <p:spPr>
+          <a:xfrm>
+            <a:off x="960120" y="274320"/>
+            <a:ext cx="7726680" cy="548640"/>
+          </a:xfrm>
+          <a:prstGeom prst="rect">
+            <a:avLst/>
+          </a:prstGeom>
+          <a:noFill/>
+          <a:ln/>
+        </p:spPr>
+        <p:txBody>
+          <a:bodyPr wrap="square" rtlCol="0"/>
+          <a:lstStyle>
+            <a:lvl1pPr algn="l" indent="0" marL="0">
+              <a:buNone/>
+              <a:defRPr lang="en-US" sz="2400" b="1" dirty="0">
+                <a:solidFill>
+                  <a:schemeClr val="tx2"/>
+                </a:solidFill>
+              </a:defRPr>
+            </a:lvl1pPr>
+          </a:lstStyle>
+          <a:p>
+            <a:pPr algn="l" indent="0" marL="0">
+              <a:buNone/>
+            </a:pPr>
+            <a:r>
+              <a:rPr lang="en-US" sz="2400" b="1" dirty="0">
+                <a:solidFill>
+                  <a:schemeClr val="tx2"/>
+                </a:solidFill>
+              </a:rPr>
+              <a:t>제목</a:t>
+            </a:r>
+            <a:endParaRPr lang="en-US" sz="2400" dirty="0"/>
+          </a:p>
+        </p:txBody>
+      </p:sp>
+      <p:sp>
+        <p:nvSpPr>
+          <p:cNvPr id="3" name="Text 0"/>
+          <p:cNvSpPr txBox="1"/>
+          <p:nvPr/>
+        </p:nvSpPr>
+        <p:spPr>
+          <a:xfrm>
+            <a:off x="457200" y="4754880"/>
+            <a:ext cx="5943600" cy="228600"/>
+          </a:xfrm>
+          <a:prstGeom prst="rect">
+            <a:avLst/>
+          </a:prstGeom>
+          <a:noFill/>
+          <a:ln/>
+        </p:spPr>
+        <p:txBody>
+          <a:bodyPr wrap="square" lIns="0" tIns="0" rIns="0" bIns="0" rtlCol="0" anchor="ctr"/>
+          <a:lstStyle/>
+          <a:p>
+            <a:pPr indent="0" marL="0">
+              <a:buNone/>
+            </a:pPr>
+            <a:r>
+              <a:rPr lang="en-US" sz="900" dirty="0">
+                <a:solidFill>
+                  <a:schemeClr val="accent3"/>
+                </a:solidFill>
+              </a:rPr>
+              <a:t>통계독서탐구 · 2학년 확률과 통계 수행평가</a:t>
+            </a:r>
+            <a:endParaRPr lang="en-US" sz="900" dirty="0"/>
+          </a:p>
+        </p:txBody>
+      </p:sp>
+      <p:sp>
+        <p:nvSpPr>
+          <p:cNvPr id="25" name="Slide Number Placeholder 0"/>
+          <p:cNvSpPr>
+            <a:spLocks noGrp="1"/>
+          </p:cNvSpPr>
+          <p:nvPr>
+            <p:ph type="sldNum" sz="quarter" idx="4294967295"/>
+          </p:nvPr>
+        </p:nvSpPr>
+        <p:spPr>
+          <a:xfrm>
+            <a:off x="8229600" y="4754880"/>
+            <a:ext cx="457200" cy="228600"/>
+          </a:xfrm>
+          <a:prstGeom prst="rect">
+            <a:avLst/>
+          </a:prstGeom>
+          <a:extLst>
+            <a:ext uri="{C572A759-6A51-4108-AA02-DFA0A04FC94B}">
+              <ma14:wrappingTextBoxFlag xmlns:ma14="http://schemas.microsoft.com/office/mac/drawingml/2011/main" val="0"/>
+            </a:ext>
+          </a:extLst>
+        </p:spPr>
+        <p:txBody>
+          <a:bodyPr/>
+          <a:lstStyle>
+            <a:lvl1pPr>
+              <a:defRPr sz="900">
+                <a:solidFill>
+                  <a:srgbClr val="6B6759"/>
+                </a:solidFill>
+              </a:defRPr>
+            </a:lvl1pPr>
+          </a:lstStyle>
+          <a:p>
+            <a:pPr algn="r"/>
+            <a:fld id="{F7021451-1387-4CA6-816F-3879F97B5CBC}" type="slidenum">
+              <a:rPr b="0" lang="en-US"/>
+              <a:t>1003</a:t>
             </a:fld>
             <a:endParaRPr lang="en-US"/>
           </a:p>
@@ -1535,6 +2055,7 @@
   <p:sldLayoutIdLst>
     <p:sldLayoutId id="2147483649" r:id="rId1"/>
     <p:sldLayoutId id="2147483650" r:id="rId2"/>
+    <p:sldLayoutId id="2147483651" r:id="rId3"/>
   </p:sldLayoutIdLst>
   <p:hf sldNum="0" hdr="0" ftr="0" dt="0"/>
   <p:txStyles>
@@ -1938,7 +2459,21 @@
                   <a:schemeClr val="tx1"/>
                 </a:solidFill>
               </a:rPr>
-              <a:t>고등학생의 아침 결식은 해마다 늘고 있고, 학교가 등교 후 먹을 수 있는 간단한 아침을 제공해야 한다.</a:t>
+              <a:t>고등학생의 아침 결식은 해마다 늘고 있다.</a:t>
+            </a:r>
+            <a:endParaRPr lang="en-US" sz="2400" dirty="0"/>
+          </a:p>
+          <a:p>
+            <a:pPr indent="0" marL="0">
+              <a:buNone/>
+            </a:pPr>
+            <a:r>
+              <a:rPr lang="en-US" sz="2400" b="1" dirty="0">
+                <a:solidFill>
+                  <a:schemeClr val="tx1"/>
+                </a:solidFill>
+              </a:rPr>
+              <a:t>등교 후 먹을 수 있는 아침을 학교가 마련해야 한다.</a:t>
             </a:r>
             <a:endParaRPr lang="en-US" sz="2400" dirty="0"/>
           </a:p>
@@ -2192,7 +2727,7 @@
                   <a:schemeClr val="tx1"/>
                 </a:solidFill>
               </a:rPr>
-              <a:t>의사인 저자는 느낌 대신 숫자로 보라고 한다. 아침 결식이 정말 느는지 숫자로 확인했다</a:t>
+              <a:t>의사인 저자는 느낌 대신 숫자로 보라고 한다. '요즘 애들은 아침을 안 먹는다'는 말을 숫자로 확인했다</a:t>
             </a:r>
             <a:endParaRPr lang="en-US" sz="1150" dirty="0"/>
           </a:p>
@@ -2300,7 +2835,7 @@
                   <a:schemeClr val="tx2"/>
                 </a:solidFill>
               </a:rPr>
-              <a:t>자료 출처와 내가 만든 표</a:t>
+              <a:t>1장 설명 · 핵심 요약</a:t>
             </a:r>
             <a:endParaRPr lang="en-US" sz="2400" dirty="0"/>
           </a:p>
@@ -2308,17 +2843,19 @@
       </p:sp>
       <p:sp>
         <p:nvSpPr>
-          <p:cNvPr id="3" name="번호 2"/>
+          <p:cNvPr id="3" name="설명 배지 1"/>
           <p:cNvSpPr/>
           <p:nvPr/>
         </p:nvSpPr>
         <p:spPr>
           <a:xfrm>
-            <a:off x="457200" y="356616"/>
-            <a:ext cx="384048" cy="384048"/>
-          </a:xfrm>
-          <a:prstGeom prst="ellipse">
-            <a:avLst/>
+            <a:off x="457200" y="384048"/>
+            <a:ext cx="420624" cy="329184"/>
+          </a:xfrm>
+          <a:prstGeom prst="roundRect">
+            <a:avLst>
+              <a:gd name="adj" fmla="val 22222"/>
+            </a:avLst>
           </a:prstGeom>
           <a:solidFill>
             <a:schemeClr val="accent1"/>
@@ -2333,14 +2870,14 @@
       </p:sp>
       <p:sp>
         <p:nvSpPr>
-          <p:cNvPr id="4" name="번호 글자 2"/>
+          <p:cNvPr id="4" name="설명 배지 글자 1"/>
           <p:cNvSpPr txBox="1"/>
           <p:nvPr/>
         </p:nvSpPr>
         <p:spPr>
           <a:xfrm>
-            <a:off x="457200" y="356616"/>
-            <a:ext cx="384048" cy="384048"/>
+            <a:off x="457200" y="384048"/>
+            <a:ext cx="420624" cy="329184"/>
           </a:xfrm>
           <a:prstGeom prst="rect">
             <a:avLst/>
@@ -2356,39 +2893,39 @@
               <a:buNone/>
             </a:pPr>
             <a:r>
-              <a:rPr lang="en-US" sz="1600" b="1" dirty="0">
+              <a:rPr lang="en-US" sz="1000" b="1" dirty="0">
                 <a:solidFill>
                   <a:schemeClr val="bg1"/>
                 </a:solidFill>
               </a:rPr>
-              <a:t>2</a:t>
-            </a:r>
-            <a:endParaRPr lang="en-US" sz="1600" dirty="0"/>
+              <a:t>설명</a:t>
+            </a:r>
+            <a:endParaRPr lang="en-US" sz="1000" dirty="0"/>
           </a:p>
         </p:txBody>
       </p:sp>
       <p:sp>
         <p:nvSpPr>
-          <p:cNvPr id="5" name="출처 카드"/>
+          <p:cNvPr id="5" name="설명 카드 1-1"/>
           <p:cNvSpPr/>
           <p:nvPr/>
         </p:nvSpPr>
         <p:spPr>
           <a:xfrm>
-            <a:off x="457200" y="1005840"/>
-            <a:ext cx="4114800" cy="1417320"/>
+            <a:off x="457200" y="960120"/>
+            <a:ext cx="4023360" cy="1691640"/>
           </a:xfrm>
           <a:prstGeom prst="roundRect">
             <a:avLst>
-              <a:gd name="adj" fmla="val 5161"/>
+              <a:gd name="adj" fmla="val 3243"/>
             </a:avLst>
           </a:prstGeom>
           <a:solidFill>
-            <a:schemeClr val="bg2"/>
+            <a:srgbClr val="FFFFFF"/>
           </a:solidFill>
-          <a:ln w="12700">
+          <a:ln w="9525">
             <a:solidFill>
-              <a:schemeClr val="bg2"/>
+              <a:srgbClr val="DCE5DF"/>
             </a:solidFill>
             <a:prstDash val="solid"/>
           </a:ln>
@@ -2396,14 +2933,14 @@
       </p:sp>
       <p:sp>
         <p:nvSpPr>
-          <p:cNvPr id="6" name="출처"/>
+          <p:cNvPr id="6" name="설명 제목 1-1"/>
           <p:cNvSpPr txBox="1"/>
           <p:nvPr/>
         </p:nvSpPr>
         <p:spPr>
           <a:xfrm>
-            <a:off x="640080" y="1143000"/>
-            <a:ext cx="3749040" cy="1188720"/>
+            <a:off x="621792" y="1051560"/>
+            <a:ext cx="3657600" cy="274320"/>
           </a:xfrm>
           <a:prstGeom prst="rect">
             <a:avLst/>
@@ -2412,73 +2949,139 @@
           <a:ln/>
         </p:spPr>
         <p:txBody>
-          <a:bodyPr wrap="square" lIns="0" tIns="0" rIns="0" bIns="0" rtlCol="0" anchor="ctr">
+          <a:bodyPr wrap="square" lIns="0" tIns="0" rIns="0" bIns="0" rtlCol="0" anchor="ctr"/>
+          <a:lstStyle/>
+          <a:p>
+            <a:pPr indent="0" marL="0">
+              <a:buNone/>
+            </a:pPr>
+            <a:r>
+              <a:rPr lang="en-US" sz="1150" b="1" dirty="0">
+                <a:solidFill>
+                  <a:schemeClr val="tx2"/>
+                </a:solidFill>
+              </a:rPr>
+              <a:t>이 장이 보여 주는 것</a:t>
+            </a:r>
+            <a:endParaRPr lang="en-US" sz="1150" dirty="0"/>
+          </a:p>
+        </p:txBody>
+      </p:sp>
+      <p:sp>
+        <p:nvSpPr>
+          <p:cNvPr id="7" name="설명 내용 1-1"/>
+          <p:cNvSpPr txBox="1"/>
+          <p:nvPr/>
+        </p:nvSpPr>
+        <p:spPr>
+          <a:xfrm>
+            <a:off x="621792" y="1344168"/>
+            <a:ext cx="3703320" cy="1234440"/>
+          </a:xfrm>
+          <a:prstGeom prst="rect">
+            <a:avLst/>
+          </a:prstGeom>
+          <a:noFill/>
+          <a:ln/>
+        </p:spPr>
+        <p:txBody>
+          <a:bodyPr wrap="square" lIns="0" tIns="0" rIns="0" bIns="0" rtlCol="0" anchor="t">
             <a:normAutofit/>
           </a:bodyPr>
           <a:lstStyle/>
           <a:p>
-            <a:pPr indent="0" marL="0">
+            <a:pPr marL="342900" indent="-342900">
               <a:spcAft>
                 <a:spcPts val="300"/>
               </a:spcAft>
-              <a:buNone/>
+              <a:buSzPct val="100000"/>
+              <a:buChar char="•"/>
             </a:pPr>
             <a:r>
-              <a:rPr lang="en-US" sz="1200" dirty="0">
+              <a:rPr lang="en-US" sz="1050" dirty="0">
                 <a:solidFill>
                   <a:schemeClr val="tx1"/>
                 </a:solidFill>
               </a:rPr>
-              <a:t>기관: 질병관리청</a:t>
-            </a:r>
-            <a:endParaRPr lang="en-US" sz="1200" dirty="0"/>
-          </a:p>
-          <a:p>
-            <a:pPr indent="0" marL="0">
+              <a:t>주장 한 문장과 참고 도서 한 권</a:t>
+            </a:r>
+            <a:endParaRPr lang="en-US" sz="1050" dirty="0"/>
+          </a:p>
+          <a:p>
+            <a:pPr marL="342900" indent="-342900">
               <a:spcAft>
                 <a:spcPts val="300"/>
               </a:spcAft>
-              <a:buNone/>
+              <a:buSzPct val="100000"/>
+              <a:buChar char="•"/>
             </a:pPr>
             <a:r>
-              <a:rPr lang="en-US" sz="1200" dirty="0">
+              <a:rPr lang="en-US" sz="1050" dirty="0">
                 <a:solidFill>
                   <a:schemeClr val="tx1"/>
                 </a:solidFill>
               </a:rPr>
-              <a:t>조사 이름: 「청소년건강행태조사」</a:t>
-            </a:r>
-            <a:endParaRPr lang="en-US" sz="1200" dirty="0"/>
-          </a:p>
-          <a:p>
-            <a:pPr indent="0" marL="0">
+              <a:t>주장은 통계로 확인할 수 있는 문장이어야 한다</a:t>
+            </a:r>
+            <a:endParaRPr lang="en-US" sz="1050" dirty="0"/>
+          </a:p>
+          <a:p>
+            <a:pPr marL="342900" indent="-342900">
               <a:spcAft>
                 <a:spcPts val="300"/>
               </a:spcAft>
-              <a:buNone/>
+              <a:buSzPct val="100000"/>
+              <a:buChar char="•"/>
             </a:pPr>
             <a:r>
-              <a:rPr lang="en-US" sz="1200" dirty="0">
+              <a:rPr lang="en-US" sz="1050" dirty="0">
                 <a:solidFill>
                   <a:schemeClr val="tx1"/>
                 </a:solidFill>
               </a:rPr>
-              <a:t>조사 방식: 일부만 뽑아 조사(표본). 전국 800개교 약 6만 명</a:t>
-            </a:r>
-            <a:endParaRPr lang="en-US" sz="1200" dirty="0"/>
+              <a:t>진로(간호사)와 자료(청소년 건강)를 한 줄로 잇는다</a:t>
+            </a:r>
+            <a:endParaRPr lang="en-US" sz="1050" dirty="0"/>
           </a:p>
         </p:txBody>
       </p:sp>
       <p:sp>
         <p:nvSpPr>
-          <p:cNvPr id="7" name="표 안내"/>
+          <p:cNvPr id="8" name="설명 카드 1-2"/>
+          <p:cNvSpPr/>
+          <p:nvPr/>
+        </p:nvSpPr>
+        <p:spPr>
+          <a:xfrm>
+            <a:off x="4663440" y="960120"/>
+            <a:ext cx="4023360" cy="1691640"/>
+          </a:xfrm>
+          <a:prstGeom prst="roundRect">
+            <a:avLst>
+              <a:gd name="adj" fmla="val 3243"/>
+            </a:avLst>
+          </a:prstGeom>
+          <a:solidFill>
+            <a:srgbClr val="FFFFFF"/>
+          </a:solidFill>
+          <a:ln w="9525">
+            <a:solidFill>
+              <a:srgbClr val="DCE5DF"/>
+            </a:solidFill>
+            <a:prstDash val="solid"/>
+          </a:ln>
+        </p:spPr>
+      </p:sp>
+      <p:sp>
+        <p:nvSpPr>
+          <p:cNvPr id="9" name="설명 제목 1-2"/>
           <p:cNvSpPr txBox="1"/>
           <p:nvPr/>
         </p:nvSpPr>
         <p:spPr>
           <a:xfrm>
-            <a:off x="457200" y="2560320"/>
-            <a:ext cx="4114800" cy="256032"/>
+            <a:off x="4828032" y="1051560"/>
+            <a:ext cx="3657600" cy="274320"/>
           </a:xfrm>
           <a:prstGeom prst="rect">
             <a:avLst/>
@@ -2494,1129 +3097,132 @@
               <a:buNone/>
             </a:pPr>
             <a:r>
-              <a:rPr lang="en-US" sz="1100" dirty="0">
-                <a:solidFill>
-                  <a:schemeClr val="accent3"/>
+              <a:rPr lang="en-US" sz="1150" b="1" dirty="0">
+                <a:solidFill>
+                  <a:schemeClr val="tx2"/>
                 </a:solidFill>
               </a:rPr>
-              <a:t>남·여 두 줄만 골라 다시 만든 표 (단위: %)</a:t>
-            </a:r>
-            <a:endParaRPr lang="en-US" sz="1100" dirty="0"/>
+              <a:t>책과의 연결</a:t>
+            </a:r>
+            <a:endParaRPr lang="en-US" sz="1150" dirty="0"/>
           </a:p>
         </p:txBody>
       </p:sp>
-      <p:graphicFrame>
-        <p:nvGraphicFramePr>
-          <p:cNvPr id="3" name="내가 만든 표"/>
-          <p:cNvGraphicFramePr>
-            <a:graphicFrameLocks noGrp="1"/>
-          </p:cNvGraphicFramePr>
-          <p:nvPr>
-            <p:extLst>
-              <p:ext uri="{D42A27DB-BD31-4B8C-83A1-F6EECF244321}">
-                <p14:modId xmlns:p14="http://schemas.microsoft.com/office/powerpoint/2010/main" val="1579011935"/>
-              </p:ext>
-            </p:extLst>
-          </p:nvPr>
-        </p:nvGraphicFramePr>
-        <p:xfrm>
-          <a:off x="457200" y="2852928"/>
-          <a:ext cx="4114800" cy="914400"/>
-        </p:xfrm>
-        <a:graphic>
-          <a:graphicData uri="http://schemas.openxmlformats.org/drawingml/2006/table">
-            <a:tbl>
-              <a:tblPr/>
-              <a:tblGrid>
-                <a:gridCol w="877824"/>
-                <a:gridCol w="539496"/>
-                <a:gridCol w="539496"/>
-                <a:gridCol w="539496"/>
-                <a:gridCol w="539496"/>
-                <a:gridCol w="539496"/>
-              </a:tblGrid>
-              <a:tr h="329184">
-                <a:tc>
-                  <a:txBody>
-                    <a:bodyPr/>
-                    <a:lstStyle/>
-                    <a:p>
-                      <a:pPr algn="ctr" indent="0" marL="0">
-                        <a:buNone/>
-                      </a:pPr>
-                      <a:r>
-                        <a:rPr lang="en-US" sz="1050" b="1" dirty="0">
-                          <a:solidFill>
-                            <a:srgbClr val="1B211D"/>
-                          </a:solidFill>
-                        </a:rPr>
-                        <a:t>연도</a:t>
-                      </a:r>
-                      <a:endParaRPr lang="en-US" sz="1050" dirty="0"/>
-                    </a:p>
-                  </a:txBody>
-                  <a:tcPr marL="27432" marR="27432" marT="27432" marB="27432" anchor="ctr">
-                    <a:lnL w="9525" cap="flat" cmpd="sng" algn="ctr">
-                      <a:solidFill>
-                        <a:srgbClr val="B9B4A6"/>
-                      </a:solidFill>
-                      <a:prstDash val="solid"/>
-                      <a:round/>
-                      <a:headEnd type="none" w="med" len="med"/>
-                      <a:tailEnd type="none" w="med" len="med"/>
-                    </a:lnL>
-                    <a:lnR w="9525" cap="flat" cmpd="sng" algn="ctr">
-                      <a:solidFill>
-                        <a:srgbClr val="B9B4A6"/>
-                      </a:solidFill>
-                      <a:prstDash val="solid"/>
-                      <a:round/>
-                      <a:headEnd type="none" w="med" len="med"/>
-                      <a:tailEnd type="none" w="med" len="med"/>
-                    </a:lnR>
-                    <a:lnT w="9525" cap="flat" cmpd="sng" algn="ctr">
-                      <a:solidFill>
-                        <a:srgbClr val="B9B4A6"/>
-                      </a:solidFill>
-                      <a:prstDash val="solid"/>
-                      <a:round/>
-                      <a:headEnd type="none" w="med" len="med"/>
-                      <a:tailEnd type="none" w="med" len="med"/>
-                    </a:lnT>
-                    <a:lnB w="9525" cap="flat" cmpd="sng" algn="ctr">
-                      <a:solidFill>
-                        <a:srgbClr val="B9B4A6"/>
-                      </a:solidFill>
-                      <a:prstDash val="solid"/>
-                      <a:round/>
-                      <a:headEnd type="none" w="med" len="med"/>
-                      <a:tailEnd type="none" w="med" len="med"/>
-                    </a:lnB>
-                    <a:solidFill>
-                      <a:srgbClr val="EEF3EF"/>
-                    </a:solidFill>
-                  </a:tcPr>
-                </a:tc>
-                <a:tc>
-                  <a:txBody>
-                    <a:bodyPr/>
-                    <a:lstStyle/>
-                    <a:p>
-                      <a:pPr algn="ctr" indent="0" marL="0">
-                        <a:buNone/>
-                      </a:pPr>
-                      <a:r>
-                        <a:rPr lang="en-US" sz="1050" b="1" dirty="0">
-                          <a:solidFill>
-                            <a:srgbClr val="1B211D"/>
-                          </a:solidFill>
-                        </a:rPr>
-                        <a:t>2021</a:t>
-                      </a:r>
-                      <a:endParaRPr lang="en-US" sz="1050" dirty="0"/>
-                    </a:p>
-                  </a:txBody>
-                  <a:tcPr marL="27432" marR="27432" marT="27432" marB="27432" anchor="ctr">
-                    <a:lnL w="9525" cap="flat" cmpd="sng" algn="ctr">
-                      <a:solidFill>
-                        <a:srgbClr val="B9B4A6"/>
-                      </a:solidFill>
-                      <a:prstDash val="solid"/>
-                      <a:round/>
-                      <a:headEnd type="none" w="med" len="med"/>
-                      <a:tailEnd type="none" w="med" len="med"/>
-                    </a:lnL>
-                    <a:lnR w="9525" cap="flat" cmpd="sng" algn="ctr">
-                      <a:solidFill>
-                        <a:srgbClr val="B9B4A6"/>
-                      </a:solidFill>
-                      <a:prstDash val="solid"/>
-                      <a:round/>
-                      <a:headEnd type="none" w="med" len="med"/>
-                      <a:tailEnd type="none" w="med" len="med"/>
-                    </a:lnR>
-                    <a:lnT w="9525" cap="flat" cmpd="sng" algn="ctr">
-                      <a:solidFill>
-                        <a:srgbClr val="B9B4A6"/>
-                      </a:solidFill>
-                      <a:prstDash val="solid"/>
-                      <a:round/>
-                      <a:headEnd type="none" w="med" len="med"/>
-                      <a:tailEnd type="none" w="med" len="med"/>
-                    </a:lnT>
-                    <a:lnB w="9525" cap="flat" cmpd="sng" algn="ctr">
-                      <a:solidFill>
-                        <a:srgbClr val="B9B4A6"/>
-                      </a:solidFill>
-                      <a:prstDash val="solid"/>
-                      <a:round/>
-                      <a:headEnd type="none" w="med" len="med"/>
-                      <a:tailEnd type="none" w="med" len="med"/>
-                    </a:lnB>
-                    <a:solidFill>
-                      <a:srgbClr val="EEF3EF"/>
-                    </a:solidFill>
-                  </a:tcPr>
-                </a:tc>
-                <a:tc>
-                  <a:txBody>
-                    <a:bodyPr/>
-                    <a:lstStyle/>
-                    <a:p>
-                      <a:pPr algn="ctr" indent="0" marL="0">
-                        <a:buNone/>
-                      </a:pPr>
-                      <a:r>
-                        <a:rPr lang="en-US" sz="1050" b="1" dirty="0">
-                          <a:solidFill>
-                            <a:srgbClr val="1B211D"/>
-                          </a:solidFill>
-                        </a:rPr>
-                        <a:t>2022</a:t>
-                      </a:r>
-                      <a:endParaRPr lang="en-US" sz="1050" dirty="0"/>
-                    </a:p>
-                  </a:txBody>
-                  <a:tcPr marL="27432" marR="27432" marT="27432" marB="27432" anchor="ctr">
-                    <a:lnL w="9525" cap="flat" cmpd="sng" algn="ctr">
-                      <a:solidFill>
-                        <a:srgbClr val="B9B4A6"/>
-                      </a:solidFill>
-                      <a:prstDash val="solid"/>
-                      <a:round/>
-                      <a:headEnd type="none" w="med" len="med"/>
-                      <a:tailEnd type="none" w="med" len="med"/>
-                    </a:lnL>
-                    <a:lnR w="9525" cap="flat" cmpd="sng" algn="ctr">
-                      <a:solidFill>
-                        <a:srgbClr val="B9B4A6"/>
-                      </a:solidFill>
-                      <a:prstDash val="solid"/>
-                      <a:round/>
-                      <a:headEnd type="none" w="med" len="med"/>
-                      <a:tailEnd type="none" w="med" len="med"/>
-                    </a:lnR>
-                    <a:lnT w="9525" cap="flat" cmpd="sng" algn="ctr">
-                      <a:solidFill>
-                        <a:srgbClr val="B9B4A6"/>
-                      </a:solidFill>
-                      <a:prstDash val="solid"/>
-                      <a:round/>
-                      <a:headEnd type="none" w="med" len="med"/>
-                      <a:tailEnd type="none" w="med" len="med"/>
-                    </a:lnT>
-                    <a:lnB w="9525" cap="flat" cmpd="sng" algn="ctr">
-                      <a:solidFill>
-                        <a:srgbClr val="B9B4A6"/>
-                      </a:solidFill>
-                      <a:prstDash val="solid"/>
-                      <a:round/>
-                      <a:headEnd type="none" w="med" len="med"/>
-                      <a:tailEnd type="none" w="med" len="med"/>
-                    </a:lnB>
-                    <a:solidFill>
-                      <a:srgbClr val="EEF3EF"/>
-                    </a:solidFill>
-                  </a:tcPr>
-                </a:tc>
-                <a:tc>
-                  <a:txBody>
-                    <a:bodyPr/>
-                    <a:lstStyle/>
-                    <a:p>
-                      <a:pPr algn="ctr" indent="0" marL="0">
-                        <a:buNone/>
-                      </a:pPr>
-                      <a:r>
-                        <a:rPr lang="en-US" sz="1050" b="1" dirty="0">
-                          <a:solidFill>
-                            <a:srgbClr val="1B211D"/>
-                          </a:solidFill>
-                        </a:rPr>
-                        <a:t>2023</a:t>
-                      </a:r>
-                      <a:endParaRPr lang="en-US" sz="1050" dirty="0"/>
-                    </a:p>
-                  </a:txBody>
-                  <a:tcPr marL="27432" marR="27432" marT="27432" marB="27432" anchor="ctr">
-                    <a:lnL w="9525" cap="flat" cmpd="sng" algn="ctr">
-                      <a:solidFill>
-                        <a:srgbClr val="B9B4A6"/>
-                      </a:solidFill>
-                      <a:prstDash val="solid"/>
-                      <a:round/>
-                      <a:headEnd type="none" w="med" len="med"/>
-                      <a:tailEnd type="none" w="med" len="med"/>
-                    </a:lnL>
-                    <a:lnR w="9525" cap="flat" cmpd="sng" algn="ctr">
-                      <a:solidFill>
-                        <a:srgbClr val="B9B4A6"/>
-                      </a:solidFill>
-                      <a:prstDash val="solid"/>
-                      <a:round/>
-                      <a:headEnd type="none" w="med" len="med"/>
-                      <a:tailEnd type="none" w="med" len="med"/>
-                    </a:lnR>
-                    <a:lnT w="9525" cap="flat" cmpd="sng" algn="ctr">
-                      <a:solidFill>
-                        <a:srgbClr val="B9B4A6"/>
-                      </a:solidFill>
-                      <a:prstDash val="solid"/>
-                      <a:round/>
-                      <a:headEnd type="none" w="med" len="med"/>
-                      <a:tailEnd type="none" w="med" len="med"/>
-                    </a:lnT>
-                    <a:lnB w="9525" cap="flat" cmpd="sng" algn="ctr">
-                      <a:solidFill>
-                        <a:srgbClr val="B9B4A6"/>
-                      </a:solidFill>
-                      <a:prstDash val="solid"/>
-                      <a:round/>
-                      <a:headEnd type="none" w="med" len="med"/>
-                      <a:tailEnd type="none" w="med" len="med"/>
-                    </a:lnB>
-                    <a:solidFill>
-                      <a:srgbClr val="EEF3EF"/>
-                    </a:solidFill>
-                  </a:tcPr>
-                </a:tc>
-                <a:tc>
-                  <a:txBody>
-                    <a:bodyPr/>
-                    <a:lstStyle/>
-                    <a:p>
-                      <a:pPr algn="ctr" indent="0" marL="0">
-                        <a:buNone/>
-                      </a:pPr>
-                      <a:r>
-                        <a:rPr lang="en-US" sz="1050" b="1" dirty="0">
-                          <a:solidFill>
-                            <a:srgbClr val="1B211D"/>
-                          </a:solidFill>
-                        </a:rPr>
-                        <a:t>2024</a:t>
-                      </a:r>
-                      <a:endParaRPr lang="en-US" sz="1050" dirty="0"/>
-                    </a:p>
-                  </a:txBody>
-                  <a:tcPr marL="27432" marR="27432" marT="27432" marB="27432" anchor="ctr">
-                    <a:lnL w="9525" cap="flat" cmpd="sng" algn="ctr">
-                      <a:solidFill>
-                        <a:srgbClr val="B9B4A6"/>
-                      </a:solidFill>
-                      <a:prstDash val="solid"/>
-                      <a:round/>
-                      <a:headEnd type="none" w="med" len="med"/>
-                      <a:tailEnd type="none" w="med" len="med"/>
-                    </a:lnL>
-                    <a:lnR w="9525" cap="flat" cmpd="sng" algn="ctr">
-                      <a:solidFill>
-                        <a:srgbClr val="B9B4A6"/>
-                      </a:solidFill>
-                      <a:prstDash val="solid"/>
-                      <a:round/>
-                      <a:headEnd type="none" w="med" len="med"/>
-                      <a:tailEnd type="none" w="med" len="med"/>
-                    </a:lnR>
-                    <a:lnT w="9525" cap="flat" cmpd="sng" algn="ctr">
-                      <a:solidFill>
-                        <a:srgbClr val="B9B4A6"/>
-                      </a:solidFill>
-                      <a:prstDash val="solid"/>
-                      <a:round/>
-                      <a:headEnd type="none" w="med" len="med"/>
-                      <a:tailEnd type="none" w="med" len="med"/>
-                    </a:lnT>
-                    <a:lnB w="9525" cap="flat" cmpd="sng" algn="ctr">
-                      <a:solidFill>
-                        <a:srgbClr val="B9B4A6"/>
-                      </a:solidFill>
-                      <a:prstDash val="solid"/>
-                      <a:round/>
-                      <a:headEnd type="none" w="med" len="med"/>
-                      <a:tailEnd type="none" w="med" len="med"/>
-                    </a:lnB>
-                    <a:solidFill>
-                      <a:srgbClr val="EEF3EF"/>
-                    </a:solidFill>
-                  </a:tcPr>
-                </a:tc>
-                <a:tc>
-                  <a:txBody>
-                    <a:bodyPr/>
-                    <a:lstStyle/>
-                    <a:p>
-                      <a:pPr algn="ctr" indent="0" marL="0">
-                        <a:buNone/>
-                      </a:pPr>
-                      <a:r>
-                        <a:rPr lang="en-US" sz="1050" b="1" dirty="0">
-                          <a:solidFill>
-                            <a:srgbClr val="1B211D"/>
-                          </a:solidFill>
-                        </a:rPr>
-                        <a:t>2025</a:t>
-                      </a:r>
-                      <a:endParaRPr lang="en-US" sz="1050" dirty="0"/>
-                    </a:p>
-                  </a:txBody>
-                  <a:tcPr marL="27432" marR="27432" marT="27432" marB="27432" anchor="ctr">
-                    <a:lnL w="9525" cap="flat" cmpd="sng" algn="ctr">
-                      <a:solidFill>
-                        <a:srgbClr val="B9B4A6"/>
-                      </a:solidFill>
-                      <a:prstDash val="solid"/>
-                      <a:round/>
-                      <a:headEnd type="none" w="med" len="med"/>
-                      <a:tailEnd type="none" w="med" len="med"/>
-                    </a:lnL>
-                    <a:lnR w="9525" cap="flat" cmpd="sng" algn="ctr">
-                      <a:solidFill>
-                        <a:srgbClr val="B9B4A6"/>
-                      </a:solidFill>
-                      <a:prstDash val="solid"/>
-                      <a:round/>
-                      <a:headEnd type="none" w="med" len="med"/>
-                      <a:tailEnd type="none" w="med" len="med"/>
-                    </a:lnR>
-                    <a:lnT w="9525" cap="flat" cmpd="sng" algn="ctr">
-                      <a:solidFill>
-                        <a:srgbClr val="B9B4A6"/>
-                      </a:solidFill>
-                      <a:prstDash val="solid"/>
-                      <a:round/>
-                      <a:headEnd type="none" w="med" len="med"/>
-                      <a:tailEnd type="none" w="med" len="med"/>
-                    </a:lnT>
-                    <a:lnB w="9525" cap="flat" cmpd="sng" algn="ctr">
-                      <a:solidFill>
-                        <a:srgbClr val="B9B4A6"/>
-                      </a:solidFill>
-                      <a:prstDash val="solid"/>
-                      <a:round/>
-                      <a:headEnd type="none" w="med" len="med"/>
-                      <a:tailEnd type="none" w="med" len="med"/>
-                    </a:lnB>
-                    <a:solidFill>
-                      <a:srgbClr val="EEF3EF"/>
-                    </a:solidFill>
-                  </a:tcPr>
-                </a:tc>
-              </a:tr>
-              <a:tr h="329184">
-                <a:tc>
-                  <a:txBody>
-                    <a:bodyPr/>
-                    <a:lstStyle/>
-                    <a:p>
-                      <a:pPr algn="ctr" indent="0" marL="0">
-                        <a:buNone/>
-                      </a:pPr>
-                      <a:r>
-                        <a:rPr lang="en-US" sz="1050" dirty="0">
-                          <a:solidFill>
-                            <a:srgbClr val="1B211D"/>
-                          </a:solidFill>
-                        </a:rPr>
-                        <a:t>남학생</a:t>
-                      </a:r>
-                      <a:endParaRPr lang="en-US" sz="1050" dirty="0"/>
-                    </a:p>
-                  </a:txBody>
-                  <a:tcPr marL="27432" marR="27432" marT="27432" marB="27432" anchor="ctr">
-                    <a:lnL w="9525" cap="flat" cmpd="sng" algn="ctr">
-                      <a:solidFill>
-                        <a:srgbClr val="B9B4A6"/>
-                      </a:solidFill>
-                      <a:prstDash val="solid"/>
-                      <a:round/>
-                      <a:headEnd type="none" w="med" len="med"/>
-                      <a:tailEnd type="none" w="med" len="med"/>
-                    </a:lnL>
-                    <a:lnR w="9525" cap="flat" cmpd="sng" algn="ctr">
-                      <a:solidFill>
-                        <a:srgbClr val="B9B4A6"/>
-                      </a:solidFill>
-                      <a:prstDash val="solid"/>
-                      <a:round/>
-                      <a:headEnd type="none" w="med" len="med"/>
-                      <a:tailEnd type="none" w="med" len="med"/>
-                    </a:lnR>
-                    <a:lnT w="9525" cap="flat" cmpd="sng" algn="ctr">
-                      <a:solidFill>
-                        <a:srgbClr val="B9B4A6"/>
-                      </a:solidFill>
-                      <a:prstDash val="solid"/>
-                      <a:round/>
-                      <a:headEnd type="none" w="med" len="med"/>
-                      <a:tailEnd type="none" w="med" len="med"/>
-                    </a:lnT>
-                    <a:lnB w="9525" cap="flat" cmpd="sng" algn="ctr">
-                      <a:solidFill>
-                        <a:srgbClr val="B9B4A6"/>
-                      </a:solidFill>
-                      <a:prstDash val="solid"/>
-                      <a:round/>
-                      <a:headEnd type="none" w="med" len="med"/>
-                      <a:tailEnd type="none" w="med" len="med"/>
-                    </a:lnB>
-                  </a:tcPr>
-                </a:tc>
-                <a:tc>
-                  <a:txBody>
-                    <a:bodyPr/>
-                    <a:lstStyle/>
-                    <a:p>
-                      <a:pPr algn="ctr" indent="0" marL="0">
-                        <a:buNone/>
-                      </a:pPr>
-                      <a:r>
-                        <a:rPr lang="en-US" sz="1050" dirty="0">
-                          <a:solidFill>
-                            <a:srgbClr val="1B211D"/>
-                          </a:solidFill>
-                        </a:rPr>
-                        <a:t>37.0</a:t>
-                      </a:r>
-                      <a:endParaRPr lang="en-US" sz="1050" dirty="0"/>
-                    </a:p>
-                  </a:txBody>
-                  <a:tcPr marL="27432" marR="27432" marT="27432" marB="27432" anchor="ctr">
-                    <a:lnL w="9525" cap="flat" cmpd="sng" algn="ctr">
-                      <a:solidFill>
-                        <a:srgbClr val="B9B4A6"/>
-                      </a:solidFill>
-                      <a:prstDash val="solid"/>
-                      <a:round/>
-                      <a:headEnd type="none" w="med" len="med"/>
-                      <a:tailEnd type="none" w="med" len="med"/>
-                    </a:lnL>
-                    <a:lnR w="9525" cap="flat" cmpd="sng" algn="ctr">
-                      <a:solidFill>
-                        <a:srgbClr val="B9B4A6"/>
-                      </a:solidFill>
-                      <a:prstDash val="solid"/>
-                      <a:round/>
-                      <a:headEnd type="none" w="med" len="med"/>
-                      <a:tailEnd type="none" w="med" len="med"/>
-                    </a:lnR>
-                    <a:lnT w="9525" cap="flat" cmpd="sng" algn="ctr">
-                      <a:solidFill>
-                        <a:srgbClr val="B9B4A6"/>
-                      </a:solidFill>
-                      <a:prstDash val="solid"/>
-                      <a:round/>
-                      <a:headEnd type="none" w="med" len="med"/>
-                      <a:tailEnd type="none" w="med" len="med"/>
-                    </a:lnT>
-                    <a:lnB w="9525" cap="flat" cmpd="sng" algn="ctr">
-                      <a:solidFill>
-                        <a:srgbClr val="B9B4A6"/>
-                      </a:solidFill>
-                      <a:prstDash val="solid"/>
-                      <a:round/>
-                      <a:headEnd type="none" w="med" len="med"/>
-                      <a:tailEnd type="none" w="med" len="med"/>
-                    </a:lnB>
-                  </a:tcPr>
-                </a:tc>
-                <a:tc>
-                  <a:txBody>
-                    <a:bodyPr/>
-                    <a:lstStyle/>
-                    <a:p>
-                      <a:pPr algn="ctr" indent="0" marL="0">
-                        <a:buNone/>
-                      </a:pPr>
-                      <a:r>
-                        <a:rPr lang="en-US" sz="1050" dirty="0">
-                          <a:solidFill>
-                            <a:srgbClr val="1B211D"/>
-                          </a:solidFill>
-                        </a:rPr>
-                        <a:t>37.4</a:t>
-                      </a:r>
-                      <a:endParaRPr lang="en-US" sz="1050" dirty="0"/>
-                    </a:p>
-                  </a:txBody>
-                  <a:tcPr marL="27432" marR="27432" marT="27432" marB="27432" anchor="ctr">
-                    <a:lnL w="9525" cap="flat" cmpd="sng" algn="ctr">
-                      <a:solidFill>
-                        <a:srgbClr val="B9B4A6"/>
-                      </a:solidFill>
-                      <a:prstDash val="solid"/>
-                      <a:round/>
-                      <a:headEnd type="none" w="med" len="med"/>
-                      <a:tailEnd type="none" w="med" len="med"/>
-                    </a:lnL>
-                    <a:lnR w="9525" cap="flat" cmpd="sng" algn="ctr">
-                      <a:solidFill>
-                        <a:srgbClr val="B9B4A6"/>
-                      </a:solidFill>
-                      <a:prstDash val="solid"/>
-                      <a:round/>
-                      <a:headEnd type="none" w="med" len="med"/>
-                      <a:tailEnd type="none" w="med" len="med"/>
-                    </a:lnR>
-                    <a:lnT w="9525" cap="flat" cmpd="sng" algn="ctr">
-                      <a:solidFill>
-                        <a:srgbClr val="B9B4A6"/>
-                      </a:solidFill>
-                      <a:prstDash val="solid"/>
-                      <a:round/>
-                      <a:headEnd type="none" w="med" len="med"/>
-                      <a:tailEnd type="none" w="med" len="med"/>
-                    </a:lnT>
-                    <a:lnB w="9525" cap="flat" cmpd="sng" algn="ctr">
-                      <a:solidFill>
-                        <a:srgbClr val="B9B4A6"/>
-                      </a:solidFill>
-                      <a:prstDash val="solid"/>
-                      <a:round/>
-                      <a:headEnd type="none" w="med" len="med"/>
-                      <a:tailEnd type="none" w="med" len="med"/>
-                    </a:lnB>
-                  </a:tcPr>
-                </a:tc>
-                <a:tc>
-                  <a:txBody>
-                    <a:bodyPr/>
-                    <a:lstStyle/>
-                    <a:p>
-                      <a:pPr algn="ctr" indent="0" marL="0">
-                        <a:buNone/>
-                      </a:pPr>
-                      <a:r>
-                        <a:rPr lang="en-US" sz="1050" dirty="0">
-                          <a:solidFill>
-                            <a:srgbClr val="1B211D"/>
-                          </a:solidFill>
-                        </a:rPr>
-                        <a:t>39.7</a:t>
-                      </a:r>
-                      <a:endParaRPr lang="en-US" sz="1050" dirty="0"/>
-                    </a:p>
-                  </a:txBody>
-                  <a:tcPr marL="27432" marR="27432" marT="27432" marB="27432" anchor="ctr">
-                    <a:lnL w="9525" cap="flat" cmpd="sng" algn="ctr">
-                      <a:solidFill>
-                        <a:srgbClr val="B9B4A6"/>
-                      </a:solidFill>
-                      <a:prstDash val="solid"/>
-                      <a:round/>
-                      <a:headEnd type="none" w="med" len="med"/>
-                      <a:tailEnd type="none" w="med" len="med"/>
-                    </a:lnL>
-                    <a:lnR w="9525" cap="flat" cmpd="sng" algn="ctr">
-                      <a:solidFill>
-                        <a:srgbClr val="B9B4A6"/>
-                      </a:solidFill>
-                      <a:prstDash val="solid"/>
-                      <a:round/>
-                      <a:headEnd type="none" w="med" len="med"/>
-                      <a:tailEnd type="none" w="med" len="med"/>
-                    </a:lnR>
-                    <a:lnT w="9525" cap="flat" cmpd="sng" algn="ctr">
-                      <a:solidFill>
-                        <a:srgbClr val="B9B4A6"/>
-                      </a:solidFill>
-                      <a:prstDash val="solid"/>
-                      <a:round/>
-                      <a:headEnd type="none" w="med" len="med"/>
-                      <a:tailEnd type="none" w="med" len="med"/>
-                    </a:lnT>
-                    <a:lnB w="9525" cap="flat" cmpd="sng" algn="ctr">
-                      <a:solidFill>
-                        <a:srgbClr val="B9B4A6"/>
-                      </a:solidFill>
-                      <a:prstDash val="solid"/>
-                      <a:round/>
-                      <a:headEnd type="none" w="med" len="med"/>
-                      <a:tailEnd type="none" w="med" len="med"/>
-                    </a:lnB>
-                  </a:tcPr>
-                </a:tc>
-                <a:tc>
-                  <a:txBody>
-                    <a:bodyPr/>
-                    <a:lstStyle/>
-                    <a:p>
-                      <a:pPr algn="ctr" indent="0" marL="0">
-                        <a:buNone/>
-                      </a:pPr>
-                      <a:r>
-                        <a:rPr lang="en-US" sz="1050" dirty="0">
-                          <a:solidFill>
-                            <a:srgbClr val="1B211D"/>
-                          </a:solidFill>
-                        </a:rPr>
-                        <a:t>40.2</a:t>
-                      </a:r>
-                      <a:endParaRPr lang="en-US" sz="1050" dirty="0"/>
-                    </a:p>
-                  </a:txBody>
-                  <a:tcPr marL="27432" marR="27432" marT="27432" marB="27432" anchor="ctr">
-                    <a:lnL w="9525" cap="flat" cmpd="sng" algn="ctr">
-                      <a:solidFill>
-                        <a:srgbClr val="B9B4A6"/>
-                      </a:solidFill>
-                      <a:prstDash val="solid"/>
-                      <a:round/>
-                      <a:headEnd type="none" w="med" len="med"/>
-                      <a:tailEnd type="none" w="med" len="med"/>
-                    </a:lnL>
-                    <a:lnR w="9525" cap="flat" cmpd="sng" algn="ctr">
-                      <a:solidFill>
-                        <a:srgbClr val="B9B4A6"/>
-                      </a:solidFill>
-                      <a:prstDash val="solid"/>
-                      <a:round/>
-                      <a:headEnd type="none" w="med" len="med"/>
-                      <a:tailEnd type="none" w="med" len="med"/>
-                    </a:lnR>
-                    <a:lnT w="9525" cap="flat" cmpd="sng" algn="ctr">
-                      <a:solidFill>
-                        <a:srgbClr val="B9B4A6"/>
-                      </a:solidFill>
-                      <a:prstDash val="solid"/>
-                      <a:round/>
-                      <a:headEnd type="none" w="med" len="med"/>
-                      <a:tailEnd type="none" w="med" len="med"/>
-                    </a:lnT>
-                    <a:lnB w="9525" cap="flat" cmpd="sng" algn="ctr">
-                      <a:solidFill>
-                        <a:srgbClr val="B9B4A6"/>
-                      </a:solidFill>
-                      <a:prstDash val="solid"/>
-                      <a:round/>
-                      <a:headEnd type="none" w="med" len="med"/>
-                      <a:tailEnd type="none" w="med" len="med"/>
-                    </a:lnB>
-                  </a:tcPr>
-                </a:tc>
-                <a:tc>
-                  <a:txBody>
-                    <a:bodyPr/>
-                    <a:lstStyle/>
-                    <a:p>
-                      <a:pPr algn="ctr" indent="0" marL="0">
-                        <a:buNone/>
-                      </a:pPr>
-                      <a:r>
-                        <a:rPr lang="en-US" sz="1050" dirty="0">
-                          <a:solidFill>
-                            <a:srgbClr val="1B211D"/>
-                          </a:solidFill>
-                        </a:rPr>
-                        <a:t>41.9</a:t>
-                      </a:r>
-                      <a:endParaRPr lang="en-US" sz="1050" dirty="0"/>
-                    </a:p>
-                  </a:txBody>
-                  <a:tcPr marL="27432" marR="27432" marT="27432" marB="27432" anchor="ctr">
-                    <a:lnL w="9525" cap="flat" cmpd="sng" algn="ctr">
-                      <a:solidFill>
-                        <a:srgbClr val="B9B4A6"/>
-                      </a:solidFill>
-                      <a:prstDash val="solid"/>
-                      <a:round/>
-                      <a:headEnd type="none" w="med" len="med"/>
-                      <a:tailEnd type="none" w="med" len="med"/>
-                    </a:lnL>
-                    <a:lnR w="9525" cap="flat" cmpd="sng" algn="ctr">
-                      <a:solidFill>
-                        <a:srgbClr val="B9B4A6"/>
-                      </a:solidFill>
-                      <a:prstDash val="solid"/>
-                      <a:round/>
-                      <a:headEnd type="none" w="med" len="med"/>
-                      <a:tailEnd type="none" w="med" len="med"/>
-                    </a:lnR>
-                    <a:lnT w="9525" cap="flat" cmpd="sng" algn="ctr">
-                      <a:solidFill>
-                        <a:srgbClr val="B9B4A6"/>
-                      </a:solidFill>
-                      <a:prstDash val="solid"/>
-                      <a:round/>
-                      <a:headEnd type="none" w="med" len="med"/>
-                      <a:tailEnd type="none" w="med" len="med"/>
-                    </a:lnT>
-                    <a:lnB w="9525" cap="flat" cmpd="sng" algn="ctr">
-                      <a:solidFill>
-                        <a:srgbClr val="B9B4A6"/>
-                      </a:solidFill>
-                      <a:prstDash val="solid"/>
-                      <a:round/>
-                      <a:headEnd type="none" w="med" len="med"/>
-                      <a:tailEnd type="none" w="med" len="med"/>
-                    </a:lnB>
-                  </a:tcPr>
-                </a:tc>
-              </a:tr>
-              <a:tr h="329184">
-                <a:tc>
-                  <a:txBody>
-                    <a:bodyPr/>
-                    <a:lstStyle/>
-                    <a:p>
-                      <a:pPr algn="ctr" indent="0" marL="0">
-                        <a:buNone/>
-                      </a:pPr>
-                      <a:r>
-                        <a:rPr lang="en-US" sz="1050" dirty="0">
-                          <a:solidFill>
-                            <a:srgbClr val="1B211D"/>
-                          </a:solidFill>
-                        </a:rPr>
-                        <a:t>여학생</a:t>
-                      </a:r>
-                      <a:endParaRPr lang="en-US" sz="1050" dirty="0"/>
-                    </a:p>
-                  </a:txBody>
-                  <a:tcPr marL="27432" marR="27432" marT="27432" marB="27432" anchor="ctr">
-                    <a:lnL w="9525" cap="flat" cmpd="sng" algn="ctr">
-                      <a:solidFill>
-                        <a:srgbClr val="B9B4A6"/>
-                      </a:solidFill>
-                      <a:prstDash val="solid"/>
-                      <a:round/>
-                      <a:headEnd type="none" w="med" len="med"/>
-                      <a:tailEnd type="none" w="med" len="med"/>
-                    </a:lnL>
-                    <a:lnR w="9525" cap="flat" cmpd="sng" algn="ctr">
-                      <a:solidFill>
-                        <a:srgbClr val="B9B4A6"/>
-                      </a:solidFill>
-                      <a:prstDash val="solid"/>
-                      <a:round/>
-                      <a:headEnd type="none" w="med" len="med"/>
-                      <a:tailEnd type="none" w="med" len="med"/>
-                    </a:lnR>
-                    <a:lnT w="9525" cap="flat" cmpd="sng" algn="ctr">
-                      <a:solidFill>
-                        <a:srgbClr val="B9B4A6"/>
-                      </a:solidFill>
-                      <a:prstDash val="solid"/>
-                      <a:round/>
-                      <a:headEnd type="none" w="med" len="med"/>
-                      <a:tailEnd type="none" w="med" len="med"/>
-                    </a:lnT>
-                    <a:lnB w="9525" cap="flat" cmpd="sng" algn="ctr">
-                      <a:solidFill>
-                        <a:srgbClr val="B9B4A6"/>
-                      </a:solidFill>
-                      <a:prstDash val="solid"/>
-                      <a:round/>
-                      <a:headEnd type="none" w="med" len="med"/>
-                      <a:tailEnd type="none" w="med" len="med"/>
-                    </a:lnB>
-                  </a:tcPr>
-                </a:tc>
-                <a:tc>
-                  <a:txBody>
-                    <a:bodyPr/>
-                    <a:lstStyle/>
-                    <a:p>
-                      <a:pPr algn="ctr" indent="0" marL="0">
-                        <a:buNone/>
-                      </a:pPr>
-                      <a:r>
-                        <a:rPr lang="en-US" sz="1050" dirty="0">
-                          <a:solidFill>
-                            <a:srgbClr val="1B211D"/>
-                          </a:solidFill>
-                        </a:rPr>
-                        <a:t>39.1</a:t>
-                      </a:r>
-                      <a:endParaRPr lang="en-US" sz="1050" dirty="0"/>
-                    </a:p>
-                  </a:txBody>
-                  <a:tcPr marL="27432" marR="27432" marT="27432" marB="27432" anchor="ctr">
-                    <a:lnL w="9525" cap="flat" cmpd="sng" algn="ctr">
-                      <a:solidFill>
-                        <a:srgbClr val="B9B4A6"/>
-                      </a:solidFill>
-                      <a:prstDash val="solid"/>
-                      <a:round/>
-                      <a:headEnd type="none" w="med" len="med"/>
-                      <a:tailEnd type="none" w="med" len="med"/>
-                    </a:lnL>
-                    <a:lnR w="9525" cap="flat" cmpd="sng" algn="ctr">
-                      <a:solidFill>
-                        <a:srgbClr val="B9B4A6"/>
-                      </a:solidFill>
-                      <a:prstDash val="solid"/>
-                      <a:round/>
-                      <a:headEnd type="none" w="med" len="med"/>
-                      <a:tailEnd type="none" w="med" len="med"/>
-                    </a:lnR>
-                    <a:lnT w="9525" cap="flat" cmpd="sng" algn="ctr">
-                      <a:solidFill>
-                        <a:srgbClr val="B9B4A6"/>
-                      </a:solidFill>
-                      <a:prstDash val="solid"/>
-                      <a:round/>
-                      <a:headEnd type="none" w="med" len="med"/>
-                      <a:tailEnd type="none" w="med" len="med"/>
-                    </a:lnT>
-                    <a:lnB w="9525" cap="flat" cmpd="sng" algn="ctr">
-                      <a:solidFill>
-                        <a:srgbClr val="B9B4A6"/>
-                      </a:solidFill>
-                      <a:prstDash val="solid"/>
-                      <a:round/>
-                      <a:headEnd type="none" w="med" len="med"/>
-                      <a:tailEnd type="none" w="med" len="med"/>
-                    </a:lnB>
-                  </a:tcPr>
-                </a:tc>
-                <a:tc>
-                  <a:txBody>
-                    <a:bodyPr/>
-                    <a:lstStyle/>
-                    <a:p>
-                      <a:pPr algn="ctr" indent="0" marL="0">
-                        <a:buNone/>
-                      </a:pPr>
-                      <a:r>
-                        <a:rPr lang="en-US" sz="1050" dirty="0">
-                          <a:solidFill>
-                            <a:srgbClr val="1B211D"/>
-                          </a:solidFill>
-                        </a:rPr>
-                        <a:t>40.7</a:t>
-                      </a:r>
-                      <a:endParaRPr lang="en-US" sz="1050" dirty="0"/>
-                    </a:p>
-                  </a:txBody>
-                  <a:tcPr marL="27432" marR="27432" marT="27432" marB="27432" anchor="ctr">
-                    <a:lnL w="9525" cap="flat" cmpd="sng" algn="ctr">
-                      <a:solidFill>
-                        <a:srgbClr val="B9B4A6"/>
-                      </a:solidFill>
-                      <a:prstDash val="solid"/>
-                      <a:round/>
-                      <a:headEnd type="none" w="med" len="med"/>
-                      <a:tailEnd type="none" w="med" len="med"/>
-                    </a:lnL>
-                    <a:lnR w="9525" cap="flat" cmpd="sng" algn="ctr">
-                      <a:solidFill>
-                        <a:srgbClr val="B9B4A6"/>
-                      </a:solidFill>
-                      <a:prstDash val="solid"/>
-                      <a:round/>
-                      <a:headEnd type="none" w="med" len="med"/>
-                      <a:tailEnd type="none" w="med" len="med"/>
-                    </a:lnR>
-                    <a:lnT w="9525" cap="flat" cmpd="sng" algn="ctr">
-                      <a:solidFill>
-                        <a:srgbClr val="B9B4A6"/>
-                      </a:solidFill>
-                      <a:prstDash val="solid"/>
-                      <a:round/>
-                      <a:headEnd type="none" w="med" len="med"/>
-                      <a:tailEnd type="none" w="med" len="med"/>
-                    </a:lnT>
-                    <a:lnB w="9525" cap="flat" cmpd="sng" algn="ctr">
-                      <a:solidFill>
-                        <a:srgbClr val="B9B4A6"/>
-                      </a:solidFill>
-                      <a:prstDash val="solid"/>
-                      <a:round/>
-                      <a:headEnd type="none" w="med" len="med"/>
-                      <a:tailEnd type="none" w="med" len="med"/>
-                    </a:lnB>
-                  </a:tcPr>
-                </a:tc>
-                <a:tc>
-                  <a:txBody>
-                    <a:bodyPr/>
-                    <a:lstStyle/>
-                    <a:p>
-                      <a:pPr algn="ctr" indent="0" marL="0">
-                        <a:buNone/>
-                      </a:pPr>
-                      <a:r>
-                        <a:rPr lang="en-US" sz="1050" dirty="0">
-                          <a:solidFill>
-                            <a:srgbClr val="1B211D"/>
-                          </a:solidFill>
-                        </a:rPr>
-                        <a:t>42.6</a:t>
-                      </a:r>
-                      <a:endParaRPr lang="en-US" sz="1050" dirty="0"/>
-                    </a:p>
-                  </a:txBody>
-                  <a:tcPr marL="27432" marR="27432" marT="27432" marB="27432" anchor="ctr">
-                    <a:lnL w="9525" cap="flat" cmpd="sng" algn="ctr">
-                      <a:solidFill>
-                        <a:srgbClr val="B9B4A6"/>
-                      </a:solidFill>
-                      <a:prstDash val="solid"/>
-                      <a:round/>
-                      <a:headEnd type="none" w="med" len="med"/>
-                      <a:tailEnd type="none" w="med" len="med"/>
-                    </a:lnL>
-                    <a:lnR w="9525" cap="flat" cmpd="sng" algn="ctr">
-                      <a:solidFill>
-                        <a:srgbClr val="B9B4A6"/>
-                      </a:solidFill>
-                      <a:prstDash val="solid"/>
-                      <a:round/>
-                      <a:headEnd type="none" w="med" len="med"/>
-                      <a:tailEnd type="none" w="med" len="med"/>
-                    </a:lnR>
-                    <a:lnT w="9525" cap="flat" cmpd="sng" algn="ctr">
-                      <a:solidFill>
-                        <a:srgbClr val="B9B4A6"/>
-                      </a:solidFill>
-                      <a:prstDash val="solid"/>
-                      <a:round/>
-                      <a:headEnd type="none" w="med" len="med"/>
-                      <a:tailEnd type="none" w="med" len="med"/>
-                    </a:lnT>
-                    <a:lnB w="9525" cap="flat" cmpd="sng" algn="ctr">
-                      <a:solidFill>
-                        <a:srgbClr val="B9B4A6"/>
-                      </a:solidFill>
-                      <a:prstDash val="solid"/>
-                      <a:round/>
-                      <a:headEnd type="none" w="med" len="med"/>
-                      <a:tailEnd type="none" w="med" len="med"/>
-                    </a:lnB>
-                  </a:tcPr>
-                </a:tc>
-                <a:tc>
-                  <a:txBody>
-                    <a:bodyPr/>
-                    <a:lstStyle/>
-                    <a:p>
-                      <a:pPr algn="ctr" indent="0" marL="0">
-                        <a:buNone/>
-                      </a:pPr>
-                      <a:r>
-                        <a:rPr lang="en-US" sz="1050" dirty="0">
-                          <a:solidFill>
-                            <a:srgbClr val="1B211D"/>
-                          </a:solidFill>
-                        </a:rPr>
-                        <a:t>44.7</a:t>
-                      </a:r>
-                      <a:endParaRPr lang="en-US" sz="1050" dirty="0"/>
-                    </a:p>
-                  </a:txBody>
-                  <a:tcPr marL="27432" marR="27432" marT="27432" marB="27432" anchor="ctr">
-                    <a:lnL w="9525" cap="flat" cmpd="sng" algn="ctr">
-                      <a:solidFill>
-                        <a:srgbClr val="B9B4A6"/>
-                      </a:solidFill>
-                      <a:prstDash val="solid"/>
-                      <a:round/>
-                      <a:headEnd type="none" w="med" len="med"/>
-                      <a:tailEnd type="none" w="med" len="med"/>
-                    </a:lnL>
-                    <a:lnR w="9525" cap="flat" cmpd="sng" algn="ctr">
-                      <a:solidFill>
-                        <a:srgbClr val="B9B4A6"/>
-                      </a:solidFill>
-                      <a:prstDash val="solid"/>
-                      <a:round/>
-                      <a:headEnd type="none" w="med" len="med"/>
-                      <a:tailEnd type="none" w="med" len="med"/>
-                    </a:lnR>
-                    <a:lnT w="9525" cap="flat" cmpd="sng" algn="ctr">
-                      <a:solidFill>
-                        <a:srgbClr val="B9B4A6"/>
-                      </a:solidFill>
-                      <a:prstDash val="solid"/>
-                      <a:round/>
-                      <a:headEnd type="none" w="med" len="med"/>
-                      <a:tailEnd type="none" w="med" len="med"/>
-                    </a:lnT>
-                    <a:lnB w="9525" cap="flat" cmpd="sng" algn="ctr">
-                      <a:solidFill>
-                        <a:srgbClr val="B9B4A6"/>
-                      </a:solidFill>
-                      <a:prstDash val="solid"/>
-                      <a:round/>
-                      <a:headEnd type="none" w="med" len="med"/>
-                      <a:tailEnd type="none" w="med" len="med"/>
-                    </a:lnB>
-                  </a:tcPr>
-                </a:tc>
-                <a:tc>
-                  <a:txBody>
-                    <a:bodyPr/>
-                    <a:lstStyle/>
-                    <a:p>
-                      <a:pPr algn="ctr" indent="0" marL="0">
-                        <a:buNone/>
-                      </a:pPr>
-                      <a:r>
-                        <a:rPr lang="en-US" sz="1050" dirty="0">
-                          <a:solidFill>
-                            <a:srgbClr val="1B211D"/>
-                          </a:solidFill>
-                        </a:rPr>
-                        <a:t>45.3</a:t>
-                      </a:r>
-                      <a:endParaRPr lang="en-US" sz="1050" dirty="0"/>
-                    </a:p>
-                  </a:txBody>
-                  <a:tcPr marL="27432" marR="27432" marT="27432" marB="27432" anchor="ctr">
-                    <a:lnL w="9525" cap="flat" cmpd="sng" algn="ctr">
-                      <a:solidFill>
-                        <a:srgbClr val="B9B4A6"/>
-                      </a:solidFill>
-                      <a:prstDash val="solid"/>
-                      <a:round/>
-                      <a:headEnd type="none" w="med" len="med"/>
-                      <a:tailEnd type="none" w="med" len="med"/>
-                    </a:lnL>
-                    <a:lnR w="9525" cap="flat" cmpd="sng" algn="ctr">
-                      <a:solidFill>
-                        <a:srgbClr val="B9B4A6"/>
-                      </a:solidFill>
-                      <a:prstDash val="solid"/>
-                      <a:round/>
-                      <a:headEnd type="none" w="med" len="med"/>
-                      <a:tailEnd type="none" w="med" len="med"/>
-                    </a:lnR>
-                    <a:lnT w="9525" cap="flat" cmpd="sng" algn="ctr">
-                      <a:solidFill>
-                        <a:srgbClr val="B9B4A6"/>
-                      </a:solidFill>
-                      <a:prstDash val="solid"/>
-                      <a:round/>
-                      <a:headEnd type="none" w="med" len="med"/>
-                      <a:tailEnd type="none" w="med" len="med"/>
-                    </a:lnT>
-                    <a:lnB w="9525" cap="flat" cmpd="sng" algn="ctr">
-                      <a:solidFill>
-                        <a:srgbClr val="B9B4A6"/>
-                      </a:solidFill>
-                      <a:prstDash val="solid"/>
-                      <a:round/>
-                      <a:headEnd type="none" w="med" len="med"/>
-                      <a:tailEnd type="none" w="med" len="med"/>
-                    </a:lnB>
-                  </a:tcPr>
-                </a:tc>
-              </a:tr>
-            </a:tbl>
-          </a:graphicData>
-        </a:graphic>
-      </p:graphicFrame>
-      <p:sp>
-        <p:nvSpPr>
-          <p:cNvPr id="9" name="표 읽기"/>
+      <p:sp>
+        <p:nvSpPr>
+          <p:cNvPr id="10" name="설명 내용 1-2"/>
           <p:cNvSpPr txBox="1"/>
           <p:nvPr/>
         </p:nvSpPr>
         <p:spPr>
           <a:xfrm>
-            <a:off x="457200" y="3950208"/>
-            <a:ext cx="4114800" cy="411480"/>
+            <a:off x="4828032" y="1344168"/>
+            <a:ext cx="3703320" cy="1234440"/>
+          </a:xfrm>
+          <a:prstGeom prst="rect">
+            <a:avLst/>
+          </a:prstGeom>
+          <a:noFill/>
+          <a:ln/>
+        </p:spPr>
+        <p:txBody>
+          <a:bodyPr wrap="square" lIns="0" tIns="0" rIns="0" bIns="0" rtlCol="0" anchor="t">
+            <a:normAutofit/>
+          </a:bodyPr>
+          <a:lstStyle/>
+          <a:p>
+            <a:pPr marL="342900" indent="-342900">
+              <a:spcAft>
+                <a:spcPts val="300"/>
+              </a:spcAft>
+              <a:buSzPct val="100000"/>
+              <a:buChar char="•"/>
+            </a:pPr>
+            <a:r>
+              <a:rPr lang="en-US" sz="1050" dirty="0">
+                <a:solidFill>
+                  <a:schemeClr val="tx1"/>
+                </a:solidFill>
+              </a:rPr>
+              <a:t>로슬링은 의사·통계학자. '느낌 대신 숫자'</a:t>
+            </a:r>
+            <a:endParaRPr lang="en-US" sz="1050" dirty="0"/>
+          </a:p>
+          <a:p>
+            <a:pPr marL="342900" indent="-342900">
+              <a:spcAft>
+                <a:spcPts val="300"/>
+              </a:spcAft>
+              <a:buSzPct val="100000"/>
+              <a:buChar char="•"/>
+            </a:pPr>
+            <a:r>
+              <a:rPr lang="en-US" sz="1050" dirty="0">
+                <a:solidFill>
+                  <a:schemeClr val="tx1"/>
+                </a:solidFill>
+              </a:rPr>
+              <a:t>어른들의 느낌을 숫자로 검증하는 것이 탐구의 출발점</a:t>
+            </a:r>
+            <a:endParaRPr lang="en-US" sz="1050" dirty="0"/>
+          </a:p>
+          <a:p>
+            <a:pPr marL="342900" indent="-342900">
+              <a:spcAft>
+                <a:spcPts val="300"/>
+              </a:spcAft>
+              <a:buSzPct val="100000"/>
+              <a:buChar char="•"/>
+            </a:pPr>
+            <a:r>
+              <a:rPr lang="en-US" sz="1050" dirty="0">
+                <a:solidFill>
+                  <a:schemeClr val="tx1"/>
+                </a:solidFill>
+              </a:rPr>
+              <a:t>책의 '표본을 전체로 말할 때 조심'은 2장의 표본조사와 이어진다</a:t>
+            </a:r>
+            <a:endParaRPr lang="en-US" sz="1050" dirty="0"/>
+          </a:p>
+        </p:txBody>
+      </p:sp>
+      <p:sp>
+        <p:nvSpPr>
+          <p:cNvPr id="11" name="설명 카드 1-3"/>
+          <p:cNvSpPr/>
+          <p:nvPr/>
+        </p:nvSpPr>
+        <p:spPr>
+          <a:xfrm>
+            <a:off x="457200" y="2788920"/>
+            <a:ext cx="4023360" cy="1691640"/>
+          </a:xfrm>
+          <a:prstGeom prst="roundRect">
+            <a:avLst>
+              <a:gd name="adj" fmla="val 3243"/>
+            </a:avLst>
+          </a:prstGeom>
+          <a:solidFill>
+            <a:srgbClr val="FFFFFF"/>
+          </a:solidFill>
+          <a:ln w="9525">
+            <a:solidFill>
+              <a:srgbClr val="DCE5DF"/>
+            </a:solidFill>
+            <a:prstDash val="solid"/>
+          </a:ln>
+        </p:spPr>
+      </p:sp>
+      <p:sp>
+        <p:nvSpPr>
+          <p:cNvPr id="12" name="설명 제목 1-3"/>
+          <p:cNvSpPr txBox="1"/>
+          <p:nvPr/>
+        </p:nvSpPr>
+        <p:spPr>
+          <a:xfrm>
+            <a:off x="621792" y="2880360"/>
+            <a:ext cx="3657600" cy="274320"/>
           </a:xfrm>
           <a:prstGeom prst="rect">
             <a:avLst/>
@@ -3632,52 +3238,114 @@
               <a:buNone/>
             </a:pPr>
             <a:r>
-              <a:rPr lang="en-US" sz="1100" dirty="0">
-                <a:solidFill>
-                  <a:schemeClr val="accent3"/>
+              <a:rPr lang="en-US" sz="1150" b="1" dirty="0">
+                <a:solidFill>
+                  <a:schemeClr val="tx2"/>
                 </a:solidFill>
               </a:rPr>
-              <a:t>둘 다 해마다 늘고, 여학생이 매년 더 높다</a:t>
-            </a:r>
-            <a:endParaRPr lang="en-US" sz="1100" dirty="0"/>
+              <a:t>실제로 읽을 분량</a:t>
+            </a:r>
+            <a:endParaRPr lang="en-US" sz="1150" dirty="0"/>
           </a:p>
         </p:txBody>
       </p:sp>
       <p:sp>
         <p:nvSpPr>
-          <p:cNvPr id="10" name="원자료 캡처 자리"/>
+          <p:cNvPr id="13" name="설명 내용 1-3"/>
+          <p:cNvSpPr txBox="1"/>
+          <p:nvPr/>
+        </p:nvSpPr>
+        <p:spPr>
+          <a:xfrm>
+            <a:off x="621792" y="3172968"/>
+            <a:ext cx="3703320" cy="1234440"/>
+          </a:xfrm>
+          <a:prstGeom prst="rect">
+            <a:avLst/>
+          </a:prstGeom>
+          <a:noFill/>
+          <a:ln/>
+        </p:spPr>
+        <p:txBody>
+          <a:bodyPr wrap="square" lIns="0" tIns="0" rIns="0" bIns="0" rtlCol="0" anchor="t">
+            <a:normAutofit/>
+          </a:bodyPr>
+          <a:lstStyle/>
+          <a:p>
+            <a:pPr marL="342900" indent="-342900">
+              <a:spcAft>
+                <a:spcPts val="300"/>
+              </a:spcAft>
+              <a:buSzPct val="100000"/>
+              <a:buChar char="•"/>
+            </a:pPr>
+            <a:r>
+              <a:rPr lang="en-US" sz="1050" dirty="0">
+                <a:solidFill>
+                  <a:schemeClr val="tx1"/>
+                </a:solidFill>
+              </a:rPr>
+              <a:t>1장과 '부정 본능' 부분만 읽어도 된다</a:t>
+            </a:r>
+            <a:endParaRPr lang="en-US" sz="1050" dirty="0"/>
+          </a:p>
+          <a:p>
+            <a:pPr marL="342900" indent="-342900">
+              <a:spcAft>
+                <a:spcPts val="300"/>
+              </a:spcAft>
+              <a:buSzPct val="100000"/>
+              <a:buChar char="•"/>
+            </a:pPr>
+            <a:r>
+              <a:rPr lang="en-US" sz="1050" dirty="0">
+                <a:solidFill>
+                  <a:schemeClr val="tx1"/>
+                </a:solidFill>
+              </a:rPr>
+              <a:t>학교 도서관에 있는 책. 통계·데이터를 다룬 다른 책도 가능</a:t>
+            </a:r>
+            <a:endParaRPr lang="en-US" sz="1050" dirty="0"/>
+          </a:p>
+        </p:txBody>
+      </p:sp>
+      <p:sp>
+        <p:nvSpPr>
+          <p:cNvPr id="14" name="설명 카드 1-4"/>
           <p:cNvSpPr/>
           <p:nvPr/>
         </p:nvSpPr>
         <p:spPr>
           <a:xfrm>
-            <a:off x="4846320" y="1005840"/>
-            <a:ext cx="3840480" cy="3474720"/>
-          </a:xfrm>
-          <a:prstGeom prst="rect">
-            <a:avLst/>
+            <a:off x="4663440" y="2788920"/>
+            <a:ext cx="4023360" cy="1691640"/>
+          </a:xfrm>
+          <a:prstGeom prst="roundRect">
+            <a:avLst>
+              <a:gd name="adj" fmla="val 3243"/>
+            </a:avLst>
           </a:prstGeom>
           <a:solidFill>
             <a:srgbClr val="FFFFFF"/>
           </a:solidFill>
-          <a:ln w="12700">
+          <a:ln w="9525">
             <a:solidFill>
-              <a:schemeClr val="accent4"/>
+              <a:srgbClr val="DCE5DF"/>
             </a:solidFill>
-            <a:prstDash val="dash"/>
+            <a:prstDash val="solid"/>
           </a:ln>
         </p:spPr>
       </p:sp>
       <p:sp>
         <p:nvSpPr>
-          <p:cNvPr id="11" name="원자료 캡처 자리 안내"/>
+          <p:cNvPr id="15" name="설명 제목 1-4"/>
           <p:cNvSpPr txBox="1"/>
           <p:nvPr/>
         </p:nvSpPr>
         <p:spPr>
           <a:xfrm>
-            <a:off x="5029200" y="1188720"/>
-            <a:ext cx="3474720" cy="3108960"/>
+            <a:off x="4828032" y="2880360"/>
+            <a:ext cx="3657600" cy="274320"/>
           </a:xfrm>
           <a:prstGeom prst="rect">
             <a:avLst/>
@@ -3686,55 +3354,81 @@
           <a:ln/>
         </p:spPr>
         <p:txBody>
-          <a:bodyPr wrap="square" rtlCol="0" anchor="ctr"/>
+          <a:bodyPr wrap="square" lIns="0" tIns="0" rIns="0" bIns="0" rtlCol="0" anchor="ctr"/>
           <a:lstStyle/>
           <a:p>
-            <a:pPr algn="ctr" indent="0" marL="0">
+            <a:pPr indent="0" marL="0">
               <a:buNone/>
             </a:pPr>
             <a:r>
-              <a:rPr lang="en-US" sz="1300" dirty="0">
-                <a:solidFill>
-                  <a:schemeClr val="accent3"/>
+              <a:rPr lang="en-US" sz="1150" b="1" dirty="0">
+                <a:solidFill>
+                  <a:schemeClr val="tx2"/>
                 </a:solidFill>
               </a:rPr>
-              <a:t>조사 누리집 화면 캡처 자리</a:t>
-            </a:r>
-            <a:endParaRPr lang="en-US" sz="1300" dirty="0"/>
-          </a:p>
-          <a:p>
-            <a:pPr algn="ctr" indent="0" marL="0">
-              <a:buNone/>
+              <a:t>채점 연결</a:t>
+            </a:r>
+            <a:endParaRPr lang="en-US" sz="1150" dirty="0"/>
+          </a:p>
+        </p:txBody>
+      </p:sp>
+      <p:sp>
+        <p:nvSpPr>
+          <p:cNvPr id="16" name="설명 내용 1-4"/>
+          <p:cNvSpPr txBox="1"/>
+          <p:nvPr/>
+        </p:nvSpPr>
+        <p:spPr>
+          <a:xfrm>
+            <a:off x="4828032" y="3172968"/>
+            <a:ext cx="3703320" cy="1234440"/>
+          </a:xfrm>
+          <a:prstGeom prst="rect">
+            <a:avLst/>
+          </a:prstGeom>
+          <a:noFill/>
+          <a:ln/>
+        </p:spPr>
+        <p:txBody>
+          <a:bodyPr wrap="square" lIns="0" tIns="0" rIns="0" bIns="0" rtlCol="0" anchor="t">
+            <a:normAutofit/>
+          </a:bodyPr>
+          <a:lstStyle/>
+          <a:p>
+            <a:pPr marL="342900" indent="-342900">
+              <a:spcAft>
+                <a:spcPts val="300"/>
+              </a:spcAft>
+              <a:buSzPct val="100000"/>
+              <a:buChar char="•"/>
             </a:pPr>
             <a:r>
-              <a:rPr lang="en-US" sz="1300" dirty="0">
-                <a:solidFill>
-                  <a:schemeClr val="accent3"/>
+              <a:rPr lang="en-US" sz="1050" dirty="0">
+                <a:solidFill>
+                  <a:schemeClr val="tx1"/>
                 </a:solidFill>
               </a:rPr>
-              <a:t>(청소년건강행태조사 → 통계 → 아침식사 결식률)</a:t>
-            </a:r>
-            <a:endParaRPr lang="en-US" sz="1300" dirty="0"/>
-          </a:p>
-          <a:p>
-            <a:pPr algn="ctr" indent="0" marL="0">
-              <a:buNone/>
+              <a:t>1번 도서 20점: 도서명·저자 + 책의 어떤 내용이 내 자료의 어디와 이어지는지</a:t>
+            </a:r>
+            <a:endParaRPr lang="en-US" sz="1050" dirty="0"/>
+          </a:p>
+          <a:p>
+            <a:pPr marL="342900" indent="-342900">
+              <a:spcAft>
+                <a:spcPts val="300"/>
+              </a:spcAft>
+              <a:buSzPct val="100000"/>
+              <a:buChar char="•"/>
             </a:pPr>
-            <a:endParaRPr lang="en-US" sz="1300" dirty="0"/>
-          </a:p>
-          <a:p>
-            <a:pPr algn="ctr" indent="0" marL="0">
-              <a:buNone/>
-            </a:pPr>
-            <a:r>
-              <a:rPr lang="en-US" sz="1300" dirty="0">
-                <a:solidFill>
-                  <a:schemeClr val="accent3"/>
+            <a:r>
+              <a:rPr lang="en-US" sz="1050" dirty="0">
+                <a:solidFill>
+                  <a:schemeClr val="tx1"/>
                 </a:solidFill>
               </a:rPr>
-              <a:t>실제 발표에서는 여기에 캡처 이미지</a:t>
-            </a:r>
-            <a:endParaRPr lang="en-US" sz="1300" dirty="0"/>
+              <a:t>책 소개만 쓰면 15점, 도서명·저자만 있으면 5점</a:t>
+            </a:r>
+            <a:endParaRPr lang="en-US" sz="1050" dirty="0"/>
           </a:p>
         </p:txBody>
       </p:sp>
@@ -3840,7 +3534,7 @@
                   <a:schemeClr val="tx2"/>
                 </a:solidFill>
               </a:rPr>
-              <a:t>그래프와 해석</a:t>
+              <a:t>자료 출처와 내가 만든 표</a:t>
             </a:r>
             <a:endParaRPr lang="en-US" sz="2400" dirty="0"/>
           </a:p>
@@ -3848,7 +3542,7 @@
       </p:sp>
       <p:sp>
         <p:nvSpPr>
-          <p:cNvPr id="3" name="번호 3"/>
+          <p:cNvPr id="3" name="번호 2"/>
           <p:cNvSpPr/>
           <p:nvPr/>
         </p:nvSpPr>
@@ -3873,7 +3567,7 @@
       </p:sp>
       <p:sp>
         <p:nvSpPr>
-          <p:cNvPr id="4" name="번호 글자 3"/>
+          <p:cNvPr id="4" name="번호 글자 2"/>
           <p:cNvSpPr txBox="1"/>
           <p:nvPr/>
         </p:nvSpPr>
@@ -3901,38 +3595,124 @@
                   <a:schemeClr val="bg1"/>
                 </a:solidFill>
               </a:rPr>
-              <a:t>3</a:t>
+              <a:t>2</a:t>
             </a:r>
             <a:endParaRPr lang="en-US" sz="1600" dirty="0"/>
           </a:p>
         </p:txBody>
       </p:sp>
-      <p:graphicFrame>
-        <p:nvGraphicFramePr>
-          <p:cNvPr id="5" name="주 5일 이상 아침식사 결식률 (단위: %)" descr=""/>
-          <p:cNvGraphicFramePr/>
+      <p:sp>
+        <p:nvSpPr>
+          <p:cNvPr id="5" name="출처 카드"/>
+          <p:cNvSpPr/>
           <p:nvPr/>
-        </p:nvGraphicFramePr>
-        <p:xfrm>
-          <a:off x="457200" y="1005840"/>
-          <a:ext cx="4572000" cy="2468880"/>
-        </p:xfrm>
-        <a:graphic xmlns:a="http://schemas.openxmlformats.org/drawingml/2006/main">
-          <a:graphicData uri="http://schemas.openxmlformats.org/drawingml/2006/chart">
-            <c:chart xmlns:c="http://schemas.openxmlformats.org/drawingml/2006/chart" r:id="rId1"/>
-          </a:graphicData>
-        </a:graphic>
-      </p:graphicFrame>
-      <p:sp>
-        <p:nvSpPr>
-          <p:cNvPr id="6" name="확률분포표 안내"/>
+        </p:nvSpPr>
+        <p:spPr>
+          <a:xfrm>
+            <a:off x="457200" y="960120"/>
+            <a:ext cx="8229600" cy="868680"/>
+          </a:xfrm>
+          <a:prstGeom prst="roundRect">
+            <a:avLst>
+              <a:gd name="adj" fmla="val 8421"/>
+            </a:avLst>
+          </a:prstGeom>
+          <a:solidFill>
+            <a:schemeClr val="bg2"/>
+          </a:solidFill>
+          <a:ln w="12700">
+            <a:solidFill>
+              <a:schemeClr val="bg2"/>
+            </a:solidFill>
+            <a:prstDash val="solid"/>
+          </a:ln>
+        </p:spPr>
+      </p:sp>
+      <p:sp>
+        <p:nvSpPr>
+          <p:cNvPr id="6" name="출처"/>
           <p:cNvSpPr txBox="1"/>
           <p:nvPr/>
         </p:nvSpPr>
         <p:spPr>
           <a:xfrm>
-            <a:off x="457200" y="3520440"/>
-            <a:ext cx="4572000" cy="256032"/>
+            <a:off x="640080" y="1024128"/>
+            <a:ext cx="7863840" cy="749808"/>
+          </a:xfrm>
+          <a:prstGeom prst="rect">
+            <a:avLst/>
+          </a:prstGeom>
+          <a:noFill/>
+          <a:ln/>
+        </p:spPr>
+        <p:txBody>
+          <a:bodyPr wrap="square" lIns="0" tIns="0" rIns="0" bIns="0" rtlCol="0" anchor="ctr">
+            <a:normAutofit/>
+          </a:bodyPr>
+          <a:lstStyle/>
+          <a:p>
+            <a:pPr indent="0" marL="0">
+              <a:spcAft>
+                <a:spcPts val="200"/>
+              </a:spcAft>
+              <a:buNone/>
+            </a:pPr>
+            <a:r>
+              <a:rPr lang="en-US" sz="1100" dirty="0">
+                <a:solidFill>
+                  <a:schemeClr val="tx1"/>
+                </a:solidFill>
+              </a:rPr>
+              <a:t>기관: 질병관리청  ·  조사 이름: 「청소년건강행태조사」</a:t>
+            </a:r>
+            <a:endParaRPr lang="en-US" sz="1100" dirty="0"/>
+          </a:p>
+          <a:p>
+            <a:pPr indent="0" marL="0">
+              <a:spcAft>
+                <a:spcPts val="200"/>
+              </a:spcAft>
+              <a:buNone/>
+            </a:pPr>
+            <a:r>
+              <a:rPr lang="en-US" sz="1100" dirty="0">
+                <a:solidFill>
+                  <a:schemeClr val="tx1"/>
+                </a:solidFill>
+              </a:rPr>
+              <a:t>대상: 전국 중1~고3(대개 만 12~18세), 800개교 약 6만 명 표본, 매년 익명 온라인 조사</a:t>
+            </a:r>
+            <a:endParaRPr lang="en-US" sz="1100" dirty="0"/>
+          </a:p>
+          <a:p>
+            <a:pPr indent="0" marL="0">
+              <a:spcAft>
+                <a:spcPts val="200"/>
+              </a:spcAft>
+              <a:buNone/>
+            </a:pPr>
+            <a:r>
+              <a:rPr lang="en-US" sz="1100" dirty="0">
+                <a:solidFill>
+                  <a:schemeClr val="tx1"/>
+                </a:solidFill>
+              </a:rPr>
+              <a:t>조사 방식: 일부만 뽑아 조사(표본조사). 표본의 비율로 전국 청소년을 미루어 본다</a:t>
+            </a:r>
+            <a:endParaRPr lang="en-US" sz="1100" dirty="0"/>
+          </a:p>
+        </p:txBody>
+      </p:sp>
+      <p:sp>
+        <p:nvSpPr>
+          <p:cNvPr id="7" name="원자료 라벨"/>
+          <p:cNvSpPr txBox="1"/>
+          <p:nvPr/>
+        </p:nvSpPr>
+        <p:spPr>
+          <a:xfrm>
+            <a:off x="457200" y="1901952"/>
+            <a:ext cx="4114800" cy="274320"/>
           </a:xfrm>
           <a:prstGeom prst="rect">
             <a:avLst/>
@@ -3948,20 +3728,20 @@
               <a:buNone/>
             </a:pPr>
             <a:r>
-              <a:rPr lang="en-US" sz="1100" dirty="0">
-                <a:solidFill>
-                  <a:schemeClr val="accent3"/>
+              <a:rPr lang="en-US" sz="1050" b="1" dirty="0">
+                <a:solidFill>
+                  <a:schemeClr val="tx2"/>
                 </a:solidFill>
               </a:rPr>
-              <a:t>확률분포표 (2025년 여학생 1명, X = 주 5일 이상 결식이면 1)</a:t>
-            </a:r>
-            <a:endParaRPr lang="en-US" sz="1100" dirty="0"/>
+              <a:t>원자료 표 (일부 발췌, 단위: %)</a:t>
+            </a:r>
+            <a:endParaRPr lang="en-US" sz="1050" dirty="0"/>
           </a:p>
         </p:txBody>
       </p:sp>
       <p:graphicFrame>
         <p:nvGraphicFramePr>
-          <p:cNvPr id="4" name="확률분포표"/>
+          <p:cNvPr id="4" name="원자료 표"/>
           <p:cNvGraphicFramePr>
             <a:graphicFrameLocks noGrp="1"/>
           </p:cNvGraphicFramePr>
@@ -3974,8 +3754,8 @@
           </p:nvPr>
         </p:nvGraphicFramePr>
         <p:xfrm>
-          <a:off x="457200" y="3803904"/>
-          <a:ext cx="4572000" cy="914400"/>
+          <a:off x="457200" y="2176272"/>
+          <a:ext cx="4114800" cy="914400"/>
         </p:xfrm>
         <a:graphic>
           <a:graphicData uri="http://schemas.openxmlformats.org/drawingml/2006/table">
@@ -3983,11 +3763,13 @@
               <a:tblPr/>
               <a:tblGrid>
                 <a:gridCol w="822960"/>
-                <a:gridCol w="1280160"/>
-                <a:gridCol w="1554480"/>
-                <a:gridCol w="914400"/>
+                <a:gridCol w="658368"/>
+                <a:gridCol w="658368"/>
+                <a:gridCol w="658368"/>
+                <a:gridCol w="658368"/>
+                <a:gridCol w="658368"/>
               </a:tblGrid>
-              <a:tr h="274320">
+              <a:tr h="237744">
                 <a:tc>
                   <a:txBody>
                     <a:bodyPr/>
@@ -3997,14 +3779,14 @@
                         <a:buNone/>
                       </a:pPr>
                       <a:r>
-                        <a:rPr lang="en-US" sz="1050" b="1" dirty="0">
+                        <a:rPr lang="en-US" sz="850" b="1" dirty="0">
                           <a:solidFill>
                             <a:srgbClr val="1B211D"/>
                           </a:solidFill>
                         </a:rPr>
-                        <a:t>X</a:t>
+                        <a:t>구분</a:t>
                       </a:r>
-                      <a:endParaRPr lang="en-US" sz="1050" dirty="0"/>
+                      <a:endParaRPr lang="en-US" sz="850" dirty="0"/>
                     </a:p>
                   </a:txBody>
                   <a:tcPr marL="27432" marR="27432" marT="27432" marB="27432" anchor="ctr">
@@ -4058,14 +3840,14 @@
                         <a:buNone/>
                       </a:pPr>
                       <a:r>
-                        <a:rPr lang="en-US" sz="1050" b="1" dirty="0">
+                        <a:rPr lang="en-US" sz="850" b="1" dirty="0">
                           <a:solidFill>
                             <a:srgbClr val="1B211D"/>
                           </a:solidFill>
                         </a:rPr>
-                        <a:t>0 (거르지 않음)</a:t>
+                        <a:t>2021</a:t>
                       </a:r>
-                      <a:endParaRPr lang="en-US" sz="1050" dirty="0"/>
+                      <a:endParaRPr lang="en-US" sz="850" dirty="0"/>
                     </a:p>
                   </a:txBody>
                   <a:tcPr marL="27432" marR="27432" marT="27432" marB="27432" anchor="ctr">
@@ -4119,14 +3901,14 @@
                         <a:buNone/>
                       </a:pPr>
                       <a:r>
-                        <a:rPr lang="en-US" sz="1050" b="1" dirty="0">
+                        <a:rPr lang="en-US" sz="850" b="1" dirty="0">
                           <a:solidFill>
                             <a:srgbClr val="1B211D"/>
                           </a:solidFill>
                         </a:rPr>
-                        <a:t>1 (주 5일 이상 거름)</a:t>
+                        <a:t>2022</a:t>
                       </a:r>
-                      <a:endParaRPr lang="en-US" sz="1050" dirty="0"/>
+                      <a:endParaRPr lang="en-US" sz="850" dirty="0"/>
                     </a:p>
                   </a:txBody>
                   <a:tcPr marL="27432" marR="27432" marT="27432" marB="27432" anchor="ctr">
@@ -4180,14 +3962,2398 @@
                         <a:buNone/>
                       </a:pPr>
                       <a:r>
-                        <a:rPr lang="en-US" sz="1050" b="1" dirty="0">
+                        <a:rPr lang="en-US" sz="850" b="1" dirty="0">
                           <a:solidFill>
                             <a:srgbClr val="1B211D"/>
                           </a:solidFill>
                         </a:rPr>
-                        <a:t>합계</a:t>
+                        <a:t>2023</a:t>
                       </a:r>
-                      <a:endParaRPr lang="en-US" sz="1050" dirty="0"/>
+                      <a:endParaRPr lang="en-US" sz="850" dirty="0"/>
+                    </a:p>
+                  </a:txBody>
+                  <a:tcPr marL="27432" marR="27432" marT="27432" marB="27432" anchor="ctr">
+                    <a:lnL w="9525" cap="flat" cmpd="sng" algn="ctr">
+                      <a:solidFill>
+                        <a:srgbClr val="B9B4A6"/>
+                      </a:solidFill>
+                      <a:prstDash val="solid"/>
+                      <a:round/>
+                      <a:headEnd type="none" w="med" len="med"/>
+                      <a:tailEnd type="none" w="med" len="med"/>
+                    </a:lnL>
+                    <a:lnR w="9525" cap="flat" cmpd="sng" algn="ctr">
+                      <a:solidFill>
+                        <a:srgbClr val="B9B4A6"/>
+                      </a:solidFill>
+                      <a:prstDash val="solid"/>
+                      <a:round/>
+                      <a:headEnd type="none" w="med" len="med"/>
+                      <a:tailEnd type="none" w="med" len="med"/>
+                    </a:lnR>
+                    <a:lnT w="9525" cap="flat" cmpd="sng" algn="ctr">
+                      <a:solidFill>
+                        <a:srgbClr val="B9B4A6"/>
+                      </a:solidFill>
+                      <a:prstDash val="solid"/>
+                      <a:round/>
+                      <a:headEnd type="none" w="med" len="med"/>
+                      <a:tailEnd type="none" w="med" len="med"/>
+                    </a:lnT>
+                    <a:lnB w="9525" cap="flat" cmpd="sng" algn="ctr">
+                      <a:solidFill>
+                        <a:srgbClr val="B9B4A6"/>
+                      </a:solidFill>
+                      <a:prstDash val="solid"/>
+                      <a:round/>
+                      <a:headEnd type="none" w="med" len="med"/>
+                      <a:tailEnd type="none" w="med" len="med"/>
+                    </a:lnB>
+                    <a:solidFill>
+                      <a:srgbClr val="EEF3EF"/>
+                    </a:solidFill>
+                  </a:tcPr>
+                </a:tc>
+                <a:tc>
+                  <a:txBody>
+                    <a:bodyPr/>
+                    <a:lstStyle/>
+                    <a:p>
+                      <a:pPr algn="ctr" indent="0" marL="0">
+                        <a:buNone/>
+                      </a:pPr>
+                      <a:r>
+                        <a:rPr lang="en-US" sz="850" b="1" dirty="0">
+                          <a:solidFill>
+                            <a:srgbClr val="1B211D"/>
+                          </a:solidFill>
+                        </a:rPr>
+                        <a:t>2024</a:t>
+                      </a:r>
+                      <a:endParaRPr lang="en-US" sz="850" dirty="0"/>
+                    </a:p>
+                  </a:txBody>
+                  <a:tcPr marL="27432" marR="27432" marT="27432" marB="27432" anchor="ctr">
+                    <a:lnL w="9525" cap="flat" cmpd="sng" algn="ctr">
+                      <a:solidFill>
+                        <a:srgbClr val="B9B4A6"/>
+                      </a:solidFill>
+                      <a:prstDash val="solid"/>
+                      <a:round/>
+                      <a:headEnd type="none" w="med" len="med"/>
+                      <a:tailEnd type="none" w="med" len="med"/>
+                    </a:lnL>
+                    <a:lnR w="9525" cap="flat" cmpd="sng" algn="ctr">
+                      <a:solidFill>
+                        <a:srgbClr val="B9B4A6"/>
+                      </a:solidFill>
+                      <a:prstDash val="solid"/>
+                      <a:round/>
+                      <a:headEnd type="none" w="med" len="med"/>
+                      <a:tailEnd type="none" w="med" len="med"/>
+                    </a:lnR>
+                    <a:lnT w="9525" cap="flat" cmpd="sng" algn="ctr">
+                      <a:solidFill>
+                        <a:srgbClr val="B9B4A6"/>
+                      </a:solidFill>
+                      <a:prstDash val="solid"/>
+                      <a:round/>
+                      <a:headEnd type="none" w="med" len="med"/>
+                      <a:tailEnd type="none" w="med" len="med"/>
+                    </a:lnT>
+                    <a:lnB w="9525" cap="flat" cmpd="sng" algn="ctr">
+                      <a:solidFill>
+                        <a:srgbClr val="B9B4A6"/>
+                      </a:solidFill>
+                      <a:prstDash val="solid"/>
+                      <a:round/>
+                      <a:headEnd type="none" w="med" len="med"/>
+                      <a:tailEnd type="none" w="med" len="med"/>
+                    </a:lnB>
+                    <a:solidFill>
+                      <a:srgbClr val="EEF3EF"/>
+                    </a:solidFill>
+                  </a:tcPr>
+                </a:tc>
+                <a:tc>
+                  <a:txBody>
+                    <a:bodyPr/>
+                    <a:lstStyle/>
+                    <a:p>
+                      <a:pPr algn="ctr" indent="0" marL="0">
+                        <a:buNone/>
+                      </a:pPr>
+                      <a:r>
+                        <a:rPr lang="en-US" sz="850" b="1" dirty="0">
+                          <a:solidFill>
+                            <a:srgbClr val="1B211D"/>
+                          </a:solidFill>
+                        </a:rPr>
+                        <a:t>2025</a:t>
+                      </a:r>
+                      <a:endParaRPr lang="en-US" sz="850" dirty="0"/>
+                    </a:p>
+                  </a:txBody>
+                  <a:tcPr marL="27432" marR="27432" marT="27432" marB="27432" anchor="ctr">
+                    <a:lnL w="9525" cap="flat" cmpd="sng" algn="ctr">
+                      <a:solidFill>
+                        <a:srgbClr val="B9B4A6"/>
+                      </a:solidFill>
+                      <a:prstDash val="solid"/>
+                      <a:round/>
+                      <a:headEnd type="none" w="med" len="med"/>
+                      <a:tailEnd type="none" w="med" len="med"/>
+                    </a:lnL>
+                    <a:lnR w="9525" cap="flat" cmpd="sng" algn="ctr">
+                      <a:solidFill>
+                        <a:srgbClr val="B9B4A6"/>
+                      </a:solidFill>
+                      <a:prstDash val="solid"/>
+                      <a:round/>
+                      <a:headEnd type="none" w="med" len="med"/>
+                      <a:tailEnd type="none" w="med" len="med"/>
+                    </a:lnR>
+                    <a:lnT w="9525" cap="flat" cmpd="sng" algn="ctr">
+                      <a:solidFill>
+                        <a:srgbClr val="B9B4A6"/>
+                      </a:solidFill>
+                      <a:prstDash val="solid"/>
+                      <a:round/>
+                      <a:headEnd type="none" w="med" len="med"/>
+                      <a:tailEnd type="none" w="med" len="med"/>
+                    </a:lnT>
+                    <a:lnB w="9525" cap="flat" cmpd="sng" algn="ctr">
+                      <a:solidFill>
+                        <a:srgbClr val="B9B4A6"/>
+                      </a:solidFill>
+                      <a:prstDash val="solid"/>
+                      <a:round/>
+                      <a:headEnd type="none" w="med" len="med"/>
+                      <a:tailEnd type="none" w="med" len="med"/>
+                    </a:lnB>
+                    <a:solidFill>
+                      <a:srgbClr val="EEF3EF"/>
+                    </a:solidFill>
+                  </a:tcPr>
+                </a:tc>
+              </a:tr>
+              <a:tr h="237744">
+                <a:tc>
+                  <a:txBody>
+                    <a:bodyPr/>
+                    <a:lstStyle/>
+                    <a:p>
+                      <a:pPr algn="ctr" indent="0" marL="0">
+                        <a:buNone/>
+                      </a:pPr>
+                      <a:r>
+                        <a:rPr lang="en-US" sz="850" dirty="0">
+                          <a:solidFill>
+                            <a:srgbClr val="1B211D"/>
+                          </a:solidFill>
+                        </a:rPr>
+                        <a:t>전체</a:t>
+                      </a:r>
+                      <a:endParaRPr lang="en-US" sz="850" dirty="0"/>
+                    </a:p>
+                  </a:txBody>
+                  <a:tcPr marL="27432" marR="27432" marT="27432" marB="27432" anchor="ctr">
+                    <a:lnL w="9525" cap="flat" cmpd="sng" algn="ctr">
+                      <a:solidFill>
+                        <a:srgbClr val="B9B4A6"/>
+                      </a:solidFill>
+                      <a:prstDash val="solid"/>
+                      <a:round/>
+                      <a:headEnd type="none" w="med" len="med"/>
+                      <a:tailEnd type="none" w="med" len="med"/>
+                    </a:lnL>
+                    <a:lnR w="9525" cap="flat" cmpd="sng" algn="ctr">
+                      <a:solidFill>
+                        <a:srgbClr val="B9B4A6"/>
+                      </a:solidFill>
+                      <a:prstDash val="solid"/>
+                      <a:round/>
+                      <a:headEnd type="none" w="med" len="med"/>
+                      <a:tailEnd type="none" w="med" len="med"/>
+                    </a:lnR>
+                    <a:lnT w="9525" cap="flat" cmpd="sng" algn="ctr">
+                      <a:solidFill>
+                        <a:srgbClr val="B9B4A6"/>
+                      </a:solidFill>
+                      <a:prstDash val="solid"/>
+                      <a:round/>
+                      <a:headEnd type="none" w="med" len="med"/>
+                      <a:tailEnd type="none" w="med" len="med"/>
+                    </a:lnT>
+                    <a:lnB w="9525" cap="flat" cmpd="sng" algn="ctr">
+                      <a:solidFill>
+                        <a:srgbClr val="B9B4A6"/>
+                      </a:solidFill>
+                      <a:prstDash val="solid"/>
+                      <a:round/>
+                      <a:headEnd type="none" w="med" len="med"/>
+                      <a:tailEnd type="none" w="med" len="med"/>
+                    </a:lnB>
+                  </a:tcPr>
+                </a:tc>
+                <a:tc>
+                  <a:txBody>
+                    <a:bodyPr/>
+                    <a:lstStyle/>
+                    <a:p>
+                      <a:pPr algn="ctr" indent="0" marL="0">
+                        <a:buNone/>
+                      </a:pPr>
+                      <a:r>
+                        <a:rPr lang="en-US" sz="850" dirty="0">
+                          <a:solidFill>
+                            <a:srgbClr val="1B211D"/>
+                          </a:solidFill>
+                        </a:rPr>
+                        <a:t>…</a:t>
+                      </a:r>
+                      <a:endParaRPr lang="en-US" sz="850" dirty="0"/>
+                    </a:p>
+                  </a:txBody>
+                  <a:tcPr marL="27432" marR="27432" marT="27432" marB="27432" anchor="ctr">
+                    <a:lnL w="9525" cap="flat" cmpd="sng" algn="ctr">
+                      <a:solidFill>
+                        <a:srgbClr val="B9B4A6"/>
+                      </a:solidFill>
+                      <a:prstDash val="solid"/>
+                      <a:round/>
+                      <a:headEnd type="none" w="med" len="med"/>
+                      <a:tailEnd type="none" w="med" len="med"/>
+                    </a:lnL>
+                    <a:lnR w="9525" cap="flat" cmpd="sng" algn="ctr">
+                      <a:solidFill>
+                        <a:srgbClr val="B9B4A6"/>
+                      </a:solidFill>
+                      <a:prstDash val="solid"/>
+                      <a:round/>
+                      <a:headEnd type="none" w="med" len="med"/>
+                      <a:tailEnd type="none" w="med" len="med"/>
+                    </a:lnR>
+                    <a:lnT w="9525" cap="flat" cmpd="sng" algn="ctr">
+                      <a:solidFill>
+                        <a:srgbClr val="B9B4A6"/>
+                      </a:solidFill>
+                      <a:prstDash val="solid"/>
+                      <a:round/>
+                      <a:headEnd type="none" w="med" len="med"/>
+                      <a:tailEnd type="none" w="med" len="med"/>
+                    </a:lnT>
+                    <a:lnB w="9525" cap="flat" cmpd="sng" algn="ctr">
+                      <a:solidFill>
+                        <a:srgbClr val="B9B4A6"/>
+                      </a:solidFill>
+                      <a:prstDash val="solid"/>
+                      <a:round/>
+                      <a:headEnd type="none" w="med" len="med"/>
+                      <a:tailEnd type="none" w="med" len="med"/>
+                    </a:lnB>
+                  </a:tcPr>
+                </a:tc>
+                <a:tc>
+                  <a:txBody>
+                    <a:bodyPr/>
+                    <a:lstStyle/>
+                    <a:p>
+                      <a:pPr algn="ctr" indent="0" marL="0">
+                        <a:buNone/>
+                      </a:pPr>
+                      <a:r>
+                        <a:rPr lang="en-US" sz="850" dirty="0">
+                          <a:solidFill>
+                            <a:srgbClr val="1B211D"/>
+                          </a:solidFill>
+                        </a:rPr>
+                        <a:t>…</a:t>
+                      </a:r>
+                      <a:endParaRPr lang="en-US" sz="850" dirty="0"/>
+                    </a:p>
+                  </a:txBody>
+                  <a:tcPr marL="27432" marR="27432" marT="27432" marB="27432" anchor="ctr">
+                    <a:lnL w="9525" cap="flat" cmpd="sng" algn="ctr">
+                      <a:solidFill>
+                        <a:srgbClr val="B9B4A6"/>
+                      </a:solidFill>
+                      <a:prstDash val="solid"/>
+                      <a:round/>
+                      <a:headEnd type="none" w="med" len="med"/>
+                      <a:tailEnd type="none" w="med" len="med"/>
+                    </a:lnL>
+                    <a:lnR w="9525" cap="flat" cmpd="sng" algn="ctr">
+                      <a:solidFill>
+                        <a:srgbClr val="B9B4A6"/>
+                      </a:solidFill>
+                      <a:prstDash val="solid"/>
+                      <a:round/>
+                      <a:headEnd type="none" w="med" len="med"/>
+                      <a:tailEnd type="none" w="med" len="med"/>
+                    </a:lnR>
+                    <a:lnT w="9525" cap="flat" cmpd="sng" algn="ctr">
+                      <a:solidFill>
+                        <a:srgbClr val="B9B4A6"/>
+                      </a:solidFill>
+                      <a:prstDash val="solid"/>
+                      <a:round/>
+                      <a:headEnd type="none" w="med" len="med"/>
+                      <a:tailEnd type="none" w="med" len="med"/>
+                    </a:lnT>
+                    <a:lnB w="9525" cap="flat" cmpd="sng" algn="ctr">
+                      <a:solidFill>
+                        <a:srgbClr val="B9B4A6"/>
+                      </a:solidFill>
+                      <a:prstDash val="solid"/>
+                      <a:round/>
+                      <a:headEnd type="none" w="med" len="med"/>
+                      <a:tailEnd type="none" w="med" len="med"/>
+                    </a:lnB>
+                  </a:tcPr>
+                </a:tc>
+                <a:tc>
+                  <a:txBody>
+                    <a:bodyPr/>
+                    <a:lstStyle/>
+                    <a:p>
+                      <a:pPr algn="ctr" indent="0" marL="0">
+                        <a:buNone/>
+                      </a:pPr>
+                      <a:r>
+                        <a:rPr lang="en-US" sz="850" dirty="0">
+                          <a:solidFill>
+                            <a:srgbClr val="1B211D"/>
+                          </a:solidFill>
+                        </a:rPr>
+                        <a:t>…</a:t>
+                      </a:r>
+                      <a:endParaRPr lang="en-US" sz="850" dirty="0"/>
+                    </a:p>
+                  </a:txBody>
+                  <a:tcPr marL="27432" marR="27432" marT="27432" marB="27432" anchor="ctr">
+                    <a:lnL w="9525" cap="flat" cmpd="sng" algn="ctr">
+                      <a:solidFill>
+                        <a:srgbClr val="B9B4A6"/>
+                      </a:solidFill>
+                      <a:prstDash val="solid"/>
+                      <a:round/>
+                      <a:headEnd type="none" w="med" len="med"/>
+                      <a:tailEnd type="none" w="med" len="med"/>
+                    </a:lnL>
+                    <a:lnR w="9525" cap="flat" cmpd="sng" algn="ctr">
+                      <a:solidFill>
+                        <a:srgbClr val="B9B4A6"/>
+                      </a:solidFill>
+                      <a:prstDash val="solid"/>
+                      <a:round/>
+                      <a:headEnd type="none" w="med" len="med"/>
+                      <a:tailEnd type="none" w="med" len="med"/>
+                    </a:lnR>
+                    <a:lnT w="9525" cap="flat" cmpd="sng" algn="ctr">
+                      <a:solidFill>
+                        <a:srgbClr val="B9B4A6"/>
+                      </a:solidFill>
+                      <a:prstDash val="solid"/>
+                      <a:round/>
+                      <a:headEnd type="none" w="med" len="med"/>
+                      <a:tailEnd type="none" w="med" len="med"/>
+                    </a:lnT>
+                    <a:lnB w="9525" cap="flat" cmpd="sng" algn="ctr">
+                      <a:solidFill>
+                        <a:srgbClr val="B9B4A6"/>
+                      </a:solidFill>
+                      <a:prstDash val="solid"/>
+                      <a:round/>
+                      <a:headEnd type="none" w="med" len="med"/>
+                      <a:tailEnd type="none" w="med" len="med"/>
+                    </a:lnB>
+                  </a:tcPr>
+                </a:tc>
+                <a:tc>
+                  <a:txBody>
+                    <a:bodyPr/>
+                    <a:lstStyle/>
+                    <a:p>
+                      <a:pPr algn="ctr" indent="0" marL="0">
+                        <a:buNone/>
+                      </a:pPr>
+                      <a:r>
+                        <a:rPr lang="en-US" sz="850" dirty="0">
+                          <a:solidFill>
+                            <a:srgbClr val="1B211D"/>
+                          </a:solidFill>
+                        </a:rPr>
+                        <a:t>42.4</a:t>
+                      </a:r>
+                      <a:endParaRPr lang="en-US" sz="850" dirty="0"/>
+                    </a:p>
+                  </a:txBody>
+                  <a:tcPr marL="27432" marR="27432" marT="27432" marB="27432" anchor="ctr">
+                    <a:lnL w="9525" cap="flat" cmpd="sng" algn="ctr">
+                      <a:solidFill>
+                        <a:srgbClr val="B9B4A6"/>
+                      </a:solidFill>
+                      <a:prstDash val="solid"/>
+                      <a:round/>
+                      <a:headEnd type="none" w="med" len="med"/>
+                      <a:tailEnd type="none" w="med" len="med"/>
+                    </a:lnL>
+                    <a:lnR w="9525" cap="flat" cmpd="sng" algn="ctr">
+                      <a:solidFill>
+                        <a:srgbClr val="B9B4A6"/>
+                      </a:solidFill>
+                      <a:prstDash val="solid"/>
+                      <a:round/>
+                      <a:headEnd type="none" w="med" len="med"/>
+                      <a:tailEnd type="none" w="med" len="med"/>
+                    </a:lnR>
+                    <a:lnT w="9525" cap="flat" cmpd="sng" algn="ctr">
+                      <a:solidFill>
+                        <a:srgbClr val="B9B4A6"/>
+                      </a:solidFill>
+                      <a:prstDash val="solid"/>
+                      <a:round/>
+                      <a:headEnd type="none" w="med" len="med"/>
+                      <a:tailEnd type="none" w="med" len="med"/>
+                    </a:lnT>
+                    <a:lnB w="9525" cap="flat" cmpd="sng" algn="ctr">
+                      <a:solidFill>
+                        <a:srgbClr val="B9B4A6"/>
+                      </a:solidFill>
+                      <a:prstDash val="solid"/>
+                      <a:round/>
+                      <a:headEnd type="none" w="med" len="med"/>
+                      <a:tailEnd type="none" w="med" len="med"/>
+                    </a:lnB>
+                  </a:tcPr>
+                </a:tc>
+                <a:tc>
+                  <a:txBody>
+                    <a:bodyPr/>
+                    <a:lstStyle/>
+                    <a:p>
+                      <a:pPr algn="ctr" indent="0" marL="0">
+                        <a:buNone/>
+                      </a:pPr>
+                      <a:r>
+                        <a:rPr lang="en-US" sz="850" dirty="0">
+                          <a:solidFill>
+                            <a:srgbClr val="1B211D"/>
+                          </a:solidFill>
+                        </a:rPr>
+                        <a:t>…</a:t>
+                      </a:r>
+                      <a:endParaRPr lang="en-US" sz="850" dirty="0"/>
+                    </a:p>
+                  </a:txBody>
+                  <a:tcPr marL="27432" marR="27432" marT="27432" marB="27432" anchor="ctr">
+                    <a:lnL w="9525" cap="flat" cmpd="sng" algn="ctr">
+                      <a:solidFill>
+                        <a:srgbClr val="B9B4A6"/>
+                      </a:solidFill>
+                      <a:prstDash val="solid"/>
+                      <a:round/>
+                      <a:headEnd type="none" w="med" len="med"/>
+                      <a:tailEnd type="none" w="med" len="med"/>
+                    </a:lnL>
+                    <a:lnR w="9525" cap="flat" cmpd="sng" algn="ctr">
+                      <a:solidFill>
+                        <a:srgbClr val="B9B4A6"/>
+                      </a:solidFill>
+                      <a:prstDash val="solid"/>
+                      <a:round/>
+                      <a:headEnd type="none" w="med" len="med"/>
+                      <a:tailEnd type="none" w="med" len="med"/>
+                    </a:lnR>
+                    <a:lnT w="9525" cap="flat" cmpd="sng" algn="ctr">
+                      <a:solidFill>
+                        <a:srgbClr val="B9B4A6"/>
+                      </a:solidFill>
+                      <a:prstDash val="solid"/>
+                      <a:round/>
+                      <a:headEnd type="none" w="med" len="med"/>
+                      <a:tailEnd type="none" w="med" len="med"/>
+                    </a:lnT>
+                    <a:lnB w="9525" cap="flat" cmpd="sng" algn="ctr">
+                      <a:solidFill>
+                        <a:srgbClr val="B9B4A6"/>
+                      </a:solidFill>
+                      <a:prstDash val="solid"/>
+                      <a:round/>
+                      <a:headEnd type="none" w="med" len="med"/>
+                      <a:tailEnd type="none" w="med" len="med"/>
+                    </a:lnB>
+                  </a:tcPr>
+                </a:tc>
+              </a:tr>
+              <a:tr h="237744">
+                <a:tc>
+                  <a:txBody>
+                    <a:bodyPr/>
+                    <a:lstStyle/>
+                    <a:p>
+                      <a:pPr algn="ctr" indent="0" marL="0">
+                        <a:buNone/>
+                      </a:pPr>
+                      <a:r>
+                        <a:rPr lang="en-US" sz="850" dirty="0">
+                          <a:solidFill>
+                            <a:srgbClr val="1B211D"/>
+                          </a:solidFill>
+                        </a:rPr>
+                        <a:t>남학생</a:t>
+                      </a:r>
+                      <a:endParaRPr lang="en-US" sz="850" dirty="0"/>
+                    </a:p>
+                  </a:txBody>
+                  <a:tcPr marL="27432" marR="27432" marT="27432" marB="27432" anchor="ctr">
+                    <a:lnL w="9525" cap="flat" cmpd="sng" algn="ctr">
+                      <a:solidFill>
+                        <a:srgbClr val="B9B4A6"/>
+                      </a:solidFill>
+                      <a:prstDash val="solid"/>
+                      <a:round/>
+                      <a:headEnd type="none" w="med" len="med"/>
+                      <a:tailEnd type="none" w="med" len="med"/>
+                    </a:lnL>
+                    <a:lnR w="9525" cap="flat" cmpd="sng" algn="ctr">
+                      <a:solidFill>
+                        <a:srgbClr val="B9B4A6"/>
+                      </a:solidFill>
+                      <a:prstDash val="solid"/>
+                      <a:round/>
+                      <a:headEnd type="none" w="med" len="med"/>
+                      <a:tailEnd type="none" w="med" len="med"/>
+                    </a:lnR>
+                    <a:lnT w="9525" cap="flat" cmpd="sng" algn="ctr">
+                      <a:solidFill>
+                        <a:srgbClr val="B9B4A6"/>
+                      </a:solidFill>
+                      <a:prstDash val="solid"/>
+                      <a:round/>
+                      <a:headEnd type="none" w="med" len="med"/>
+                      <a:tailEnd type="none" w="med" len="med"/>
+                    </a:lnT>
+                    <a:lnB w="9525" cap="flat" cmpd="sng" algn="ctr">
+                      <a:solidFill>
+                        <a:srgbClr val="B9B4A6"/>
+                      </a:solidFill>
+                      <a:prstDash val="solid"/>
+                      <a:round/>
+                      <a:headEnd type="none" w="med" len="med"/>
+                      <a:tailEnd type="none" w="med" len="med"/>
+                    </a:lnB>
+                  </a:tcPr>
+                </a:tc>
+                <a:tc>
+                  <a:txBody>
+                    <a:bodyPr/>
+                    <a:lstStyle/>
+                    <a:p>
+                      <a:pPr algn="ctr" indent="0" marL="0">
+                        <a:buNone/>
+                      </a:pPr>
+                      <a:r>
+                        <a:rPr lang="en-US" sz="850" dirty="0">
+                          <a:solidFill>
+                            <a:srgbClr val="1B211D"/>
+                          </a:solidFill>
+                        </a:rPr>
+                        <a:t>37.0</a:t>
+                      </a:r>
+                      <a:endParaRPr lang="en-US" sz="850" dirty="0"/>
+                    </a:p>
+                  </a:txBody>
+                  <a:tcPr marL="27432" marR="27432" marT="27432" marB="27432" anchor="ctr">
+                    <a:lnL w="9525" cap="flat" cmpd="sng" algn="ctr">
+                      <a:solidFill>
+                        <a:srgbClr val="B9B4A6"/>
+                      </a:solidFill>
+                      <a:prstDash val="solid"/>
+                      <a:round/>
+                      <a:headEnd type="none" w="med" len="med"/>
+                      <a:tailEnd type="none" w="med" len="med"/>
+                    </a:lnL>
+                    <a:lnR w="9525" cap="flat" cmpd="sng" algn="ctr">
+                      <a:solidFill>
+                        <a:srgbClr val="B9B4A6"/>
+                      </a:solidFill>
+                      <a:prstDash val="solid"/>
+                      <a:round/>
+                      <a:headEnd type="none" w="med" len="med"/>
+                      <a:tailEnd type="none" w="med" len="med"/>
+                    </a:lnR>
+                    <a:lnT w="9525" cap="flat" cmpd="sng" algn="ctr">
+                      <a:solidFill>
+                        <a:srgbClr val="B9B4A6"/>
+                      </a:solidFill>
+                      <a:prstDash val="solid"/>
+                      <a:round/>
+                      <a:headEnd type="none" w="med" len="med"/>
+                      <a:tailEnd type="none" w="med" len="med"/>
+                    </a:lnT>
+                    <a:lnB w="9525" cap="flat" cmpd="sng" algn="ctr">
+                      <a:solidFill>
+                        <a:srgbClr val="B9B4A6"/>
+                      </a:solidFill>
+                      <a:prstDash val="solid"/>
+                      <a:round/>
+                      <a:headEnd type="none" w="med" len="med"/>
+                      <a:tailEnd type="none" w="med" len="med"/>
+                    </a:lnB>
+                  </a:tcPr>
+                </a:tc>
+                <a:tc>
+                  <a:txBody>
+                    <a:bodyPr/>
+                    <a:lstStyle/>
+                    <a:p>
+                      <a:pPr algn="ctr" indent="0" marL="0">
+                        <a:buNone/>
+                      </a:pPr>
+                      <a:r>
+                        <a:rPr lang="en-US" sz="850" dirty="0">
+                          <a:solidFill>
+                            <a:srgbClr val="1B211D"/>
+                          </a:solidFill>
+                        </a:rPr>
+                        <a:t>37.4</a:t>
+                      </a:r>
+                      <a:endParaRPr lang="en-US" sz="850" dirty="0"/>
+                    </a:p>
+                  </a:txBody>
+                  <a:tcPr marL="27432" marR="27432" marT="27432" marB="27432" anchor="ctr">
+                    <a:lnL w="9525" cap="flat" cmpd="sng" algn="ctr">
+                      <a:solidFill>
+                        <a:srgbClr val="B9B4A6"/>
+                      </a:solidFill>
+                      <a:prstDash val="solid"/>
+                      <a:round/>
+                      <a:headEnd type="none" w="med" len="med"/>
+                      <a:tailEnd type="none" w="med" len="med"/>
+                    </a:lnL>
+                    <a:lnR w="9525" cap="flat" cmpd="sng" algn="ctr">
+                      <a:solidFill>
+                        <a:srgbClr val="B9B4A6"/>
+                      </a:solidFill>
+                      <a:prstDash val="solid"/>
+                      <a:round/>
+                      <a:headEnd type="none" w="med" len="med"/>
+                      <a:tailEnd type="none" w="med" len="med"/>
+                    </a:lnR>
+                    <a:lnT w="9525" cap="flat" cmpd="sng" algn="ctr">
+                      <a:solidFill>
+                        <a:srgbClr val="B9B4A6"/>
+                      </a:solidFill>
+                      <a:prstDash val="solid"/>
+                      <a:round/>
+                      <a:headEnd type="none" w="med" len="med"/>
+                      <a:tailEnd type="none" w="med" len="med"/>
+                    </a:lnT>
+                    <a:lnB w="9525" cap="flat" cmpd="sng" algn="ctr">
+                      <a:solidFill>
+                        <a:srgbClr val="B9B4A6"/>
+                      </a:solidFill>
+                      <a:prstDash val="solid"/>
+                      <a:round/>
+                      <a:headEnd type="none" w="med" len="med"/>
+                      <a:tailEnd type="none" w="med" len="med"/>
+                    </a:lnB>
+                  </a:tcPr>
+                </a:tc>
+                <a:tc>
+                  <a:txBody>
+                    <a:bodyPr/>
+                    <a:lstStyle/>
+                    <a:p>
+                      <a:pPr algn="ctr" indent="0" marL="0">
+                        <a:buNone/>
+                      </a:pPr>
+                      <a:r>
+                        <a:rPr lang="en-US" sz="850" dirty="0">
+                          <a:solidFill>
+                            <a:srgbClr val="1B211D"/>
+                          </a:solidFill>
+                        </a:rPr>
+                        <a:t>39.7</a:t>
+                      </a:r>
+                      <a:endParaRPr lang="en-US" sz="850" dirty="0"/>
+                    </a:p>
+                  </a:txBody>
+                  <a:tcPr marL="27432" marR="27432" marT="27432" marB="27432" anchor="ctr">
+                    <a:lnL w="9525" cap="flat" cmpd="sng" algn="ctr">
+                      <a:solidFill>
+                        <a:srgbClr val="B9B4A6"/>
+                      </a:solidFill>
+                      <a:prstDash val="solid"/>
+                      <a:round/>
+                      <a:headEnd type="none" w="med" len="med"/>
+                      <a:tailEnd type="none" w="med" len="med"/>
+                    </a:lnL>
+                    <a:lnR w="9525" cap="flat" cmpd="sng" algn="ctr">
+                      <a:solidFill>
+                        <a:srgbClr val="B9B4A6"/>
+                      </a:solidFill>
+                      <a:prstDash val="solid"/>
+                      <a:round/>
+                      <a:headEnd type="none" w="med" len="med"/>
+                      <a:tailEnd type="none" w="med" len="med"/>
+                    </a:lnR>
+                    <a:lnT w="9525" cap="flat" cmpd="sng" algn="ctr">
+                      <a:solidFill>
+                        <a:srgbClr val="B9B4A6"/>
+                      </a:solidFill>
+                      <a:prstDash val="solid"/>
+                      <a:round/>
+                      <a:headEnd type="none" w="med" len="med"/>
+                      <a:tailEnd type="none" w="med" len="med"/>
+                    </a:lnT>
+                    <a:lnB w="9525" cap="flat" cmpd="sng" algn="ctr">
+                      <a:solidFill>
+                        <a:srgbClr val="B9B4A6"/>
+                      </a:solidFill>
+                      <a:prstDash val="solid"/>
+                      <a:round/>
+                      <a:headEnd type="none" w="med" len="med"/>
+                      <a:tailEnd type="none" w="med" len="med"/>
+                    </a:lnB>
+                  </a:tcPr>
+                </a:tc>
+                <a:tc>
+                  <a:txBody>
+                    <a:bodyPr/>
+                    <a:lstStyle/>
+                    <a:p>
+                      <a:pPr algn="ctr" indent="0" marL="0">
+                        <a:buNone/>
+                      </a:pPr>
+                      <a:r>
+                        <a:rPr lang="en-US" sz="850" dirty="0">
+                          <a:solidFill>
+                            <a:srgbClr val="1B211D"/>
+                          </a:solidFill>
+                        </a:rPr>
+                        <a:t>40.2</a:t>
+                      </a:r>
+                      <a:endParaRPr lang="en-US" sz="850" dirty="0"/>
+                    </a:p>
+                  </a:txBody>
+                  <a:tcPr marL="27432" marR="27432" marT="27432" marB="27432" anchor="ctr">
+                    <a:lnL w="9525" cap="flat" cmpd="sng" algn="ctr">
+                      <a:solidFill>
+                        <a:srgbClr val="B9B4A6"/>
+                      </a:solidFill>
+                      <a:prstDash val="solid"/>
+                      <a:round/>
+                      <a:headEnd type="none" w="med" len="med"/>
+                      <a:tailEnd type="none" w="med" len="med"/>
+                    </a:lnL>
+                    <a:lnR w="9525" cap="flat" cmpd="sng" algn="ctr">
+                      <a:solidFill>
+                        <a:srgbClr val="B9B4A6"/>
+                      </a:solidFill>
+                      <a:prstDash val="solid"/>
+                      <a:round/>
+                      <a:headEnd type="none" w="med" len="med"/>
+                      <a:tailEnd type="none" w="med" len="med"/>
+                    </a:lnR>
+                    <a:lnT w="9525" cap="flat" cmpd="sng" algn="ctr">
+                      <a:solidFill>
+                        <a:srgbClr val="B9B4A6"/>
+                      </a:solidFill>
+                      <a:prstDash val="solid"/>
+                      <a:round/>
+                      <a:headEnd type="none" w="med" len="med"/>
+                      <a:tailEnd type="none" w="med" len="med"/>
+                    </a:lnT>
+                    <a:lnB w="9525" cap="flat" cmpd="sng" algn="ctr">
+                      <a:solidFill>
+                        <a:srgbClr val="B9B4A6"/>
+                      </a:solidFill>
+                      <a:prstDash val="solid"/>
+                      <a:round/>
+                      <a:headEnd type="none" w="med" len="med"/>
+                      <a:tailEnd type="none" w="med" len="med"/>
+                    </a:lnB>
+                  </a:tcPr>
+                </a:tc>
+                <a:tc>
+                  <a:txBody>
+                    <a:bodyPr/>
+                    <a:lstStyle/>
+                    <a:p>
+                      <a:pPr algn="ctr" indent="0" marL="0">
+                        <a:buNone/>
+                      </a:pPr>
+                      <a:r>
+                        <a:rPr lang="en-US" sz="850" dirty="0">
+                          <a:solidFill>
+                            <a:srgbClr val="1B211D"/>
+                          </a:solidFill>
+                        </a:rPr>
+                        <a:t>41.9</a:t>
+                      </a:r>
+                      <a:endParaRPr lang="en-US" sz="850" dirty="0"/>
+                    </a:p>
+                  </a:txBody>
+                  <a:tcPr marL="27432" marR="27432" marT="27432" marB="27432" anchor="ctr">
+                    <a:lnL w="9525" cap="flat" cmpd="sng" algn="ctr">
+                      <a:solidFill>
+                        <a:srgbClr val="B9B4A6"/>
+                      </a:solidFill>
+                      <a:prstDash val="solid"/>
+                      <a:round/>
+                      <a:headEnd type="none" w="med" len="med"/>
+                      <a:tailEnd type="none" w="med" len="med"/>
+                    </a:lnL>
+                    <a:lnR w="9525" cap="flat" cmpd="sng" algn="ctr">
+                      <a:solidFill>
+                        <a:srgbClr val="B9B4A6"/>
+                      </a:solidFill>
+                      <a:prstDash val="solid"/>
+                      <a:round/>
+                      <a:headEnd type="none" w="med" len="med"/>
+                      <a:tailEnd type="none" w="med" len="med"/>
+                    </a:lnR>
+                    <a:lnT w="9525" cap="flat" cmpd="sng" algn="ctr">
+                      <a:solidFill>
+                        <a:srgbClr val="B9B4A6"/>
+                      </a:solidFill>
+                      <a:prstDash val="solid"/>
+                      <a:round/>
+                      <a:headEnd type="none" w="med" len="med"/>
+                      <a:tailEnd type="none" w="med" len="med"/>
+                    </a:lnT>
+                    <a:lnB w="9525" cap="flat" cmpd="sng" algn="ctr">
+                      <a:solidFill>
+                        <a:srgbClr val="B9B4A6"/>
+                      </a:solidFill>
+                      <a:prstDash val="solid"/>
+                      <a:round/>
+                      <a:headEnd type="none" w="med" len="med"/>
+                      <a:tailEnd type="none" w="med" len="med"/>
+                    </a:lnB>
+                  </a:tcPr>
+                </a:tc>
+              </a:tr>
+              <a:tr h="237744">
+                <a:tc>
+                  <a:txBody>
+                    <a:bodyPr/>
+                    <a:lstStyle/>
+                    <a:p>
+                      <a:pPr algn="ctr" indent="0" marL="0">
+                        <a:buNone/>
+                      </a:pPr>
+                      <a:r>
+                        <a:rPr lang="en-US" sz="850" dirty="0">
+                          <a:solidFill>
+                            <a:srgbClr val="1B211D"/>
+                          </a:solidFill>
+                        </a:rPr>
+                        <a:t>여학생</a:t>
+                      </a:r>
+                      <a:endParaRPr lang="en-US" sz="850" dirty="0"/>
+                    </a:p>
+                  </a:txBody>
+                  <a:tcPr marL="27432" marR="27432" marT="27432" marB="27432" anchor="ctr">
+                    <a:lnL w="9525" cap="flat" cmpd="sng" algn="ctr">
+                      <a:solidFill>
+                        <a:srgbClr val="B9B4A6"/>
+                      </a:solidFill>
+                      <a:prstDash val="solid"/>
+                      <a:round/>
+                      <a:headEnd type="none" w="med" len="med"/>
+                      <a:tailEnd type="none" w="med" len="med"/>
+                    </a:lnL>
+                    <a:lnR w="9525" cap="flat" cmpd="sng" algn="ctr">
+                      <a:solidFill>
+                        <a:srgbClr val="B9B4A6"/>
+                      </a:solidFill>
+                      <a:prstDash val="solid"/>
+                      <a:round/>
+                      <a:headEnd type="none" w="med" len="med"/>
+                      <a:tailEnd type="none" w="med" len="med"/>
+                    </a:lnR>
+                    <a:lnT w="9525" cap="flat" cmpd="sng" algn="ctr">
+                      <a:solidFill>
+                        <a:srgbClr val="B9B4A6"/>
+                      </a:solidFill>
+                      <a:prstDash val="solid"/>
+                      <a:round/>
+                      <a:headEnd type="none" w="med" len="med"/>
+                      <a:tailEnd type="none" w="med" len="med"/>
+                    </a:lnT>
+                    <a:lnB w="9525" cap="flat" cmpd="sng" algn="ctr">
+                      <a:solidFill>
+                        <a:srgbClr val="B9B4A6"/>
+                      </a:solidFill>
+                      <a:prstDash val="solid"/>
+                      <a:round/>
+                      <a:headEnd type="none" w="med" len="med"/>
+                      <a:tailEnd type="none" w="med" len="med"/>
+                    </a:lnB>
+                  </a:tcPr>
+                </a:tc>
+                <a:tc>
+                  <a:txBody>
+                    <a:bodyPr/>
+                    <a:lstStyle/>
+                    <a:p>
+                      <a:pPr algn="ctr" indent="0" marL="0">
+                        <a:buNone/>
+                      </a:pPr>
+                      <a:r>
+                        <a:rPr lang="en-US" sz="850" dirty="0">
+                          <a:solidFill>
+                            <a:srgbClr val="1B211D"/>
+                          </a:solidFill>
+                        </a:rPr>
+                        <a:t>39.1</a:t>
+                      </a:r>
+                      <a:endParaRPr lang="en-US" sz="850" dirty="0"/>
+                    </a:p>
+                  </a:txBody>
+                  <a:tcPr marL="27432" marR="27432" marT="27432" marB="27432" anchor="ctr">
+                    <a:lnL w="9525" cap="flat" cmpd="sng" algn="ctr">
+                      <a:solidFill>
+                        <a:srgbClr val="B9B4A6"/>
+                      </a:solidFill>
+                      <a:prstDash val="solid"/>
+                      <a:round/>
+                      <a:headEnd type="none" w="med" len="med"/>
+                      <a:tailEnd type="none" w="med" len="med"/>
+                    </a:lnL>
+                    <a:lnR w="9525" cap="flat" cmpd="sng" algn="ctr">
+                      <a:solidFill>
+                        <a:srgbClr val="B9B4A6"/>
+                      </a:solidFill>
+                      <a:prstDash val="solid"/>
+                      <a:round/>
+                      <a:headEnd type="none" w="med" len="med"/>
+                      <a:tailEnd type="none" w="med" len="med"/>
+                    </a:lnR>
+                    <a:lnT w="9525" cap="flat" cmpd="sng" algn="ctr">
+                      <a:solidFill>
+                        <a:srgbClr val="B9B4A6"/>
+                      </a:solidFill>
+                      <a:prstDash val="solid"/>
+                      <a:round/>
+                      <a:headEnd type="none" w="med" len="med"/>
+                      <a:tailEnd type="none" w="med" len="med"/>
+                    </a:lnT>
+                    <a:lnB w="9525" cap="flat" cmpd="sng" algn="ctr">
+                      <a:solidFill>
+                        <a:srgbClr val="B9B4A6"/>
+                      </a:solidFill>
+                      <a:prstDash val="solid"/>
+                      <a:round/>
+                      <a:headEnd type="none" w="med" len="med"/>
+                      <a:tailEnd type="none" w="med" len="med"/>
+                    </a:lnB>
+                  </a:tcPr>
+                </a:tc>
+                <a:tc>
+                  <a:txBody>
+                    <a:bodyPr/>
+                    <a:lstStyle/>
+                    <a:p>
+                      <a:pPr algn="ctr" indent="0" marL="0">
+                        <a:buNone/>
+                      </a:pPr>
+                      <a:r>
+                        <a:rPr lang="en-US" sz="850" dirty="0">
+                          <a:solidFill>
+                            <a:srgbClr val="1B211D"/>
+                          </a:solidFill>
+                        </a:rPr>
+                        <a:t>40.7</a:t>
+                      </a:r>
+                      <a:endParaRPr lang="en-US" sz="850" dirty="0"/>
+                    </a:p>
+                  </a:txBody>
+                  <a:tcPr marL="27432" marR="27432" marT="27432" marB="27432" anchor="ctr">
+                    <a:lnL w="9525" cap="flat" cmpd="sng" algn="ctr">
+                      <a:solidFill>
+                        <a:srgbClr val="B9B4A6"/>
+                      </a:solidFill>
+                      <a:prstDash val="solid"/>
+                      <a:round/>
+                      <a:headEnd type="none" w="med" len="med"/>
+                      <a:tailEnd type="none" w="med" len="med"/>
+                    </a:lnL>
+                    <a:lnR w="9525" cap="flat" cmpd="sng" algn="ctr">
+                      <a:solidFill>
+                        <a:srgbClr val="B9B4A6"/>
+                      </a:solidFill>
+                      <a:prstDash val="solid"/>
+                      <a:round/>
+                      <a:headEnd type="none" w="med" len="med"/>
+                      <a:tailEnd type="none" w="med" len="med"/>
+                    </a:lnR>
+                    <a:lnT w="9525" cap="flat" cmpd="sng" algn="ctr">
+                      <a:solidFill>
+                        <a:srgbClr val="B9B4A6"/>
+                      </a:solidFill>
+                      <a:prstDash val="solid"/>
+                      <a:round/>
+                      <a:headEnd type="none" w="med" len="med"/>
+                      <a:tailEnd type="none" w="med" len="med"/>
+                    </a:lnT>
+                    <a:lnB w="9525" cap="flat" cmpd="sng" algn="ctr">
+                      <a:solidFill>
+                        <a:srgbClr val="B9B4A6"/>
+                      </a:solidFill>
+                      <a:prstDash val="solid"/>
+                      <a:round/>
+                      <a:headEnd type="none" w="med" len="med"/>
+                      <a:tailEnd type="none" w="med" len="med"/>
+                    </a:lnB>
+                  </a:tcPr>
+                </a:tc>
+                <a:tc>
+                  <a:txBody>
+                    <a:bodyPr/>
+                    <a:lstStyle/>
+                    <a:p>
+                      <a:pPr algn="ctr" indent="0" marL="0">
+                        <a:buNone/>
+                      </a:pPr>
+                      <a:r>
+                        <a:rPr lang="en-US" sz="850" dirty="0">
+                          <a:solidFill>
+                            <a:srgbClr val="1B211D"/>
+                          </a:solidFill>
+                        </a:rPr>
+                        <a:t>42.6</a:t>
+                      </a:r>
+                      <a:endParaRPr lang="en-US" sz="850" dirty="0"/>
+                    </a:p>
+                  </a:txBody>
+                  <a:tcPr marL="27432" marR="27432" marT="27432" marB="27432" anchor="ctr">
+                    <a:lnL w="9525" cap="flat" cmpd="sng" algn="ctr">
+                      <a:solidFill>
+                        <a:srgbClr val="B9B4A6"/>
+                      </a:solidFill>
+                      <a:prstDash val="solid"/>
+                      <a:round/>
+                      <a:headEnd type="none" w="med" len="med"/>
+                      <a:tailEnd type="none" w="med" len="med"/>
+                    </a:lnL>
+                    <a:lnR w="9525" cap="flat" cmpd="sng" algn="ctr">
+                      <a:solidFill>
+                        <a:srgbClr val="B9B4A6"/>
+                      </a:solidFill>
+                      <a:prstDash val="solid"/>
+                      <a:round/>
+                      <a:headEnd type="none" w="med" len="med"/>
+                      <a:tailEnd type="none" w="med" len="med"/>
+                    </a:lnR>
+                    <a:lnT w="9525" cap="flat" cmpd="sng" algn="ctr">
+                      <a:solidFill>
+                        <a:srgbClr val="B9B4A6"/>
+                      </a:solidFill>
+                      <a:prstDash val="solid"/>
+                      <a:round/>
+                      <a:headEnd type="none" w="med" len="med"/>
+                      <a:tailEnd type="none" w="med" len="med"/>
+                    </a:lnT>
+                    <a:lnB w="9525" cap="flat" cmpd="sng" algn="ctr">
+                      <a:solidFill>
+                        <a:srgbClr val="B9B4A6"/>
+                      </a:solidFill>
+                      <a:prstDash val="solid"/>
+                      <a:round/>
+                      <a:headEnd type="none" w="med" len="med"/>
+                      <a:tailEnd type="none" w="med" len="med"/>
+                    </a:lnB>
+                  </a:tcPr>
+                </a:tc>
+                <a:tc>
+                  <a:txBody>
+                    <a:bodyPr/>
+                    <a:lstStyle/>
+                    <a:p>
+                      <a:pPr algn="ctr" indent="0" marL="0">
+                        <a:buNone/>
+                      </a:pPr>
+                      <a:r>
+                        <a:rPr lang="en-US" sz="850" dirty="0">
+                          <a:solidFill>
+                            <a:srgbClr val="1B211D"/>
+                          </a:solidFill>
+                        </a:rPr>
+                        <a:t>44.7</a:t>
+                      </a:r>
+                      <a:endParaRPr lang="en-US" sz="850" dirty="0"/>
+                    </a:p>
+                  </a:txBody>
+                  <a:tcPr marL="27432" marR="27432" marT="27432" marB="27432" anchor="ctr">
+                    <a:lnL w="9525" cap="flat" cmpd="sng" algn="ctr">
+                      <a:solidFill>
+                        <a:srgbClr val="B9B4A6"/>
+                      </a:solidFill>
+                      <a:prstDash val="solid"/>
+                      <a:round/>
+                      <a:headEnd type="none" w="med" len="med"/>
+                      <a:tailEnd type="none" w="med" len="med"/>
+                    </a:lnL>
+                    <a:lnR w="9525" cap="flat" cmpd="sng" algn="ctr">
+                      <a:solidFill>
+                        <a:srgbClr val="B9B4A6"/>
+                      </a:solidFill>
+                      <a:prstDash val="solid"/>
+                      <a:round/>
+                      <a:headEnd type="none" w="med" len="med"/>
+                      <a:tailEnd type="none" w="med" len="med"/>
+                    </a:lnR>
+                    <a:lnT w="9525" cap="flat" cmpd="sng" algn="ctr">
+                      <a:solidFill>
+                        <a:srgbClr val="B9B4A6"/>
+                      </a:solidFill>
+                      <a:prstDash val="solid"/>
+                      <a:round/>
+                      <a:headEnd type="none" w="med" len="med"/>
+                      <a:tailEnd type="none" w="med" len="med"/>
+                    </a:lnT>
+                    <a:lnB w="9525" cap="flat" cmpd="sng" algn="ctr">
+                      <a:solidFill>
+                        <a:srgbClr val="B9B4A6"/>
+                      </a:solidFill>
+                      <a:prstDash val="solid"/>
+                      <a:round/>
+                      <a:headEnd type="none" w="med" len="med"/>
+                      <a:tailEnd type="none" w="med" len="med"/>
+                    </a:lnB>
+                  </a:tcPr>
+                </a:tc>
+                <a:tc>
+                  <a:txBody>
+                    <a:bodyPr/>
+                    <a:lstStyle/>
+                    <a:p>
+                      <a:pPr algn="ctr" indent="0" marL="0">
+                        <a:buNone/>
+                      </a:pPr>
+                      <a:r>
+                        <a:rPr lang="en-US" sz="850" dirty="0">
+                          <a:solidFill>
+                            <a:srgbClr val="1B211D"/>
+                          </a:solidFill>
+                        </a:rPr>
+                        <a:t>45.3</a:t>
+                      </a:r>
+                      <a:endParaRPr lang="en-US" sz="850" dirty="0"/>
+                    </a:p>
+                  </a:txBody>
+                  <a:tcPr marL="27432" marR="27432" marT="27432" marB="27432" anchor="ctr">
+                    <a:lnL w="9525" cap="flat" cmpd="sng" algn="ctr">
+                      <a:solidFill>
+                        <a:srgbClr val="B9B4A6"/>
+                      </a:solidFill>
+                      <a:prstDash val="solid"/>
+                      <a:round/>
+                      <a:headEnd type="none" w="med" len="med"/>
+                      <a:tailEnd type="none" w="med" len="med"/>
+                    </a:lnL>
+                    <a:lnR w="9525" cap="flat" cmpd="sng" algn="ctr">
+                      <a:solidFill>
+                        <a:srgbClr val="B9B4A6"/>
+                      </a:solidFill>
+                      <a:prstDash val="solid"/>
+                      <a:round/>
+                      <a:headEnd type="none" w="med" len="med"/>
+                      <a:tailEnd type="none" w="med" len="med"/>
+                    </a:lnR>
+                    <a:lnT w="9525" cap="flat" cmpd="sng" algn="ctr">
+                      <a:solidFill>
+                        <a:srgbClr val="B9B4A6"/>
+                      </a:solidFill>
+                      <a:prstDash val="solid"/>
+                      <a:round/>
+                      <a:headEnd type="none" w="med" len="med"/>
+                      <a:tailEnd type="none" w="med" len="med"/>
+                    </a:lnT>
+                    <a:lnB w="9525" cap="flat" cmpd="sng" algn="ctr">
+                      <a:solidFill>
+                        <a:srgbClr val="B9B4A6"/>
+                      </a:solidFill>
+                      <a:prstDash val="solid"/>
+                      <a:round/>
+                      <a:headEnd type="none" w="med" len="med"/>
+                      <a:tailEnd type="none" w="med" len="med"/>
+                    </a:lnB>
+                  </a:tcPr>
+                </a:tc>
+              </a:tr>
+              <a:tr h="237744">
+                <a:tc>
+                  <a:txBody>
+                    <a:bodyPr/>
+                    <a:lstStyle/>
+                    <a:p>
+                      <a:pPr algn="ctr" indent="0" marL="0">
+                        <a:buNone/>
+                      </a:pPr>
+                      <a:r>
+                        <a:rPr lang="en-US" sz="850" dirty="0">
+                          <a:solidFill>
+                            <a:srgbClr val="1B211D"/>
+                          </a:solidFill>
+                        </a:rPr>
+                        <a:t>중학교</a:t>
+                      </a:r>
+                      <a:endParaRPr lang="en-US" sz="850" dirty="0"/>
+                    </a:p>
+                  </a:txBody>
+                  <a:tcPr marL="27432" marR="27432" marT="27432" marB="27432" anchor="ctr">
+                    <a:lnL w="9525" cap="flat" cmpd="sng" algn="ctr">
+                      <a:solidFill>
+                        <a:srgbClr val="B9B4A6"/>
+                      </a:solidFill>
+                      <a:prstDash val="solid"/>
+                      <a:round/>
+                      <a:headEnd type="none" w="med" len="med"/>
+                      <a:tailEnd type="none" w="med" len="med"/>
+                    </a:lnL>
+                    <a:lnR w="9525" cap="flat" cmpd="sng" algn="ctr">
+                      <a:solidFill>
+                        <a:srgbClr val="B9B4A6"/>
+                      </a:solidFill>
+                      <a:prstDash val="solid"/>
+                      <a:round/>
+                      <a:headEnd type="none" w="med" len="med"/>
+                      <a:tailEnd type="none" w="med" len="med"/>
+                    </a:lnR>
+                    <a:lnT w="9525" cap="flat" cmpd="sng" algn="ctr">
+                      <a:solidFill>
+                        <a:srgbClr val="B9B4A6"/>
+                      </a:solidFill>
+                      <a:prstDash val="solid"/>
+                      <a:round/>
+                      <a:headEnd type="none" w="med" len="med"/>
+                      <a:tailEnd type="none" w="med" len="med"/>
+                    </a:lnT>
+                    <a:lnB w="9525" cap="flat" cmpd="sng" algn="ctr">
+                      <a:solidFill>
+                        <a:srgbClr val="B9B4A6"/>
+                      </a:solidFill>
+                      <a:prstDash val="solid"/>
+                      <a:round/>
+                      <a:headEnd type="none" w="med" len="med"/>
+                      <a:tailEnd type="none" w="med" len="med"/>
+                    </a:lnB>
+                  </a:tcPr>
+                </a:tc>
+                <a:tc>
+                  <a:txBody>
+                    <a:bodyPr/>
+                    <a:lstStyle/>
+                    <a:p>
+                      <a:pPr algn="ctr" indent="0" marL="0">
+                        <a:buNone/>
+                      </a:pPr>
+                      <a:r>
+                        <a:rPr lang="en-US" sz="850" dirty="0">
+                          <a:solidFill>
+                            <a:srgbClr val="1B211D"/>
+                          </a:solidFill>
+                        </a:rPr>
+                        <a:t>…</a:t>
+                      </a:r>
+                      <a:endParaRPr lang="en-US" sz="850" dirty="0"/>
+                    </a:p>
+                  </a:txBody>
+                  <a:tcPr marL="27432" marR="27432" marT="27432" marB="27432" anchor="ctr">
+                    <a:lnL w="9525" cap="flat" cmpd="sng" algn="ctr">
+                      <a:solidFill>
+                        <a:srgbClr val="B9B4A6"/>
+                      </a:solidFill>
+                      <a:prstDash val="solid"/>
+                      <a:round/>
+                      <a:headEnd type="none" w="med" len="med"/>
+                      <a:tailEnd type="none" w="med" len="med"/>
+                    </a:lnL>
+                    <a:lnR w="9525" cap="flat" cmpd="sng" algn="ctr">
+                      <a:solidFill>
+                        <a:srgbClr val="B9B4A6"/>
+                      </a:solidFill>
+                      <a:prstDash val="solid"/>
+                      <a:round/>
+                      <a:headEnd type="none" w="med" len="med"/>
+                      <a:tailEnd type="none" w="med" len="med"/>
+                    </a:lnR>
+                    <a:lnT w="9525" cap="flat" cmpd="sng" algn="ctr">
+                      <a:solidFill>
+                        <a:srgbClr val="B9B4A6"/>
+                      </a:solidFill>
+                      <a:prstDash val="solid"/>
+                      <a:round/>
+                      <a:headEnd type="none" w="med" len="med"/>
+                      <a:tailEnd type="none" w="med" len="med"/>
+                    </a:lnT>
+                    <a:lnB w="9525" cap="flat" cmpd="sng" algn="ctr">
+                      <a:solidFill>
+                        <a:srgbClr val="B9B4A6"/>
+                      </a:solidFill>
+                      <a:prstDash val="solid"/>
+                      <a:round/>
+                      <a:headEnd type="none" w="med" len="med"/>
+                      <a:tailEnd type="none" w="med" len="med"/>
+                    </a:lnB>
+                  </a:tcPr>
+                </a:tc>
+                <a:tc>
+                  <a:txBody>
+                    <a:bodyPr/>
+                    <a:lstStyle/>
+                    <a:p>
+                      <a:pPr algn="ctr" indent="0" marL="0">
+                        <a:buNone/>
+                      </a:pPr>
+                      <a:r>
+                        <a:rPr lang="en-US" sz="850" dirty="0">
+                          <a:solidFill>
+                            <a:srgbClr val="1B211D"/>
+                          </a:solidFill>
+                        </a:rPr>
+                        <a:t>…</a:t>
+                      </a:r>
+                      <a:endParaRPr lang="en-US" sz="850" dirty="0"/>
+                    </a:p>
+                  </a:txBody>
+                  <a:tcPr marL="27432" marR="27432" marT="27432" marB="27432" anchor="ctr">
+                    <a:lnL w="9525" cap="flat" cmpd="sng" algn="ctr">
+                      <a:solidFill>
+                        <a:srgbClr val="B9B4A6"/>
+                      </a:solidFill>
+                      <a:prstDash val="solid"/>
+                      <a:round/>
+                      <a:headEnd type="none" w="med" len="med"/>
+                      <a:tailEnd type="none" w="med" len="med"/>
+                    </a:lnL>
+                    <a:lnR w="9525" cap="flat" cmpd="sng" algn="ctr">
+                      <a:solidFill>
+                        <a:srgbClr val="B9B4A6"/>
+                      </a:solidFill>
+                      <a:prstDash val="solid"/>
+                      <a:round/>
+                      <a:headEnd type="none" w="med" len="med"/>
+                      <a:tailEnd type="none" w="med" len="med"/>
+                    </a:lnR>
+                    <a:lnT w="9525" cap="flat" cmpd="sng" algn="ctr">
+                      <a:solidFill>
+                        <a:srgbClr val="B9B4A6"/>
+                      </a:solidFill>
+                      <a:prstDash val="solid"/>
+                      <a:round/>
+                      <a:headEnd type="none" w="med" len="med"/>
+                      <a:tailEnd type="none" w="med" len="med"/>
+                    </a:lnT>
+                    <a:lnB w="9525" cap="flat" cmpd="sng" algn="ctr">
+                      <a:solidFill>
+                        <a:srgbClr val="B9B4A6"/>
+                      </a:solidFill>
+                      <a:prstDash val="solid"/>
+                      <a:round/>
+                      <a:headEnd type="none" w="med" len="med"/>
+                      <a:tailEnd type="none" w="med" len="med"/>
+                    </a:lnB>
+                  </a:tcPr>
+                </a:tc>
+                <a:tc>
+                  <a:txBody>
+                    <a:bodyPr/>
+                    <a:lstStyle/>
+                    <a:p>
+                      <a:pPr algn="ctr" indent="0" marL="0">
+                        <a:buNone/>
+                      </a:pPr>
+                      <a:r>
+                        <a:rPr lang="en-US" sz="850" dirty="0">
+                          <a:solidFill>
+                            <a:srgbClr val="1B211D"/>
+                          </a:solidFill>
+                        </a:rPr>
+                        <a:t>…</a:t>
+                      </a:r>
+                      <a:endParaRPr lang="en-US" sz="850" dirty="0"/>
+                    </a:p>
+                  </a:txBody>
+                  <a:tcPr marL="27432" marR="27432" marT="27432" marB="27432" anchor="ctr">
+                    <a:lnL w="9525" cap="flat" cmpd="sng" algn="ctr">
+                      <a:solidFill>
+                        <a:srgbClr val="B9B4A6"/>
+                      </a:solidFill>
+                      <a:prstDash val="solid"/>
+                      <a:round/>
+                      <a:headEnd type="none" w="med" len="med"/>
+                      <a:tailEnd type="none" w="med" len="med"/>
+                    </a:lnL>
+                    <a:lnR w="9525" cap="flat" cmpd="sng" algn="ctr">
+                      <a:solidFill>
+                        <a:srgbClr val="B9B4A6"/>
+                      </a:solidFill>
+                      <a:prstDash val="solid"/>
+                      <a:round/>
+                      <a:headEnd type="none" w="med" len="med"/>
+                      <a:tailEnd type="none" w="med" len="med"/>
+                    </a:lnR>
+                    <a:lnT w="9525" cap="flat" cmpd="sng" algn="ctr">
+                      <a:solidFill>
+                        <a:srgbClr val="B9B4A6"/>
+                      </a:solidFill>
+                      <a:prstDash val="solid"/>
+                      <a:round/>
+                      <a:headEnd type="none" w="med" len="med"/>
+                      <a:tailEnd type="none" w="med" len="med"/>
+                    </a:lnT>
+                    <a:lnB w="9525" cap="flat" cmpd="sng" algn="ctr">
+                      <a:solidFill>
+                        <a:srgbClr val="B9B4A6"/>
+                      </a:solidFill>
+                      <a:prstDash val="solid"/>
+                      <a:round/>
+                      <a:headEnd type="none" w="med" len="med"/>
+                      <a:tailEnd type="none" w="med" len="med"/>
+                    </a:lnB>
+                  </a:tcPr>
+                </a:tc>
+                <a:tc>
+                  <a:txBody>
+                    <a:bodyPr/>
+                    <a:lstStyle/>
+                    <a:p>
+                      <a:pPr algn="ctr" indent="0" marL="0">
+                        <a:buNone/>
+                      </a:pPr>
+                      <a:r>
+                        <a:rPr lang="en-US" sz="850" dirty="0">
+                          <a:solidFill>
+                            <a:srgbClr val="1B211D"/>
+                          </a:solidFill>
+                        </a:rPr>
+                        <a:t>…</a:t>
+                      </a:r>
+                      <a:endParaRPr lang="en-US" sz="850" dirty="0"/>
+                    </a:p>
+                  </a:txBody>
+                  <a:tcPr marL="27432" marR="27432" marT="27432" marB="27432" anchor="ctr">
+                    <a:lnL w="9525" cap="flat" cmpd="sng" algn="ctr">
+                      <a:solidFill>
+                        <a:srgbClr val="B9B4A6"/>
+                      </a:solidFill>
+                      <a:prstDash val="solid"/>
+                      <a:round/>
+                      <a:headEnd type="none" w="med" len="med"/>
+                      <a:tailEnd type="none" w="med" len="med"/>
+                    </a:lnL>
+                    <a:lnR w="9525" cap="flat" cmpd="sng" algn="ctr">
+                      <a:solidFill>
+                        <a:srgbClr val="B9B4A6"/>
+                      </a:solidFill>
+                      <a:prstDash val="solid"/>
+                      <a:round/>
+                      <a:headEnd type="none" w="med" len="med"/>
+                      <a:tailEnd type="none" w="med" len="med"/>
+                    </a:lnR>
+                    <a:lnT w="9525" cap="flat" cmpd="sng" algn="ctr">
+                      <a:solidFill>
+                        <a:srgbClr val="B9B4A6"/>
+                      </a:solidFill>
+                      <a:prstDash val="solid"/>
+                      <a:round/>
+                      <a:headEnd type="none" w="med" len="med"/>
+                      <a:tailEnd type="none" w="med" len="med"/>
+                    </a:lnT>
+                    <a:lnB w="9525" cap="flat" cmpd="sng" algn="ctr">
+                      <a:solidFill>
+                        <a:srgbClr val="B9B4A6"/>
+                      </a:solidFill>
+                      <a:prstDash val="solid"/>
+                      <a:round/>
+                      <a:headEnd type="none" w="med" len="med"/>
+                      <a:tailEnd type="none" w="med" len="med"/>
+                    </a:lnB>
+                  </a:tcPr>
+                </a:tc>
+                <a:tc>
+                  <a:txBody>
+                    <a:bodyPr/>
+                    <a:lstStyle/>
+                    <a:p>
+                      <a:pPr algn="ctr" indent="0" marL="0">
+                        <a:buNone/>
+                      </a:pPr>
+                      <a:r>
+                        <a:rPr lang="en-US" sz="850" dirty="0">
+                          <a:solidFill>
+                            <a:srgbClr val="1B211D"/>
+                          </a:solidFill>
+                        </a:rPr>
+                        <a:t>…</a:t>
+                      </a:r>
+                      <a:endParaRPr lang="en-US" sz="850" dirty="0"/>
+                    </a:p>
+                  </a:txBody>
+                  <a:tcPr marL="27432" marR="27432" marT="27432" marB="27432" anchor="ctr">
+                    <a:lnL w="9525" cap="flat" cmpd="sng" algn="ctr">
+                      <a:solidFill>
+                        <a:srgbClr val="B9B4A6"/>
+                      </a:solidFill>
+                      <a:prstDash val="solid"/>
+                      <a:round/>
+                      <a:headEnd type="none" w="med" len="med"/>
+                      <a:tailEnd type="none" w="med" len="med"/>
+                    </a:lnL>
+                    <a:lnR w="9525" cap="flat" cmpd="sng" algn="ctr">
+                      <a:solidFill>
+                        <a:srgbClr val="B9B4A6"/>
+                      </a:solidFill>
+                      <a:prstDash val="solid"/>
+                      <a:round/>
+                      <a:headEnd type="none" w="med" len="med"/>
+                      <a:tailEnd type="none" w="med" len="med"/>
+                    </a:lnR>
+                    <a:lnT w="9525" cap="flat" cmpd="sng" algn="ctr">
+                      <a:solidFill>
+                        <a:srgbClr val="B9B4A6"/>
+                      </a:solidFill>
+                      <a:prstDash val="solid"/>
+                      <a:round/>
+                      <a:headEnd type="none" w="med" len="med"/>
+                      <a:tailEnd type="none" w="med" len="med"/>
+                    </a:lnT>
+                    <a:lnB w="9525" cap="flat" cmpd="sng" algn="ctr">
+                      <a:solidFill>
+                        <a:srgbClr val="B9B4A6"/>
+                      </a:solidFill>
+                      <a:prstDash val="solid"/>
+                      <a:round/>
+                      <a:headEnd type="none" w="med" len="med"/>
+                      <a:tailEnd type="none" w="med" len="med"/>
+                    </a:lnB>
+                  </a:tcPr>
+                </a:tc>
+              </a:tr>
+              <a:tr h="237744">
+                <a:tc>
+                  <a:txBody>
+                    <a:bodyPr/>
+                    <a:lstStyle/>
+                    <a:p>
+                      <a:pPr algn="ctr" indent="0" marL="0">
+                        <a:buNone/>
+                      </a:pPr>
+                      <a:r>
+                        <a:rPr lang="en-US" sz="850" dirty="0">
+                          <a:solidFill>
+                            <a:srgbClr val="1B211D"/>
+                          </a:solidFill>
+                        </a:rPr>
+                        <a:t>고등학교</a:t>
+                      </a:r>
+                      <a:endParaRPr lang="en-US" sz="850" dirty="0"/>
+                    </a:p>
+                  </a:txBody>
+                  <a:tcPr marL="27432" marR="27432" marT="27432" marB="27432" anchor="ctr">
+                    <a:lnL w="9525" cap="flat" cmpd="sng" algn="ctr">
+                      <a:solidFill>
+                        <a:srgbClr val="B9B4A6"/>
+                      </a:solidFill>
+                      <a:prstDash val="solid"/>
+                      <a:round/>
+                      <a:headEnd type="none" w="med" len="med"/>
+                      <a:tailEnd type="none" w="med" len="med"/>
+                    </a:lnL>
+                    <a:lnR w="9525" cap="flat" cmpd="sng" algn="ctr">
+                      <a:solidFill>
+                        <a:srgbClr val="B9B4A6"/>
+                      </a:solidFill>
+                      <a:prstDash val="solid"/>
+                      <a:round/>
+                      <a:headEnd type="none" w="med" len="med"/>
+                      <a:tailEnd type="none" w="med" len="med"/>
+                    </a:lnR>
+                    <a:lnT w="9525" cap="flat" cmpd="sng" algn="ctr">
+                      <a:solidFill>
+                        <a:srgbClr val="B9B4A6"/>
+                      </a:solidFill>
+                      <a:prstDash val="solid"/>
+                      <a:round/>
+                      <a:headEnd type="none" w="med" len="med"/>
+                      <a:tailEnd type="none" w="med" len="med"/>
+                    </a:lnT>
+                    <a:lnB w="9525" cap="flat" cmpd="sng" algn="ctr">
+                      <a:solidFill>
+                        <a:srgbClr val="B9B4A6"/>
+                      </a:solidFill>
+                      <a:prstDash val="solid"/>
+                      <a:round/>
+                      <a:headEnd type="none" w="med" len="med"/>
+                      <a:tailEnd type="none" w="med" len="med"/>
+                    </a:lnB>
+                  </a:tcPr>
+                </a:tc>
+                <a:tc>
+                  <a:txBody>
+                    <a:bodyPr/>
+                    <a:lstStyle/>
+                    <a:p>
+                      <a:pPr algn="ctr" indent="0" marL="0">
+                        <a:buNone/>
+                      </a:pPr>
+                      <a:r>
+                        <a:rPr lang="en-US" sz="850" dirty="0">
+                          <a:solidFill>
+                            <a:srgbClr val="1B211D"/>
+                          </a:solidFill>
+                        </a:rPr>
+                        <a:t>…</a:t>
+                      </a:r>
+                      <a:endParaRPr lang="en-US" sz="850" dirty="0"/>
+                    </a:p>
+                  </a:txBody>
+                  <a:tcPr marL="27432" marR="27432" marT="27432" marB="27432" anchor="ctr">
+                    <a:lnL w="9525" cap="flat" cmpd="sng" algn="ctr">
+                      <a:solidFill>
+                        <a:srgbClr val="B9B4A6"/>
+                      </a:solidFill>
+                      <a:prstDash val="solid"/>
+                      <a:round/>
+                      <a:headEnd type="none" w="med" len="med"/>
+                      <a:tailEnd type="none" w="med" len="med"/>
+                    </a:lnL>
+                    <a:lnR w="9525" cap="flat" cmpd="sng" algn="ctr">
+                      <a:solidFill>
+                        <a:srgbClr val="B9B4A6"/>
+                      </a:solidFill>
+                      <a:prstDash val="solid"/>
+                      <a:round/>
+                      <a:headEnd type="none" w="med" len="med"/>
+                      <a:tailEnd type="none" w="med" len="med"/>
+                    </a:lnR>
+                    <a:lnT w="9525" cap="flat" cmpd="sng" algn="ctr">
+                      <a:solidFill>
+                        <a:srgbClr val="B9B4A6"/>
+                      </a:solidFill>
+                      <a:prstDash val="solid"/>
+                      <a:round/>
+                      <a:headEnd type="none" w="med" len="med"/>
+                      <a:tailEnd type="none" w="med" len="med"/>
+                    </a:lnT>
+                    <a:lnB w="9525" cap="flat" cmpd="sng" algn="ctr">
+                      <a:solidFill>
+                        <a:srgbClr val="B9B4A6"/>
+                      </a:solidFill>
+                      <a:prstDash val="solid"/>
+                      <a:round/>
+                      <a:headEnd type="none" w="med" len="med"/>
+                      <a:tailEnd type="none" w="med" len="med"/>
+                    </a:lnB>
+                  </a:tcPr>
+                </a:tc>
+                <a:tc>
+                  <a:txBody>
+                    <a:bodyPr/>
+                    <a:lstStyle/>
+                    <a:p>
+                      <a:pPr algn="ctr" indent="0" marL="0">
+                        <a:buNone/>
+                      </a:pPr>
+                      <a:r>
+                        <a:rPr lang="en-US" sz="850" dirty="0">
+                          <a:solidFill>
+                            <a:srgbClr val="1B211D"/>
+                          </a:solidFill>
+                        </a:rPr>
+                        <a:t>…</a:t>
+                      </a:r>
+                      <a:endParaRPr lang="en-US" sz="850" dirty="0"/>
+                    </a:p>
+                  </a:txBody>
+                  <a:tcPr marL="27432" marR="27432" marT="27432" marB="27432" anchor="ctr">
+                    <a:lnL w="9525" cap="flat" cmpd="sng" algn="ctr">
+                      <a:solidFill>
+                        <a:srgbClr val="B9B4A6"/>
+                      </a:solidFill>
+                      <a:prstDash val="solid"/>
+                      <a:round/>
+                      <a:headEnd type="none" w="med" len="med"/>
+                      <a:tailEnd type="none" w="med" len="med"/>
+                    </a:lnL>
+                    <a:lnR w="9525" cap="flat" cmpd="sng" algn="ctr">
+                      <a:solidFill>
+                        <a:srgbClr val="B9B4A6"/>
+                      </a:solidFill>
+                      <a:prstDash val="solid"/>
+                      <a:round/>
+                      <a:headEnd type="none" w="med" len="med"/>
+                      <a:tailEnd type="none" w="med" len="med"/>
+                    </a:lnR>
+                    <a:lnT w="9525" cap="flat" cmpd="sng" algn="ctr">
+                      <a:solidFill>
+                        <a:srgbClr val="B9B4A6"/>
+                      </a:solidFill>
+                      <a:prstDash val="solid"/>
+                      <a:round/>
+                      <a:headEnd type="none" w="med" len="med"/>
+                      <a:tailEnd type="none" w="med" len="med"/>
+                    </a:lnT>
+                    <a:lnB w="9525" cap="flat" cmpd="sng" algn="ctr">
+                      <a:solidFill>
+                        <a:srgbClr val="B9B4A6"/>
+                      </a:solidFill>
+                      <a:prstDash val="solid"/>
+                      <a:round/>
+                      <a:headEnd type="none" w="med" len="med"/>
+                      <a:tailEnd type="none" w="med" len="med"/>
+                    </a:lnB>
+                  </a:tcPr>
+                </a:tc>
+                <a:tc>
+                  <a:txBody>
+                    <a:bodyPr/>
+                    <a:lstStyle/>
+                    <a:p>
+                      <a:pPr algn="ctr" indent="0" marL="0">
+                        <a:buNone/>
+                      </a:pPr>
+                      <a:r>
+                        <a:rPr lang="en-US" sz="850" dirty="0">
+                          <a:solidFill>
+                            <a:srgbClr val="1B211D"/>
+                          </a:solidFill>
+                        </a:rPr>
+                        <a:t>…</a:t>
+                      </a:r>
+                      <a:endParaRPr lang="en-US" sz="850" dirty="0"/>
+                    </a:p>
+                  </a:txBody>
+                  <a:tcPr marL="27432" marR="27432" marT="27432" marB="27432" anchor="ctr">
+                    <a:lnL w="9525" cap="flat" cmpd="sng" algn="ctr">
+                      <a:solidFill>
+                        <a:srgbClr val="B9B4A6"/>
+                      </a:solidFill>
+                      <a:prstDash val="solid"/>
+                      <a:round/>
+                      <a:headEnd type="none" w="med" len="med"/>
+                      <a:tailEnd type="none" w="med" len="med"/>
+                    </a:lnL>
+                    <a:lnR w="9525" cap="flat" cmpd="sng" algn="ctr">
+                      <a:solidFill>
+                        <a:srgbClr val="B9B4A6"/>
+                      </a:solidFill>
+                      <a:prstDash val="solid"/>
+                      <a:round/>
+                      <a:headEnd type="none" w="med" len="med"/>
+                      <a:tailEnd type="none" w="med" len="med"/>
+                    </a:lnR>
+                    <a:lnT w="9525" cap="flat" cmpd="sng" algn="ctr">
+                      <a:solidFill>
+                        <a:srgbClr val="B9B4A6"/>
+                      </a:solidFill>
+                      <a:prstDash val="solid"/>
+                      <a:round/>
+                      <a:headEnd type="none" w="med" len="med"/>
+                      <a:tailEnd type="none" w="med" len="med"/>
+                    </a:lnT>
+                    <a:lnB w="9525" cap="flat" cmpd="sng" algn="ctr">
+                      <a:solidFill>
+                        <a:srgbClr val="B9B4A6"/>
+                      </a:solidFill>
+                      <a:prstDash val="solid"/>
+                      <a:round/>
+                      <a:headEnd type="none" w="med" len="med"/>
+                      <a:tailEnd type="none" w="med" len="med"/>
+                    </a:lnB>
+                  </a:tcPr>
+                </a:tc>
+                <a:tc>
+                  <a:txBody>
+                    <a:bodyPr/>
+                    <a:lstStyle/>
+                    <a:p>
+                      <a:pPr algn="ctr" indent="0" marL="0">
+                        <a:buNone/>
+                      </a:pPr>
+                      <a:r>
+                        <a:rPr lang="en-US" sz="850" dirty="0">
+                          <a:solidFill>
+                            <a:srgbClr val="1B211D"/>
+                          </a:solidFill>
+                        </a:rPr>
+                        <a:t>…</a:t>
+                      </a:r>
+                      <a:endParaRPr lang="en-US" sz="850" dirty="0"/>
+                    </a:p>
+                  </a:txBody>
+                  <a:tcPr marL="27432" marR="27432" marT="27432" marB="27432" anchor="ctr">
+                    <a:lnL w="9525" cap="flat" cmpd="sng" algn="ctr">
+                      <a:solidFill>
+                        <a:srgbClr val="B9B4A6"/>
+                      </a:solidFill>
+                      <a:prstDash val="solid"/>
+                      <a:round/>
+                      <a:headEnd type="none" w="med" len="med"/>
+                      <a:tailEnd type="none" w="med" len="med"/>
+                    </a:lnL>
+                    <a:lnR w="9525" cap="flat" cmpd="sng" algn="ctr">
+                      <a:solidFill>
+                        <a:srgbClr val="B9B4A6"/>
+                      </a:solidFill>
+                      <a:prstDash val="solid"/>
+                      <a:round/>
+                      <a:headEnd type="none" w="med" len="med"/>
+                      <a:tailEnd type="none" w="med" len="med"/>
+                    </a:lnR>
+                    <a:lnT w="9525" cap="flat" cmpd="sng" algn="ctr">
+                      <a:solidFill>
+                        <a:srgbClr val="B9B4A6"/>
+                      </a:solidFill>
+                      <a:prstDash val="solid"/>
+                      <a:round/>
+                      <a:headEnd type="none" w="med" len="med"/>
+                      <a:tailEnd type="none" w="med" len="med"/>
+                    </a:lnT>
+                    <a:lnB w="9525" cap="flat" cmpd="sng" algn="ctr">
+                      <a:solidFill>
+                        <a:srgbClr val="B9B4A6"/>
+                      </a:solidFill>
+                      <a:prstDash val="solid"/>
+                      <a:round/>
+                      <a:headEnd type="none" w="med" len="med"/>
+                      <a:tailEnd type="none" w="med" len="med"/>
+                    </a:lnB>
+                  </a:tcPr>
+                </a:tc>
+                <a:tc>
+                  <a:txBody>
+                    <a:bodyPr/>
+                    <a:lstStyle/>
+                    <a:p>
+                      <a:pPr algn="ctr" indent="0" marL="0">
+                        <a:buNone/>
+                      </a:pPr>
+                      <a:r>
+                        <a:rPr lang="en-US" sz="850" dirty="0">
+                          <a:solidFill>
+                            <a:srgbClr val="1B211D"/>
+                          </a:solidFill>
+                        </a:rPr>
+                        <a:t>…</a:t>
+                      </a:r>
+                      <a:endParaRPr lang="en-US" sz="850" dirty="0"/>
+                    </a:p>
+                  </a:txBody>
+                  <a:tcPr marL="27432" marR="27432" marT="27432" marB="27432" anchor="ctr">
+                    <a:lnL w="9525" cap="flat" cmpd="sng" algn="ctr">
+                      <a:solidFill>
+                        <a:srgbClr val="B9B4A6"/>
+                      </a:solidFill>
+                      <a:prstDash val="solid"/>
+                      <a:round/>
+                      <a:headEnd type="none" w="med" len="med"/>
+                      <a:tailEnd type="none" w="med" len="med"/>
+                    </a:lnL>
+                    <a:lnR w="9525" cap="flat" cmpd="sng" algn="ctr">
+                      <a:solidFill>
+                        <a:srgbClr val="B9B4A6"/>
+                      </a:solidFill>
+                      <a:prstDash val="solid"/>
+                      <a:round/>
+                      <a:headEnd type="none" w="med" len="med"/>
+                      <a:tailEnd type="none" w="med" len="med"/>
+                    </a:lnR>
+                    <a:lnT w="9525" cap="flat" cmpd="sng" algn="ctr">
+                      <a:solidFill>
+                        <a:srgbClr val="B9B4A6"/>
+                      </a:solidFill>
+                      <a:prstDash val="solid"/>
+                      <a:round/>
+                      <a:headEnd type="none" w="med" len="med"/>
+                      <a:tailEnd type="none" w="med" len="med"/>
+                    </a:lnT>
+                    <a:lnB w="9525" cap="flat" cmpd="sng" algn="ctr">
+                      <a:solidFill>
+                        <a:srgbClr val="B9B4A6"/>
+                      </a:solidFill>
+                      <a:prstDash val="solid"/>
+                      <a:round/>
+                      <a:headEnd type="none" w="med" len="med"/>
+                      <a:tailEnd type="none" w="med" len="med"/>
+                    </a:lnB>
+                  </a:tcPr>
+                </a:tc>
+              </a:tr>
+            </a:tbl>
+          </a:graphicData>
+        </a:graphic>
+      </p:graphicFrame>
+      <p:sp>
+        <p:nvSpPr>
+          <p:cNvPr id="9" name="원자료 안내"/>
+          <p:cNvSpPr txBox="1"/>
+          <p:nvPr/>
+        </p:nvSpPr>
+        <p:spPr>
+          <a:xfrm>
+            <a:off x="457200" y="3648456"/>
+            <a:ext cx="4114800" cy="457200"/>
+          </a:xfrm>
+          <a:prstGeom prst="rect">
+            <a:avLst/>
+          </a:prstGeom>
+          <a:noFill/>
+          <a:ln/>
+        </p:spPr>
+        <p:txBody>
+          <a:bodyPr wrap="square" lIns="0" tIns="0" rIns="0" bIns="0" rtlCol="0" anchor="ctr"/>
+          <a:lstStyle/>
+          <a:p>
+            <a:pPr indent="0" marL="0">
+              <a:buNone/>
+            </a:pPr>
+            <a:r>
+              <a:rPr lang="en-US" sz="900" dirty="0">
+                <a:solidFill>
+                  <a:schemeClr val="accent3"/>
+                </a:solidFill>
+              </a:rPr>
+              <a:t>'아침식사 결식률(주 5일 이상)' 표. 2005년부터 연도별로 전체·성별·학교급·학년·시도 행이 있다(학년·시도 행 생략). …은 옮기지 않은 칸</a:t>
+            </a:r>
+            <a:endParaRPr lang="en-US" sz="900" dirty="0"/>
+          </a:p>
+        </p:txBody>
+      </p:sp>
+      <p:sp>
+        <p:nvSpPr>
+          <p:cNvPr id="10" name="화살표"/>
+          <p:cNvSpPr txBox="1"/>
+          <p:nvPr/>
+        </p:nvSpPr>
+        <p:spPr>
+          <a:xfrm>
+            <a:off x="4572000" y="2651760"/>
+            <a:ext cx="457200" cy="457200"/>
+          </a:xfrm>
+          <a:prstGeom prst="rect">
+            <a:avLst/>
+          </a:prstGeom>
+          <a:noFill/>
+          <a:ln/>
+        </p:spPr>
+        <p:txBody>
+          <a:bodyPr wrap="square" lIns="0" tIns="0" rIns="0" bIns="0" rtlCol="0" anchor="t">
+            <a:normAutofit/>
+          </a:bodyPr>
+          <a:lstStyle/>
+          <a:p>
+            <a:pPr algn="ctr" indent="0" marL="0">
+              <a:buNone/>
+            </a:pPr>
+            <a:r>
+              <a:rPr lang="en-US" sz="2000" dirty="0">
+                <a:solidFill>
+                  <a:schemeClr val="accent1"/>
+                </a:solidFill>
+              </a:rPr>
+              <a:t>→</a:t>
+            </a:r>
+            <a:endParaRPr lang="en-US" sz="2000" dirty="0"/>
+          </a:p>
+        </p:txBody>
+      </p:sp>
+      <p:sp>
+        <p:nvSpPr>
+          <p:cNvPr id="11" name="가공표 라벨"/>
+          <p:cNvSpPr txBox="1"/>
+          <p:nvPr/>
+        </p:nvSpPr>
+        <p:spPr>
+          <a:xfrm>
+            <a:off x="5029200" y="1901952"/>
+            <a:ext cx="3657600" cy="274320"/>
+          </a:xfrm>
+          <a:prstGeom prst="rect">
+            <a:avLst/>
+          </a:prstGeom>
+          <a:noFill/>
+          <a:ln/>
+        </p:spPr>
+        <p:txBody>
+          <a:bodyPr wrap="square" lIns="0" tIns="0" rIns="0" bIns="0" rtlCol="0" anchor="ctr"/>
+          <a:lstStyle/>
+          <a:p>
+            <a:pPr indent="0" marL="0">
+              <a:buNone/>
+            </a:pPr>
+            <a:r>
+              <a:rPr lang="en-US" sz="1050" b="1" dirty="0">
+                <a:solidFill>
+                  <a:schemeClr val="tx2"/>
+                </a:solidFill>
+              </a:rPr>
+              <a:t>내가 다시 만든 표 (단위: %)</a:t>
+            </a:r>
+            <a:endParaRPr lang="en-US" sz="1050" dirty="0"/>
+          </a:p>
+        </p:txBody>
+      </p:sp>
+      <p:graphicFrame>
+        <p:nvGraphicFramePr>
+          <p:cNvPr id="7" name="내가 만든 표"/>
+          <p:cNvGraphicFramePr>
+            <a:graphicFrameLocks noGrp="1"/>
+          </p:cNvGraphicFramePr>
+          <p:nvPr>
+            <p:extLst>
+              <p:ext uri="{D42A27DB-BD31-4B8C-83A1-F6EECF244321}">
+                <p14:modId xmlns:p14="http://schemas.microsoft.com/office/powerpoint/2010/main" val="1579011935"/>
+              </p:ext>
+            </p:extLst>
+          </p:nvPr>
+        </p:nvGraphicFramePr>
+        <p:xfrm>
+          <a:off x="5029200" y="2176272"/>
+          <a:ext cx="3657600" cy="914400"/>
+        </p:xfrm>
+        <a:graphic>
+          <a:graphicData uri="http://schemas.openxmlformats.org/drawingml/2006/table">
+            <a:tbl>
+              <a:tblPr/>
+              <a:tblGrid>
+                <a:gridCol w="822960"/>
+                <a:gridCol w="566928"/>
+                <a:gridCol w="566928"/>
+                <a:gridCol w="566928"/>
+                <a:gridCol w="566928"/>
+                <a:gridCol w="566928"/>
+              </a:tblGrid>
+              <a:tr h="274320">
+                <a:tc>
+                  <a:txBody>
+                    <a:bodyPr/>
+                    <a:lstStyle/>
+                    <a:p>
+                      <a:pPr algn="ctr" indent="0" marL="0">
+                        <a:buNone/>
+                      </a:pPr>
+                      <a:r>
+                        <a:rPr lang="en-US" sz="950" b="1" dirty="0">
+                          <a:solidFill>
+                            <a:srgbClr val="1B211D"/>
+                          </a:solidFill>
+                        </a:rPr>
+                        <a:t>구분</a:t>
+                      </a:r>
+                      <a:endParaRPr lang="en-US" sz="950" dirty="0"/>
+                    </a:p>
+                  </a:txBody>
+                  <a:tcPr marL="27432" marR="27432" marT="27432" marB="27432" anchor="ctr">
+                    <a:lnL w="9525" cap="flat" cmpd="sng" algn="ctr">
+                      <a:solidFill>
+                        <a:srgbClr val="B9B4A6"/>
+                      </a:solidFill>
+                      <a:prstDash val="solid"/>
+                      <a:round/>
+                      <a:headEnd type="none" w="med" len="med"/>
+                      <a:tailEnd type="none" w="med" len="med"/>
+                    </a:lnL>
+                    <a:lnR w="9525" cap="flat" cmpd="sng" algn="ctr">
+                      <a:solidFill>
+                        <a:srgbClr val="B9B4A6"/>
+                      </a:solidFill>
+                      <a:prstDash val="solid"/>
+                      <a:round/>
+                      <a:headEnd type="none" w="med" len="med"/>
+                      <a:tailEnd type="none" w="med" len="med"/>
+                    </a:lnR>
+                    <a:lnT w="9525" cap="flat" cmpd="sng" algn="ctr">
+                      <a:solidFill>
+                        <a:srgbClr val="B9B4A6"/>
+                      </a:solidFill>
+                      <a:prstDash val="solid"/>
+                      <a:round/>
+                      <a:headEnd type="none" w="med" len="med"/>
+                      <a:tailEnd type="none" w="med" len="med"/>
+                    </a:lnT>
+                    <a:lnB w="9525" cap="flat" cmpd="sng" algn="ctr">
+                      <a:solidFill>
+                        <a:srgbClr val="B9B4A6"/>
+                      </a:solidFill>
+                      <a:prstDash val="solid"/>
+                      <a:round/>
+                      <a:headEnd type="none" w="med" len="med"/>
+                      <a:tailEnd type="none" w="med" len="med"/>
+                    </a:lnB>
+                    <a:solidFill>
+                      <a:srgbClr val="EEF3EF"/>
+                    </a:solidFill>
+                  </a:tcPr>
+                </a:tc>
+                <a:tc>
+                  <a:txBody>
+                    <a:bodyPr/>
+                    <a:lstStyle/>
+                    <a:p>
+                      <a:pPr algn="ctr" indent="0" marL="0">
+                        <a:buNone/>
+                      </a:pPr>
+                      <a:r>
+                        <a:rPr lang="en-US" sz="950" b="1" dirty="0">
+                          <a:solidFill>
+                            <a:srgbClr val="1B211D"/>
+                          </a:solidFill>
+                        </a:rPr>
+                        <a:t>2021</a:t>
+                      </a:r>
+                      <a:endParaRPr lang="en-US" sz="950" dirty="0"/>
+                    </a:p>
+                  </a:txBody>
+                  <a:tcPr marL="27432" marR="27432" marT="27432" marB="27432" anchor="ctr">
+                    <a:lnL w="9525" cap="flat" cmpd="sng" algn="ctr">
+                      <a:solidFill>
+                        <a:srgbClr val="B9B4A6"/>
+                      </a:solidFill>
+                      <a:prstDash val="solid"/>
+                      <a:round/>
+                      <a:headEnd type="none" w="med" len="med"/>
+                      <a:tailEnd type="none" w="med" len="med"/>
+                    </a:lnL>
+                    <a:lnR w="9525" cap="flat" cmpd="sng" algn="ctr">
+                      <a:solidFill>
+                        <a:srgbClr val="B9B4A6"/>
+                      </a:solidFill>
+                      <a:prstDash val="solid"/>
+                      <a:round/>
+                      <a:headEnd type="none" w="med" len="med"/>
+                      <a:tailEnd type="none" w="med" len="med"/>
+                    </a:lnR>
+                    <a:lnT w="9525" cap="flat" cmpd="sng" algn="ctr">
+                      <a:solidFill>
+                        <a:srgbClr val="B9B4A6"/>
+                      </a:solidFill>
+                      <a:prstDash val="solid"/>
+                      <a:round/>
+                      <a:headEnd type="none" w="med" len="med"/>
+                      <a:tailEnd type="none" w="med" len="med"/>
+                    </a:lnT>
+                    <a:lnB w="9525" cap="flat" cmpd="sng" algn="ctr">
+                      <a:solidFill>
+                        <a:srgbClr val="B9B4A6"/>
+                      </a:solidFill>
+                      <a:prstDash val="solid"/>
+                      <a:round/>
+                      <a:headEnd type="none" w="med" len="med"/>
+                      <a:tailEnd type="none" w="med" len="med"/>
+                    </a:lnB>
+                    <a:solidFill>
+                      <a:srgbClr val="EEF3EF"/>
+                    </a:solidFill>
+                  </a:tcPr>
+                </a:tc>
+                <a:tc>
+                  <a:txBody>
+                    <a:bodyPr/>
+                    <a:lstStyle/>
+                    <a:p>
+                      <a:pPr algn="ctr" indent="0" marL="0">
+                        <a:buNone/>
+                      </a:pPr>
+                      <a:r>
+                        <a:rPr lang="en-US" sz="950" b="1" dirty="0">
+                          <a:solidFill>
+                            <a:srgbClr val="1B211D"/>
+                          </a:solidFill>
+                        </a:rPr>
+                        <a:t>2022</a:t>
+                      </a:r>
+                      <a:endParaRPr lang="en-US" sz="950" dirty="0"/>
+                    </a:p>
+                  </a:txBody>
+                  <a:tcPr marL="27432" marR="27432" marT="27432" marB="27432" anchor="ctr">
+                    <a:lnL w="9525" cap="flat" cmpd="sng" algn="ctr">
+                      <a:solidFill>
+                        <a:srgbClr val="B9B4A6"/>
+                      </a:solidFill>
+                      <a:prstDash val="solid"/>
+                      <a:round/>
+                      <a:headEnd type="none" w="med" len="med"/>
+                      <a:tailEnd type="none" w="med" len="med"/>
+                    </a:lnL>
+                    <a:lnR w="9525" cap="flat" cmpd="sng" algn="ctr">
+                      <a:solidFill>
+                        <a:srgbClr val="B9B4A6"/>
+                      </a:solidFill>
+                      <a:prstDash val="solid"/>
+                      <a:round/>
+                      <a:headEnd type="none" w="med" len="med"/>
+                      <a:tailEnd type="none" w="med" len="med"/>
+                    </a:lnR>
+                    <a:lnT w="9525" cap="flat" cmpd="sng" algn="ctr">
+                      <a:solidFill>
+                        <a:srgbClr val="B9B4A6"/>
+                      </a:solidFill>
+                      <a:prstDash val="solid"/>
+                      <a:round/>
+                      <a:headEnd type="none" w="med" len="med"/>
+                      <a:tailEnd type="none" w="med" len="med"/>
+                    </a:lnT>
+                    <a:lnB w="9525" cap="flat" cmpd="sng" algn="ctr">
+                      <a:solidFill>
+                        <a:srgbClr val="B9B4A6"/>
+                      </a:solidFill>
+                      <a:prstDash val="solid"/>
+                      <a:round/>
+                      <a:headEnd type="none" w="med" len="med"/>
+                      <a:tailEnd type="none" w="med" len="med"/>
+                    </a:lnB>
+                    <a:solidFill>
+                      <a:srgbClr val="EEF3EF"/>
+                    </a:solidFill>
+                  </a:tcPr>
+                </a:tc>
+                <a:tc>
+                  <a:txBody>
+                    <a:bodyPr/>
+                    <a:lstStyle/>
+                    <a:p>
+                      <a:pPr algn="ctr" indent="0" marL="0">
+                        <a:buNone/>
+                      </a:pPr>
+                      <a:r>
+                        <a:rPr lang="en-US" sz="950" b="1" dirty="0">
+                          <a:solidFill>
+                            <a:srgbClr val="1B211D"/>
+                          </a:solidFill>
+                        </a:rPr>
+                        <a:t>2023</a:t>
+                      </a:r>
+                      <a:endParaRPr lang="en-US" sz="950" dirty="0"/>
+                    </a:p>
+                  </a:txBody>
+                  <a:tcPr marL="27432" marR="27432" marT="27432" marB="27432" anchor="ctr">
+                    <a:lnL w="9525" cap="flat" cmpd="sng" algn="ctr">
+                      <a:solidFill>
+                        <a:srgbClr val="B9B4A6"/>
+                      </a:solidFill>
+                      <a:prstDash val="solid"/>
+                      <a:round/>
+                      <a:headEnd type="none" w="med" len="med"/>
+                      <a:tailEnd type="none" w="med" len="med"/>
+                    </a:lnL>
+                    <a:lnR w="9525" cap="flat" cmpd="sng" algn="ctr">
+                      <a:solidFill>
+                        <a:srgbClr val="B9B4A6"/>
+                      </a:solidFill>
+                      <a:prstDash val="solid"/>
+                      <a:round/>
+                      <a:headEnd type="none" w="med" len="med"/>
+                      <a:tailEnd type="none" w="med" len="med"/>
+                    </a:lnR>
+                    <a:lnT w="9525" cap="flat" cmpd="sng" algn="ctr">
+                      <a:solidFill>
+                        <a:srgbClr val="B9B4A6"/>
+                      </a:solidFill>
+                      <a:prstDash val="solid"/>
+                      <a:round/>
+                      <a:headEnd type="none" w="med" len="med"/>
+                      <a:tailEnd type="none" w="med" len="med"/>
+                    </a:lnT>
+                    <a:lnB w="9525" cap="flat" cmpd="sng" algn="ctr">
+                      <a:solidFill>
+                        <a:srgbClr val="B9B4A6"/>
+                      </a:solidFill>
+                      <a:prstDash val="solid"/>
+                      <a:round/>
+                      <a:headEnd type="none" w="med" len="med"/>
+                      <a:tailEnd type="none" w="med" len="med"/>
+                    </a:lnB>
+                    <a:solidFill>
+                      <a:srgbClr val="EEF3EF"/>
+                    </a:solidFill>
+                  </a:tcPr>
+                </a:tc>
+                <a:tc>
+                  <a:txBody>
+                    <a:bodyPr/>
+                    <a:lstStyle/>
+                    <a:p>
+                      <a:pPr algn="ctr" indent="0" marL="0">
+                        <a:buNone/>
+                      </a:pPr>
+                      <a:r>
+                        <a:rPr lang="en-US" sz="950" b="1" dirty="0">
+                          <a:solidFill>
+                            <a:srgbClr val="1B211D"/>
+                          </a:solidFill>
+                        </a:rPr>
+                        <a:t>2024</a:t>
+                      </a:r>
+                      <a:endParaRPr lang="en-US" sz="950" dirty="0"/>
+                    </a:p>
+                  </a:txBody>
+                  <a:tcPr marL="27432" marR="27432" marT="27432" marB="27432" anchor="ctr">
+                    <a:lnL w="9525" cap="flat" cmpd="sng" algn="ctr">
+                      <a:solidFill>
+                        <a:srgbClr val="B9B4A6"/>
+                      </a:solidFill>
+                      <a:prstDash val="solid"/>
+                      <a:round/>
+                      <a:headEnd type="none" w="med" len="med"/>
+                      <a:tailEnd type="none" w="med" len="med"/>
+                    </a:lnL>
+                    <a:lnR w="9525" cap="flat" cmpd="sng" algn="ctr">
+                      <a:solidFill>
+                        <a:srgbClr val="B9B4A6"/>
+                      </a:solidFill>
+                      <a:prstDash val="solid"/>
+                      <a:round/>
+                      <a:headEnd type="none" w="med" len="med"/>
+                      <a:tailEnd type="none" w="med" len="med"/>
+                    </a:lnR>
+                    <a:lnT w="9525" cap="flat" cmpd="sng" algn="ctr">
+                      <a:solidFill>
+                        <a:srgbClr val="B9B4A6"/>
+                      </a:solidFill>
+                      <a:prstDash val="solid"/>
+                      <a:round/>
+                      <a:headEnd type="none" w="med" len="med"/>
+                      <a:tailEnd type="none" w="med" len="med"/>
+                    </a:lnT>
+                    <a:lnB w="9525" cap="flat" cmpd="sng" algn="ctr">
+                      <a:solidFill>
+                        <a:srgbClr val="B9B4A6"/>
+                      </a:solidFill>
+                      <a:prstDash val="solid"/>
+                      <a:round/>
+                      <a:headEnd type="none" w="med" len="med"/>
+                      <a:tailEnd type="none" w="med" len="med"/>
+                    </a:lnB>
+                    <a:solidFill>
+                      <a:srgbClr val="EEF3EF"/>
+                    </a:solidFill>
+                  </a:tcPr>
+                </a:tc>
+                <a:tc>
+                  <a:txBody>
+                    <a:bodyPr/>
+                    <a:lstStyle/>
+                    <a:p>
+                      <a:pPr algn="ctr" indent="0" marL="0">
+                        <a:buNone/>
+                      </a:pPr>
+                      <a:r>
+                        <a:rPr lang="en-US" sz="950" b="1" dirty="0">
+                          <a:solidFill>
+                            <a:srgbClr val="1B211D"/>
+                          </a:solidFill>
+                        </a:rPr>
+                        <a:t>2025</a:t>
+                      </a:r>
+                      <a:endParaRPr lang="en-US" sz="950" dirty="0"/>
                     </a:p>
                   </a:txBody>
                   <a:tcPr marL="27432" marR="27432" marT="27432" marB="27432" anchor="ctr">
@@ -4243,14 +6409,14 @@
                         <a:buNone/>
                       </a:pPr>
                       <a:r>
-                        <a:rPr lang="en-US" sz="1050" dirty="0">
+                        <a:rPr lang="en-US" sz="950" dirty="0">
                           <a:solidFill>
                             <a:srgbClr val="1B211D"/>
                           </a:solidFill>
                         </a:rPr>
-                        <a:t>P(X = x)</a:t>
+                        <a:t>남학생</a:t>
                       </a:r>
-                      <a:endParaRPr lang="en-US" sz="1050" dirty="0"/>
+                      <a:endParaRPr lang="en-US" sz="950" dirty="0"/>
                     </a:p>
                   </a:txBody>
                   <a:tcPr marL="27432" marR="27432" marT="27432" marB="27432" anchor="ctr">
@@ -4301,14 +6467,14 @@
                         <a:buNone/>
                       </a:pPr>
                       <a:r>
-                        <a:rPr lang="en-US" sz="1050" dirty="0">
+                        <a:rPr lang="en-US" sz="950" dirty="0">
                           <a:solidFill>
                             <a:srgbClr val="1B211D"/>
                           </a:solidFill>
                         </a:rPr>
-                        <a:t>0.547</a:t>
+                        <a:t>37.0</a:t>
                       </a:r>
-                      <a:endParaRPr lang="en-US" sz="1050" dirty="0"/>
+                      <a:endParaRPr lang="en-US" sz="950" dirty="0"/>
                     </a:p>
                   </a:txBody>
                   <a:tcPr marL="27432" marR="27432" marT="27432" marB="27432" anchor="ctr">
@@ -4359,14 +6525,14 @@
                         <a:buNone/>
                       </a:pPr>
                       <a:r>
-                        <a:rPr lang="en-US" sz="1050" dirty="0">
+                        <a:rPr lang="en-US" sz="950" dirty="0">
                           <a:solidFill>
                             <a:srgbClr val="1B211D"/>
                           </a:solidFill>
                         </a:rPr>
-                        <a:t>0.453</a:t>
+                        <a:t>37.4</a:t>
                       </a:r>
-                      <a:endParaRPr lang="en-US" sz="1050" dirty="0"/>
+                      <a:endParaRPr lang="en-US" sz="950" dirty="0"/>
                     </a:p>
                   </a:txBody>
                   <a:tcPr marL="27432" marR="27432" marT="27432" marB="27432" anchor="ctr">
@@ -4417,14 +6583,480 @@
                         <a:buNone/>
                       </a:pPr>
                       <a:r>
-                        <a:rPr lang="en-US" sz="1050" dirty="0">
+                        <a:rPr lang="en-US" sz="950" dirty="0">
                           <a:solidFill>
                             <a:srgbClr val="1B211D"/>
                           </a:solidFill>
                         </a:rPr>
-                        <a:t>1</a:t>
+                        <a:t>39.7</a:t>
                       </a:r>
-                      <a:endParaRPr lang="en-US" sz="1050" dirty="0"/>
+                      <a:endParaRPr lang="en-US" sz="950" dirty="0"/>
+                    </a:p>
+                  </a:txBody>
+                  <a:tcPr marL="27432" marR="27432" marT="27432" marB="27432" anchor="ctr">
+                    <a:lnL w="9525" cap="flat" cmpd="sng" algn="ctr">
+                      <a:solidFill>
+                        <a:srgbClr val="B9B4A6"/>
+                      </a:solidFill>
+                      <a:prstDash val="solid"/>
+                      <a:round/>
+                      <a:headEnd type="none" w="med" len="med"/>
+                      <a:tailEnd type="none" w="med" len="med"/>
+                    </a:lnL>
+                    <a:lnR w="9525" cap="flat" cmpd="sng" algn="ctr">
+                      <a:solidFill>
+                        <a:srgbClr val="B9B4A6"/>
+                      </a:solidFill>
+                      <a:prstDash val="solid"/>
+                      <a:round/>
+                      <a:headEnd type="none" w="med" len="med"/>
+                      <a:tailEnd type="none" w="med" len="med"/>
+                    </a:lnR>
+                    <a:lnT w="9525" cap="flat" cmpd="sng" algn="ctr">
+                      <a:solidFill>
+                        <a:srgbClr val="B9B4A6"/>
+                      </a:solidFill>
+                      <a:prstDash val="solid"/>
+                      <a:round/>
+                      <a:headEnd type="none" w="med" len="med"/>
+                      <a:tailEnd type="none" w="med" len="med"/>
+                    </a:lnT>
+                    <a:lnB w="9525" cap="flat" cmpd="sng" algn="ctr">
+                      <a:solidFill>
+                        <a:srgbClr val="B9B4A6"/>
+                      </a:solidFill>
+                      <a:prstDash val="solid"/>
+                      <a:round/>
+                      <a:headEnd type="none" w="med" len="med"/>
+                      <a:tailEnd type="none" w="med" len="med"/>
+                    </a:lnB>
+                  </a:tcPr>
+                </a:tc>
+                <a:tc>
+                  <a:txBody>
+                    <a:bodyPr/>
+                    <a:lstStyle/>
+                    <a:p>
+                      <a:pPr algn="ctr" indent="0" marL="0">
+                        <a:buNone/>
+                      </a:pPr>
+                      <a:r>
+                        <a:rPr lang="en-US" sz="950" dirty="0">
+                          <a:solidFill>
+                            <a:srgbClr val="1B211D"/>
+                          </a:solidFill>
+                        </a:rPr>
+                        <a:t>40.2</a:t>
+                      </a:r>
+                      <a:endParaRPr lang="en-US" sz="950" dirty="0"/>
+                    </a:p>
+                  </a:txBody>
+                  <a:tcPr marL="27432" marR="27432" marT="27432" marB="27432" anchor="ctr">
+                    <a:lnL w="9525" cap="flat" cmpd="sng" algn="ctr">
+                      <a:solidFill>
+                        <a:srgbClr val="B9B4A6"/>
+                      </a:solidFill>
+                      <a:prstDash val="solid"/>
+                      <a:round/>
+                      <a:headEnd type="none" w="med" len="med"/>
+                      <a:tailEnd type="none" w="med" len="med"/>
+                    </a:lnL>
+                    <a:lnR w="9525" cap="flat" cmpd="sng" algn="ctr">
+                      <a:solidFill>
+                        <a:srgbClr val="B9B4A6"/>
+                      </a:solidFill>
+                      <a:prstDash val="solid"/>
+                      <a:round/>
+                      <a:headEnd type="none" w="med" len="med"/>
+                      <a:tailEnd type="none" w="med" len="med"/>
+                    </a:lnR>
+                    <a:lnT w="9525" cap="flat" cmpd="sng" algn="ctr">
+                      <a:solidFill>
+                        <a:srgbClr val="B9B4A6"/>
+                      </a:solidFill>
+                      <a:prstDash val="solid"/>
+                      <a:round/>
+                      <a:headEnd type="none" w="med" len="med"/>
+                      <a:tailEnd type="none" w="med" len="med"/>
+                    </a:lnT>
+                    <a:lnB w="9525" cap="flat" cmpd="sng" algn="ctr">
+                      <a:solidFill>
+                        <a:srgbClr val="B9B4A6"/>
+                      </a:solidFill>
+                      <a:prstDash val="solid"/>
+                      <a:round/>
+                      <a:headEnd type="none" w="med" len="med"/>
+                      <a:tailEnd type="none" w="med" len="med"/>
+                    </a:lnB>
+                  </a:tcPr>
+                </a:tc>
+                <a:tc>
+                  <a:txBody>
+                    <a:bodyPr/>
+                    <a:lstStyle/>
+                    <a:p>
+                      <a:pPr algn="ctr" indent="0" marL="0">
+                        <a:buNone/>
+                      </a:pPr>
+                      <a:r>
+                        <a:rPr lang="en-US" sz="950" dirty="0">
+                          <a:solidFill>
+                            <a:srgbClr val="1B211D"/>
+                          </a:solidFill>
+                        </a:rPr>
+                        <a:t>41.9</a:t>
+                      </a:r>
+                      <a:endParaRPr lang="en-US" sz="950" dirty="0"/>
+                    </a:p>
+                  </a:txBody>
+                  <a:tcPr marL="27432" marR="27432" marT="27432" marB="27432" anchor="ctr">
+                    <a:lnL w="9525" cap="flat" cmpd="sng" algn="ctr">
+                      <a:solidFill>
+                        <a:srgbClr val="B9B4A6"/>
+                      </a:solidFill>
+                      <a:prstDash val="solid"/>
+                      <a:round/>
+                      <a:headEnd type="none" w="med" len="med"/>
+                      <a:tailEnd type="none" w="med" len="med"/>
+                    </a:lnL>
+                    <a:lnR w="9525" cap="flat" cmpd="sng" algn="ctr">
+                      <a:solidFill>
+                        <a:srgbClr val="B9B4A6"/>
+                      </a:solidFill>
+                      <a:prstDash val="solid"/>
+                      <a:round/>
+                      <a:headEnd type="none" w="med" len="med"/>
+                      <a:tailEnd type="none" w="med" len="med"/>
+                    </a:lnR>
+                    <a:lnT w="9525" cap="flat" cmpd="sng" algn="ctr">
+                      <a:solidFill>
+                        <a:srgbClr val="B9B4A6"/>
+                      </a:solidFill>
+                      <a:prstDash val="solid"/>
+                      <a:round/>
+                      <a:headEnd type="none" w="med" len="med"/>
+                      <a:tailEnd type="none" w="med" len="med"/>
+                    </a:lnT>
+                    <a:lnB w="9525" cap="flat" cmpd="sng" algn="ctr">
+                      <a:solidFill>
+                        <a:srgbClr val="B9B4A6"/>
+                      </a:solidFill>
+                      <a:prstDash val="solid"/>
+                      <a:round/>
+                      <a:headEnd type="none" w="med" len="med"/>
+                      <a:tailEnd type="none" w="med" len="med"/>
+                    </a:lnB>
+                  </a:tcPr>
+                </a:tc>
+              </a:tr>
+              <a:tr h="274320">
+                <a:tc>
+                  <a:txBody>
+                    <a:bodyPr/>
+                    <a:lstStyle/>
+                    <a:p>
+                      <a:pPr algn="ctr" indent="0" marL="0">
+                        <a:buNone/>
+                      </a:pPr>
+                      <a:r>
+                        <a:rPr lang="en-US" sz="950" dirty="0">
+                          <a:solidFill>
+                            <a:srgbClr val="1B211D"/>
+                          </a:solidFill>
+                        </a:rPr>
+                        <a:t>여학생</a:t>
+                      </a:r>
+                      <a:endParaRPr lang="en-US" sz="950" dirty="0"/>
+                    </a:p>
+                  </a:txBody>
+                  <a:tcPr marL="27432" marR="27432" marT="27432" marB="27432" anchor="ctr">
+                    <a:lnL w="9525" cap="flat" cmpd="sng" algn="ctr">
+                      <a:solidFill>
+                        <a:srgbClr val="B9B4A6"/>
+                      </a:solidFill>
+                      <a:prstDash val="solid"/>
+                      <a:round/>
+                      <a:headEnd type="none" w="med" len="med"/>
+                      <a:tailEnd type="none" w="med" len="med"/>
+                    </a:lnL>
+                    <a:lnR w="9525" cap="flat" cmpd="sng" algn="ctr">
+                      <a:solidFill>
+                        <a:srgbClr val="B9B4A6"/>
+                      </a:solidFill>
+                      <a:prstDash val="solid"/>
+                      <a:round/>
+                      <a:headEnd type="none" w="med" len="med"/>
+                      <a:tailEnd type="none" w="med" len="med"/>
+                    </a:lnR>
+                    <a:lnT w="9525" cap="flat" cmpd="sng" algn="ctr">
+                      <a:solidFill>
+                        <a:srgbClr val="B9B4A6"/>
+                      </a:solidFill>
+                      <a:prstDash val="solid"/>
+                      <a:round/>
+                      <a:headEnd type="none" w="med" len="med"/>
+                      <a:tailEnd type="none" w="med" len="med"/>
+                    </a:lnT>
+                    <a:lnB w="9525" cap="flat" cmpd="sng" algn="ctr">
+                      <a:solidFill>
+                        <a:srgbClr val="B9B4A6"/>
+                      </a:solidFill>
+                      <a:prstDash val="solid"/>
+                      <a:round/>
+                      <a:headEnd type="none" w="med" len="med"/>
+                      <a:tailEnd type="none" w="med" len="med"/>
+                    </a:lnB>
+                  </a:tcPr>
+                </a:tc>
+                <a:tc>
+                  <a:txBody>
+                    <a:bodyPr/>
+                    <a:lstStyle/>
+                    <a:p>
+                      <a:pPr algn="ctr" indent="0" marL="0">
+                        <a:buNone/>
+                      </a:pPr>
+                      <a:r>
+                        <a:rPr lang="en-US" sz="950" dirty="0">
+                          <a:solidFill>
+                            <a:srgbClr val="1B211D"/>
+                          </a:solidFill>
+                        </a:rPr>
+                        <a:t>39.1</a:t>
+                      </a:r>
+                      <a:endParaRPr lang="en-US" sz="950" dirty="0"/>
+                    </a:p>
+                  </a:txBody>
+                  <a:tcPr marL="27432" marR="27432" marT="27432" marB="27432" anchor="ctr">
+                    <a:lnL w="9525" cap="flat" cmpd="sng" algn="ctr">
+                      <a:solidFill>
+                        <a:srgbClr val="B9B4A6"/>
+                      </a:solidFill>
+                      <a:prstDash val="solid"/>
+                      <a:round/>
+                      <a:headEnd type="none" w="med" len="med"/>
+                      <a:tailEnd type="none" w="med" len="med"/>
+                    </a:lnL>
+                    <a:lnR w="9525" cap="flat" cmpd="sng" algn="ctr">
+                      <a:solidFill>
+                        <a:srgbClr val="B9B4A6"/>
+                      </a:solidFill>
+                      <a:prstDash val="solid"/>
+                      <a:round/>
+                      <a:headEnd type="none" w="med" len="med"/>
+                      <a:tailEnd type="none" w="med" len="med"/>
+                    </a:lnR>
+                    <a:lnT w="9525" cap="flat" cmpd="sng" algn="ctr">
+                      <a:solidFill>
+                        <a:srgbClr val="B9B4A6"/>
+                      </a:solidFill>
+                      <a:prstDash val="solid"/>
+                      <a:round/>
+                      <a:headEnd type="none" w="med" len="med"/>
+                      <a:tailEnd type="none" w="med" len="med"/>
+                    </a:lnT>
+                    <a:lnB w="9525" cap="flat" cmpd="sng" algn="ctr">
+                      <a:solidFill>
+                        <a:srgbClr val="B9B4A6"/>
+                      </a:solidFill>
+                      <a:prstDash val="solid"/>
+                      <a:round/>
+                      <a:headEnd type="none" w="med" len="med"/>
+                      <a:tailEnd type="none" w="med" len="med"/>
+                    </a:lnB>
+                  </a:tcPr>
+                </a:tc>
+                <a:tc>
+                  <a:txBody>
+                    <a:bodyPr/>
+                    <a:lstStyle/>
+                    <a:p>
+                      <a:pPr algn="ctr" indent="0" marL="0">
+                        <a:buNone/>
+                      </a:pPr>
+                      <a:r>
+                        <a:rPr lang="en-US" sz="950" dirty="0">
+                          <a:solidFill>
+                            <a:srgbClr val="1B211D"/>
+                          </a:solidFill>
+                        </a:rPr>
+                        <a:t>40.7</a:t>
+                      </a:r>
+                      <a:endParaRPr lang="en-US" sz="950" dirty="0"/>
+                    </a:p>
+                  </a:txBody>
+                  <a:tcPr marL="27432" marR="27432" marT="27432" marB="27432" anchor="ctr">
+                    <a:lnL w="9525" cap="flat" cmpd="sng" algn="ctr">
+                      <a:solidFill>
+                        <a:srgbClr val="B9B4A6"/>
+                      </a:solidFill>
+                      <a:prstDash val="solid"/>
+                      <a:round/>
+                      <a:headEnd type="none" w="med" len="med"/>
+                      <a:tailEnd type="none" w="med" len="med"/>
+                    </a:lnL>
+                    <a:lnR w="9525" cap="flat" cmpd="sng" algn="ctr">
+                      <a:solidFill>
+                        <a:srgbClr val="B9B4A6"/>
+                      </a:solidFill>
+                      <a:prstDash val="solid"/>
+                      <a:round/>
+                      <a:headEnd type="none" w="med" len="med"/>
+                      <a:tailEnd type="none" w="med" len="med"/>
+                    </a:lnR>
+                    <a:lnT w="9525" cap="flat" cmpd="sng" algn="ctr">
+                      <a:solidFill>
+                        <a:srgbClr val="B9B4A6"/>
+                      </a:solidFill>
+                      <a:prstDash val="solid"/>
+                      <a:round/>
+                      <a:headEnd type="none" w="med" len="med"/>
+                      <a:tailEnd type="none" w="med" len="med"/>
+                    </a:lnT>
+                    <a:lnB w="9525" cap="flat" cmpd="sng" algn="ctr">
+                      <a:solidFill>
+                        <a:srgbClr val="B9B4A6"/>
+                      </a:solidFill>
+                      <a:prstDash val="solid"/>
+                      <a:round/>
+                      <a:headEnd type="none" w="med" len="med"/>
+                      <a:tailEnd type="none" w="med" len="med"/>
+                    </a:lnB>
+                  </a:tcPr>
+                </a:tc>
+                <a:tc>
+                  <a:txBody>
+                    <a:bodyPr/>
+                    <a:lstStyle/>
+                    <a:p>
+                      <a:pPr algn="ctr" indent="0" marL="0">
+                        <a:buNone/>
+                      </a:pPr>
+                      <a:r>
+                        <a:rPr lang="en-US" sz="950" dirty="0">
+                          <a:solidFill>
+                            <a:srgbClr val="1B211D"/>
+                          </a:solidFill>
+                        </a:rPr>
+                        <a:t>42.6</a:t>
+                      </a:r>
+                      <a:endParaRPr lang="en-US" sz="950" dirty="0"/>
+                    </a:p>
+                  </a:txBody>
+                  <a:tcPr marL="27432" marR="27432" marT="27432" marB="27432" anchor="ctr">
+                    <a:lnL w="9525" cap="flat" cmpd="sng" algn="ctr">
+                      <a:solidFill>
+                        <a:srgbClr val="B9B4A6"/>
+                      </a:solidFill>
+                      <a:prstDash val="solid"/>
+                      <a:round/>
+                      <a:headEnd type="none" w="med" len="med"/>
+                      <a:tailEnd type="none" w="med" len="med"/>
+                    </a:lnL>
+                    <a:lnR w="9525" cap="flat" cmpd="sng" algn="ctr">
+                      <a:solidFill>
+                        <a:srgbClr val="B9B4A6"/>
+                      </a:solidFill>
+                      <a:prstDash val="solid"/>
+                      <a:round/>
+                      <a:headEnd type="none" w="med" len="med"/>
+                      <a:tailEnd type="none" w="med" len="med"/>
+                    </a:lnR>
+                    <a:lnT w="9525" cap="flat" cmpd="sng" algn="ctr">
+                      <a:solidFill>
+                        <a:srgbClr val="B9B4A6"/>
+                      </a:solidFill>
+                      <a:prstDash val="solid"/>
+                      <a:round/>
+                      <a:headEnd type="none" w="med" len="med"/>
+                      <a:tailEnd type="none" w="med" len="med"/>
+                    </a:lnT>
+                    <a:lnB w="9525" cap="flat" cmpd="sng" algn="ctr">
+                      <a:solidFill>
+                        <a:srgbClr val="B9B4A6"/>
+                      </a:solidFill>
+                      <a:prstDash val="solid"/>
+                      <a:round/>
+                      <a:headEnd type="none" w="med" len="med"/>
+                      <a:tailEnd type="none" w="med" len="med"/>
+                    </a:lnB>
+                  </a:tcPr>
+                </a:tc>
+                <a:tc>
+                  <a:txBody>
+                    <a:bodyPr/>
+                    <a:lstStyle/>
+                    <a:p>
+                      <a:pPr algn="ctr" indent="0" marL="0">
+                        <a:buNone/>
+                      </a:pPr>
+                      <a:r>
+                        <a:rPr lang="en-US" sz="950" dirty="0">
+                          <a:solidFill>
+                            <a:srgbClr val="1B211D"/>
+                          </a:solidFill>
+                        </a:rPr>
+                        <a:t>44.7</a:t>
+                      </a:r>
+                      <a:endParaRPr lang="en-US" sz="950" dirty="0"/>
+                    </a:p>
+                  </a:txBody>
+                  <a:tcPr marL="27432" marR="27432" marT="27432" marB="27432" anchor="ctr">
+                    <a:lnL w="9525" cap="flat" cmpd="sng" algn="ctr">
+                      <a:solidFill>
+                        <a:srgbClr val="B9B4A6"/>
+                      </a:solidFill>
+                      <a:prstDash val="solid"/>
+                      <a:round/>
+                      <a:headEnd type="none" w="med" len="med"/>
+                      <a:tailEnd type="none" w="med" len="med"/>
+                    </a:lnL>
+                    <a:lnR w="9525" cap="flat" cmpd="sng" algn="ctr">
+                      <a:solidFill>
+                        <a:srgbClr val="B9B4A6"/>
+                      </a:solidFill>
+                      <a:prstDash val="solid"/>
+                      <a:round/>
+                      <a:headEnd type="none" w="med" len="med"/>
+                      <a:tailEnd type="none" w="med" len="med"/>
+                    </a:lnR>
+                    <a:lnT w="9525" cap="flat" cmpd="sng" algn="ctr">
+                      <a:solidFill>
+                        <a:srgbClr val="B9B4A6"/>
+                      </a:solidFill>
+                      <a:prstDash val="solid"/>
+                      <a:round/>
+                      <a:headEnd type="none" w="med" len="med"/>
+                      <a:tailEnd type="none" w="med" len="med"/>
+                    </a:lnT>
+                    <a:lnB w="9525" cap="flat" cmpd="sng" algn="ctr">
+                      <a:solidFill>
+                        <a:srgbClr val="B9B4A6"/>
+                      </a:solidFill>
+                      <a:prstDash val="solid"/>
+                      <a:round/>
+                      <a:headEnd type="none" w="med" len="med"/>
+                      <a:tailEnd type="none" w="med" len="med"/>
+                    </a:lnB>
+                  </a:tcPr>
+                </a:tc>
+                <a:tc>
+                  <a:txBody>
+                    <a:bodyPr/>
+                    <a:lstStyle/>
+                    <a:p>
+                      <a:pPr algn="ctr" indent="0" marL="0">
+                        <a:buNone/>
+                      </a:pPr>
+                      <a:r>
+                        <a:rPr lang="en-US" sz="950" dirty="0">
+                          <a:solidFill>
+                            <a:srgbClr val="1B211D"/>
+                          </a:solidFill>
+                        </a:rPr>
+                        <a:t>45.3</a:t>
+                      </a:r>
+                      <a:endParaRPr lang="en-US" sz="950" dirty="0"/>
                     </a:p>
                   </a:txBody>
                   <a:tcPr marL="27432" marR="27432" marT="27432" marB="27432" anchor="ctr">
@@ -4473,41 +7105,14 @@
       </p:graphicFrame>
       <p:sp>
         <p:nvSpPr>
-          <p:cNvPr id="8" name="해석 카드 1"/>
-          <p:cNvSpPr/>
-          <p:nvPr/>
-        </p:nvSpPr>
-        <p:spPr>
-          <a:xfrm>
-            <a:off x="5303520" y="1005840"/>
-            <a:ext cx="3383280" cy="1051560"/>
-          </a:xfrm>
-          <a:prstGeom prst="roundRect">
-            <a:avLst>
-              <a:gd name="adj" fmla="val 6957"/>
-            </a:avLst>
-          </a:prstGeom>
-          <a:solidFill>
-            <a:schemeClr val="bg2"/>
-          </a:solidFill>
-          <a:ln w="12700">
-            <a:solidFill>
-              <a:schemeClr val="bg2"/>
-            </a:solidFill>
-            <a:prstDash val="solid"/>
-          </a:ln>
-        </p:spPr>
-      </p:sp>
-      <p:sp>
-        <p:nvSpPr>
-          <p:cNvPr id="9" name="해석 라벨 1"/>
+          <p:cNvPr id="13" name="가공 안내"/>
           <p:cNvSpPr txBox="1"/>
           <p:nvPr/>
         </p:nvSpPr>
         <p:spPr>
           <a:xfrm>
-            <a:off x="5486400" y="1097280"/>
-            <a:ext cx="3017520" cy="274320"/>
+            <a:off x="5029200" y="3044952"/>
+            <a:ext cx="3657600" cy="548640"/>
           </a:xfrm>
           <a:prstGeom prst="rect">
             <a:avLst/>
@@ -4523,254 +7128,14 @@
               <a:buNone/>
             </a:pPr>
             <a:r>
-              <a:rPr lang="en-US" sz="1100" b="1" dirty="0">
-                <a:solidFill>
-                  <a:schemeClr val="tx2"/>
+              <a:rPr lang="en-US" sz="900" dirty="0">
+                <a:solidFill>
+                  <a:schemeClr val="accent3"/>
                 </a:solidFill>
               </a:rPr>
-              <a:t>① 숫자로 말하기</a:t>
-            </a:r>
-            <a:endParaRPr lang="en-US" sz="1100" dirty="0"/>
-          </a:p>
-        </p:txBody>
-      </p:sp>
-      <p:sp>
-        <p:nvSpPr>
-          <p:cNvPr id="10" name="해석 1"/>
-          <p:cNvSpPr txBox="1"/>
-          <p:nvPr/>
-        </p:nvSpPr>
-        <p:spPr>
-          <a:xfrm>
-            <a:off x="5486400" y="1371600"/>
-            <a:ext cx="3017520" cy="640080"/>
-          </a:xfrm>
-          <a:prstGeom prst="rect">
-            <a:avLst/>
-          </a:prstGeom>
-          <a:noFill/>
-          <a:ln/>
-        </p:spPr>
-        <p:txBody>
-          <a:bodyPr wrap="square" lIns="0" tIns="0" rIns="0" bIns="0" rtlCol="0" anchor="t">
-            <a:normAutofit/>
-          </a:bodyPr>
-          <a:lstStyle/>
-          <a:p>
-            <a:pPr indent="0" marL="0">
-              <a:buNone/>
-            </a:pPr>
-            <a:r>
-              <a:rPr lang="en-US" sz="1050" dirty="0">
-                <a:solidFill>
-                  <a:schemeClr val="tx1"/>
-                </a:solidFill>
-              </a:rPr>
-              <a:t>여학생 39.1% → 45.3%(+6.2%p), 남학생 37.0% → 41.9%(+4.9%p), 2021→2025. 여학생이 매년 더 높다</a:t>
-            </a:r>
-            <a:endParaRPr lang="en-US" sz="1050" dirty="0"/>
-          </a:p>
-        </p:txBody>
-      </p:sp>
-      <p:sp>
-        <p:nvSpPr>
-          <p:cNvPr id="11" name="해석 카드 2"/>
-          <p:cNvSpPr/>
-          <p:nvPr/>
-        </p:nvSpPr>
-        <p:spPr>
-          <a:xfrm>
-            <a:off x="5303520" y="2194560"/>
-            <a:ext cx="3383280" cy="1051560"/>
-          </a:xfrm>
-          <a:prstGeom prst="roundRect">
-            <a:avLst>
-              <a:gd name="adj" fmla="val 6957"/>
-            </a:avLst>
-          </a:prstGeom>
-          <a:solidFill>
-            <a:schemeClr val="bg2"/>
-          </a:solidFill>
-          <a:ln w="12700">
-            <a:solidFill>
-              <a:schemeClr val="bg2"/>
-            </a:solidFill>
-            <a:prstDash val="solid"/>
-          </a:ln>
-        </p:spPr>
-      </p:sp>
-      <p:sp>
-        <p:nvSpPr>
-          <p:cNvPr id="12" name="해석 라벨 2"/>
-          <p:cNvSpPr txBox="1"/>
-          <p:nvPr/>
-        </p:nvSpPr>
-        <p:spPr>
-          <a:xfrm>
-            <a:off x="5486400" y="2286000"/>
-            <a:ext cx="3017520" cy="274320"/>
-          </a:xfrm>
-          <a:prstGeom prst="rect">
-            <a:avLst/>
-          </a:prstGeom>
-          <a:noFill/>
-          <a:ln/>
-        </p:spPr>
-        <p:txBody>
-          <a:bodyPr wrap="square" lIns="0" tIns="0" rIns="0" bIns="0" rtlCol="0" anchor="ctr"/>
-          <a:lstStyle/>
-          <a:p>
-            <a:pPr indent="0" marL="0">
-              <a:buNone/>
-            </a:pPr>
-            <a:r>
-              <a:rPr lang="en-US" sz="1100" b="1" dirty="0">
-                <a:solidFill>
-                  <a:schemeClr val="tx2"/>
-                </a:solidFill>
-              </a:rPr>
-              <a:t>② 왜 그렇게 되었을까, 내 의견</a:t>
-            </a:r>
-            <a:endParaRPr lang="en-US" sz="1100" dirty="0"/>
-          </a:p>
-        </p:txBody>
-      </p:sp>
-      <p:sp>
-        <p:nvSpPr>
-          <p:cNvPr id="13" name="해석 2"/>
-          <p:cNvSpPr txBox="1"/>
-          <p:nvPr/>
-        </p:nvSpPr>
-        <p:spPr>
-          <a:xfrm>
-            <a:off x="5486400" y="2560320"/>
-            <a:ext cx="3017520" cy="640080"/>
-          </a:xfrm>
-          <a:prstGeom prst="rect">
-            <a:avLst/>
-          </a:prstGeom>
-          <a:noFill/>
-          <a:ln/>
-        </p:spPr>
-        <p:txBody>
-          <a:bodyPr wrap="square" lIns="0" tIns="0" rIns="0" bIns="0" rtlCol="0" anchor="t">
-            <a:normAutofit/>
-          </a:bodyPr>
-          <a:lstStyle/>
-          <a:p>
-            <a:pPr indent="0" marL="0">
-              <a:buNone/>
-            </a:pPr>
-            <a:r>
-              <a:rPr lang="en-US" sz="1050" dirty="0">
-                <a:solidFill>
-                  <a:schemeClr val="tx1"/>
-                </a:solidFill>
-              </a:rPr>
-              <a:t>잠이 부족해 아침에 먹기보다 자는 쪽을 택한다. 학원·스마트폰·이른 등교가 겹친다</a:t>
-            </a:r>
-            <a:endParaRPr lang="en-US" sz="1050" dirty="0"/>
-          </a:p>
-        </p:txBody>
-      </p:sp>
-      <p:sp>
-        <p:nvSpPr>
-          <p:cNvPr id="14" name="해석 카드 3"/>
-          <p:cNvSpPr/>
-          <p:nvPr/>
-        </p:nvSpPr>
-        <p:spPr>
-          <a:xfrm>
-            <a:off x="5303520" y="3383280"/>
-            <a:ext cx="3383280" cy="1051560"/>
-          </a:xfrm>
-          <a:prstGeom prst="roundRect">
-            <a:avLst>
-              <a:gd name="adj" fmla="val 6957"/>
-            </a:avLst>
-          </a:prstGeom>
-          <a:solidFill>
-            <a:schemeClr val="bg2"/>
-          </a:solidFill>
-          <a:ln w="12700">
-            <a:solidFill>
-              <a:schemeClr val="bg2"/>
-            </a:solidFill>
-            <a:prstDash val="solid"/>
-          </a:ln>
-        </p:spPr>
-      </p:sp>
-      <p:sp>
-        <p:nvSpPr>
-          <p:cNvPr id="15" name="해석 라벨 3"/>
-          <p:cNvSpPr txBox="1"/>
-          <p:nvPr/>
-        </p:nvSpPr>
-        <p:spPr>
-          <a:xfrm>
-            <a:off x="5486400" y="3474720"/>
-            <a:ext cx="3017520" cy="274320"/>
-          </a:xfrm>
-          <a:prstGeom prst="rect">
-            <a:avLst/>
-          </a:prstGeom>
-          <a:noFill/>
-          <a:ln/>
-        </p:spPr>
-        <p:txBody>
-          <a:bodyPr wrap="square" lIns="0" tIns="0" rIns="0" bIns="0" rtlCol="0" anchor="ctr"/>
-          <a:lstStyle/>
-          <a:p>
-            <a:pPr indent="0" marL="0">
-              <a:buNone/>
-            </a:pPr>
-            <a:r>
-              <a:rPr lang="en-US" sz="1100" b="1" dirty="0">
-                <a:solidFill>
-                  <a:schemeClr val="tx2"/>
-                </a:solidFill>
-              </a:rPr>
-              <a:t>③ 내 의견의 근거</a:t>
-            </a:r>
-            <a:endParaRPr lang="en-US" sz="1100" dirty="0"/>
-          </a:p>
-        </p:txBody>
-      </p:sp>
-      <p:sp>
-        <p:nvSpPr>
-          <p:cNvPr id="16" name="해석 3"/>
-          <p:cNvSpPr txBox="1"/>
-          <p:nvPr/>
-        </p:nvSpPr>
-        <p:spPr>
-          <a:xfrm>
-            <a:off x="5486400" y="3749040"/>
-            <a:ext cx="3017520" cy="640080"/>
-          </a:xfrm>
-          <a:prstGeom prst="rect">
-            <a:avLst/>
-          </a:prstGeom>
-          <a:noFill/>
-          <a:ln/>
-        </p:spPr>
-        <p:txBody>
-          <a:bodyPr wrap="square" lIns="0" tIns="0" rIns="0" bIns="0" rtlCol="0" anchor="t">
-            <a:normAutofit/>
-          </a:bodyPr>
-          <a:lstStyle/>
-          <a:p>
-            <a:pPr indent="0" marL="0">
-              <a:buNone/>
-            </a:pPr>
-            <a:r>
-              <a:rPr lang="en-US" sz="1050" dirty="0">
-                <a:solidFill>
-                  <a:schemeClr val="tx1"/>
-                </a:solidFill>
-              </a:rPr>
-              <a:t>같은 조사(2024년): 잠을 충분히 잔다고 느끼는 비율 남 27.1%, 여 16.5%. 결식률 높은 여학생이 수면 충족률도 낮다</a:t>
-            </a:r>
-            <a:endParaRPr lang="en-US" sz="1050" dirty="0"/>
+              <a:t>남·여 두 줄, 최근 5년만 골라 옮겼다. 제목과 단위(%)를 붙였다</a:t>
+            </a:r>
+            <a:endParaRPr lang="en-US" sz="900" dirty="0"/>
           </a:p>
         </p:txBody>
       </p:sp>
@@ -4876,7 +7241,7 @@
                   <a:schemeClr val="tx2"/>
                 </a:solidFill>
               </a:rPr>
-              <a:t>결론</a:t>
+              <a:t>2장 설명 · 핵심 요약</a:t>
             </a:r>
             <a:endParaRPr lang="en-US" sz="2400" dirty="0"/>
           </a:p>
@@ -4884,17 +7249,19 @@
       </p:sp>
       <p:sp>
         <p:nvSpPr>
-          <p:cNvPr id="3" name="번호 4"/>
+          <p:cNvPr id="3" name="설명 배지 2"/>
           <p:cNvSpPr/>
           <p:nvPr/>
         </p:nvSpPr>
         <p:spPr>
           <a:xfrm>
-            <a:off x="457200" y="356616"/>
-            <a:ext cx="384048" cy="384048"/>
-          </a:xfrm>
-          <a:prstGeom prst="ellipse">
-            <a:avLst/>
+            <a:off x="457200" y="384048"/>
+            <a:ext cx="420624" cy="329184"/>
+          </a:xfrm>
+          <a:prstGeom prst="roundRect">
+            <a:avLst>
+              <a:gd name="adj" fmla="val 22222"/>
+            </a:avLst>
           </a:prstGeom>
           <a:solidFill>
             <a:schemeClr val="accent1"/>
@@ -4909,14 +7276,14 @@
       </p:sp>
       <p:sp>
         <p:nvSpPr>
-          <p:cNvPr id="4" name="번호 글자 4"/>
+          <p:cNvPr id="4" name="설명 배지 글자 2"/>
           <p:cNvSpPr txBox="1"/>
           <p:nvPr/>
         </p:nvSpPr>
         <p:spPr>
           <a:xfrm>
-            <a:off x="457200" y="356616"/>
-            <a:ext cx="384048" cy="384048"/>
+            <a:off x="457200" y="384048"/>
+            <a:ext cx="420624" cy="329184"/>
           </a:xfrm>
           <a:prstGeom prst="rect">
             <a:avLst/>
@@ -4932,31 +7299,1724 @@
               <a:buNone/>
             </a:pPr>
             <a:r>
-              <a:rPr lang="en-US" sz="1600" b="1" dirty="0">
+              <a:rPr lang="en-US" sz="1000" b="1" dirty="0">
                 <a:solidFill>
                   <a:schemeClr val="bg1"/>
                 </a:solidFill>
               </a:rPr>
-              <a:t>4</a:t>
-            </a:r>
-            <a:endParaRPr lang="en-US" sz="1600" dirty="0"/>
+              <a:t>설명</a:t>
+            </a:r>
+            <a:endParaRPr lang="en-US" sz="1000" dirty="0"/>
           </a:p>
         </p:txBody>
       </p:sp>
       <p:sp>
         <p:nvSpPr>
-          <p:cNvPr id="5" name="결론 카드 1"/>
+          <p:cNvPr id="5" name="설명 카드 2-1"/>
           <p:cNvSpPr/>
           <p:nvPr/>
         </p:nvSpPr>
         <p:spPr>
           <a:xfrm>
-            <a:off x="457200" y="1005840"/>
-            <a:ext cx="8229600" cy="1051560"/>
+            <a:off x="457200" y="960120"/>
+            <a:ext cx="4023360" cy="1691640"/>
           </a:xfrm>
           <a:prstGeom prst="roundRect">
             <a:avLst>
-              <a:gd name="adj" fmla="val 6957"/>
+              <a:gd name="adj" fmla="val 3243"/>
+            </a:avLst>
+          </a:prstGeom>
+          <a:solidFill>
+            <a:srgbClr val="FFFFFF"/>
+          </a:solidFill>
+          <a:ln w="9525">
+            <a:solidFill>
+              <a:srgbClr val="DCE5DF"/>
+            </a:solidFill>
+            <a:prstDash val="solid"/>
+          </a:ln>
+        </p:spPr>
+      </p:sp>
+      <p:sp>
+        <p:nvSpPr>
+          <p:cNvPr id="6" name="설명 제목 2-1"/>
+          <p:cNvSpPr txBox="1"/>
+          <p:nvPr/>
+        </p:nvSpPr>
+        <p:spPr>
+          <a:xfrm>
+            <a:off x="621792" y="1051560"/>
+            <a:ext cx="3657600" cy="274320"/>
+          </a:xfrm>
+          <a:prstGeom prst="rect">
+            <a:avLst/>
+          </a:prstGeom>
+          <a:noFill/>
+          <a:ln/>
+        </p:spPr>
+        <p:txBody>
+          <a:bodyPr wrap="square" lIns="0" tIns="0" rIns="0" bIns="0" rtlCol="0" anchor="ctr"/>
+          <a:lstStyle/>
+          <a:p>
+            <a:pPr indent="0" marL="0">
+              <a:buNone/>
+            </a:pPr>
+            <a:r>
+              <a:rPr lang="en-US" sz="1150" b="1" dirty="0">
+                <a:solidFill>
+                  <a:schemeClr val="tx2"/>
+                </a:solidFill>
+              </a:rPr>
+              <a:t>실재하는 자료다</a:t>
+            </a:r>
+            <a:endParaRPr lang="en-US" sz="1150" dirty="0"/>
+          </a:p>
+        </p:txBody>
+      </p:sp>
+      <p:sp>
+        <p:nvSpPr>
+          <p:cNvPr id="7" name="설명 내용 2-1"/>
+          <p:cNvSpPr txBox="1"/>
+          <p:nvPr/>
+        </p:nvSpPr>
+        <p:spPr>
+          <a:xfrm>
+            <a:off x="621792" y="1344168"/>
+            <a:ext cx="3703320" cy="1234440"/>
+          </a:xfrm>
+          <a:prstGeom prst="rect">
+            <a:avLst/>
+          </a:prstGeom>
+          <a:noFill/>
+          <a:ln/>
+        </p:spPr>
+        <p:txBody>
+          <a:bodyPr wrap="square" lIns="0" tIns="0" rIns="0" bIns="0" rtlCol="0" anchor="t">
+            <a:normAutofit/>
+          </a:bodyPr>
+          <a:lstStyle/>
+          <a:p>
+            <a:pPr marL="342900" indent="-342900">
+              <a:spcAft>
+                <a:spcPts val="300"/>
+              </a:spcAft>
+              <a:buSzPct val="100000"/>
+              <a:buChar char="•"/>
+            </a:pPr>
+            <a:r>
+              <a:rPr lang="en-US" sz="1050" dirty="0">
+                <a:solidFill>
+                  <a:schemeClr val="tx1"/>
+                </a:solidFill>
+              </a:rPr>
+              <a:t>질병관리청이 2005년부터 매년 하는 국가승인통계</a:t>
+            </a:r>
+            <a:endParaRPr lang="en-US" sz="1050" dirty="0"/>
+          </a:p>
+          <a:p>
+            <a:pPr marL="342900" indent="-342900">
+              <a:spcAft>
+                <a:spcPts val="300"/>
+              </a:spcAft>
+              <a:buSzPct val="100000"/>
+              <a:buChar char="•"/>
+            </a:pPr>
+            <a:r>
+              <a:rPr lang="en-US" sz="1050" dirty="0">
+                <a:solidFill>
+                  <a:schemeClr val="tx1"/>
+                </a:solidFill>
+              </a:rPr>
+              <a:t>대상 중1~고3(만 12~18세), 전국 800개교 약 6만 명</a:t>
+            </a:r>
+            <a:endParaRPr lang="en-US" sz="1050" dirty="0"/>
+          </a:p>
+          <a:p>
+            <a:pPr marL="342900" indent="-342900">
+              <a:spcAft>
+                <a:spcPts val="300"/>
+              </a:spcAft>
+              <a:buSzPct val="100000"/>
+              <a:buChar char="•"/>
+            </a:pPr>
+            <a:r>
+              <a:rPr lang="en-US" sz="1050" dirty="0">
+                <a:solidFill>
+                  <a:schemeClr val="tx1"/>
+                </a:solidFill>
+              </a:rPr>
+              <a:t>익명 온라인 조사이므로 표본조사다</a:t>
+            </a:r>
+            <a:endParaRPr lang="en-US" sz="1050" dirty="0"/>
+          </a:p>
+        </p:txBody>
+      </p:sp>
+      <p:sp>
+        <p:nvSpPr>
+          <p:cNvPr id="8" name="설명 카드 2-2"/>
+          <p:cNvSpPr/>
+          <p:nvPr/>
+        </p:nvSpPr>
+        <p:spPr>
+          <a:xfrm>
+            <a:off x="4663440" y="960120"/>
+            <a:ext cx="4023360" cy="1691640"/>
+          </a:xfrm>
+          <a:prstGeom prst="roundRect">
+            <a:avLst>
+              <a:gd name="adj" fmla="val 3243"/>
+            </a:avLst>
+          </a:prstGeom>
+          <a:solidFill>
+            <a:srgbClr val="FFFFFF"/>
+          </a:solidFill>
+          <a:ln w="9525">
+            <a:solidFill>
+              <a:srgbClr val="DCE5DF"/>
+            </a:solidFill>
+            <a:prstDash val="solid"/>
+          </a:ln>
+        </p:spPr>
+      </p:sp>
+      <p:sp>
+        <p:nvSpPr>
+          <p:cNvPr id="9" name="설명 제목 2-2"/>
+          <p:cNvSpPr txBox="1"/>
+          <p:nvPr/>
+        </p:nvSpPr>
+        <p:spPr>
+          <a:xfrm>
+            <a:off x="4828032" y="1051560"/>
+            <a:ext cx="3657600" cy="274320"/>
+          </a:xfrm>
+          <a:prstGeom prst="rect">
+            <a:avLst/>
+          </a:prstGeom>
+          <a:noFill/>
+          <a:ln/>
+        </p:spPr>
+        <p:txBody>
+          <a:bodyPr wrap="square" lIns="0" tIns="0" rIns="0" bIns="0" rtlCol="0" anchor="ctr"/>
+          <a:lstStyle/>
+          <a:p>
+            <a:pPr indent="0" marL="0">
+              <a:buNone/>
+            </a:pPr>
+            <a:r>
+              <a:rPr lang="en-US" sz="1150" b="1" dirty="0">
+                <a:solidFill>
+                  <a:schemeClr val="tx2"/>
+                </a:solidFill>
+              </a:rPr>
+              <a:t>얻는 길</a:t>
+            </a:r>
+            <a:endParaRPr lang="en-US" sz="1150" dirty="0"/>
+          </a:p>
+        </p:txBody>
+      </p:sp>
+      <p:sp>
+        <p:nvSpPr>
+          <p:cNvPr id="10" name="설명 내용 2-2"/>
+          <p:cNvSpPr txBox="1"/>
+          <p:nvPr/>
+        </p:nvSpPr>
+        <p:spPr>
+          <a:xfrm>
+            <a:off x="4828032" y="1344168"/>
+            <a:ext cx="3703320" cy="1234440"/>
+          </a:xfrm>
+          <a:prstGeom prst="rect">
+            <a:avLst/>
+          </a:prstGeom>
+          <a:noFill/>
+          <a:ln/>
+        </p:spPr>
+        <p:txBody>
+          <a:bodyPr wrap="square" lIns="0" tIns="0" rIns="0" bIns="0" rtlCol="0" anchor="t">
+            <a:normAutofit/>
+          </a:bodyPr>
+          <a:lstStyle/>
+          <a:p>
+            <a:pPr marL="342900" indent="-342900">
+              <a:spcAft>
+                <a:spcPts val="300"/>
+              </a:spcAft>
+              <a:buSzPct val="100000"/>
+              <a:buChar char="•"/>
+            </a:pPr>
+            <a:r>
+              <a:rPr lang="en-US" sz="1050" dirty="0">
+                <a:solidFill>
+                  <a:schemeClr val="tx1"/>
+                </a:solidFill>
+              </a:rPr>
+              <a:t>KOSIS(kosis.kr) → 국내통계 → 보건 → 청소년건강행태조사 → 아침식사 결식률</a:t>
+            </a:r>
+            <a:endParaRPr lang="en-US" sz="1050" dirty="0"/>
+          </a:p>
+          <a:p>
+            <a:pPr marL="342900" indent="-342900">
+              <a:spcAft>
+                <a:spcPts val="300"/>
+              </a:spcAft>
+              <a:buSzPct val="100000"/>
+              <a:buChar char="•"/>
+            </a:pPr>
+            <a:r>
+              <a:rPr lang="en-US" sz="1050" dirty="0">
+                <a:solidFill>
+                  <a:schemeClr val="tx1"/>
+                </a:solidFill>
+              </a:rPr>
+              <a:t>또는 조사 누리집 yhs.kdca.go.kr → 통계 → 지표별 통계</a:t>
+            </a:r>
+            <a:endParaRPr lang="en-US" sz="1050" dirty="0"/>
+          </a:p>
+          <a:p>
+            <a:pPr marL="342900" indent="-342900">
+              <a:spcAft>
+                <a:spcPts val="300"/>
+              </a:spcAft>
+              <a:buSzPct val="100000"/>
+              <a:buChar char="•"/>
+            </a:pPr>
+            <a:r>
+              <a:rPr lang="en-US" sz="1050" dirty="0">
+                <a:solidFill>
+                  <a:schemeClr val="tx1"/>
+                </a:solidFill>
+              </a:rPr>
+              <a:t>표를 엑셀로 내려받을 수 있다</a:t>
+            </a:r>
+            <a:endParaRPr lang="en-US" sz="1050" dirty="0"/>
+          </a:p>
+        </p:txBody>
+      </p:sp>
+      <p:sp>
+        <p:nvSpPr>
+          <p:cNvPr id="11" name="설명 카드 2-3"/>
+          <p:cNvSpPr/>
+          <p:nvPr/>
+        </p:nvSpPr>
+        <p:spPr>
+          <a:xfrm>
+            <a:off x="457200" y="2788920"/>
+            <a:ext cx="4023360" cy="1691640"/>
+          </a:xfrm>
+          <a:prstGeom prst="roundRect">
+            <a:avLst>
+              <a:gd name="adj" fmla="val 3243"/>
+            </a:avLst>
+          </a:prstGeom>
+          <a:solidFill>
+            <a:srgbClr val="FFFFFF"/>
+          </a:solidFill>
+          <a:ln w="9525">
+            <a:solidFill>
+              <a:srgbClr val="DCE5DF"/>
+            </a:solidFill>
+            <a:prstDash val="solid"/>
+          </a:ln>
+        </p:spPr>
+      </p:sp>
+      <p:sp>
+        <p:nvSpPr>
+          <p:cNvPr id="12" name="설명 제목 2-3"/>
+          <p:cNvSpPr txBox="1"/>
+          <p:nvPr/>
+        </p:nvSpPr>
+        <p:spPr>
+          <a:xfrm>
+            <a:off x="621792" y="2880360"/>
+            <a:ext cx="3657600" cy="274320"/>
+          </a:xfrm>
+          <a:prstGeom prst="rect">
+            <a:avLst/>
+          </a:prstGeom>
+          <a:noFill/>
+          <a:ln/>
+        </p:spPr>
+        <p:txBody>
+          <a:bodyPr wrap="square" lIns="0" tIns="0" rIns="0" bIns="0" rtlCol="0" anchor="ctr"/>
+          <a:lstStyle/>
+          <a:p>
+            <a:pPr indent="0" marL="0">
+              <a:buNone/>
+            </a:pPr>
+            <a:r>
+              <a:rPr lang="en-US" sz="1150" b="1" dirty="0">
+                <a:solidFill>
+                  <a:schemeClr val="tx2"/>
+                </a:solidFill>
+              </a:rPr>
+              <a:t>원자료 → 가공</a:t>
+            </a:r>
+            <a:endParaRPr lang="en-US" sz="1150" dirty="0"/>
+          </a:p>
+        </p:txBody>
+      </p:sp>
+      <p:sp>
+        <p:nvSpPr>
+          <p:cNvPr id="13" name="설명 내용 2-3"/>
+          <p:cNvSpPr txBox="1"/>
+          <p:nvPr/>
+        </p:nvSpPr>
+        <p:spPr>
+          <a:xfrm>
+            <a:off x="621792" y="3172968"/>
+            <a:ext cx="3703320" cy="1234440"/>
+          </a:xfrm>
+          <a:prstGeom prst="rect">
+            <a:avLst/>
+          </a:prstGeom>
+          <a:noFill/>
+          <a:ln/>
+        </p:spPr>
+        <p:txBody>
+          <a:bodyPr wrap="square" lIns="0" tIns="0" rIns="0" bIns="0" rtlCol="0" anchor="t">
+            <a:normAutofit/>
+          </a:bodyPr>
+          <a:lstStyle/>
+          <a:p>
+            <a:pPr marL="342900" indent="-342900">
+              <a:spcAft>
+                <a:spcPts val="300"/>
+              </a:spcAft>
+              <a:buSzPct val="100000"/>
+              <a:buChar char="•"/>
+            </a:pPr>
+            <a:r>
+              <a:rPr lang="en-US" sz="1050" dirty="0">
+                <a:solidFill>
+                  <a:schemeClr val="tx1"/>
+                </a:solidFill>
+              </a:rPr>
+              <a:t>원자료: 연도(2005~) × 구분(전체·남·여·학교급·학년·시도)</a:t>
+            </a:r>
+            <a:endParaRPr lang="en-US" sz="1050" dirty="0"/>
+          </a:p>
+          <a:p>
+            <a:pPr marL="342900" indent="-342900">
+              <a:spcAft>
+                <a:spcPts val="300"/>
+              </a:spcAft>
+              <a:buSzPct val="100000"/>
+              <a:buChar char="•"/>
+            </a:pPr>
+            <a:r>
+              <a:rPr lang="en-US" sz="1050" dirty="0">
+                <a:solidFill>
+                  <a:schemeClr val="tx1"/>
+                </a:solidFill>
+              </a:rPr>
+              <a:t>남·여 두 줄, 최근 5년만 골라 옮김</a:t>
+            </a:r>
+            <a:endParaRPr lang="en-US" sz="1050" dirty="0"/>
+          </a:p>
+          <a:p>
+            <a:pPr marL="342900" indent="-342900">
+              <a:spcAft>
+                <a:spcPts val="300"/>
+              </a:spcAft>
+              <a:buSzPct val="100000"/>
+              <a:buChar char="•"/>
+            </a:pPr>
+            <a:r>
+              <a:rPr lang="en-US" sz="1050" dirty="0">
+                <a:solidFill>
+                  <a:schemeClr val="tx1"/>
+                </a:solidFill>
+              </a:rPr>
+              <a:t>뜻: 최근 7일 중 아침을 5일 이상 안 먹은 학생의 비율</a:t>
+            </a:r>
+            <a:endParaRPr lang="en-US" sz="1050" dirty="0"/>
+          </a:p>
+        </p:txBody>
+      </p:sp>
+      <p:sp>
+        <p:nvSpPr>
+          <p:cNvPr id="14" name="설명 카드 2-4"/>
+          <p:cNvSpPr/>
+          <p:nvPr/>
+        </p:nvSpPr>
+        <p:spPr>
+          <a:xfrm>
+            <a:off x="4663440" y="2788920"/>
+            <a:ext cx="4023360" cy="1691640"/>
+          </a:xfrm>
+          <a:prstGeom prst="roundRect">
+            <a:avLst>
+              <a:gd name="adj" fmla="val 3243"/>
+            </a:avLst>
+          </a:prstGeom>
+          <a:solidFill>
+            <a:srgbClr val="FFFFFF"/>
+          </a:solidFill>
+          <a:ln w="9525">
+            <a:solidFill>
+              <a:srgbClr val="DCE5DF"/>
+            </a:solidFill>
+            <a:prstDash val="solid"/>
+          </a:ln>
+        </p:spPr>
+      </p:sp>
+      <p:sp>
+        <p:nvSpPr>
+          <p:cNvPr id="15" name="설명 제목 2-4"/>
+          <p:cNvSpPr txBox="1"/>
+          <p:nvPr/>
+        </p:nvSpPr>
+        <p:spPr>
+          <a:xfrm>
+            <a:off x="4828032" y="2880360"/>
+            <a:ext cx="3657600" cy="274320"/>
+          </a:xfrm>
+          <a:prstGeom prst="rect">
+            <a:avLst/>
+          </a:prstGeom>
+          <a:noFill/>
+          <a:ln/>
+        </p:spPr>
+        <p:txBody>
+          <a:bodyPr wrap="square" lIns="0" tIns="0" rIns="0" bIns="0" rtlCol="0" anchor="ctr"/>
+          <a:lstStyle/>
+          <a:p>
+            <a:pPr indent="0" marL="0">
+              <a:buNone/>
+            </a:pPr>
+            <a:r>
+              <a:rPr lang="en-US" sz="1150" b="1" dirty="0">
+                <a:solidFill>
+                  <a:schemeClr val="tx2"/>
+                </a:solidFill>
+              </a:rPr>
+              <a:t>채점 연결</a:t>
+            </a:r>
+            <a:endParaRPr lang="en-US" sz="1150" dirty="0"/>
+          </a:p>
+        </p:txBody>
+      </p:sp>
+      <p:sp>
+        <p:nvSpPr>
+          <p:cNvPr id="16" name="설명 내용 2-4"/>
+          <p:cNvSpPr txBox="1"/>
+          <p:nvPr/>
+        </p:nvSpPr>
+        <p:spPr>
+          <a:xfrm>
+            <a:off x="4828032" y="3172968"/>
+            <a:ext cx="3703320" cy="1234440"/>
+          </a:xfrm>
+          <a:prstGeom prst="rect">
+            <a:avLst/>
+          </a:prstGeom>
+          <a:noFill/>
+          <a:ln/>
+        </p:spPr>
+        <p:txBody>
+          <a:bodyPr wrap="square" lIns="0" tIns="0" rIns="0" bIns="0" rtlCol="0" anchor="t">
+            <a:normAutofit/>
+          </a:bodyPr>
+          <a:lstStyle/>
+          <a:p>
+            <a:pPr marL="342900" indent="-342900">
+              <a:spcAft>
+                <a:spcPts val="300"/>
+              </a:spcAft>
+              <a:buSzPct val="100000"/>
+              <a:buChar char="•"/>
+            </a:pPr>
+            <a:r>
+              <a:rPr lang="en-US" sz="1050" dirty="0">
+                <a:solidFill>
+                  <a:schemeClr val="tx1"/>
+                </a:solidFill>
+              </a:rPr>
+              <a:t>2-① 기관과 조사 이름</a:t>
+            </a:r>
+            <a:endParaRPr lang="en-US" sz="1050" dirty="0"/>
+          </a:p>
+          <a:p>
+            <a:pPr marL="342900" indent="-342900">
+              <a:spcAft>
+                <a:spcPts val="300"/>
+              </a:spcAft>
+              <a:buSzPct val="100000"/>
+              <a:buChar char="•"/>
+            </a:pPr>
+            <a:r>
+              <a:rPr lang="en-US" sz="1050" dirty="0">
+                <a:solidFill>
+                  <a:schemeClr val="tx1"/>
+                </a:solidFill>
+              </a:rPr>
+              <a:t>2-② 표본조사의 근거: '800개교 약 6만 명을 뽑아'</a:t>
+            </a:r>
+            <a:endParaRPr lang="en-US" sz="1050" dirty="0"/>
+          </a:p>
+          <a:p>
+            <a:pPr marL="342900" indent="-342900">
+              <a:spcAft>
+                <a:spcPts val="300"/>
+              </a:spcAft>
+              <a:buSzPct val="100000"/>
+              <a:buChar char="•"/>
+            </a:pPr>
+            <a:r>
+              <a:rPr lang="en-US" sz="1050" dirty="0">
+                <a:solidFill>
+                  <a:schemeClr val="tx1"/>
+                </a:solidFill>
+              </a:rPr>
+              <a:t>2-③ 필요한 행·열만 고른 표(원자료를 통째로 옮기면 미충족)</a:t>
+            </a:r>
+            <a:endParaRPr lang="en-US" sz="1050" dirty="0"/>
+          </a:p>
+        </p:txBody>
+      </p:sp>
+      <p:sp>
+        <p:nvSpPr>
+          <p:cNvPr id="25" name="Slide Number Placeholder 0"/>
+          <p:cNvSpPr>
+            <a:spLocks noGrp="1"/>
+          </p:cNvSpPr>
+          <p:nvPr>
+            <p:ph type="sldNum" sz="quarter" idx="4294967295"/>
+          </p:nvPr>
+        </p:nvSpPr>
+        <p:spPr>
+          <a:xfrm>
+            <a:off x="8229600" y="4754880"/>
+            <a:ext cx="457200" cy="228600"/>
+          </a:xfrm>
+          <a:prstGeom prst="rect">
+            <a:avLst/>
+          </a:prstGeom>
+          <a:extLst>
+            <a:ext uri="{C572A759-6A51-4108-AA02-DFA0A04FC94B}">
+              <ma14:wrappingTextBoxFlag xmlns:ma14="http://schemas.microsoft.com/office/mac/drawingml/2011/main" val="0"/>
+            </a:ext>
+          </a:extLst>
+        </p:spPr>
+        <p:txBody>
+          <a:bodyPr/>
+          <a:lstStyle>
+            <a:lvl1pPr>
+              <a:defRPr sz="900">
+                <a:solidFill>
+                  <a:srgbClr val="6B6759"/>
+                </a:solidFill>
+              </a:defRPr>
+            </a:lvl1pPr>
+          </a:lstStyle>
+          <a:p>
+            <a:pPr algn="r"/>
+            <a:fld id="{F7021451-1387-4CA6-816F-3879F97B5CBC}" type="slidenum">
+              <a:rPr b="0" lang="en-US"/>
+              <a:t>4</a:t>
+            </a:fld>
+            <a:endParaRPr lang="en-US"/>
+          </a:p>
+        </p:txBody>
+      </p:sp>
+    </p:spTree>
+  </p:cSld>
+  <p:clrMapOvr>
+    <a:masterClrMapping/>
+  </p:clrMapOvr>
+</p:sld>
+</file>
+
+<file path=ppt/slides/slide5.xml><?xml version="1.0" encoding="utf-8"?>
+<p:sld xmlns:a="http://schemas.openxmlformats.org/drawingml/2006/main" xmlns:r="http://schemas.openxmlformats.org/officeDocument/2006/relationships" xmlns:p="http://schemas.openxmlformats.org/presentationml/2006/main">
+  <p:cSld name="Slide 5">
+    <p:spTree>
+      <p:nvGrpSpPr>
+        <p:cNvPr id="1" name=""/>
+        <p:cNvGrpSpPr/>
+        <p:nvPr/>
+      </p:nvGrpSpPr>
+      <p:grpSpPr>
+        <a:xfrm>
+          <a:off x="0" y="0"/>
+          <a:ext cx="0" cy="0"/>
+          <a:chOff x="0" y="0"/>
+          <a:chExt cx="0" cy="0"/>
+        </a:xfrm>
+      </p:grpSpPr>
+      <p:sp>
+        <p:nvSpPr>
+          <p:cNvPr id="2" name="Text 0"/>
+          <p:cNvSpPr/>
+          <p:nvPr>
+            <p:ph idx="100" type="title" hasCustomPrompt="1"/>
+          </p:nvPr>
+        </p:nvSpPr>
+        <p:spPr>
+          <a:xfrm>
+            <a:off x="960120" y="274320"/>
+            <a:ext cx="7726680" cy="548640"/>
+          </a:xfrm>
+          <a:prstGeom prst="rect">
+            <a:avLst/>
+          </a:prstGeom>
+          <a:noFill/>
+          <a:ln/>
+        </p:spPr>
+        <p:txBody>
+          <a:bodyPr wrap="square" lIns="0" tIns="0" rIns="0" bIns="0" rtlCol="0" anchor="ctr"/>
+          <a:lstStyle/>
+          <a:p>
+            <a:pPr algn="l" indent="0" marL="0">
+              <a:buNone/>
+            </a:pPr>
+            <a:r>
+              <a:rPr lang="en-US" sz="2400" b="1" dirty="0">
+                <a:solidFill>
+                  <a:schemeClr val="tx2"/>
+                </a:solidFill>
+              </a:rPr>
+              <a:t>그래프와 해석</a:t>
+            </a:r>
+            <a:endParaRPr lang="en-US" sz="2400" dirty="0"/>
+          </a:p>
+        </p:txBody>
+      </p:sp>
+      <p:sp>
+        <p:nvSpPr>
+          <p:cNvPr id="3" name="번호 3"/>
+          <p:cNvSpPr/>
+          <p:nvPr/>
+        </p:nvSpPr>
+        <p:spPr>
+          <a:xfrm>
+            <a:off x="457200" y="356616"/>
+            <a:ext cx="384048" cy="384048"/>
+          </a:xfrm>
+          <a:prstGeom prst="ellipse">
+            <a:avLst/>
+          </a:prstGeom>
+          <a:solidFill>
+            <a:schemeClr val="accent1"/>
+          </a:solidFill>
+          <a:ln w="12700">
+            <a:solidFill>
+              <a:schemeClr val="accent1"/>
+            </a:solidFill>
+            <a:prstDash val="solid"/>
+          </a:ln>
+        </p:spPr>
+      </p:sp>
+      <p:sp>
+        <p:nvSpPr>
+          <p:cNvPr id="4" name="번호 글자 3"/>
+          <p:cNvSpPr txBox="1"/>
+          <p:nvPr/>
+        </p:nvSpPr>
+        <p:spPr>
+          <a:xfrm>
+            <a:off x="457200" y="356616"/>
+            <a:ext cx="384048" cy="384048"/>
+          </a:xfrm>
+          <a:prstGeom prst="rect">
+            <a:avLst/>
+          </a:prstGeom>
+          <a:noFill/>
+          <a:ln/>
+        </p:spPr>
+        <p:txBody>
+          <a:bodyPr wrap="square" lIns="0" tIns="0" rIns="0" bIns="0" rtlCol="0" anchor="ctr"/>
+          <a:lstStyle/>
+          <a:p>
+            <a:pPr algn="ctr" indent="0" marL="0">
+              <a:buNone/>
+            </a:pPr>
+            <a:r>
+              <a:rPr lang="en-US" sz="1600" b="1" dirty="0">
+                <a:solidFill>
+                  <a:schemeClr val="bg1"/>
+                </a:solidFill>
+              </a:rPr>
+              <a:t>3</a:t>
+            </a:r>
+            <a:endParaRPr lang="en-US" sz="1600" dirty="0"/>
+          </a:p>
+        </p:txBody>
+      </p:sp>
+      <p:graphicFrame>
+        <p:nvGraphicFramePr>
+          <p:cNvPr id="5" name="주 5일 이상 아침식사 결식률 (단위: %)" descr=""/>
+          <p:cNvGraphicFramePr/>
+          <p:nvPr/>
+        </p:nvGraphicFramePr>
+        <p:xfrm>
+          <a:off x="457200" y="960120"/>
+          <a:ext cx="4023360" cy="2011680"/>
+        </p:xfrm>
+        <a:graphic xmlns:a="http://schemas.openxmlformats.org/drawingml/2006/main">
+          <a:graphicData uri="http://schemas.openxmlformats.org/drawingml/2006/chart">
+            <c:chart xmlns:c="http://schemas.openxmlformats.org/drawingml/2006/chart" r:id="rId1"/>
+          </a:graphicData>
+        </a:graphic>
+      </p:graphicFrame>
+      <p:sp>
+        <p:nvSpPr>
+          <p:cNvPr id="6" name="확률분포표 안내"/>
+          <p:cNvSpPr txBox="1"/>
+          <p:nvPr/>
+        </p:nvSpPr>
+        <p:spPr>
+          <a:xfrm>
+            <a:off x="4663440" y="960120"/>
+            <a:ext cx="4023360" cy="457200"/>
+          </a:xfrm>
+          <a:prstGeom prst="rect">
+            <a:avLst/>
+          </a:prstGeom>
+          <a:noFill/>
+          <a:ln/>
+        </p:spPr>
+        <p:txBody>
+          <a:bodyPr wrap="square" lIns="0" tIns="0" rIns="0" bIns="0" rtlCol="0" anchor="ctr"/>
+          <a:lstStyle/>
+          <a:p>
+            <a:pPr indent="0" marL="0">
+              <a:buNone/>
+            </a:pPr>
+            <a:r>
+              <a:rPr lang="en-US" sz="950" dirty="0">
+                <a:solidFill>
+                  <a:schemeClr val="accent3"/>
+                </a:solidFill>
+              </a:rPr>
+              <a:t>확률분포표 · 2025년 여학생 4명 모둠에서 주 5일 이상 아침을 거르는 학생 수 X (한 명이 거를 확률 p = 0.453, 이항분포)</a:t>
+            </a:r>
+            <a:endParaRPr lang="en-US" sz="950" dirty="0"/>
+          </a:p>
+        </p:txBody>
+      </p:sp>
+      <p:graphicFrame>
+        <p:nvGraphicFramePr>
+          <p:cNvPr id="6" name="확률분포표"/>
+          <p:cNvGraphicFramePr>
+            <a:graphicFrameLocks noGrp="1"/>
+          </p:cNvGraphicFramePr>
+          <p:nvPr>
+            <p:extLst>
+              <p:ext uri="{D42A27DB-BD31-4B8C-83A1-F6EECF244321}">
+                <p14:modId xmlns:p14="http://schemas.microsoft.com/office/powerpoint/2010/main" val="1579011935"/>
+              </p:ext>
+            </p:extLst>
+          </p:nvPr>
+        </p:nvGraphicFramePr>
+        <p:xfrm>
+          <a:off x="4663440" y="1463040"/>
+          <a:ext cx="4023360" cy="914400"/>
+        </p:xfrm>
+        <a:graphic>
+          <a:graphicData uri="http://schemas.openxmlformats.org/drawingml/2006/table">
+            <a:tbl>
+              <a:tblPr/>
+              <a:tblGrid>
+                <a:gridCol w="822960"/>
+                <a:gridCol w="512064"/>
+                <a:gridCol w="512064"/>
+                <a:gridCol w="512064"/>
+                <a:gridCol w="512064"/>
+                <a:gridCol w="512064"/>
+                <a:gridCol w="640080"/>
+              </a:tblGrid>
+              <a:tr h="274320">
+                <a:tc>
+                  <a:txBody>
+                    <a:bodyPr/>
+                    <a:lstStyle/>
+                    <a:p>
+                      <a:pPr algn="ctr" indent="0" marL="0">
+                        <a:buNone/>
+                      </a:pPr>
+                      <a:r>
+                        <a:rPr lang="en-US" sz="950" b="1" dirty="0">
+                          <a:solidFill>
+                            <a:srgbClr val="1B211D"/>
+                          </a:solidFill>
+                        </a:rPr>
+                        <a:t>X</a:t>
+                      </a:r>
+                      <a:endParaRPr lang="en-US" sz="950" dirty="0"/>
+                    </a:p>
+                  </a:txBody>
+                  <a:tcPr marL="27432" marR="27432" marT="27432" marB="27432" anchor="ctr">
+                    <a:lnL w="9525" cap="flat" cmpd="sng" algn="ctr">
+                      <a:solidFill>
+                        <a:srgbClr val="B9B4A6"/>
+                      </a:solidFill>
+                      <a:prstDash val="solid"/>
+                      <a:round/>
+                      <a:headEnd type="none" w="med" len="med"/>
+                      <a:tailEnd type="none" w="med" len="med"/>
+                    </a:lnL>
+                    <a:lnR w="9525" cap="flat" cmpd="sng" algn="ctr">
+                      <a:solidFill>
+                        <a:srgbClr val="B9B4A6"/>
+                      </a:solidFill>
+                      <a:prstDash val="solid"/>
+                      <a:round/>
+                      <a:headEnd type="none" w="med" len="med"/>
+                      <a:tailEnd type="none" w="med" len="med"/>
+                    </a:lnR>
+                    <a:lnT w="9525" cap="flat" cmpd="sng" algn="ctr">
+                      <a:solidFill>
+                        <a:srgbClr val="B9B4A6"/>
+                      </a:solidFill>
+                      <a:prstDash val="solid"/>
+                      <a:round/>
+                      <a:headEnd type="none" w="med" len="med"/>
+                      <a:tailEnd type="none" w="med" len="med"/>
+                    </a:lnT>
+                    <a:lnB w="9525" cap="flat" cmpd="sng" algn="ctr">
+                      <a:solidFill>
+                        <a:srgbClr val="B9B4A6"/>
+                      </a:solidFill>
+                      <a:prstDash val="solid"/>
+                      <a:round/>
+                      <a:headEnd type="none" w="med" len="med"/>
+                      <a:tailEnd type="none" w="med" len="med"/>
+                    </a:lnB>
+                    <a:solidFill>
+                      <a:srgbClr val="EEF3EF"/>
+                    </a:solidFill>
+                  </a:tcPr>
+                </a:tc>
+                <a:tc>
+                  <a:txBody>
+                    <a:bodyPr/>
+                    <a:lstStyle/>
+                    <a:p>
+                      <a:pPr algn="ctr" indent="0" marL="0">
+                        <a:buNone/>
+                      </a:pPr>
+                      <a:r>
+                        <a:rPr lang="en-US" sz="950" b="1" dirty="0">
+                          <a:solidFill>
+                            <a:srgbClr val="1B211D"/>
+                          </a:solidFill>
+                        </a:rPr>
+                        <a:t>0</a:t>
+                      </a:r>
+                      <a:endParaRPr lang="en-US" sz="950" dirty="0"/>
+                    </a:p>
+                  </a:txBody>
+                  <a:tcPr marL="27432" marR="27432" marT="27432" marB="27432" anchor="ctr">
+                    <a:lnL w="9525" cap="flat" cmpd="sng" algn="ctr">
+                      <a:solidFill>
+                        <a:srgbClr val="B9B4A6"/>
+                      </a:solidFill>
+                      <a:prstDash val="solid"/>
+                      <a:round/>
+                      <a:headEnd type="none" w="med" len="med"/>
+                      <a:tailEnd type="none" w="med" len="med"/>
+                    </a:lnL>
+                    <a:lnR w="9525" cap="flat" cmpd="sng" algn="ctr">
+                      <a:solidFill>
+                        <a:srgbClr val="B9B4A6"/>
+                      </a:solidFill>
+                      <a:prstDash val="solid"/>
+                      <a:round/>
+                      <a:headEnd type="none" w="med" len="med"/>
+                      <a:tailEnd type="none" w="med" len="med"/>
+                    </a:lnR>
+                    <a:lnT w="9525" cap="flat" cmpd="sng" algn="ctr">
+                      <a:solidFill>
+                        <a:srgbClr val="B9B4A6"/>
+                      </a:solidFill>
+                      <a:prstDash val="solid"/>
+                      <a:round/>
+                      <a:headEnd type="none" w="med" len="med"/>
+                      <a:tailEnd type="none" w="med" len="med"/>
+                    </a:lnT>
+                    <a:lnB w="9525" cap="flat" cmpd="sng" algn="ctr">
+                      <a:solidFill>
+                        <a:srgbClr val="B9B4A6"/>
+                      </a:solidFill>
+                      <a:prstDash val="solid"/>
+                      <a:round/>
+                      <a:headEnd type="none" w="med" len="med"/>
+                      <a:tailEnd type="none" w="med" len="med"/>
+                    </a:lnB>
+                    <a:solidFill>
+                      <a:srgbClr val="EEF3EF"/>
+                    </a:solidFill>
+                  </a:tcPr>
+                </a:tc>
+                <a:tc>
+                  <a:txBody>
+                    <a:bodyPr/>
+                    <a:lstStyle/>
+                    <a:p>
+                      <a:pPr algn="ctr" indent="0" marL="0">
+                        <a:buNone/>
+                      </a:pPr>
+                      <a:r>
+                        <a:rPr lang="en-US" sz="950" b="1" dirty="0">
+                          <a:solidFill>
+                            <a:srgbClr val="1B211D"/>
+                          </a:solidFill>
+                        </a:rPr>
+                        <a:t>1</a:t>
+                      </a:r>
+                      <a:endParaRPr lang="en-US" sz="950" dirty="0"/>
+                    </a:p>
+                  </a:txBody>
+                  <a:tcPr marL="27432" marR="27432" marT="27432" marB="27432" anchor="ctr">
+                    <a:lnL w="9525" cap="flat" cmpd="sng" algn="ctr">
+                      <a:solidFill>
+                        <a:srgbClr val="B9B4A6"/>
+                      </a:solidFill>
+                      <a:prstDash val="solid"/>
+                      <a:round/>
+                      <a:headEnd type="none" w="med" len="med"/>
+                      <a:tailEnd type="none" w="med" len="med"/>
+                    </a:lnL>
+                    <a:lnR w="9525" cap="flat" cmpd="sng" algn="ctr">
+                      <a:solidFill>
+                        <a:srgbClr val="B9B4A6"/>
+                      </a:solidFill>
+                      <a:prstDash val="solid"/>
+                      <a:round/>
+                      <a:headEnd type="none" w="med" len="med"/>
+                      <a:tailEnd type="none" w="med" len="med"/>
+                    </a:lnR>
+                    <a:lnT w="9525" cap="flat" cmpd="sng" algn="ctr">
+                      <a:solidFill>
+                        <a:srgbClr val="B9B4A6"/>
+                      </a:solidFill>
+                      <a:prstDash val="solid"/>
+                      <a:round/>
+                      <a:headEnd type="none" w="med" len="med"/>
+                      <a:tailEnd type="none" w="med" len="med"/>
+                    </a:lnT>
+                    <a:lnB w="9525" cap="flat" cmpd="sng" algn="ctr">
+                      <a:solidFill>
+                        <a:srgbClr val="B9B4A6"/>
+                      </a:solidFill>
+                      <a:prstDash val="solid"/>
+                      <a:round/>
+                      <a:headEnd type="none" w="med" len="med"/>
+                      <a:tailEnd type="none" w="med" len="med"/>
+                    </a:lnB>
+                    <a:solidFill>
+                      <a:srgbClr val="EEF3EF"/>
+                    </a:solidFill>
+                  </a:tcPr>
+                </a:tc>
+                <a:tc>
+                  <a:txBody>
+                    <a:bodyPr/>
+                    <a:lstStyle/>
+                    <a:p>
+                      <a:pPr algn="ctr" indent="0" marL="0">
+                        <a:buNone/>
+                      </a:pPr>
+                      <a:r>
+                        <a:rPr lang="en-US" sz="950" b="1" dirty="0">
+                          <a:solidFill>
+                            <a:srgbClr val="1B211D"/>
+                          </a:solidFill>
+                        </a:rPr>
+                        <a:t>2</a:t>
+                      </a:r>
+                      <a:endParaRPr lang="en-US" sz="950" dirty="0"/>
+                    </a:p>
+                  </a:txBody>
+                  <a:tcPr marL="27432" marR="27432" marT="27432" marB="27432" anchor="ctr">
+                    <a:lnL w="9525" cap="flat" cmpd="sng" algn="ctr">
+                      <a:solidFill>
+                        <a:srgbClr val="B9B4A6"/>
+                      </a:solidFill>
+                      <a:prstDash val="solid"/>
+                      <a:round/>
+                      <a:headEnd type="none" w="med" len="med"/>
+                      <a:tailEnd type="none" w="med" len="med"/>
+                    </a:lnL>
+                    <a:lnR w="9525" cap="flat" cmpd="sng" algn="ctr">
+                      <a:solidFill>
+                        <a:srgbClr val="B9B4A6"/>
+                      </a:solidFill>
+                      <a:prstDash val="solid"/>
+                      <a:round/>
+                      <a:headEnd type="none" w="med" len="med"/>
+                      <a:tailEnd type="none" w="med" len="med"/>
+                    </a:lnR>
+                    <a:lnT w="9525" cap="flat" cmpd="sng" algn="ctr">
+                      <a:solidFill>
+                        <a:srgbClr val="B9B4A6"/>
+                      </a:solidFill>
+                      <a:prstDash val="solid"/>
+                      <a:round/>
+                      <a:headEnd type="none" w="med" len="med"/>
+                      <a:tailEnd type="none" w="med" len="med"/>
+                    </a:lnT>
+                    <a:lnB w="9525" cap="flat" cmpd="sng" algn="ctr">
+                      <a:solidFill>
+                        <a:srgbClr val="B9B4A6"/>
+                      </a:solidFill>
+                      <a:prstDash val="solid"/>
+                      <a:round/>
+                      <a:headEnd type="none" w="med" len="med"/>
+                      <a:tailEnd type="none" w="med" len="med"/>
+                    </a:lnB>
+                    <a:solidFill>
+                      <a:srgbClr val="EEF3EF"/>
+                    </a:solidFill>
+                  </a:tcPr>
+                </a:tc>
+                <a:tc>
+                  <a:txBody>
+                    <a:bodyPr/>
+                    <a:lstStyle/>
+                    <a:p>
+                      <a:pPr algn="ctr" indent="0" marL="0">
+                        <a:buNone/>
+                      </a:pPr>
+                      <a:r>
+                        <a:rPr lang="en-US" sz="950" b="1" dirty="0">
+                          <a:solidFill>
+                            <a:srgbClr val="1B211D"/>
+                          </a:solidFill>
+                        </a:rPr>
+                        <a:t>3</a:t>
+                      </a:r>
+                      <a:endParaRPr lang="en-US" sz="950" dirty="0"/>
+                    </a:p>
+                  </a:txBody>
+                  <a:tcPr marL="27432" marR="27432" marT="27432" marB="27432" anchor="ctr">
+                    <a:lnL w="9525" cap="flat" cmpd="sng" algn="ctr">
+                      <a:solidFill>
+                        <a:srgbClr val="B9B4A6"/>
+                      </a:solidFill>
+                      <a:prstDash val="solid"/>
+                      <a:round/>
+                      <a:headEnd type="none" w="med" len="med"/>
+                      <a:tailEnd type="none" w="med" len="med"/>
+                    </a:lnL>
+                    <a:lnR w="9525" cap="flat" cmpd="sng" algn="ctr">
+                      <a:solidFill>
+                        <a:srgbClr val="B9B4A6"/>
+                      </a:solidFill>
+                      <a:prstDash val="solid"/>
+                      <a:round/>
+                      <a:headEnd type="none" w="med" len="med"/>
+                      <a:tailEnd type="none" w="med" len="med"/>
+                    </a:lnR>
+                    <a:lnT w="9525" cap="flat" cmpd="sng" algn="ctr">
+                      <a:solidFill>
+                        <a:srgbClr val="B9B4A6"/>
+                      </a:solidFill>
+                      <a:prstDash val="solid"/>
+                      <a:round/>
+                      <a:headEnd type="none" w="med" len="med"/>
+                      <a:tailEnd type="none" w="med" len="med"/>
+                    </a:lnT>
+                    <a:lnB w="9525" cap="flat" cmpd="sng" algn="ctr">
+                      <a:solidFill>
+                        <a:srgbClr val="B9B4A6"/>
+                      </a:solidFill>
+                      <a:prstDash val="solid"/>
+                      <a:round/>
+                      <a:headEnd type="none" w="med" len="med"/>
+                      <a:tailEnd type="none" w="med" len="med"/>
+                    </a:lnB>
+                    <a:solidFill>
+                      <a:srgbClr val="EEF3EF"/>
+                    </a:solidFill>
+                  </a:tcPr>
+                </a:tc>
+                <a:tc>
+                  <a:txBody>
+                    <a:bodyPr/>
+                    <a:lstStyle/>
+                    <a:p>
+                      <a:pPr algn="ctr" indent="0" marL="0">
+                        <a:buNone/>
+                      </a:pPr>
+                      <a:r>
+                        <a:rPr lang="en-US" sz="950" b="1" dirty="0">
+                          <a:solidFill>
+                            <a:srgbClr val="1B211D"/>
+                          </a:solidFill>
+                        </a:rPr>
+                        <a:t>4</a:t>
+                      </a:r>
+                      <a:endParaRPr lang="en-US" sz="950" dirty="0"/>
+                    </a:p>
+                  </a:txBody>
+                  <a:tcPr marL="27432" marR="27432" marT="27432" marB="27432" anchor="ctr">
+                    <a:lnL w="9525" cap="flat" cmpd="sng" algn="ctr">
+                      <a:solidFill>
+                        <a:srgbClr val="B9B4A6"/>
+                      </a:solidFill>
+                      <a:prstDash val="solid"/>
+                      <a:round/>
+                      <a:headEnd type="none" w="med" len="med"/>
+                      <a:tailEnd type="none" w="med" len="med"/>
+                    </a:lnL>
+                    <a:lnR w="9525" cap="flat" cmpd="sng" algn="ctr">
+                      <a:solidFill>
+                        <a:srgbClr val="B9B4A6"/>
+                      </a:solidFill>
+                      <a:prstDash val="solid"/>
+                      <a:round/>
+                      <a:headEnd type="none" w="med" len="med"/>
+                      <a:tailEnd type="none" w="med" len="med"/>
+                    </a:lnR>
+                    <a:lnT w="9525" cap="flat" cmpd="sng" algn="ctr">
+                      <a:solidFill>
+                        <a:srgbClr val="B9B4A6"/>
+                      </a:solidFill>
+                      <a:prstDash val="solid"/>
+                      <a:round/>
+                      <a:headEnd type="none" w="med" len="med"/>
+                      <a:tailEnd type="none" w="med" len="med"/>
+                    </a:lnT>
+                    <a:lnB w="9525" cap="flat" cmpd="sng" algn="ctr">
+                      <a:solidFill>
+                        <a:srgbClr val="B9B4A6"/>
+                      </a:solidFill>
+                      <a:prstDash val="solid"/>
+                      <a:round/>
+                      <a:headEnd type="none" w="med" len="med"/>
+                      <a:tailEnd type="none" w="med" len="med"/>
+                    </a:lnB>
+                    <a:solidFill>
+                      <a:srgbClr val="EEF3EF"/>
+                    </a:solidFill>
+                  </a:tcPr>
+                </a:tc>
+                <a:tc>
+                  <a:txBody>
+                    <a:bodyPr/>
+                    <a:lstStyle/>
+                    <a:p>
+                      <a:pPr algn="ctr" indent="0" marL="0">
+                        <a:buNone/>
+                      </a:pPr>
+                      <a:r>
+                        <a:rPr lang="en-US" sz="950" b="1" dirty="0">
+                          <a:solidFill>
+                            <a:srgbClr val="1B211D"/>
+                          </a:solidFill>
+                        </a:rPr>
+                        <a:t>합계</a:t>
+                      </a:r>
+                      <a:endParaRPr lang="en-US" sz="950" dirty="0"/>
+                    </a:p>
+                  </a:txBody>
+                  <a:tcPr marL="27432" marR="27432" marT="27432" marB="27432" anchor="ctr">
+                    <a:lnL w="9525" cap="flat" cmpd="sng" algn="ctr">
+                      <a:solidFill>
+                        <a:srgbClr val="B9B4A6"/>
+                      </a:solidFill>
+                      <a:prstDash val="solid"/>
+                      <a:round/>
+                      <a:headEnd type="none" w="med" len="med"/>
+                      <a:tailEnd type="none" w="med" len="med"/>
+                    </a:lnL>
+                    <a:lnR w="9525" cap="flat" cmpd="sng" algn="ctr">
+                      <a:solidFill>
+                        <a:srgbClr val="B9B4A6"/>
+                      </a:solidFill>
+                      <a:prstDash val="solid"/>
+                      <a:round/>
+                      <a:headEnd type="none" w="med" len="med"/>
+                      <a:tailEnd type="none" w="med" len="med"/>
+                    </a:lnR>
+                    <a:lnT w="9525" cap="flat" cmpd="sng" algn="ctr">
+                      <a:solidFill>
+                        <a:srgbClr val="B9B4A6"/>
+                      </a:solidFill>
+                      <a:prstDash val="solid"/>
+                      <a:round/>
+                      <a:headEnd type="none" w="med" len="med"/>
+                      <a:tailEnd type="none" w="med" len="med"/>
+                    </a:lnT>
+                    <a:lnB w="9525" cap="flat" cmpd="sng" algn="ctr">
+                      <a:solidFill>
+                        <a:srgbClr val="B9B4A6"/>
+                      </a:solidFill>
+                      <a:prstDash val="solid"/>
+                      <a:round/>
+                      <a:headEnd type="none" w="med" len="med"/>
+                      <a:tailEnd type="none" w="med" len="med"/>
+                    </a:lnB>
+                    <a:solidFill>
+                      <a:srgbClr val="EEF3EF"/>
+                    </a:solidFill>
+                  </a:tcPr>
+                </a:tc>
+              </a:tr>
+              <a:tr h="274320">
+                <a:tc>
+                  <a:txBody>
+                    <a:bodyPr/>
+                    <a:lstStyle/>
+                    <a:p>
+                      <a:pPr algn="ctr" indent="0" marL="0">
+                        <a:buNone/>
+                      </a:pPr>
+                      <a:r>
+                        <a:rPr lang="en-US" sz="950" dirty="0">
+                          <a:solidFill>
+                            <a:srgbClr val="1B211D"/>
+                          </a:solidFill>
+                        </a:rPr>
+                        <a:t>P(X = x)</a:t>
+                      </a:r>
+                      <a:endParaRPr lang="en-US" sz="950" dirty="0"/>
+                    </a:p>
+                  </a:txBody>
+                  <a:tcPr marL="27432" marR="27432" marT="27432" marB="27432" anchor="ctr">
+                    <a:lnL w="9525" cap="flat" cmpd="sng" algn="ctr">
+                      <a:solidFill>
+                        <a:srgbClr val="B9B4A6"/>
+                      </a:solidFill>
+                      <a:prstDash val="solid"/>
+                      <a:round/>
+                      <a:headEnd type="none" w="med" len="med"/>
+                      <a:tailEnd type="none" w="med" len="med"/>
+                    </a:lnL>
+                    <a:lnR w="9525" cap="flat" cmpd="sng" algn="ctr">
+                      <a:solidFill>
+                        <a:srgbClr val="B9B4A6"/>
+                      </a:solidFill>
+                      <a:prstDash val="solid"/>
+                      <a:round/>
+                      <a:headEnd type="none" w="med" len="med"/>
+                      <a:tailEnd type="none" w="med" len="med"/>
+                    </a:lnR>
+                    <a:lnT w="9525" cap="flat" cmpd="sng" algn="ctr">
+                      <a:solidFill>
+                        <a:srgbClr val="B9B4A6"/>
+                      </a:solidFill>
+                      <a:prstDash val="solid"/>
+                      <a:round/>
+                      <a:headEnd type="none" w="med" len="med"/>
+                      <a:tailEnd type="none" w="med" len="med"/>
+                    </a:lnT>
+                    <a:lnB w="9525" cap="flat" cmpd="sng" algn="ctr">
+                      <a:solidFill>
+                        <a:srgbClr val="B9B4A6"/>
+                      </a:solidFill>
+                      <a:prstDash val="solid"/>
+                      <a:round/>
+                      <a:headEnd type="none" w="med" len="med"/>
+                      <a:tailEnd type="none" w="med" len="med"/>
+                    </a:lnB>
+                  </a:tcPr>
+                </a:tc>
+                <a:tc>
+                  <a:txBody>
+                    <a:bodyPr/>
+                    <a:lstStyle/>
+                    <a:p>
+                      <a:pPr algn="ctr" indent="0" marL="0">
+                        <a:buNone/>
+                      </a:pPr>
+                      <a:r>
+                        <a:rPr lang="en-US" sz="950" dirty="0">
+                          <a:solidFill>
+                            <a:srgbClr val="1B211D"/>
+                          </a:solidFill>
+                        </a:rPr>
+                        <a:t>0.090</a:t>
+                      </a:r>
+                      <a:endParaRPr lang="en-US" sz="950" dirty="0"/>
+                    </a:p>
+                  </a:txBody>
+                  <a:tcPr marL="27432" marR="27432" marT="27432" marB="27432" anchor="ctr">
+                    <a:lnL w="9525" cap="flat" cmpd="sng" algn="ctr">
+                      <a:solidFill>
+                        <a:srgbClr val="B9B4A6"/>
+                      </a:solidFill>
+                      <a:prstDash val="solid"/>
+                      <a:round/>
+                      <a:headEnd type="none" w="med" len="med"/>
+                      <a:tailEnd type="none" w="med" len="med"/>
+                    </a:lnL>
+                    <a:lnR w="9525" cap="flat" cmpd="sng" algn="ctr">
+                      <a:solidFill>
+                        <a:srgbClr val="B9B4A6"/>
+                      </a:solidFill>
+                      <a:prstDash val="solid"/>
+                      <a:round/>
+                      <a:headEnd type="none" w="med" len="med"/>
+                      <a:tailEnd type="none" w="med" len="med"/>
+                    </a:lnR>
+                    <a:lnT w="9525" cap="flat" cmpd="sng" algn="ctr">
+                      <a:solidFill>
+                        <a:srgbClr val="B9B4A6"/>
+                      </a:solidFill>
+                      <a:prstDash val="solid"/>
+                      <a:round/>
+                      <a:headEnd type="none" w="med" len="med"/>
+                      <a:tailEnd type="none" w="med" len="med"/>
+                    </a:lnT>
+                    <a:lnB w="9525" cap="flat" cmpd="sng" algn="ctr">
+                      <a:solidFill>
+                        <a:srgbClr val="B9B4A6"/>
+                      </a:solidFill>
+                      <a:prstDash val="solid"/>
+                      <a:round/>
+                      <a:headEnd type="none" w="med" len="med"/>
+                      <a:tailEnd type="none" w="med" len="med"/>
+                    </a:lnB>
+                  </a:tcPr>
+                </a:tc>
+                <a:tc>
+                  <a:txBody>
+                    <a:bodyPr/>
+                    <a:lstStyle/>
+                    <a:p>
+                      <a:pPr algn="ctr" indent="0" marL="0">
+                        <a:buNone/>
+                      </a:pPr>
+                      <a:r>
+                        <a:rPr lang="en-US" sz="950" dirty="0">
+                          <a:solidFill>
+                            <a:srgbClr val="1B211D"/>
+                          </a:solidFill>
+                        </a:rPr>
+                        <a:t>0.297</a:t>
+                      </a:r>
+                      <a:endParaRPr lang="en-US" sz="950" dirty="0"/>
+                    </a:p>
+                  </a:txBody>
+                  <a:tcPr marL="27432" marR="27432" marT="27432" marB="27432" anchor="ctr">
+                    <a:lnL w="9525" cap="flat" cmpd="sng" algn="ctr">
+                      <a:solidFill>
+                        <a:srgbClr val="B9B4A6"/>
+                      </a:solidFill>
+                      <a:prstDash val="solid"/>
+                      <a:round/>
+                      <a:headEnd type="none" w="med" len="med"/>
+                      <a:tailEnd type="none" w="med" len="med"/>
+                    </a:lnL>
+                    <a:lnR w="9525" cap="flat" cmpd="sng" algn="ctr">
+                      <a:solidFill>
+                        <a:srgbClr val="B9B4A6"/>
+                      </a:solidFill>
+                      <a:prstDash val="solid"/>
+                      <a:round/>
+                      <a:headEnd type="none" w="med" len="med"/>
+                      <a:tailEnd type="none" w="med" len="med"/>
+                    </a:lnR>
+                    <a:lnT w="9525" cap="flat" cmpd="sng" algn="ctr">
+                      <a:solidFill>
+                        <a:srgbClr val="B9B4A6"/>
+                      </a:solidFill>
+                      <a:prstDash val="solid"/>
+                      <a:round/>
+                      <a:headEnd type="none" w="med" len="med"/>
+                      <a:tailEnd type="none" w="med" len="med"/>
+                    </a:lnT>
+                    <a:lnB w="9525" cap="flat" cmpd="sng" algn="ctr">
+                      <a:solidFill>
+                        <a:srgbClr val="B9B4A6"/>
+                      </a:solidFill>
+                      <a:prstDash val="solid"/>
+                      <a:round/>
+                      <a:headEnd type="none" w="med" len="med"/>
+                      <a:tailEnd type="none" w="med" len="med"/>
+                    </a:lnB>
+                  </a:tcPr>
+                </a:tc>
+                <a:tc>
+                  <a:txBody>
+                    <a:bodyPr/>
+                    <a:lstStyle/>
+                    <a:p>
+                      <a:pPr algn="ctr" indent="0" marL="0">
+                        <a:buNone/>
+                      </a:pPr>
+                      <a:r>
+                        <a:rPr lang="en-US" sz="950" dirty="0">
+                          <a:solidFill>
+                            <a:srgbClr val="1B211D"/>
+                          </a:solidFill>
+                        </a:rPr>
+                        <a:t>0.368</a:t>
+                      </a:r>
+                      <a:endParaRPr lang="en-US" sz="950" dirty="0"/>
+                    </a:p>
+                  </a:txBody>
+                  <a:tcPr marL="27432" marR="27432" marT="27432" marB="27432" anchor="ctr">
+                    <a:lnL w="9525" cap="flat" cmpd="sng" algn="ctr">
+                      <a:solidFill>
+                        <a:srgbClr val="B9B4A6"/>
+                      </a:solidFill>
+                      <a:prstDash val="solid"/>
+                      <a:round/>
+                      <a:headEnd type="none" w="med" len="med"/>
+                      <a:tailEnd type="none" w="med" len="med"/>
+                    </a:lnL>
+                    <a:lnR w="9525" cap="flat" cmpd="sng" algn="ctr">
+                      <a:solidFill>
+                        <a:srgbClr val="B9B4A6"/>
+                      </a:solidFill>
+                      <a:prstDash val="solid"/>
+                      <a:round/>
+                      <a:headEnd type="none" w="med" len="med"/>
+                      <a:tailEnd type="none" w="med" len="med"/>
+                    </a:lnR>
+                    <a:lnT w="9525" cap="flat" cmpd="sng" algn="ctr">
+                      <a:solidFill>
+                        <a:srgbClr val="B9B4A6"/>
+                      </a:solidFill>
+                      <a:prstDash val="solid"/>
+                      <a:round/>
+                      <a:headEnd type="none" w="med" len="med"/>
+                      <a:tailEnd type="none" w="med" len="med"/>
+                    </a:lnT>
+                    <a:lnB w="9525" cap="flat" cmpd="sng" algn="ctr">
+                      <a:solidFill>
+                        <a:srgbClr val="B9B4A6"/>
+                      </a:solidFill>
+                      <a:prstDash val="solid"/>
+                      <a:round/>
+                      <a:headEnd type="none" w="med" len="med"/>
+                      <a:tailEnd type="none" w="med" len="med"/>
+                    </a:lnB>
+                  </a:tcPr>
+                </a:tc>
+                <a:tc>
+                  <a:txBody>
+                    <a:bodyPr/>
+                    <a:lstStyle/>
+                    <a:p>
+                      <a:pPr algn="ctr" indent="0" marL="0">
+                        <a:buNone/>
+                      </a:pPr>
+                      <a:r>
+                        <a:rPr lang="en-US" sz="950" dirty="0">
+                          <a:solidFill>
+                            <a:srgbClr val="1B211D"/>
+                          </a:solidFill>
+                        </a:rPr>
+                        <a:t>0.203</a:t>
+                      </a:r>
+                      <a:endParaRPr lang="en-US" sz="950" dirty="0"/>
+                    </a:p>
+                  </a:txBody>
+                  <a:tcPr marL="27432" marR="27432" marT="27432" marB="27432" anchor="ctr">
+                    <a:lnL w="9525" cap="flat" cmpd="sng" algn="ctr">
+                      <a:solidFill>
+                        <a:srgbClr val="B9B4A6"/>
+                      </a:solidFill>
+                      <a:prstDash val="solid"/>
+                      <a:round/>
+                      <a:headEnd type="none" w="med" len="med"/>
+                      <a:tailEnd type="none" w="med" len="med"/>
+                    </a:lnL>
+                    <a:lnR w="9525" cap="flat" cmpd="sng" algn="ctr">
+                      <a:solidFill>
+                        <a:srgbClr val="B9B4A6"/>
+                      </a:solidFill>
+                      <a:prstDash val="solid"/>
+                      <a:round/>
+                      <a:headEnd type="none" w="med" len="med"/>
+                      <a:tailEnd type="none" w="med" len="med"/>
+                    </a:lnR>
+                    <a:lnT w="9525" cap="flat" cmpd="sng" algn="ctr">
+                      <a:solidFill>
+                        <a:srgbClr val="B9B4A6"/>
+                      </a:solidFill>
+                      <a:prstDash val="solid"/>
+                      <a:round/>
+                      <a:headEnd type="none" w="med" len="med"/>
+                      <a:tailEnd type="none" w="med" len="med"/>
+                    </a:lnT>
+                    <a:lnB w="9525" cap="flat" cmpd="sng" algn="ctr">
+                      <a:solidFill>
+                        <a:srgbClr val="B9B4A6"/>
+                      </a:solidFill>
+                      <a:prstDash val="solid"/>
+                      <a:round/>
+                      <a:headEnd type="none" w="med" len="med"/>
+                      <a:tailEnd type="none" w="med" len="med"/>
+                    </a:lnB>
+                  </a:tcPr>
+                </a:tc>
+                <a:tc>
+                  <a:txBody>
+                    <a:bodyPr/>
+                    <a:lstStyle/>
+                    <a:p>
+                      <a:pPr algn="ctr" indent="0" marL="0">
+                        <a:buNone/>
+                      </a:pPr>
+                      <a:r>
+                        <a:rPr lang="en-US" sz="950" dirty="0">
+                          <a:solidFill>
+                            <a:srgbClr val="1B211D"/>
+                          </a:solidFill>
+                        </a:rPr>
+                        <a:t>0.042</a:t>
+                      </a:r>
+                      <a:endParaRPr lang="en-US" sz="950" dirty="0"/>
+                    </a:p>
+                  </a:txBody>
+                  <a:tcPr marL="27432" marR="27432" marT="27432" marB="27432" anchor="ctr">
+                    <a:lnL w="9525" cap="flat" cmpd="sng" algn="ctr">
+                      <a:solidFill>
+                        <a:srgbClr val="B9B4A6"/>
+                      </a:solidFill>
+                      <a:prstDash val="solid"/>
+                      <a:round/>
+                      <a:headEnd type="none" w="med" len="med"/>
+                      <a:tailEnd type="none" w="med" len="med"/>
+                    </a:lnL>
+                    <a:lnR w="9525" cap="flat" cmpd="sng" algn="ctr">
+                      <a:solidFill>
+                        <a:srgbClr val="B9B4A6"/>
+                      </a:solidFill>
+                      <a:prstDash val="solid"/>
+                      <a:round/>
+                      <a:headEnd type="none" w="med" len="med"/>
+                      <a:tailEnd type="none" w="med" len="med"/>
+                    </a:lnR>
+                    <a:lnT w="9525" cap="flat" cmpd="sng" algn="ctr">
+                      <a:solidFill>
+                        <a:srgbClr val="B9B4A6"/>
+                      </a:solidFill>
+                      <a:prstDash val="solid"/>
+                      <a:round/>
+                      <a:headEnd type="none" w="med" len="med"/>
+                      <a:tailEnd type="none" w="med" len="med"/>
+                    </a:lnT>
+                    <a:lnB w="9525" cap="flat" cmpd="sng" algn="ctr">
+                      <a:solidFill>
+                        <a:srgbClr val="B9B4A6"/>
+                      </a:solidFill>
+                      <a:prstDash val="solid"/>
+                      <a:round/>
+                      <a:headEnd type="none" w="med" len="med"/>
+                      <a:tailEnd type="none" w="med" len="med"/>
+                    </a:lnB>
+                  </a:tcPr>
+                </a:tc>
+                <a:tc>
+                  <a:txBody>
+                    <a:bodyPr/>
+                    <a:lstStyle/>
+                    <a:p>
+                      <a:pPr algn="ctr" indent="0" marL="0">
+                        <a:buNone/>
+                      </a:pPr>
+                      <a:r>
+                        <a:rPr lang="en-US" sz="950" dirty="0">
+                          <a:solidFill>
+                            <a:srgbClr val="1B211D"/>
+                          </a:solidFill>
+                        </a:rPr>
+                        <a:t>1</a:t>
+                      </a:r>
+                      <a:endParaRPr lang="en-US" sz="950" dirty="0"/>
+                    </a:p>
+                  </a:txBody>
+                  <a:tcPr marL="27432" marR="27432" marT="27432" marB="27432" anchor="ctr">
+                    <a:lnL w="9525" cap="flat" cmpd="sng" algn="ctr">
+                      <a:solidFill>
+                        <a:srgbClr val="B9B4A6"/>
+                      </a:solidFill>
+                      <a:prstDash val="solid"/>
+                      <a:round/>
+                      <a:headEnd type="none" w="med" len="med"/>
+                      <a:tailEnd type="none" w="med" len="med"/>
+                    </a:lnL>
+                    <a:lnR w="9525" cap="flat" cmpd="sng" algn="ctr">
+                      <a:solidFill>
+                        <a:srgbClr val="B9B4A6"/>
+                      </a:solidFill>
+                      <a:prstDash val="solid"/>
+                      <a:round/>
+                      <a:headEnd type="none" w="med" len="med"/>
+                      <a:tailEnd type="none" w="med" len="med"/>
+                    </a:lnR>
+                    <a:lnT w="9525" cap="flat" cmpd="sng" algn="ctr">
+                      <a:solidFill>
+                        <a:srgbClr val="B9B4A6"/>
+                      </a:solidFill>
+                      <a:prstDash val="solid"/>
+                      <a:round/>
+                      <a:headEnd type="none" w="med" len="med"/>
+                      <a:tailEnd type="none" w="med" len="med"/>
+                    </a:lnT>
+                    <a:lnB w="9525" cap="flat" cmpd="sng" algn="ctr">
+                      <a:solidFill>
+                        <a:srgbClr val="B9B4A6"/>
+                      </a:solidFill>
+                      <a:prstDash val="solid"/>
+                      <a:round/>
+                      <a:headEnd type="none" w="med" len="med"/>
+                      <a:tailEnd type="none" w="med" len="med"/>
+                    </a:lnB>
+                  </a:tcPr>
+                </a:tc>
+              </a:tr>
+            </a:tbl>
+          </a:graphicData>
+        </a:graphic>
+      </p:graphicFrame>
+      <p:sp>
+        <p:nvSpPr>
+          <p:cNvPr id="8" name="확률분포표 기댓값"/>
+          <p:cNvSpPr txBox="1"/>
+          <p:nvPr/>
+        </p:nvSpPr>
+        <p:spPr>
+          <a:xfrm>
+            <a:off x="4663440" y="2084832"/>
+            <a:ext cx="4023360" cy="457200"/>
+          </a:xfrm>
+          <a:prstGeom prst="rect">
+            <a:avLst/>
+          </a:prstGeom>
+          <a:noFill/>
+          <a:ln/>
+        </p:spPr>
+        <p:txBody>
+          <a:bodyPr wrap="square" lIns="0" tIns="0" rIns="0" bIns="0" rtlCol="0" anchor="ctr"/>
+          <a:lstStyle/>
+          <a:p>
+            <a:pPr indent="0" marL="0">
+              <a:buNone/>
+            </a:pPr>
+            <a:r>
+              <a:rPr lang="en-US" sz="950" dirty="0">
+                <a:solidFill>
+                  <a:schemeClr val="accent3"/>
+                </a:solidFill>
+              </a:rPr>
+              <a:t>기댓값 4 × 0.453 ≈ 1.8명. 4명이 밥을 먹으면 평균 두 명 가까이는 아침을 거른 채다</a:t>
+            </a:r>
+            <a:endParaRPr lang="en-US" sz="950" dirty="0"/>
+          </a:p>
+        </p:txBody>
+      </p:sp>
+      <p:sp>
+        <p:nvSpPr>
+          <p:cNvPr id="9" name="해석 카드 1"/>
+          <p:cNvSpPr/>
+          <p:nvPr/>
+        </p:nvSpPr>
+        <p:spPr>
+          <a:xfrm>
+            <a:off x="457200" y="3108960"/>
+            <a:ext cx="2651760" cy="1417320"/>
+          </a:xfrm>
+          <a:prstGeom prst="roundRect">
+            <a:avLst>
+              <a:gd name="adj" fmla="val 5161"/>
             </a:avLst>
           </a:prstGeom>
           <a:solidFill>
@@ -4972,14 +9032,14 @@
       </p:sp>
       <p:sp>
         <p:nvSpPr>
-          <p:cNvPr id="6" name="결론 라벨 1"/>
+          <p:cNvPr id="10" name="해석 라벨 1"/>
           <p:cNvSpPr txBox="1"/>
           <p:nvPr/>
         </p:nvSpPr>
         <p:spPr>
           <a:xfrm>
-            <a:off x="685800" y="1115568"/>
-            <a:ext cx="7772400" cy="274320"/>
+            <a:off x="603504" y="3172968"/>
+            <a:ext cx="2377440" cy="274320"/>
           </a:xfrm>
           <a:prstGeom prst="rect">
             <a:avLst/>
@@ -4995,27 +9055,27 @@
               <a:buNone/>
             </a:pPr>
             <a:r>
-              <a:rPr lang="en-US" sz="1100" b="1" dirty="0">
+              <a:rPr lang="en-US" sz="1000" b="1" dirty="0">
                 <a:solidFill>
                   <a:schemeClr val="tx2"/>
                 </a:solidFill>
               </a:rPr>
-              <a:t>통계가 보여 준 것</a:t>
-            </a:r>
-            <a:endParaRPr lang="en-US" sz="1100" dirty="0"/>
+              <a:t>① 숫자로 말하기</a:t>
+            </a:r>
+            <a:endParaRPr lang="en-US" sz="1000" dirty="0"/>
           </a:p>
         </p:txBody>
       </p:sp>
       <p:sp>
         <p:nvSpPr>
-          <p:cNvPr id="7" name="결론 1"/>
+          <p:cNvPr id="11" name="해석 1"/>
           <p:cNvSpPr txBox="1"/>
           <p:nvPr/>
         </p:nvSpPr>
         <p:spPr>
           <a:xfrm>
-            <a:off x="685800" y="1417320"/>
-            <a:ext cx="7772400" cy="548640"/>
+            <a:off x="603504" y="3438144"/>
+            <a:ext cx="2377440" cy="1033272"/>
           </a:xfrm>
           <a:prstGeom prst="rect">
             <a:avLst/>
@@ -5033,31 +9093,31 @@
               <a:buNone/>
             </a:pPr>
             <a:r>
-              <a:rPr lang="en-US" sz="1600" dirty="0">
+              <a:rPr lang="en-US" sz="950" dirty="0">
                 <a:solidFill>
                   <a:schemeClr val="tx1"/>
                 </a:solidFill>
               </a:rPr>
-              <a:t>아침 결식은 10명 중 4명을 넘고 5년째 늘며 여학생이 더 높다.</a:t>
-            </a:r>
-            <a:endParaRPr lang="en-US" sz="1600" dirty="0"/>
+              <a:t>여학생 39.1% → 45.3%(+6.2%p), 남학생 37.0% → 41.9%(+4.9%p), 2021→2025. 둘 다 해마다 늘었고 여학생이 매년 높다</a:t>
+            </a:r>
+            <a:endParaRPr lang="en-US" sz="950" dirty="0"/>
           </a:p>
         </p:txBody>
       </p:sp>
       <p:sp>
         <p:nvSpPr>
-          <p:cNvPr id="8" name="결론 카드 2"/>
+          <p:cNvPr id="12" name="해석 카드 2"/>
           <p:cNvSpPr/>
           <p:nvPr/>
         </p:nvSpPr>
         <p:spPr>
           <a:xfrm>
-            <a:off x="457200" y="2194560"/>
-            <a:ext cx="8229600" cy="1051560"/>
+            <a:off x="3246120" y="3108960"/>
+            <a:ext cx="2651760" cy="1417320"/>
           </a:xfrm>
           <a:prstGeom prst="roundRect">
             <a:avLst>
-              <a:gd name="adj" fmla="val 6957"/>
+              <a:gd name="adj" fmla="val 5161"/>
             </a:avLst>
           </a:prstGeom>
           <a:solidFill>
@@ -5073,14 +9133,14 @@
       </p:sp>
       <p:sp>
         <p:nvSpPr>
-          <p:cNvPr id="9" name="결론 라벨 2"/>
+          <p:cNvPr id="13" name="해석 라벨 2"/>
           <p:cNvSpPr txBox="1"/>
           <p:nvPr/>
         </p:nvSpPr>
         <p:spPr>
           <a:xfrm>
-            <a:off x="685800" y="2304288"/>
-            <a:ext cx="7772400" cy="274320"/>
+            <a:off x="3392424" y="3172968"/>
+            <a:ext cx="2377440" cy="274320"/>
           </a:xfrm>
           <a:prstGeom prst="rect">
             <a:avLst/>
@@ -5096,27 +9156,27 @@
               <a:buNone/>
             </a:pPr>
             <a:r>
-              <a:rPr lang="en-US" sz="1100" b="1" dirty="0">
+              <a:rPr lang="en-US" sz="1000" b="1" dirty="0">
                 <a:solidFill>
                   <a:schemeClr val="tx2"/>
                 </a:solidFill>
               </a:rPr>
-              <a:t>그래서 나의 주장</a:t>
-            </a:r>
-            <a:endParaRPr lang="en-US" sz="1100" dirty="0"/>
+              <a:t>② 왜 그렇게 되었을까, 내 의견</a:t>
+            </a:r>
+            <a:endParaRPr lang="en-US" sz="1000" dirty="0"/>
           </a:p>
         </p:txBody>
       </p:sp>
       <p:sp>
         <p:nvSpPr>
-          <p:cNvPr id="10" name="결론 2"/>
+          <p:cNvPr id="14" name="해석 2"/>
           <p:cNvSpPr txBox="1"/>
           <p:nvPr/>
         </p:nvSpPr>
         <p:spPr>
           <a:xfrm>
-            <a:off x="685800" y="2606040"/>
-            <a:ext cx="7772400" cy="548640"/>
+            <a:off x="3392424" y="3438144"/>
+            <a:ext cx="2377440" cy="1033272"/>
           </a:xfrm>
           <a:prstGeom prst="rect">
             <a:avLst/>
@@ -5134,31 +9194,31 @@
               <a:buNone/>
             </a:pPr>
             <a:r>
-              <a:rPr lang="en-US" sz="1600" dirty="0">
+              <a:rPr lang="en-US" sz="950" dirty="0">
                 <a:solidFill>
                   <a:schemeClr val="tx1"/>
                 </a:solidFill>
               </a:rPr>
-              <a:t>집에서 먹으라는 교육보다 등교 후 학교에서 먹는 아침이 현실적이다.</a:t>
-            </a:r>
-            <a:endParaRPr lang="en-US" sz="1600" dirty="0"/>
+              <a:t>잠이 부족해 아침에 먹기보다 자는 쪽을 택한다. 늦은 취침(학원·스마트폰)과 이른 등교가 겹친다</a:t>
+            </a:r>
+            <a:endParaRPr lang="en-US" sz="950" dirty="0"/>
           </a:p>
         </p:txBody>
       </p:sp>
       <p:sp>
         <p:nvSpPr>
-          <p:cNvPr id="11" name="결론 카드 3"/>
+          <p:cNvPr id="15" name="해석 카드 3"/>
           <p:cNvSpPr/>
           <p:nvPr/>
         </p:nvSpPr>
         <p:spPr>
           <a:xfrm>
-            <a:off x="457200" y="3383280"/>
-            <a:ext cx="8229600" cy="1051560"/>
+            <a:off x="6035040" y="3108960"/>
+            <a:ext cx="2651760" cy="1417320"/>
           </a:xfrm>
           <a:prstGeom prst="roundRect">
             <a:avLst>
-              <a:gd name="adj" fmla="val 6957"/>
+              <a:gd name="adj" fmla="val 5161"/>
             </a:avLst>
           </a:prstGeom>
           <a:solidFill>
@@ -5174,14 +9234,14 @@
       </p:sp>
       <p:sp>
         <p:nvSpPr>
-          <p:cNvPr id="12" name="결론 라벨 3"/>
+          <p:cNvPr id="16" name="해석 라벨 3"/>
           <p:cNvSpPr txBox="1"/>
           <p:nvPr/>
         </p:nvSpPr>
         <p:spPr>
           <a:xfrm>
-            <a:off x="685800" y="3493008"/>
-            <a:ext cx="7772400" cy="274320"/>
+            <a:off x="6181344" y="3172968"/>
+            <a:ext cx="2377440" cy="274320"/>
           </a:xfrm>
           <a:prstGeom prst="rect">
             <a:avLst/>
@@ -5197,27 +9257,27 @@
               <a:buNone/>
             </a:pPr>
             <a:r>
-              <a:rPr lang="en-US" sz="1100" b="1" dirty="0">
+              <a:rPr lang="en-US" sz="1000" b="1" dirty="0">
                 <a:solidFill>
                   <a:schemeClr val="tx2"/>
                 </a:solidFill>
               </a:rPr>
-              <a:t>남는 궁금증</a:t>
-            </a:r>
-            <a:endParaRPr lang="en-US" sz="1100" dirty="0"/>
+              <a:t>③ 내 의견의 근거</a:t>
+            </a:r>
+            <a:endParaRPr lang="en-US" sz="1000" dirty="0"/>
           </a:p>
         </p:txBody>
       </p:sp>
       <p:sp>
         <p:nvSpPr>
-          <p:cNvPr id="13" name="결론 3"/>
+          <p:cNvPr id="17" name="해석 3"/>
           <p:cNvSpPr txBox="1"/>
           <p:nvPr/>
         </p:nvSpPr>
         <p:spPr>
           <a:xfrm>
-            <a:off x="685800" y="3794760"/>
-            <a:ext cx="7772400" cy="548640"/>
+            <a:off x="6181344" y="3438144"/>
+            <a:ext cx="2377440" cy="1033272"/>
           </a:xfrm>
           <a:prstGeom prst="rect">
             <a:avLst/>
@@ -5235,14 +9295,14 @@
               <a:buNone/>
             </a:pPr>
             <a:r>
-              <a:rPr lang="en-US" sz="1600" dirty="0">
+              <a:rPr lang="en-US" sz="950" dirty="0">
                 <a:solidFill>
                   <a:schemeClr val="tx1"/>
                 </a:solidFill>
               </a:rPr>
-              <a:t>결식과 빈혈·체중 자료를 더 찾아보고 싶다. 간호사가 되면 환자의 생활 습관을 이렇게 숫자로 묻겠다.</a:t>
-            </a:r>
-            <a:endParaRPr lang="en-US" sz="1600" dirty="0"/>
+              <a:t>같은 조사의 '주관적 수면충족률'(2024): 남 27.1%, 여 16.5%. 결식률이 높은 여학생이 수면충족률도 낮다</a:t>
+            </a:r>
+            <a:endParaRPr lang="en-US" sz="950" dirty="0"/>
           </a:p>
         </p:txBody>
       </p:sp>
@@ -5285,7 +9345,1859 @@
             <a:pPr algn="r"/>
             <a:fld id="{F7021451-1387-4CA6-816F-3879F97B5CBC}" type="slidenum">
               <a:rPr b="0" lang="en-US"/>
+              <a:t>5</a:t>
+            </a:fld>
+            <a:endParaRPr lang="en-US"/>
+          </a:p>
+        </p:txBody>
+      </p:sp>
+    </p:spTree>
+  </p:cSld>
+  <p:clrMapOvr>
+    <a:masterClrMapping/>
+  </p:clrMapOvr>
+</p:sld>
+</file>
+
+<file path=ppt/slides/slide6.xml><?xml version="1.0" encoding="utf-8"?>
+<p:sld xmlns:a="http://schemas.openxmlformats.org/drawingml/2006/main" xmlns:r="http://schemas.openxmlformats.org/officeDocument/2006/relationships" xmlns:p="http://schemas.openxmlformats.org/presentationml/2006/main">
+  <p:cSld name="Slide 6">
+    <p:spTree>
+      <p:nvGrpSpPr>
+        <p:cNvPr id="1" name=""/>
+        <p:cNvGrpSpPr/>
+        <p:nvPr/>
+      </p:nvGrpSpPr>
+      <p:grpSpPr>
+        <a:xfrm>
+          <a:off x="0" y="0"/>
+          <a:ext cx="0" cy="0"/>
+          <a:chOff x="0" y="0"/>
+          <a:chExt cx="0" cy="0"/>
+        </a:xfrm>
+      </p:grpSpPr>
+      <p:sp>
+        <p:nvSpPr>
+          <p:cNvPr id="2" name="Text 0"/>
+          <p:cNvSpPr/>
+          <p:nvPr>
+            <p:ph idx="100" type="title" hasCustomPrompt="1"/>
+          </p:nvPr>
+        </p:nvSpPr>
+        <p:spPr>
+          <a:xfrm>
+            <a:off x="960120" y="274320"/>
+            <a:ext cx="7726680" cy="548640"/>
+          </a:xfrm>
+          <a:prstGeom prst="rect">
+            <a:avLst/>
+          </a:prstGeom>
+          <a:noFill/>
+          <a:ln/>
+        </p:spPr>
+        <p:txBody>
+          <a:bodyPr wrap="square" lIns="0" tIns="0" rIns="0" bIns="0" rtlCol="0" anchor="ctr"/>
+          <a:lstStyle/>
+          <a:p>
+            <a:pPr algn="l" indent="0" marL="0">
+              <a:buNone/>
+            </a:pPr>
+            <a:r>
+              <a:rPr lang="en-US" sz="2400" b="1" dirty="0">
+                <a:solidFill>
+                  <a:schemeClr val="tx2"/>
+                </a:solidFill>
+              </a:rPr>
+              <a:t>3장 설명 · 핵심 요약</a:t>
+            </a:r>
+            <a:endParaRPr lang="en-US" sz="2400" dirty="0"/>
+          </a:p>
+        </p:txBody>
+      </p:sp>
+      <p:sp>
+        <p:nvSpPr>
+          <p:cNvPr id="3" name="설명 배지 3"/>
+          <p:cNvSpPr/>
+          <p:nvPr/>
+        </p:nvSpPr>
+        <p:spPr>
+          <a:xfrm>
+            <a:off x="457200" y="384048"/>
+            <a:ext cx="420624" cy="329184"/>
+          </a:xfrm>
+          <a:prstGeom prst="roundRect">
+            <a:avLst>
+              <a:gd name="adj" fmla="val 22222"/>
+            </a:avLst>
+          </a:prstGeom>
+          <a:solidFill>
+            <a:schemeClr val="accent1"/>
+          </a:solidFill>
+          <a:ln w="12700">
+            <a:solidFill>
+              <a:schemeClr val="accent1"/>
+            </a:solidFill>
+            <a:prstDash val="solid"/>
+          </a:ln>
+        </p:spPr>
+      </p:sp>
+      <p:sp>
+        <p:nvSpPr>
+          <p:cNvPr id="4" name="설명 배지 글자 3"/>
+          <p:cNvSpPr txBox="1"/>
+          <p:nvPr/>
+        </p:nvSpPr>
+        <p:spPr>
+          <a:xfrm>
+            <a:off x="457200" y="384048"/>
+            <a:ext cx="420624" cy="329184"/>
+          </a:xfrm>
+          <a:prstGeom prst="rect">
+            <a:avLst/>
+          </a:prstGeom>
+          <a:noFill/>
+          <a:ln/>
+        </p:spPr>
+        <p:txBody>
+          <a:bodyPr wrap="square" lIns="0" tIns="0" rIns="0" bIns="0" rtlCol="0" anchor="ctr"/>
+          <a:lstStyle/>
+          <a:p>
+            <a:pPr algn="ctr" indent="0" marL="0">
+              <a:buNone/>
+            </a:pPr>
+            <a:r>
+              <a:rPr lang="en-US" sz="1000" b="1" dirty="0">
+                <a:solidFill>
+                  <a:schemeClr val="bg1"/>
+                </a:solidFill>
+              </a:rPr>
+              <a:t>설명</a:t>
+            </a:r>
+            <a:endParaRPr lang="en-US" sz="1000" dirty="0"/>
+          </a:p>
+        </p:txBody>
+      </p:sp>
+      <p:sp>
+        <p:nvSpPr>
+          <p:cNvPr id="5" name="설명 카드 3-1"/>
+          <p:cNvSpPr/>
+          <p:nvPr/>
+        </p:nvSpPr>
+        <p:spPr>
+          <a:xfrm>
+            <a:off x="457200" y="960120"/>
+            <a:ext cx="4023360" cy="1691640"/>
+          </a:xfrm>
+          <a:prstGeom prst="roundRect">
+            <a:avLst>
+              <a:gd name="adj" fmla="val 3243"/>
+            </a:avLst>
+          </a:prstGeom>
+          <a:solidFill>
+            <a:srgbClr val="FFFFFF"/>
+          </a:solidFill>
+          <a:ln w="9525">
+            <a:solidFill>
+              <a:srgbClr val="DCE5DF"/>
+            </a:solidFill>
+            <a:prstDash val="solid"/>
+          </a:ln>
+        </p:spPr>
+      </p:sp>
+      <p:sp>
+        <p:nvSpPr>
+          <p:cNvPr id="6" name="설명 제목 3-1"/>
+          <p:cNvSpPr txBox="1"/>
+          <p:nvPr/>
+        </p:nvSpPr>
+        <p:spPr>
+          <a:xfrm>
+            <a:off x="621792" y="1051560"/>
+            <a:ext cx="3657600" cy="274320"/>
+          </a:xfrm>
+          <a:prstGeom prst="rect">
+            <a:avLst/>
+          </a:prstGeom>
+          <a:noFill/>
+          <a:ln/>
+        </p:spPr>
+        <p:txBody>
+          <a:bodyPr wrap="square" lIns="0" tIns="0" rIns="0" bIns="0" rtlCol="0" anchor="ctr"/>
+          <a:lstStyle/>
+          <a:p>
+            <a:pPr indent="0" marL="0">
+              <a:buNone/>
+            </a:pPr>
+            <a:r>
+              <a:rPr lang="en-US" sz="1150" b="1" dirty="0">
+                <a:solidFill>
+                  <a:schemeClr val="tx2"/>
+                </a:solidFill>
+              </a:rPr>
+              <a:t>그래프</a:t>
+            </a:r>
+            <a:endParaRPr lang="en-US" sz="1150" dirty="0"/>
+          </a:p>
+        </p:txBody>
+      </p:sp>
+      <p:sp>
+        <p:nvSpPr>
+          <p:cNvPr id="7" name="설명 내용 3-1"/>
+          <p:cNvSpPr txBox="1"/>
+          <p:nvPr/>
+        </p:nvSpPr>
+        <p:spPr>
+          <a:xfrm>
+            <a:off x="621792" y="1344168"/>
+            <a:ext cx="3703320" cy="1234440"/>
+          </a:xfrm>
+          <a:prstGeom prst="rect">
+            <a:avLst/>
+          </a:prstGeom>
+          <a:noFill/>
+          <a:ln/>
+        </p:spPr>
+        <p:txBody>
+          <a:bodyPr wrap="square" lIns="0" tIns="0" rIns="0" bIns="0" rtlCol="0" anchor="t">
+            <a:normAutofit/>
+          </a:bodyPr>
+          <a:lstStyle/>
+          <a:p>
+            <a:pPr marL="342900" indent="-342900">
+              <a:spcAft>
+                <a:spcPts val="300"/>
+              </a:spcAft>
+              <a:buSzPct val="100000"/>
+              <a:buChar char="•"/>
+            </a:pPr>
+            <a:r>
+              <a:rPr lang="en-US" sz="1050" dirty="0">
+                <a:solidFill>
+                  <a:schemeClr val="tx1"/>
+                </a:solidFill>
+              </a:rPr>
+              <a:t>계열이 둘이라 색과 범례로 구분, 세로축 0~50%</a:t>
+            </a:r>
+            <a:endParaRPr lang="en-US" sz="1050" dirty="0"/>
+          </a:p>
+          <a:p>
+            <a:pPr marL="342900" indent="-342900">
+              <a:spcAft>
+                <a:spcPts val="300"/>
+              </a:spcAft>
+              <a:buSzPct val="100000"/>
+              <a:buChar char="•"/>
+            </a:pPr>
+            <a:r>
+              <a:rPr lang="en-US" sz="1050" dirty="0">
+                <a:solidFill>
+                  <a:schemeClr val="tx1"/>
+                </a:solidFill>
+              </a:rPr>
+              <a:t>꺾은선은 '해마다 어떻게 변했나'를 보여 준다</a:t>
+            </a:r>
+            <a:endParaRPr lang="en-US" sz="1050" dirty="0"/>
+          </a:p>
+        </p:txBody>
+      </p:sp>
+      <p:sp>
+        <p:nvSpPr>
+          <p:cNvPr id="8" name="설명 카드 3-2"/>
+          <p:cNvSpPr/>
+          <p:nvPr/>
+        </p:nvSpPr>
+        <p:spPr>
+          <a:xfrm>
+            <a:off x="4663440" y="960120"/>
+            <a:ext cx="4023360" cy="1691640"/>
+          </a:xfrm>
+          <a:prstGeom prst="roundRect">
+            <a:avLst>
+              <a:gd name="adj" fmla="val 3243"/>
+            </a:avLst>
+          </a:prstGeom>
+          <a:solidFill>
+            <a:srgbClr val="FFFFFF"/>
+          </a:solidFill>
+          <a:ln w="9525">
+            <a:solidFill>
+              <a:srgbClr val="DCE5DF"/>
+            </a:solidFill>
+            <a:prstDash val="solid"/>
+          </a:ln>
+        </p:spPr>
+      </p:sp>
+      <p:sp>
+        <p:nvSpPr>
+          <p:cNvPr id="9" name="설명 제목 3-2"/>
+          <p:cNvSpPr txBox="1"/>
+          <p:nvPr/>
+        </p:nvSpPr>
+        <p:spPr>
+          <a:xfrm>
+            <a:off x="4828032" y="1051560"/>
+            <a:ext cx="3657600" cy="274320"/>
+          </a:xfrm>
+          <a:prstGeom prst="rect">
+            <a:avLst/>
+          </a:prstGeom>
+          <a:noFill/>
+          <a:ln/>
+        </p:spPr>
+        <p:txBody>
+          <a:bodyPr wrap="square" lIns="0" tIns="0" rIns="0" bIns="0" rtlCol="0" anchor="ctr"/>
+          <a:lstStyle/>
+          <a:p>
+            <a:pPr indent="0" marL="0">
+              <a:buNone/>
+            </a:pPr>
+            <a:r>
+              <a:rPr lang="en-US" sz="1150" b="1" dirty="0">
+                <a:solidFill>
+                  <a:schemeClr val="tx2"/>
+                </a:solidFill>
+              </a:rPr>
+              <a:t>확률분포표를 이렇게 만든 이유</a:t>
+            </a:r>
+            <a:endParaRPr lang="en-US" sz="1150" dirty="0"/>
+          </a:p>
+        </p:txBody>
+      </p:sp>
+      <p:sp>
+        <p:nvSpPr>
+          <p:cNvPr id="10" name="설명 내용 3-2"/>
+          <p:cNvSpPr txBox="1"/>
+          <p:nvPr/>
+        </p:nvSpPr>
+        <p:spPr>
+          <a:xfrm>
+            <a:off x="4828032" y="1344168"/>
+            <a:ext cx="3703320" cy="1234440"/>
+          </a:xfrm>
+          <a:prstGeom prst="rect">
+            <a:avLst/>
+          </a:prstGeom>
+          <a:noFill/>
+          <a:ln/>
+        </p:spPr>
+        <p:txBody>
+          <a:bodyPr wrap="square" lIns="0" tIns="0" rIns="0" bIns="0" rtlCol="0" anchor="t">
+            <a:normAutofit/>
+          </a:bodyPr>
+          <a:lstStyle/>
+          <a:p>
+            <a:pPr marL="342900" indent="-342900">
+              <a:spcAft>
+                <a:spcPts val="300"/>
+              </a:spcAft>
+              <a:buSzPct val="100000"/>
+              <a:buChar char="•"/>
+            </a:pPr>
+            <a:r>
+              <a:rPr lang="en-US" sz="1050" dirty="0">
+                <a:solidFill>
+                  <a:schemeClr val="tx1"/>
+                </a:solidFill>
+              </a:rPr>
+              <a:t>공개 자료는 '5일 이상 결식 비율'뿐이고 0~7일 분포는 원시자료(신청 필요)에만 있다</a:t>
+            </a:r>
+            <a:endParaRPr lang="en-US" sz="1050" dirty="0"/>
+          </a:p>
+          <a:p>
+            <a:pPr marL="342900" indent="-342900">
+              <a:spcAft>
+                <a:spcPts val="300"/>
+              </a:spcAft>
+              <a:buSzPct val="100000"/>
+              <a:buChar char="•"/>
+            </a:pPr>
+            <a:r>
+              <a:rPr lang="en-US" sz="1050" dirty="0">
+                <a:solidFill>
+                  <a:schemeClr val="tx1"/>
+                </a:solidFill>
+              </a:rPr>
+              <a:t>주 4일 이하 / 5일 이상 두 칸뿐이면 표가 싱거우므로, 이항분포 B(4, 0.453)로 4명 모둠의 결식 학생 수 분포를 만들었다</a:t>
+            </a:r>
+            <a:endParaRPr lang="en-US" sz="1050" dirty="0"/>
+          </a:p>
+          <a:p>
+            <a:pPr marL="342900" indent="-342900">
+              <a:spcAft>
+                <a:spcPts val="300"/>
+              </a:spcAft>
+              <a:buSzPct val="100000"/>
+              <a:buChar char="•"/>
+            </a:pPr>
+            <a:r>
+              <a:rPr lang="en-US" sz="1050" dirty="0">
+                <a:solidFill>
+                  <a:schemeClr val="tx1"/>
+                </a:solidFill>
+              </a:rPr>
+              <a:t>기댓값 1.8명 (교과: 이항분포·기댓값)</a:t>
+            </a:r>
+            <a:endParaRPr lang="en-US" sz="1050" dirty="0"/>
+          </a:p>
+        </p:txBody>
+      </p:sp>
+      <p:sp>
+        <p:nvSpPr>
+          <p:cNvPr id="11" name="설명 카드 3-3"/>
+          <p:cNvSpPr/>
+          <p:nvPr/>
+        </p:nvSpPr>
+        <p:spPr>
+          <a:xfrm>
+            <a:off x="457200" y="2788920"/>
+            <a:ext cx="4023360" cy="1691640"/>
+          </a:xfrm>
+          <a:prstGeom prst="roundRect">
+            <a:avLst>
+              <a:gd name="adj" fmla="val 3243"/>
+            </a:avLst>
+          </a:prstGeom>
+          <a:solidFill>
+            <a:srgbClr val="FFFFFF"/>
+          </a:solidFill>
+          <a:ln w="9525">
+            <a:solidFill>
+              <a:srgbClr val="DCE5DF"/>
+            </a:solidFill>
+            <a:prstDash val="solid"/>
+          </a:ln>
+        </p:spPr>
+      </p:sp>
+      <p:sp>
+        <p:nvSpPr>
+          <p:cNvPr id="12" name="설명 제목 3-3"/>
+          <p:cNvSpPr txBox="1"/>
+          <p:nvPr/>
+        </p:nvSpPr>
+        <p:spPr>
+          <a:xfrm>
+            <a:off x="621792" y="2880360"/>
+            <a:ext cx="3657600" cy="274320"/>
+          </a:xfrm>
+          <a:prstGeom prst="rect">
+            <a:avLst/>
+          </a:prstGeom>
+          <a:noFill/>
+          <a:ln/>
+        </p:spPr>
+        <p:txBody>
+          <a:bodyPr wrap="square" lIns="0" tIns="0" rIns="0" bIns="0" rtlCol="0" anchor="ctr"/>
+          <a:lstStyle/>
+          <a:p>
+            <a:pPr indent="0" marL="0">
+              <a:buNone/>
+            </a:pPr>
+            <a:r>
+              <a:rPr lang="en-US" sz="1150" b="1" dirty="0">
+                <a:solidFill>
+                  <a:schemeClr val="tx2"/>
+                </a:solidFill>
+              </a:rPr>
+              <a:t>근거 자료는 어디서</a:t>
+            </a:r>
+            <a:endParaRPr lang="en-US" sz="1150" dirty="0"/>
+          </a:p>
+        </p:txBody>
+      </p:sp>
+      <p:sp>
+        <p:nvSpPr>
+          <p:cNvPr id="13" name="설명 내용 3-3"/>
+          <p:cNvSpPr txBox="1"/>
+          <p:nvPr/>
+        </p:nvSpPr>
+        <p:spPr>
+          <a:xfrm>
+            <a:off x="621792" y="3172968"/>
+            <a:ext cx="3703320" cy="1234440"/>
+          </a:xfrm>
+          <a:prstGeom prst="rect">
+            <a:avLst/>
+          </a:prstGeom>
+          <a:noFill/>
+          <a:ln/>
+        </p:spPr>
+        <p:txBody>
+          <a:bodyPr wrap="square" lIns="0" tIns="0" rIns="0" bIns="0" rtlCol="0" anchor="t">
+            <a:normAutofit/>
+          </a:bodyPr>
+          <a:lstStyle/>
+          <a:p>
+            <a:pPr marL="342900" indent="-342900">
+              <a:spcAft>
+                <a:spcPts val="300"/>
+              </a:spcAft>
+              <a:buSzPct val="100000"/>
+              <a:buChar char="•"/>
+            </a:pPr>
+            <a:r>
+              <a:rPr lang="en-US" sz="1050" dirty="0">
+                <a:solidFill>
+                  <a:schemeClr val="tx1"/>
+                </a:solidFill>
+              </a:rPr>
+              <a:t>같은 지표 목록의 '주관적 수면충족률'</a:t>
+            </a:r>
+            <a:endParaRPr lang="en-US" sz="1050" dirty="0"/>
+          </a:p>
+          <a:p>
+            <a:pPr marL="342900" indent="-342900">
+              <a:spcAft>
+                <a:spcPts val="300"/>
+              </a:spcAft>
+              <a:buSzPct val="100000"/>
+              <a:buChar char="•"/>
+            </a:pPr>
+            <a:r>
+              <a:rPr lang="en-US" sz="1050" dirty="0">
+                <a:solidFill>
+                  <a:schemeClr val="tx1"/>
+                </a:solidFill>
+              </a:rPr>
+              <a:t>뜻: 최근 7일 수면이 피로 회복에 충분하다고 답한 비율</a:t>
+            </a:r>
+            <a:endParaRPr lang="en-US" sz="1050" dirty="0"/>
+          </a:p>
+          <a:p>
+            <a:pPr marL="342900" indent="-342900">
+              <a:spcAft>
+                <a:spcPts val="300"/>
+              </a:spcAft>
+              <a:buSzPct val="100000"/>
+              <a:buChar char="•"/>
+            </a:pPr>
+            <a:r>
+              <a:rPr lang="en-US" sz="1050" dirty="0">
+                <a:solidFill>
+                  <a:schemeClr val="tx1"/>
+                </a:solidFill>
+              </a:rPr>
+              <a:t>2024년 결과 보도자료(질병관리청)에도 나온다</a:t>
+            </a:r>
+            <a:endParaRPr lang="en-US" sz="1050" dirty="0"/>
+          </a:p>
+        </p:txBody>
+      </p:sp>
+      <p:sp>
+        <p:nvSpPr>
+          <p:cNvPr id="14" name="설명 카드 3-4"/>
+          <p:cNvSpPr/>
+          <p:nvPr/>
+        </p:nvSpPr>
+        <p:spPr>
+          <a:xfrm>
+            <a:off x="4663440" y="2788920"/>
+            <a:ext cx="4023360" cy="1691640"/>
+          </a:xfrm>
+          <a:prstGeom prst="roundRect">
+            <a:avLst>
+              <a:gd name="adj" fmla="val 3243"/>
+            </a:avLst>
+          </a:prstGeom>
+          <a:solidFill>
+            <a:srgbClr val="FFFFFF"/>
+          </a:solidFill>
+          <a:ln w="9525">
+            <a:solidFill>
+              <a:srgbClr val="DCE5DF"/>
+            </a:solidFill>
+            <a:prstDash val="solid"/>
+          </a:ln>
+        </p:spPr>
+      </p:sp>
+      <p:sp>
+        <p:nvSpPr>
+          <p:cNvPr id="15" name="설명 제목 3-4"/>
+          <p:cNvSpPr txBox="1"/>
+          <p:nvPr/>
+        </p:nvSpPr>
+        <p:spPr>
+          <a:xfrm>
+            <a:off x="4828032" y="2880360"/>
+            <a:ext cx="3657600" cy="274320"/>
+          </a:xfrm>
+          <a:prstGeom prst="rect">
+            <a:avLst/>
+          </a:prstGeom>
+          <a:noFill/>
+          <a:ln/>
+        </p:spPr>
+        <p:txBody>
+          <a:bodyPr wrap="square" lIns="0" tIns="0" rIns="0" bIns="0" rtlCol="0" anchor="ctr"/>
+          <a:lstStyle/>
+          <a:p>
+            <a:pPr indent="0" marL="0">
+              <a:buNone/>
+            </a:pPr>
+            <a:r>
+              <a:rPr lang="en-US" sz="1150" b="1" dirty="0">
+                <a:solidFill>
+                  <a:schemeClr val="tx2"/>
+                </a:solidFill>
+              </a:rPr>
+              <a:t>채점 연결</a:t>
+            </a:r>
+            <a:endParaRPr lang="en-US" sz="1150" dirty="0"/>
+          </a:p>
+        </p:txBody>
+      </p:sp>
+      <p:sp>
+        <p:nvSpPr>
+          <p:cNvPr id="16" name="설명 내용 3-4"/>
+          <p:cNvSpPr txBox="1"/>
+          <p:nvPr/>
+        </p:nvSpPr>
+        <p:spPr>
+          <a:xfrm>
+            <a:off x="4828032" y="3172968"/>
+            <a:ext cx="3703320" cy="1234440"/>
+          </a:xfrm>
+          <a:prstGeom prst="rect">
+            <a:avLst/>
+          </a:prstGeom>
+          <a:noFill/>
+          <a:ln/>
+        </p:spPr>
+        <p:txBody>
+          <a:bodyPr wrap="square" lIns="0" tIns="0" rIns="0" bIns="0" rtlCol="0" anchor="t">
+            <a:normAutofit/>
+          </a:bodyPr>
+          <a:lstStyle/>
+          <a:p>
+            <a:pPr marL="342900" indent="-342900">
+              <a:spcAft>
+                <a:spcPts val="300"/>
+              </a:spcAft>
+              <a:buSzPct val="100000"/>
+              <a:buChar char="•"/>
+            </a:pPr>
+            <a:r>
+              <a:rPr lang="en-US" sz="1050" dirty="0">
+                <a:solidFill>
+                  <a:schemeClr val="tx1"/>
+                </a:solidFill>
+              </a:rPr>
+              <a:t>2-④ 그래프 또는 확률분포표(둘 다 있음)</a:t>
+            </a:r>
+            <a:endParaRPr lang="en-US" sz="1050" dirty="0"/>
+          </a:p>
+          <a:p>
+            <a:pPr marL="342900" indent="-342900">
+              <a:spcAft>
+                <a:spcPts val="300"/>
+              </a:spcAft>
+              <a:buSzPct val="100000"/>
+              <a:buChar char="•"/>
+            </a:pPr>
+            <a:r>
+              <a:rPr lang="en-US" sz="1050" dirty="0">
+                <a:solidFill>
+                  <a:schemeClr val="tx1"/>
+                </a:solidFill>
+              </a:rPr>
+              <a:t>3-① 두 시점·차이(%p)  3-② 의견</a:t>
+            </a:r>
+            <a:endParaRPr lang="en-US" sz="1050" dirty="0"/>
+          </a:p>
+          <a:p>
+            <a:pPr marL="342900" indent="-342900">
+              <a:spcAft>
+                <a:spcPts val="300"/>
+              </a:spcAft>
+              <a:buSzPct val="100000"/>
+              <a:buChar char="•"/>
+            </a:pPr>
+            <a:r>
+              <a:rPr lang="en-US" sz="1050" dirty="0">
+                <a:solidFill>
+                  <a:schemeClr val="tx1"/>
+                </a:solidFill>
+              </a:rPr>
+              <a:t>3-③ 같은 조사의 다른 지표를 출처와 함께 근거로</a:t>
+            </a:r>
+            <a:endParaRPr lang="en-US" sz="1050" dirty="0"/>
+          </a:p>
+        </p:txBody>
+      </p:sp>
+      <p:sp>
+        <p:nvSpPr>
+          <p:cNvPr id="25" name="Slide Number Placeholder 0"/>
+          <p:cNvSpPr>
+            <a:spLocks noGrp="1"/>
+          </p:cNvSpPr>
+          <p:nvPr>
+            <p:ph type="sldNum" sz="quarter" idx="4294967295"/>
+          </p:nvPr>
+        </p:nvSpPr>
+        <p:spPr>
+          <a:xfrm>
+            <a:off x="8229600" y="4754880"/>
+            <a:ext cx="457200" cy="228600"/>
+          </a:xfrm>
+          <a:prstGeom prst="rect">
+            <a:avLst/>
+          </a:prstGeom>
+          <a:extLst>
+            <a:ext uri="{C572A759-6A51-4108-AA02-DFA0A04FC94B}">
+              <ma14:wrappingTextBoxFlag xmlns:ma14="http://schemas.microsoft.com/office/mac/drawingml/2011/main" val="0"/>
+            </a:ext>
+          </a:extLst>
+        </p:spPr>
+        <p:txBody>
+          <a:bodyPr/>
+          <a:lstStyle>
+            <a:lvl1pPr>
+              <a:defRPr sz="900">
+                <a:solidFill>
+                  <a:srgbClr val="6B6759"/>
+                </a:solidFill>
+              </a:defRPr>
+            </a:lvl1pPr>
+          </a:lstStyle>
+          <a:p>
+            <a:pPr algn="r"/>
+            <a:fld id="{F7021451-1387-4CA6-816F-3879F97B5CBC}" type="slidenum">
+              <a:rPr b="0" lang="en-US"/>
+              <a:t>6</a:t>
+            </a:fld>
+            <a:endParaRPr lang="en-US"/>
+          </a:p>
+        </p:txBody>
+      </p:sp>
+    </p:spTree>
+  </p:cSld>
+  <p:clrMapOvr>
+    <a:masterClrMapping/>
+  </p:clrMapOvr>
+</p:sld>
+</file>
+
+<file path=ppt/slides/slide7.xml><?xml version="1.0" encoding="utf-8"?>
+<p:sld xmlns:a="http://schemas.openxmlformats.org/drawingml/2006/main" xmlns:r="http://schemas.openxmlformats.org/officeDocument/2006/relationships" xmlns:p="http://schemas.openxmlformats.org/presentationml/2006/main">
+  <p:cSld name="Slide 7">
+    <p:spTree>
+      <p:nvGrpSpPr>
+        <p:cNvPr id="1" name=""/>
+        <p:cNvGrpSpPr/>
+        <p:nvPr/>
+      </p:nvGrpSpPr>
+      <p:grpSpPr>
+        <a:xfrm>
+          <a:off x="0" y="0"/>
+          <a:ext cx="0" cy="0"/>
+          <a:chOff x="0" y="0"/>
+          <a:chExt cx="0" cy="0"/>
+        </a:xfrm>
+      </p:grpSpPr>
+      <p:sp>
+        <p:nvSpPr>
+          <p:cNvPr id="2" name="Text 0"/>
+          <p:cNvSpPr/>
+          <p:nvPr>
+            <p:ph idx="100" type="title" hasCustomPrompt="1"/>
+          </p:nvPr>
+        </p:nvSpPr>
+        <p:spPr>
+          <a:xfrm>
+            <a:off x="960120" y="274320"/>
+            <a:ext cx="7726680" cy="548640"/>
+          </a:xfrm>
+          <a:prstGeom prst="rect">
+            <a:avLst/>
+          </a:prstGeom>
+          <a:noFill/>
+          <a:ln/>
+        </p:spPr>
+        <p:txBody>
+          <a:bodyPr wrap="square" lIns="0" tIns="0" rIns="0" bIns="0" rtlCol="0" anchor="ctr"/>
+          <a:lstStyle/>
+          <a:p>
+            <a:pPr algn="l" indent="0" marL="0">
+              <a:buNone/>
+            </a:pPr>
+            <a:r>
+              <a:rPr lang="en-US" sz="2400" b="1" dirty="0">
+                <a:solidFill>
+                  <a:schemeClr val="tx2"/>
+                </a:solidFill>
+              </a:rPr>
+              <a:t>결론</a:t>
+            </a:r>
+            <a:endParaRPr lang="en-US" sz="2400" dirty="0"/>
+          </a:p>
+        </p:txBody>
+      </p:sp>
+      <p:sp>
+        <p:nvSpPr>
+          <p:cNvPr id="3" name="번호 4"/>
+          <p:cNvSpPr/>
+          <p:nvPr/>
+        </p:nvSpPr>
+        <p:spPr>
+          <a:xfrm>
+            <a:off x="457200" y="356616"/>
+            <a:ext cx="384048" cy="384048"/>
+          </a:xfrm>
+          <a:prstGeom prst="ellipse">
+            <a:avLst/>
+          </a:prstGeom>
+          <a:solidFill>
+            <a:schemeClr val="accent1"/>
+          </a:solidFill>
+          <a:ln w="12700">
+            <a:solidFill>
+              <a:schemeClr val="accent1"/>
+            </a:solidFill>
+            <a:prstDash val="solid"/>
+          </a:ln>
+        </p:spPr>
+      </p:sp>
+      <p:sp>
+        <p:nvSpPr>
+          <p:cNvPr id="4" name="번호 글자 4"/>
+          <p:cNvSpPr txBox="1"/>
+          <p:nvPr/>
+        </p:nvSpPr>
+        <p:spPr>
+          <a:xfrm>
+            <a:off x="457200" y="356616"/>
+            <a:ext cx="384048" cy="384048"/>
+          </a:xfrm>
+          <a:prstGeom prst="rect">
+            <a:avLst/>
+          </a:prstGeom>
+          <a:noFill/>
+          <a:ln/>
+        </p:spPr>
+        <p:txBody>
+          <a:bodyPr wrap="square" lIns="0" tIns="0" rIns="0" bIns="0" rtlCol="0" anchor="ctr"/>
+          <a:lstStyle/>
+          <a:p>
+            <a:pPr algn="ctr" indent="0" marL="0">
+              <a:buNone/>
+            </a:pPr>
+            <a:r>
+              <a:rPr lang="en-US" sz="1600" b="1" dirty="0">
+                <a:solidFill>
+                  <a:schemeClr val="bg1"/>
+                </a:solidFill>
+              </a:rPr>
               <a:t>4</a:t>
+            </a:r>
+            <a:endParaRPr lang="en-US" sz="1600" dirty="0"/>
+          </a:p>
+        </p:txBody>
+      </p:sp>
+      <p:sp>
+        <p:nvSpPr>
+          <p:cNvPr id="5" name="결론 카드 1"/>
+          <p:cNvSpPr/>
+          <p:nvPr/>
+        </p:nvSpPr>
+        <p:spPr>
+          <a:xfrm>
+            <a:off x="457200" y="960120"/>
+            <a:ext cx="8229600" cy="1115568"/>
+          </a:xfrm>
+          <a:prstGeom prst="roundRect">
+            <a:avLst>
+              <a:gd name="adj" fmla="val 6557"/>
+            </a:avLst>
+          </a:prstGeom>
+          <a:solidFill>
+            <a:schemeClr val="bg2"/>
+          </a:solidFill>
+          <a:ln w="12700">
+            <a:solidFill>
+              <a:schemeClr val="bg2"/>
+            </a:solidFill>
+            <a:prstDash val="solid"/>
+          </a:ln>
+        </p:spPr>
+      </p:sp>
+      <p:sp>
+        <p:nvSpPr>
+          <p:cNvPr id="6" name="결론 라벨 1"/>
+          <p:cNvSpPr txBox="1"/>
+          <p:nvPr/>
+        </p:nvSpPr>
+        <p:spPr>
+          <a:xfrm>
+            <a:off x="685800" y="1051560"/>
+            <a:ext cx="7772400" cy="274320"/>
+          </a:xfrm>
+          <a:prstGeom prst="rect">
+            <a:avLst/>
+          </a:prstGeom>
+          <a:noFill/>
+          <a:ln/>
+        </p:spPr>
+        <p:txBody>
+          <a:bodyPr wrap="square" lIns="0" tIns="0" rIns="0" bIns="0" rtlCol="0" anchor="ctr"/>
+          <a:lstStyle/>
+          <a:p>
+            <a:pPr indent="0" marL="0">
+              <a:buNone/>
+            </a:pPr>
+            <a:r>
+              <a:rPr lang="en-US" sz="1100" b="1" dirty="0">
+                <a:solidFill>
+                  <a:schemeClr val="tx2"/>
+                </a:solidFill>
+              </a:rPr>
+              <a:t>통계가 보여 준 것</a:t>
+            </a:r>
+            <a:endParaRPr lang="en-US" sz="1100" dirty="0"/>
+          </a:p>
+        </p:txBody>
+      </p:sp>
+      <p:sp>
+        <p:nvSpPr>
+          <p:cNvPr id="7" name="결론 1"/>
+          <p:cNvSpPr txBox="1"/>
+          <p:nvPr/>
+        </p:nvSpPr>
+        <p:spPr>
+          <a:xfrm>
+            <a:off x="685800" y="1344168"/>
+            <a:ext cx="7772400" cy="685800"/>
+          </a:xfrm>
+          <a:prstGeom prst="rect">
+            <a:avLst/>
+          </a:prstGeom>
+          <a:noFill/>
+          <a:ln/>
+        </p:spPr>
+        <p:txBody>
+          <a:bodyPr wrap="square" lIns="0" tIns="0" rIns="0" bIns="0" rtlCol="0" anchor="t">
+            <a:normAutofit/>
+          </a:bodyPr>
+          <a:lstStyle/>
+          <a:p>
+            <a:pPr indent="0" marL="0">
+              <a:buNone/>
+            </a:pPr>
+            <a:r>
+              <a:rPr lang="en-US" sz="1300" dirty="0">
+                <a:solidFill>
+                  <a:schemeClr val="tx1"/>
+                </a:solidFill>
+              </a:rPr>
+              <a:t>아침 결식은 10명 중 4명을 넘고(2025년 여학생 45.3%, 남학생 41.9%) 5년째 늘었으며, 잠이 부족한 집단일수록 높다.</a:t>
+            </a:r>
+            <a:endParaRPr lang="en-US" sz="1300" dirty="0"/>
+          </a:p>
+        </p:txBody>
+      </p:sp>
+      <p:sp>
+        <p:nvSpPr>
+          <p:cNvPr id="8" name="결론 카드 2"/>
+          <p:cNvSpPr/>
+          <p:nvPr/>
+        </p:nvSpPr>
+        <p:spPr>
+          <a:xfrm>
+            <a:off x="457200" y="2194560"/>
+            <a:ext cx="8229600" cy="1115568"/>
+          </a:xfrm>
+          <a:prstGeom prst="roundRect">
+            <a:avLst>
+              <a:gd name="adj" fmla="val 6557"/>
+            </a:avLst>
+          </a:prstGeom>
+          <a:solidFill>
+            <a:schemeClr val="bg2"/>
+          </a:solidFill>
+          <a:ln w="12700">
+            <a:solidFill>
+              <a:schemeClr val="bg2"/>
+            </a:solidFill>
+            <a:prstDash val="solid"/>
+          </a:ln>
+        </p:spPr>
+      </p:sp>
+      <p:sp>
+        <p:nvSpPr>
+          <p:cNvPr id="9" name="결론 라벨 2"/>
+          <p:cNvSpPr txBox="1"/>
+          <p:nvPr/>
+        </p:nvSpPr>
+        <p:spPr>
+          <a:xfrm>
+            <a:off x="685800" y="2286000"/>
+            <a:ext cx="7772400" cy="274320"/>
+          </a:xfrm>
+          <a:prstGeom prst="rect">
+            <a:avLst/>
+          </a:prstGeom>
+          <a:noFill/>
+          <a:ln/>
+        </p:spPr>
+        <p:txBody>
+          <a:bodyPr wrap="square" lIns="0" tIns="0" rIns="0" bIns="0" rtlCol="0" anchor="ctr"/>
+          <a:lstStyle/>
+          <a:p>
+            <a:pPr indent="0" marL="0">
+              <a:buNone/>
+            </a:pPr>
+            <a:r>
+              <a:rPr lang="en-US" sz="1100" b="1" dirty="0">
+                <a:solidFill>
+                  <a:schemeClr val="tx2"/>
+                </a:solidFill>
+              </a:rPr>
+              <a:t>그래서 나의 주장</a:t>
+            </a:r>
+            <a:endParaRPr lang="en-US" sz="1100" dirty="0"/>
+          </a:p>
+        </p:txBody>
+      </p:sp>
+      <p:sp>
+        <p:nvSpPr>
+          <p:cNvPr id="10" name="결론 2"/>
+          <p:cNvSpPr txBox="1"/>
+          <p:nvPr/>
+        </p:nvSpPr>
+        <p:spPr>
+          <a:xfrm>
+            <a:off x="685800" y="2578608"/>
+            <a:ext cx="7772400" cy="685800"/>
+          </a:xfrm>
+          <a:prstGeom prst="rect">
+            <a:avLst/>
+          </a:prstGeom>
+          <a:noFill/>
+          <a:ln/>
+        </p:spPr>
+        <p:txBody>
+          <a:bodyPr wrap="square" lIns="0" tIns="0" rIns="0" bIns="0" rtlCol="0" anchor="t">
+            <a:normAutofit/>
+          </a:bodyPr>
+          <a:lstStyle/>
+          <a:p>
+            <a:pPr indent="0" marL="0">
+              <a:buNone/>
+            </a:pPr>
+            <a:r>
+              <a:rPr lang="en-US" sz="1300" dirty="0">
+                <a:solidFill>
+                  <a:schemeClr val="tx1"/>
+                </a:solidFill>
+              </a:rPr>
+              <a:t>'집에서 먹고 오라'는 교육은 잠을 더 줄이라는 말이다. 등교 후 10분 안에 먹을 수 있는 아침(간편식)을 학교가 마련해야 한다.</a:t>
+            </a:r>
+            <a:endParaRPr lang="en-US" sz="1300" dirty="0"/>
+          </a:p>
+        </p:txBody>
+      </p:sp>
+      <p:sp>
+        <p:nvSpPr>
+          <p:cNvPr id="11" name="결론 카드 3"/>
+          <p:cNvSpPr/>
+          <p:nvPr/>
+        </p:nvSpPr>
+        <p:spPr>
+          <a:xfrm>
+            <a:off x="457200" y="3429000"/>
+            <a:ext cx="8229600" cy="1115568"/>
+          </a:xfrm>
+          <a:prstGeom prst="roundRect">
+            <a:avLst>
+              <a:gd name="adj" fmla="val 6557"/>
+            </a:avLst>
+          </a:prstGeom>
+          <a:solidFill>
+            <a:schemeClr val="bg2"/>
+          </a:solidFill>
+          <a:ln w="12700">
+            <a:solidFill>
+              <a:schemeClr val="bg2"/>
+            </a:solidFill>
+            <a:prstDash val="solid"/>
+          </a:ln>
+        </p:spPr>
+      </p:sp>
+      <p:sp>
+        <p:nvSpPr>
+          <p:cNvPr id="12" name="결론 라벨 3"/>
+          <p:cNvSpPr txBox="1"/>
+          <p:nvPr/>
+        </p:nvSpPr>
+        <p:spPr>
+          <a:xfrm>
+            <a:off x="685800" y="3520440"/>
+            <a:ext cx="7772400" cy="274320"/>
+          </a:xfrm>
+          <a:prstGeom prst="rect">
+            <a:avLst/>
+          </a:prstGeom>
+          <a:noFill/>
+          <a:ln/>
+        </p:spPr>
+        <p:txBody>
+          <a:bodyPr wrap="square" lIns="0" tIns="0" rIns="0" bIns="0" rtlCol="0" anchor="ctr"/>
+          <a:lstStyle/>
+          <a:p>
+            <a:pPr indent="0" marL="0">
+              <a:buNone/>
+            </a:pPr>
+            <a:r>
+              <a:rPr lang="en-US" sz="1100" b="1" dirty="0">
+                <a:solidFill>
+                  <a:schemeClr val="tx2"/>
+                </a:solidFill>
+              </a:rPr>
+              <a:t>제안</a:t>
+            </a:r>
+            <a:endParaRPr lang="en-US" sz="1100" dirty="0"/>
+          </a:p>
+        </p:txBody>
+      </p:sp>
+      <p:sp>
+        <p:nvSpPr>
+          <p:cNvPr id="13" name="결론 3"/>
+          <p:cNvSpPr txBox="1"/>
+          <p:nvPr/>
+        </p:nvSpPr>
+        <p:spPr>
+          <a:xfrm>
+            <a:off x="685800" y="3813048"/>
+            <a:ext cx="7772400" cy="685800"/>
+          </a:xfrm>
+          <a:prstGeom prst="rect">
+            <a:avLst/>
+          </a:prstGeom>
+          <a:noFill/>
+          <a:ln/>
+        </p:spPr>
+        <p:txBody>
+          <a:bodyPr wrap="square" lIns="0" tIns="0" rIns="0" bIns="0" rtlCol="0" anchor="t">
+            <a:normAutofit/>
+          </a:bodyPr>
+          <a:lstStyle/>
+          <a:p>
+            <a:pPr indent="0" marL="0">
+              <a:buNone/>
+            </a:pPr>
+            <a:r>
+              <a:rPr lang="en-US" sz="1300" dirty="0">
+                <a:solidFill>
+                  <a:schemeClr val="tx1"/>
+                </a:solidFill>
+              </a:rPr>
+              <a:t>아침을 꾸준히 먹은 학생의 수능 평균이 약 20점 높았다는 조사(농촌진흥청, 2005)가 있다. 2학년이 240명이면 45%인 약 108명이 대상이다. 한 학기 시범 운영 뒤 결식률과 지각·조퇴를 비교해 효과를 숫자로 확인하자.</a:t>
+            </a:r>
+            <a:endParaRPr lang="en-US" sz="1300" dirty="0"/>
+          </a:p>
+        </p:txBody>
+      </p:sp>
+      <p:sp>
+        <p:nvSpPr>
+          <p:cNvPr id="25" name="Slide Number Placeholder 0"/>
+          <p:cNvSpPr>
+            <a:spLocks noGrp="1"/>
+          </p:cNvSpPr>
+          <p:nvPr>
+            <p:ph type="sldNum" sz="quarter" idx="4294967295"/>
+          </p:nvPr>
+        </p:nvSpPr>
+        <p:spPr>
+          <a:xfrm>
+            <a:off x="8229600" y="4754880"/>
+            <a:ext cx="457200" cy="228600"/>
+          </a:xfrm>
+          <a:prstGeom prst="rect">
+            <a:avLst/>
+          </a:prstGeom>
+          <a:extLst>
+            <a:ext uri="{C572A759-6A51-4108-AA02-DFA0A04FC94B}">
+              <ma14:wrappingTextBoxFlag xmlns:ma14="http://schemas.microsoft.com/office/mac/drawingml/2011/main" val="0"/>
+            </a:ext>
+          </a:extLst>
+        </p:spPr>
+        <p:txBody>
+          <a:bodyPr/>
+          <a:lstStyle>
+            <a:lvl1pPr>
+              <a:defRPr sz="900">
+                <a:solidFill>
+                  <a:srgbClr val="6B6759"/>
+                </a:solidFill>
+              </a:defRPr>
+            </a:lvl1pPr>
+          </a:lstStyle>
+          <a:p>
+            <a:pPr algn="r"/>
+            <a:fld id="{F7021451-1387-4CA6-816F-3879F97B5CBC}" type="slidenum">
+              <a:rPr b="0" lang="en-US"/>
+              <a:t>7</a:t>
+            </a:fld>
+            <a:endParaRPr lang="en-US"/>
+          </a:p>
+        </p:txBody>
+      </p:sp>
+    </p:spTree>
+  </p:cSld>
+  <p:clrMapOvr>
+    <a:masterClrMapping/>
+  </p:clrMapOvr>
+</p:sld>
+</file>
+
+<file path=ppt/slides/slide8.xml><?xml version="1.0" encoding="utf-8"?>
+<p:sld xmlns:a="http://schemas.openxmlformats.org/drawingml/2006/main" xmlns:r="http://schemas.openxmlformats.org/officeDocument/2006/relationships" xmlns:p="http://schemas.openxmlformats.org/presentationml/2006/main">
+  <p:cSld name="Slide 8">
+    <p:spTree>
+      <p:nvGrpSpPr>
+        <p:cNvPr id="1" name=""/>
+        <p:cNvGrpSpPr/>
+        <p:nvPr/>
+      </p:nvGrpSpPr>
+      <p:grpSpPr>
+        <a:xfrm>
+          <a:off x="0" y="0"/>
+          <a:ext cx="0" cy="0"/>
+          <a:chOff x="0" y="0"/>
+          <a:chExt cx="0" cy="0"/>
+        </a:xfrm>
+      </p:grpSpPr>
+      <p:sp>
+        <p:nvSpPr>
+          <p:cNvPr id="2" name="Text 0"/>
+          <p:cNvSpPr/>
+          <p:nvPr>
+            <p:ph idx="100" type="title" hasCustomPrompt="1"/>
+          </p:nvPr>
+        </p:nvSpPr>
+        <p:spPr>
+          <a:xfrm>
+            <a:off x="960120" y="274320"/>
+            <a:ext cx="7726680" cy="548640"/>
+          </a:xfrm>
+          <a:prstGeom prst="rect">
+            <a:avLst/>
+          </a:prstGeom>
+          <a:noFill/>
+          <a:ln/>
+        </p:spPr>
+        <p:txBody>
+          <a:bodyPr wrap="square" lIns="0" tIns="0" rIns="0" bIns="0" rtlCol="0" anchor="ctr"/>
+          <a:lstStyle/>
+          <a:p>
+            <a:pPr algn="l" indent="0" marL="0">
+              <a:buNone/>
+            </a:pPr>
+            <a:r>
+              <a:rPr lang="en-US" sz="2400" b="1" dirty="0">
+                <a:solidFill>
+                  <a:schemeClr val="tx2"/>
+                </a:solidFill>
+              </a:rPr>
+              <a:t>4장 설명 · 핵심 요약</a:t>
+            </a:r>
+            <a:endParaRPr lang="en-US" sz="2400" dirty="0"/>
+          </a:p>
+        </p:txBody>
+      </p:sp>
+      <p:sp>
+        <p:nvSpPr>
+          <p:cNvPr id="3" name="설명 배지 4"/>
+          <p:cNvSpPr/>
+          <p:nvPr/>
+        </p:nvSpPr>
+        <p:spPr>
+          <a:xfrm>
+            <a:off x="457200" y="384048"/>
+            <a:ext cx="420624" cy="329184"/>
+          </a:xfrm>
+          <a:prstGeom prst="roundRect">
+            <a:avLst>
+              <a:gd name="adj" fmla="val 22222"/>
+            </a:avLst>
+          </a:prstGeom>
+          <a:solidFill>
+            <a:schemeClr val="accent1"/>
+          </a:solidFill>
+          <a:ln w="12700">
+            <a:solidFill>
+              <a:schemeClr val="accent1"/>
+            </a:solidFill>
+            <a:prstDash val="solid"/>
+          </a:ln>
+        </p:spPr>
+      </p:sp>
+      <p:sp>
+        <p:nvSpPr>
+          <p:cNvPr id="4" name="설명 배지 글자 4"/>
+          <p:cNvSpPr txBox="1"/>
+          <p:nvPr/>
+        </p:nvSpPr>
+        <p:spPr>
+          <a:xfrm>
+            <a:off x="457200" y="384048"/>
+            <a:ext cx="420624" cy="329184"/>
+          </a:xfrm>
+          <a:prstGeom prst="rect">
+            <a:avLst/>
+          </a:prstGeom>
+          <a:noFill/>
+          <a:ln/>
+        </p:spPr>
+        <p:txBody>
+          <a:bodyPr wrap="square" lIns="0" tIns="0" rIns="0" bIns="0" rtlCol="0" anchor="ctr"/>
+          <a:lstStyle/>
+          <a:p>
+            <a:pPr algn="ctr" indent="0" marL="0">
+              <a:buNone/>
+            </a:pPr>
+            <a:r>
+              <a:rPr lang="en-US" sz="1000" b="1" dirty="0">
+                <a:solidFill>
+                  <a:schemeClr val="bg1"/>
+                </a:solidFill>
+              </a:rPr>
+              <a:t>설명</a:t>
+            </a:r>
+            <a:endParaRPr lang="en-US" sz="1000" dirty="0"/>
+          </a:p>
+        </p:txBody>
+      </p:sp>
+      <p:sp>
+        <p:nvSpPr>
+          <p:cNvPr id="5" name="설명 카드 4-1"/>
+          <p:cNvSpPr/>
+          <p:nvPr/>
+        </p:nvSpPr>
+        <p:spPr>
+          <a:xfrm>
+            <a:off x="457200" y="960120"/>
+            <a:ext cx="4023360" cy="1691640"/>
+          </a:xfrm>
+          <a:prstGeom prst="roundRect">
+            <a:avLst>
+              <a:gd name="adj" fmla="val 3243"/>
+            </a:avLst>
+          </a:prstGeom>
+          <a:solidFill>
+            <a:srgbClr val="FFFFFF"/>
+          </a:solidFill>
+          <a:ln w="9525">
+            <a:solidFill>
+              <a:srgbClr val="DCE5DF"/>
+            </a:solidFill>
+            <a:prstDash val="solid"/>
+          </a:ln>
+        </p:spPr>
+      </p:sp>
+      <p:sp>
+        <p:nvSpPr>
+          <p:cNvPr id="6" name="설명 제목 4-1"/>
+          <p:cNvSpPr txBox="1"/>
+          <p:nvPr/>
+        </p:nvSpPr>
+        <p:spPr>
+          <a:xfrm>
+            <a:off x="621792" y="1051560"/>
+            <a:ext cx="3657600" cy="274320"/>
+          </a:xfrm>
+          <a:prstGeom prst="rect">
+            <a:avLst/>
+          </a:prstGeom>
+          <a:noFill/>
+          <a:ln/>
+        </p:spPr>
+        <p:txBody>
+          <a:bodyPr wrap="square" lIns="0" tIns="0" rIns="0" bIns="0" rtlCol="0" anchor="ctr"/>
+          <a:lstStyle/>
+          <a:p>
+            <a:pPr indent="0" marL="0">
+              <a:buNone/>
+            </a:pPr>
+            <a:r>
+              <a:rPr lang="en-US" sz="1150" b="1" dirty="0">
+                <a:solidFill>
+                  <a:schemeClr val="tx2"/>
+                </a:solidFill>
+              </a:rPr>
+              <a:t>결론의 구조</a:t>
+            </a:r>
+            <a:endParaRPr lang="en-US" sz="1150" dirty="0"/>
+          </a:p>
+        </p:txBody>
+      </p:sp>
+      <p:sp>
+        <p:nvSpPr>
+          <p:cNvPr id="7" name="설명 내용 4-1"/>
+          <p:cNvSpPr txBox="1"/>
+          <p:nvPr/>
+        </p:nvSpPr>
+        <p:spPr>
+          <a:xfrm>
+            <a:off x="621792" y="1344168"/>
+            <a:ext cx="3703320" cy="1234440"/>
+          </a:xfrm>
+          <a:prstGeom prst="rect">
+            <a:avLst/>
+          </a:prstGeom>
+          <a:noFill/>
+          <a:ln/>
+        </p:spPr>
+        <p:txBody>
+          <a:bodyPr wrap="square" lIns="0" tIns="0" rIns="0" bIns="0" rtlCol="0" anchor="t">
+            <a:normAutofit/>
+          </a:bodyPr>
+          <a:lstStyle/>
+          <a:p>
+            <a:pPr marL="342900" indent="-342900">
+              <a:spcAft>
+                <a:spcPts val="300"/>
+              </a:spcAft>
+              <a:buSzPct val="100000"/>
+              <a:buChar char="•"/>
+            </a:pPr>
+            <a:r>
+              <a:rPr lang="en-US" sz="1050" dirty="0">
+                <a:solidFill>
+                  <a:schemeClr val="tx1"/>
+                </a:solidFill>
+              </a:rPr>
+              <a:t>보여 준 것(숫자) → 주장 → 제안, 세 문장</a:t>
+            </a:r>
+            <a:endParaRPr lang="en-US" sz="1050" dirty="0"/>
+          </a:p>
+          <a:p>
+            <a:pPr marL="342900" indent="-342900">
+              <a:spcAft>
+                <a:spcPts val="300"/>
+              </a:spcAft>
+              <a:buSzPct val="100000"/>
+              <a:buChar char="•"/>
+            </a:pPr>
+            <a:r>
+              <a:rPr lang="en-US" sz="1050" dirty="0">
+                <a:solidFill>
+                  <a:schemeClr val="tx1"/>
+                </a:solidFill>
+              </a:rPr>
+              <a:t>제안에는 학교 규모로 환산한 숫자를 넣는다(240명 → 약 108명)</a:t>
+            </a:r>
+            <a:endParaRPr lang="en-US" sz="1050" dirty="0"/>
+          </a:p>
+        </p:txBody>
+      </p:sp>
+      <p:sp>
+        <p:nvSpPr>
+          <p:cNvPr id="8" name="설명 카드 4-2"/>
+          <p:cNvSpPr/>
+          <p:nvPr/>
+        </p:nvSpPr>
+        <p:spPr>
+          <a:xfrm>
+            <a:off x="4663440" y="960120"/>
+            <a:ext cx="4023360" cy="1691640"/>
+          </a:xfrm>
+          <a:prstGeom prst="roundRect">
+            <a:avLst>
+              <a:gd name="adj" fmla="val 3243"/>
+            </a:avLst>
+          </a:prstGeom>
+          <a:solidFill>
+            <a:srgbClr val="FFFFFF"/>
+          </a:solidFill>
+          <a:ln w="9525">
+            <a:solidFill>
+              <a:srgbClr val="DCE5DF"/>
+            </a:solidFill>
+            <a:prstDash val="solid"/>
+          </a:ln>
+        </p:spPr>
+      </p:sp>
+      <p:sp>
+        <p:nvSpPr>
+          <p:cNvPr id="9" name="설명 제목 4-2"/>
+          <p:cNvSpPr txBox="1"/>
+          <p:nvPr/>
+        </p:nvSpPr>
+        <p:spPr>
+          <a:xfrm>
+            <a:off x="4828032" y="1051560"/>
+            <a:ext cx="3657600" cy="274320"/>
+          </a:xfrm>
+          <a:prstGeom prst="rect">
+            <a:avLst/>
+          </a:prstGeom>
+          <a:noFill/>
+          <a:ln/>
+        </p:spPr>
+        <p:txBody>
+          <a:bodyPr wrap="square" lIns="0" tIns="0" rIns="0" bIns="0" rtlCol="0" anchor="ctr"/>
+          <a:lstStyle/>
+          <a:p>
+            <a:pPr indent="0" marL="0">
+              <a:buNone/>
+            </a:pPr>
+            <a:r>
+              <a:rPr lang="en-US" sz="1150" b="1" dirty="0">
+                <a:solidFill>
+                  <a:schemeClr val="tx2"/>
+                </a:solidFill>
+              </a:rPr>
+              <a:t>효과 통계의 출처와 한계</a:t>
+            </a:r>
+            <a:endParaRPr lang="en-US" sz="1150" dirty="0"/>
+          </a:p>
+        </p:txBody>
+      </p:sp>
+      <p:sp>
+        <p:nvSpPr>
+          <p:cNvPr id="10" name="설명 내용 4-2"/>
+          <p:cNvSpPr txBox="1"/>
+          <p:nvPr/>
+        </p:nvSpPr>
+        <p:spPr>
+          <a:xfrm>
+            <a:off x="4828032" y="1344168"/>
+            <a:ext cx="3703320" cy="1234440"/>
+          </a:xfrm>
+          <a:prstGeom prst="rect">
+            <a:avLst/>
+          </a:prstGeom>
+          <a:noFill/>
+          <a:ln/>
+        </p:spPr>
+        <p:txBody>
+          <a:bodyPr wrap="square" lIns="0" tIns="0" rIns="0" bIns="0" rtlCol="0" anchor="t">
+            <a:normAutofit/>
+          </a:bodyPr>
+          <a:lstStyle/>
+          <a:p>
+            <a:pPr marL="342900" indent="-342900">
+              <a:spcAft>
+                <a:spcPts val="300"/>
+              </a:spcAft>
+              <a:buSzPct val="100000"/>
+              <a:buChar char="•"/>
+            </a:pPr>
+            <a:r>
+              <a:rPr lang="en-US" sz="1050" dirty="0">
+                <a:solidFill>
+                  <a:schemeClr val="tx1"/>
+                </a:solidFill>
+              </a:rPr>
+              <a:t>농촌진흥청 농촌자원개발연구소 조사(2005년 보도): 아침을 꾸준히 먹은 학생의 수능 평균이 약 20점 높았다</a:t>
+            </a:r>
+            <a:endParaRPr lang="en-US" sz="1050" dirty="0"/>
+          </a:p>
+          <a:p>
+            <a:pPr marL="342900" indent="-342900">
+              <a:spcAft>
+                <a:spcPts val="300"/>
+              </a:spcAft>
+              <a:buSzPct val="100000"/>
+              <a:buChar char="•"/>
+            </a:pPr>
+            <a:r>
+              <a:rPr lang="en-US" sz="1050" dirty="0">
+                <a:solidFill>
+                  <a:schemeClr val="tx1"/>
+                </a:solidFill>
+              </a:rPr>
+              <a:t>오래된 조사이고 상관관계다. 발표에서 이 한계를 말하면 더 좋다</a:t>
+            </a:r>
+            <a:endParaRPr lang="en-US" sz="1050" dirty="0"/>
+          </a:p>
+        </p:txBody>
+      </p:sp>
+      <p:sp>
+        <p:nvSpPr>
+          <p:cNvPr id="11" name="설명 카드 4-3"/>
+          <p:cNvSpPr/>
+          <p:nvPr/>
+        </p:nvSpPr>
+        <p:spPr>
+          <a:xfrm>
+            <a:off x="457200" y="2788920"/>
+            <a:ext cx="4023360" cy="1691640"/>
+          </a:xfrm>
+          <a:prstGeom prst="roundRect">
+            <a:avLst>
+              <a:gd name="adj" fmla="val 3243"/>
+            </a:avLst>
+          </a:prstGeom>
+          <a:solidFill>
+            <a:srgbClr val="FFFFFF"/>
+          </a:solidFill>
+          <a:ln w="9525">
+            <a:solidFill>
+              <a:srgbClr val="DCE5DF"/>
+            </a:solidFill>
+            <a:prstDash val="solid"/>
+          </a:ln>
+        </p:spPr>
+      </p:sp>
+      <p:sp>
+        <p:nvSpPr>
+          <p:cNvPr id="12" name="설명 제목 4-3"/>
+          <p:cNvSpPr txBox="1"/>
+          <p:nvPr/>
+        </p:nvSpPr>
+        <p:spPr>
+          <a:xfrm>
+            <a:off x="621792" y="2880360"/>
+            <a:ext cx="3657600" cy="274320"/>
+          </a:xfrm>
+          <a:prstGeom prst="rect">
+            <a:avLst/>
+          </a:prstGeom>
+          <a:noFill/>
+          <a:ln/>
+        </p:spPr>
+        <p:txBody>
+          <a:bodyPr wrap="square" lIns="0" tIns="0" rIns="0" bIns="0" rtlCol="0" anchor="ctr"/>
+          <a:lstStyle/>
+          <a:p>
+            <a:pPr indent="0" marL="0">
+              <a:buNone/>
+            </a:pPr>
+            <a:r>
+              <a:rPr lang="en-US" sz="1150" b="1" dirty="0">
+                <a:solidFill>
+                  <a:schemeClr val="tx2"/>
+                </a:solidFill>
+              </a:rPr>
+              <a:t>궁금증 대신 실행</a:t>
+            </a:r>
+            <a:endParaRPr lang="en-US" sz="1150" dirty="0"/>
+          </a:p>
+        </p:txBody>
+      </p:sp>
+      <p:sp>
+        <p:nvSpPr>
+          <p:cNvPr id="13" name="설명 내용 4-3"/>
+          <p:cNvSpPr txBox="1"/>
+          <p:nvPr/>
+        </p:nvSpPr>
+        <p:spPr>
+          <a:xfrm>
+            <a:off x="621792" y="3172968"/>
+            <a:ext cx="3703320" cy="1234440"/>
+          </a:xfrm>
+          <a:prstGeom prst="rect">
+            <a:avLst/>
+          </a:prstGeom>
+          <a:noFill/>
+          <a:ln/>
+        </p:spPr>
+        <p:txBody>
+          <a:bodyPr wrap="square" lIns="0" tIns="0" rIns="0" bIns="0" rtlCol="0" anchor="t">
+            <a:normAutofit/>
+          </a:bodyPr>
+          <a:lstStyle/>
+          <a:p>
+            <a:pPr marL="342900" indent="-342900">
+              <a:spcAft>
+                <a:spcPts val="300"/>
+              </a:spcAft>
+              <a:buSzPct val="100000"/>
+              <a:buChar char="•"/>
+            </a:pPr>
+            <a:r>
+              <a:rPr lang="en-US" sz="1050" dirty="0">
+                <a:solidFill>
+                  <a:schemeClr val="tx1"/>
+                </a:solidFill>
+              </a:rPr>
+              <a:t>'더 찾아보고 싶다'로 끝내지 않는다</a:t>
+            </a:r>
+            <a:endParaRPr lang="en-US" sz="1050" dirty="0"/>
+          </a:p>
+          <a:p>
+            <a:pPr marL="342900" indent="-342900">
+              <a:spcAft>
+                <a:spcPts val="300"/>
+              </a:spcAft>
+              <a:buSzPct val="100000"/>
+              <a:buChar char="•"/>
+            </a:pPr>
+            <a:r>
+              <a:rPr lang="en-US" sz="1050" dirty="0">
+                <a:solidFill>
+                  <a:schemeClr val="tx1"/>
+                </a:solidFill>
+              </a:rPr>
+              <a:t>할 일을 적는다: 한 학기 시범 운영, 전후 비교(결식률·지각·조퇴·수면 시간)</a:t>
+            </a:r>
+            <a:endParaRPr lang="en-US" sz="1050" dirty="0"/>
+          </a:p>
+        </p:txBody>
+      </p:sp>
+      <p:sp>
+        <p:nvSpPr>
+          <p:cNvPr id="14" name="설명 카드 4-4"/>
+          <p:cNvSpPr/>
+          <p:nvPr/>
+        </p:nvSpPr>
+        <p:spPr>
+          <a:xfrm>
+            <a:off x="4663440" y="2788920"/>
+            <a:ext cx="4023360" cy="1691640"/>
+          </a:xfrm>
+          <a:prstGeom prst="roundRect">
+            <a:avLst>
+              <a:gd name="adj" fmla="val 3243"/>
+            </a:avLst>
+          </a:prstGeom>
+          <a:solidFill>
+            <a:srgbClr val="FFFFFF"/>
+          </a:solidFill>
+          <a:ln w="9525">
+            <a:solidFill>
+              <a:srgbClr val="DCE5DF"/>
+            </a:solidFill>
+            <a:prstDash val="solid"/>
+          </a:ln>
+        </p:spPr>
+      </p:sp>
+      <p:sp>
+        <p:nvSpPr>
+          <p:cNvPr id="15" name="설명 제목 4-4"/>
+          <p:cNvSpPr txBox="1"/>
+          <p:nvPr/>
+        </p:nvSpPr>
+        <p:spPr>
+          <a:xfrm>
+            <a:off x="4828032" y="2880360"/>
+            <a:ext cx="3657600" cy="274320"/>
+          </a:xfrm>
+          <a:prstGeom prst="rect">
+            <a:avLst/>
+          </a:prstGeom>
+          <a:noFill/>
+          <a:ln/>
+        </p:spPr>
+        <p:txBody>
+          <a:bodyPr wrap="square" lIns="0" tIns="0" rIns="0" bIns="0" rtlCol="0" anchor="ctr"/>
+          <a:lstStyle/>
+          <a:p>
+            <a:pPr indent="0" marL="0">
+              <a:buNone/>
+            </a:pPr>
+            <a:r>
+              <a:rPr lang="en-US" sz="1150" b="1" dirty="0">
+                <a:solidFill>
+                  <a:schemeClr val="tx2"/>
+                </a:solidFill>
+              </a:rPr>
+              <a:t>채점 연결</a:t>
+            </a:r>
+            <a:endParaRPr lang="en-US" sz="1150" dirty="0"/>
+          </a:p>
+        </p:txBody>
+      </p:sp>
+      <p:sp>
+        <p:nvSpPr>
+          <p:cNvPr id="16" name="설명 내용 4-4"/>
+          <p:cNvSpPr txBox="1"/>
+          <p:nvPr/>
+        </p:nvSpPr>
+        <p:spPr>
+          <a:xfrm>
+            <a:off x="4828032" y="3172968"/>
+            <a:ext cx="3703320" cy="1234440"/>
+          </a:xfrm>
+          <a:prstGeom prst="rect">
+            <a:avLst/>
+          </a:prstGeom>
+          <a:noFill/>
+          <a:ln/>
+        </p:spPr>
+        <p:txBody>
+          <a:bodyPr wrap="square" lIns="0" tIns="0" rIns="0" bIns="0" rtlCol="0" anchor="t">
+            <a:normAutofit/>
+          </a:bodyPr>
+          <a:lstStyle/>
+          <a:p>
+            <a:pPr marL="342900" indent="-342900">
+              <a:spcAft>
+                <a:spcPts val="300"/>
+              </a:spcAft>
+              <a:buSzPct val="100000"/>
+              <a:buChar char="•"/>
+            </a:pPr>
+            <a:r>
+              <a:rPr lang="en-US" sz="1050" dirty="0">
+                <a:solidFill>
+                  <a:schemeClr val="tx1"/>
+                </a:solidFill>
+              </a:rPr>
+              <a:t>4번 발표 20점: 출처·표·그래프·해석이 모두 나오고 결론이 자세할 때</a:t>
+            </a:r>
+            <a:endParaRPr lang="en-US" sz="1050" dirty="0"/>
+          </a:p>
+          <a:p>
+            <a:pPr marL="342900" indent="-342900">
+              <a:spcAft>
+                <a:spcPts val="300"/>
+              </a:spcAft>
+              <a:buSzPct val="100000"/>
+              <a:buChar char="•"/>
+            </a:pPr>
+            <a:r>
+              <a:rPr lang="en-US" sz="1050" dirty="0">
+                <a:solidFill>
+                  <a:schemeClr val="tx1"/>
+                </a:solidFill>
+              </a:rPr>
+              <a:t>결론이 한 문장이면 15점, 제작·해석이 빠지면 10점</a:t>
+            </a:r>
+            <a:endParaRPr lang="en-US" sz="1050" dirty="0"/>
+          </a:p>
+        </p:txBody>
+      </p:sp>
+      <p:sp>
+        <p:nvSpPr>
+          <p:cNvPr id="25" name="Slide Number Placeholder 0"/>
+          <p:cNvSpPr>
+            <a:spLocks noGrp="1"/>
+          </p:cNvSpPr>
+          <p:nvPr>
+            <p:ph type="sldNum" sz="quarter" idx="4294967295"/>
+          </p:nvPr>
+        </p:nvSpPr>
+        <p:spPr>
+          <a:xfrm>
+            <a:off x="8229600" y="4754880"/>
+            <a:ext cx="457200" cy="228600"/>
+          </a:xfrm>
+          <a:prstGeom prst="rect">
+            <a:avLst/>
+          </a:prstGeom>
+          <a:extLst>
+            <a:ext uri="{C572A759-6A51-4108-AA02-DFA0A04FC94B}">
+              <ma14:wrappingTextBoxFlag xmlns:ma14="http://schemas.microsoft.com/office/mac/drawingml/2011/main" val="0"/>
+            </a:ext>
+          </a:extLst>
+        </p:spPr>
+        <p:txBody>
+          <a:bodyPr/>
+          <a:lstStyle>
+            <a:lvl1pPr>
+              <a:defRPr sz="900">
+                <a:solidFill>
+                  <a:srgbClr val="6B6759"/>
+                </a:solidFill>
+              </a:defRPr>
+            </a:lvl1pPr>
+          </a:lstStyle>
+          <a:p>
+            <a:pPr algn="r"/>
+            <a:fld id="{F7021451-1387-4CA6-816F-3879F97B5CBC}" type="slidenum">
+              <a:rPr b="0" lang="en-US"/>
+              <a:t>8</a:t>
             </a:fld>
             <a:endParaRPr lang="en-US"/>
           </a:p>

--- a/docs/2026-2학기-통계독서탐구-수행평가/발표예시-간호.pptx
+++ b/docs/2026-2학기-통계독서탐구-수행평가/발표예시-간호.pptx
@@ -114,7 +114,7 @@
   <p:extLst>
     <p:ext uri="{521415D9-36F7-43E2-AB2F-B90AF26B5E84}">
       <p14:sectionLst xmlns:p14="http://schemas.microsoft.com/office/powerpoint/2010/main">
-        <p14:section name="발표" id="{a29a602f-50a3-b39b-90fd-3dff5ac32301}">
+        <p14:section name="발표" id="{96f17dfe-71d5-520b-fb9b-4d9a72eae0e4}">
           <p14:sldIdLst>
             <p14:sldId id="256"/>
             <p14:sldId id="257"/>
@@ -10489,7 +10489,7 @@
                   <a:schemeClr val="tx1"/>
                 </a:solidFill>
               </a:rPr>
-              <a:t>아침을 꾸준히 먹은 학생의 수능 평균이 약 20점 높았다는 조사(농촌진흥청, 2005)가 있다. 2학년이 240명이면 45%인 약 108명이 대상이다. 한 학기 시범 운영 뒤 결식률과 지각·조퇴를 비교해 효과를 숫자로 확인하자.</a:t>
+              <a:t>아침은 학업과도 이어진다. 농촌진흥청 설문(2002년, 대학 1·2학년 3,612명)에서 고교 때 아침을 매일 먹은 응답자의 수능 평균은 294점, 주 2일 이하는 275점이었다(400점 만점). 2학년이 240명이면 45%인 약 108명이 대상이다. 한 학기 시범 운영 뒤 결식률과 지각·조퇴를 비교해 효과를 숫자로 확인하자.</a:t>
             </a:r>
             <a:endParaRPr lang="en-US" sz="1300" dirty="0"/>
           </a:p>
@@ -10888,7 +10888,7 @@
                   <a:schemeClr val="tx1"/>
                 </a:solidFill>
               </a:rPr>
-              <a:t>농촌진흥청 농촌자원개발연구소 조사(2005년 보도): 아침을 꾸준히 먹은 학생의 수능 평균이 약 20점 높았다</a:t>
+              <a:t>농촌진흥청·다음 설문(2002. 7. 발표): 대학 1·2학년 3,612명에게 고교 때 아침 식사 습관과 수능 점수를 물음</a:t>
             </a:r>
             <a:endParaRPr lang="en-US" sz="1050" dirty="0"/>
           </a:p>
@@ -10906,7 +10906,25 @@
                   <a:schemeClr val="tx1"/>
                 </a:solidFill>
               </a:rPr>
-              <a:t>오래된 조사이고 상관관계다. 발표에서 이 한계를 말하면 더 좋다</a:t>
+              <a:t>매일 먹음 294점 vs 주 2일 이하 275점(400점 만점), 내신 평균 3.7 vs 4.4등급</a:t>
+            </a:r>
+            <a:endParaRPr lang="en-US" sz="1050" dirty="0"/>
+          </a:p>
+          <a:p>
+            <a:pPr marL="342900" indent="-342900">
+              <a:spcAft>
+                <a:spcPts val="300"/>
+              </a:spcAft>
+              <a:buSzPct val="100000"/>
+              <a:buChar char="•"/>
+            </a:pPr>
+            <a:r>
+              <a:rPr lang="en-US" sz="1050" dirty="0">
+                <a:solidFill>
+                  <a:schemeClr val="tx1"/>
+                </a:solidFill>
+              </a:rPr>
+              <a:t>오래된 자기보고 조사라 상관관계다. 2017년 청소년건강행태조사를 분석한 논문(한국가정의학회지, 2019)도 같은 방향</a:t>
             </a:r>
             <a:endParaRPr lang="en-US" sz="1050" dirty="0"/>
           </a:p>

--- a/docs/2026-2학기-통계독서탐구-수행평가/발표예시-간호.pptx
+++ b/docs/2026-2학기-통계독서탐구-수행평가/발표예시-간호.pptx
@@ -114,7 +114,7 @@
   <p:extLst>
     <p:ext uri="{521415D9-36F7-43E2-AB2F-B90AF26B5E84}">
       <p14:sectionLst xmlns:p14="http://schemas.microsoft.com/office/powerpoint/2010/main">
-        <p14:section name="발표" id="{96f17dfe-71d5-520b-fb9b-4d9a72eae0e4}">
+        <p14:section name="발표" id="{49f0fe88-6029-5082-dc47-046f7dd61d0f}">
           <p14:sldIdLst>
             <p14:sldId id="256"/>
             <p14:sldId id="257"/>
@@ -2459,7 +2459,7 @@
                   <a:schemeClr val="tx1"/>
                 </a:solidFill>
               </a:rPr>
-              <a:t>고등학생의 아침 결식은 해마다 늘고 있다.</a:t>
+              <a:t>아침을 거르는 고등학생이 해마다 늘고 있다.</a:t>
             </a:r>
             <a:endParaRPr lang="en-US" sz="2400" dirty="0"/>
           </a:p>
@@ -2473,7 +2473,7 @@
                   <a:schemeClr val="tx1"/>
                 </a:solidFill>
               </a:rPr>
-              <a:t>등교 후 먹을 수 있는 아침을 학교가 마련해야 한다.</a:t>
+              <a:t>아침을 먹는 습관은 학습과 이어지므로, 잠과 아침부터 지키자.</a:t>
             </a:r>
             <a:endParaRPr lang="en-US" sz="2400" dirty="0"/>
           </a:p>
@@ -2727,7 +2727,7 @@
                   <a:schemeClr val="tx1"/>
                 </a:solidFill>
               </a:rPr>
-              <a:t>의사인 저자는 느낌 대신 숫자로 보라고 한다. '요즘 애들은 아침을 안 먹는다'는 말을 숫자로 확인했다</a:t>
+              <a:t>의사인 저자는 느낌 대신 숫자로 보라고 한다. '아침을 먹어야 공부가 잘된다'는 말이 숫자로도 맞는지 확인했다</a:t>
             </a:r>
             <a:endParaRPr lang="en-US" sz="1150" dirty="0"/>
           </a:p>
@@ -3021,7 +3021,7 @@
                   <a:schemeClr val="tx1"/>
                 </a:solidFill>
               </a:rPr>
-              <a:t>주장은 통계로 확인할 수 있는 문장이어야 한다</a:t>
+              <a:t>주장은 통계로 확인할 수 있고, 내가 실천할 수 있는 것으로</a:t>
             </a:r>
             <a:endParaRPr lang="en-US" sz="1050" dirty="0"/>
           </a:p>
@@ -3039,7 +3039,7 @@
                   <a:schemeClr val="tx1"/>
                 </a:solidFill>
               </a:rPr>
-              <a:t>진로(간호사)와 자료(청소년 건강)를 한 줄로 잇는다</a:t>
+              <a:t>진로(간호사)와 자료(청소년 생활 습관), 학습을 한 줄로 잇는다</a:t>
             </a:r>
             <a:endParaRPr lang="en-US" sz="1050" dirty="0"/>
           </a:p>
@@ -3162,7 +3162,7 @@
                   <a:schemeClr val="tx1"/>
                 </a:solidFill>
               </a:rPr>
-              <a:t>어른들의 느낌을 숫자로 검증하는 것이 탐구의 출발점</a:t>
+              <a:t>'아침을 먹어야 공부가 잘된다'는 말을 숫자로 검증하는 것이 탐구의 출발점</a:t>
             </a:r>
             <a:endParaRPr lang="en-US" sz="1050" dirty="0"/>
           </a:p>
@@ -3408,7 +3408,7 @@
                   <a:schemeClr val="tx1"/>
                 </a:solidFill>
               </a:rPr>
-              <a:t>1번 도서 20점: 도서명·저자 + 책의 어떤 내용이 내 자료의 어디와 이어지는지</a:t>
+              <a:t>1번 도서 20점: 도서명·저자 + 책을 어떻게 썼는지 핵심</a:t>
             </a:r>
             <a:endParaRPr lang="en-US" sz="1050" dirty="0"/>
           </a:p>
@@ -3610,11 +3610,11 @@
         <p:spPr>
           <a:xfrm>
             <a:off x="457200" y="960120"/>
-            <a:ext cx="8229600" cy="868680"/>
+            <a:ext cx="8229600" cy="1051560"/>
           </a:xfrm>
           <a:prstGeom prst="roundRect">
             <a:avLst>
-              <a:gd name="adj" fmla="val 8421"/>
+              <a:gd name="adj" fmla="val 6957"/>
             </a:avLst>
           </a:prstGeom>
           <a:solidFill>
@@ -3636,8 +3636,8 @@
         </p:nvSpPr>
         <p:spPr>
           <a:xfrm>
-            <a:off x="640080" y="1024128"/>
-            <a:ext cx="7863840" cy="749808"/>
+            <a:off x="640080" y="1005840"/>
+            <a:ext cx="7863840" cy="960120"/>
           </a:xfrm>
           <a:prstGeom prst="rect">
             <a:avLst/>
@@ -3680,7 +3680,7 @@
                   <a:schemeClr val="tx1"/>
                 </a:solidFill>
               </a:rPr>
-              <a:t>대상: 전국 중1~고3(대개 만 12~18세), 800개교 약 6만 명 표본, 매년 익명 온라인 조사</a:t>
+              <a:t>대상: 전국 중1~고3(대개 만 12~18세), 800개교 약 6만 명 표본, 매년 익명 온라인 조사 → 일부만 뽑아 조사(표본조사)</a:t>
             </a:r>
             <a:endParaRPr lang="en-US" sz="1100" dirty="0"/>
           </a:p>
@@ -3697,7 +3697,7 @@
                   <a:schemeClr val="tx1"/>
                 </a:solidFill>
               </a:rPr>
-              <a:t>조사 방식: 일부만 뽑아 조사(표본조사). 표본의 비율로 전국 청소년을 미루어 본다</a:t>
+              <a:t>얻는 길: kosis.kr → 국내통계 → 보건 → 청소년건강행태조사 → '아침식사 결식률'  (또는 kdca.go.kr/yhs → 통계 메뉴)</a:t>
             </a:r>
             <a:endParaRPr lang="en-US" sz="1100" dirty="0"/>
           </a:p>
@@ -3711,7 +3711,7 @@
         </p:nvSpPr>
         <p:spPr>
           <a:xfrm>
-            <a:off x="457200" y="1901952"/>
+            <a:off x="457200" y="2084832"/>
             <a:ext cx="4114800" cy="274320"/>
           </a:xfrm>
           <a:prstGeom prst="rect">
@@ -3754,7 +3754,7 @@
           </p:nvPr>
         </p:nvGraphicFramePr>
         <p:xfrm>
-          <a:off x="457200" y="2176272"/>
+          <a:off x="457200" y="2359152"/>
           <a:ext cx="4114800" cy="914400"/>
         </p:xfrm>
         <a:graphic>
@@ -5899,7 +5899,7 @@
         </p:nvSpPr>
         <p:spPr>
           <a:xfrm>
-            <a:off x="457200" y="3648456"/>
+            <a:off x="457200" y="3831336"/>
             <a:ext cx="4114800" cy="457200"/>
           </a:xfrm>
           <a:prstGeom prst="rect">
@@ -5935,7 +5935,7 @@
         </p:nvSpPr>
         <p:spPr>
           <a:xfrm>
-            <a:off x="4572000" y="2651760"/>
+            <a:off x="4572000" y="2834640"/>
             <a:ext cx="457200" cy="457200"/>
           </a:xfrm>
           <a:prstGeom prst="rect">
@@ -5973,7 +5973,7 @@
         </p:nvSpPr>
         <p:spPr>
           <a:xfrm>
-            <a:off x="5029200" y="1901952"/>
+            <a:off x="5029200" y="2084832"/>
             <a:ext cx="3657600" cy="274320"/>
           </a:xfrm>
           <a:prstGeom prst="rect">
@@ -6016,7 +6016,7 @@
           </p:nvPr>
         </p:nvGraphicFramePr>
         <p:xfrm>
-          <a:off x="5029200" y="2176272"/>
+          <a:off x="5029200" y="2359152"/>
           <a:ext cx="3657600" cy="914400"/>
         </p:xfrm>
         <a:graphic>
@@ -7111,7 +7111,7 @@
         </p:nvSpPr>
         <p:spPr>
           <a:xfrm>
-            <a:off x="5029200" y="3044952"/>
+            <a:off x="5029200" y="3227832"/>
             <a:ext cx="3657600" cy="548640"/>
           </a:xfrm>
           <a:prstGeom prst="rect">
@@ -7508,7 +7508,7 @@
                   <a:schemeClr val="tx2"/>
                 </a:solidFill>
               </a:rPr>
-              <a:t>얻는 길</a:t>
+              <a:t>얻는 길 (링크)</a:t>
             </a:r>
             <a:endParaRPr lang="en-US" sz="1150" dirty="0"/>
           </a:p>
@@ -7550,7 +7550,7 @@
                   <a:schemeClr val="tx1"/>
                 </a:solidFill>
               </a:rPr>
-              <a:t>KOSIS(kosis.kr) → 국내통계 → 보건 → 청소년건강행태조사 → 아침식사 결식률</a:t>
+              <a:t>kosis.kr → 국내통계 → 보건 → 청소년건강행태조사 → 아침식사 결식률</a:t>
             </a:r>
             <a:endParaRPr lang="en-US" sz="1050" dirty="0"/>
           </a:p>
@@ -7568,7 +7568,7 @@
                   <a:schemeClr val="tx1"/>
                 </a:solidFill>
               </a:rPr>
-              <a:t>또는 조사 누리집 yhs.kdca.go.kr → 통계 → 지표별 통계</a:t>
+              <a:t>kdca.go.kr/yhs → 통계 메뉴 (같은 표, 엑셀 내려받기)</a:t>
             </a:r>
             <a:endParaRPr lang="en-US" sz="1050" dirty="0"/>
           </a:p>
@@ -7586,7 +7586,7 @@
                   <a:schemeClr val="tx1"/>
                 </a:solidFill>
               </a:rPr>
-              <a:t>표를 엑셀로 내려받을 수 있다</a:t>
+              <a:t>수면 지표(주중 평균 수면시간, 주관적 수면충족률)도 같은 목록에 있다</a:t>
             </a:r>
             <a:endParaRPr lang="en-US" sz="1050" dirty="0"/>
           </a:p>
@@ -7832,7 +7832,7 @@
                   <a:schemeClr val="tx1"/>
                 </a:solidFill>
               </a:rPr>
-              <a:t>2-① 기관과 조사 이름</a:t>
+              <a:t>출처(기관·조사 이름·링크)를 표현했는가</a:t>
             </a:r>
             <a:endParaRPr lang="en-US" sz="1050" dirty="0"/>
           </a:p>
@@ -7850,7 +7850,7 @@
                   <a:schemeClr val="tx1"/>
                 </a:solidFill>
               </a:rPr>
-              <a:t>2-② 표본조사의 근거: '800개교 약 6만 명을 뽑아'</a:t>
+              <a:t>모두 조사인지 일부 조사인지 밝혔는가(표본조사)</a:t>
             </a:r>
             <a:endParaRPr lang="en-US" sz="1050" dirty="0"/>
           </a:p>
@@ -7868,7 +7868,7 @@
                   <a:schemeClr val="tx1"/>
                 </a:solidFill>
               </a:rPr>
-              <a:t>2-③ 필요한 행·열만 고른 표(원자료를 통째로 옮기면 미충족)</a:t>
+              <a:t>가공 전·후를 함께 보여 신뢰도를 높였는가</a:t>
             </a:r>
             <a:endParaRPr lang="en-US" sz="1050" dirty="0"/>
           </a:p>
@@ -8051,7 +8051,7 @@
         </p:nvGraphicFramePr>
         <p:xfrm>
           <a:off x="457200" y="960120"/>
-          <a:ext cx="4023360" cy="2011680"/>
+          <a:ext cx="8229600" cy="2011680"/>
         </p:xfrm>
         <a:graphic xmlns:a="http://schemas.openxmlformats.org/drawingml/2006/main">
           <a:graphicData uri="http://schemas.openxmlformats.org/drawingml/2006/chart">
@@ -8061,951 +8061,7 @@
       </p:graphicFrame>
       <p:sp>
         <p:nvSpPr>
-          <p:cNvPr id="6" name="확률분포표 안내"/>
-          <p:cNvSpPr txBox="1"/>
-          <p:nvPr/>
-        </p:nvSpPr>
-        <p:spPr>
-          <a:xfrm>
-            <a:off x="4663440" y="960120"/>
-            <a:ext cx="4023360" cy="457200"/>
-          </a:xfrm>
-          <a:prstGeom prst="rect">
-            <a:avLst/>
-          </a:prstGeom>
-          <a:noFill/>
-          <a:ln/>
-        </p:spPr>
-        <p:txBody>
-          <a:bodyPr wrap="square" lIns="0" tIns="0" rIns="0" bIns="0" rtlCol="0" anchor="ctr"/>
-          <a:lstStyle/>
-          <a:p>
-            <a:pPr indent="0" marL="0">
-              <a:buNone/>
-            </a:pPr>
-            <a:r>
-              <a:rPr lang="en-US" sz="950" dirty="0">
-                <a:solidFill>
-                  <a:schemeClr val="accent3"/>
-                </a:solidFill>
-              </a:rPr>
-              <a:t>확률분포표 · 2025년 여학생 4명 모둠에서 주 5일 이상 아침을 거르는 학생 수 X (한 명이 거를 확률 p = 0.453, 이항분포)</a:t>
-            </a:r>
-            <a:endParaRPr lang="en-US" sz="950" dirty="0"/>
-          </a:p>
-        </p:txBody>
-      </p:sp>
-      <p:graphicFrame>
-        <p:nvGraphicFramePr>
-          <p:cNvPr id="6" name="확률분포표"/>
-          <p:cNvGraphicFramePr>
-            <a:graphicFrameLocks noGrp="1"/>
-          </p:cNvGraphicFramePr>
-          <p:nvPr>
-            <p:extLst>
-              <p:ext uri="{D42A27DB-BD31-4B8C-83A1-F6EECF244321}">
-                <p14:modId xmlns:p14="http://schemas.microsoft.com/office/powerpoint/2010/main" val="1579011935"/>
-              </p:ext>
-            </p:extLst>
-          </p:nvPr>
-        </p:nvGraphicFramePr>
-        <p:xfrm>
-          <a:off x="4663440" y="1463040"/>
-          <a:ext cx="4023360" cy="914400"/>
-        </p:xfrm>
-        <a:graphic>
-          <a:graphicData uri="http://schemas.openxmlformats.org/drawingml/2006/table">
-            <a:tbl>
-              <a:tblPr/>
-              <a:tblGrid>
-                <a:gridCol w="822960"/>
-                <a:gridCol w="512064"/>
-                <a:gridCol w="512064"/>
-                <a:gridCol w="512064"/>
-                <a:gridCol w="512064"/>
-                <a:gridCol w="512064"/>
-                <a:gridCol w="640080"/>
-              </a:tblGrid>
-              <a:tr h="274320">
-                <a:tc>
-                  <a:txBody>
-                    <a:bodyPr/>
-                    <a:lstStyle/>
-                    <a:p>
-                      <a:pPr algn="ctr" indent="0" marL="0">
-                        <a:buNone/>
-                      </a:pPr>
-                      <a:r>
-                        <a:rPr lang="en-US" sz="950" b="1" dirty="0">
-                          <a:solidFill>
-                            <a:srgbClr val="1B211D"/>
-                          </a:solidFill>
-                        </a:rPr>
-                        <a:t>X</a:t>
-                      </a:r>
-                      <a:endParaRPr lang="en-US" sz="950" dirty="0"/>
-                    </a:p>
-                  </a:txBody>
-                  <a:tcPr marL="27432" marR="27432" marT="27432" marB="27432" anchor="ctr">
-                    <a:lnL w="9525" cap="flat" cmpd="sng" algn="ctr">
-                      <a:solidFill>
-                        <a:srgbClr val="B9B4A6"/>
-                      </a:solidFill>
-                      <a:prstDash val="solid"/>
-                      <a:round/>
-                      <a:headEnd type="none" w="med" len="med"/>
-                      <a:tailEnd type="none" w="med" len="med"/>
-                    </a:lnL>
-                    <a:lnR w="9525" cap="flat" cmpd="sng" algn="ctr">
-                      <a:solidFill>
-                        <a:srgbClr val="B9B4A6"/>
-                      </a:solidFill>
-                      <a:prstDash val="solid"/>
-                      <a:round/>
-                      <a:headEnd type="none" w="med" len="med"/>
-                      <a:tailEnd type="none" w="med" len="med"/>
-                    </a:lnR>
-                    <a:lnT w="9525" cap="flat" cmpd="sng" algn="ctr">
-                      <a:solidFill>
-                        <a:srgbClr val="B9B4A6"/>
-                      </a:solidFill>
-                      <a:prstDash val="solid"/>
-                      <a:round/>
-                      <a:headEnd type="none" w="med" len="med"/>
-                      <a:tailEnd type="none" w="med" len="med"/>
-                    </a:lnT>
-                    <a:lnB w="9525" cap="flat" cmpd="sng" algn="ctr">
-                      <a:solidFill>
-                        <a:srgbClr val="B9B4A6"/>
-                      </a:solidFill>
-                      <a:prstDash val="solid"/>
-                      <a:round/>
-                      <a:headEnd type="none" w="med" len="med"/>
-                      <a:tailEnd type="none" w="med" len="med"/>
-                    </a:lnB>
-                    <a:solidFill>
-                      <a:srgbClr val="EEF3EF"/>
-                    </a:solidFill>
-                  </a:tcPr>
-                </a:tc>
-                <a:tc>
-                  <a:txBody>
-                    <a:bodyPr/>
-                    <a:lstStyle/>
-                    <a:p>
-                      <a:pPr algn="ctr" indent="0" marL="0">
-                        <a:buNone/>
-                      </a:pPr>
-                      <a:r>
-                        <a:rPr lang="en-US" sz="950" b="1" dirty="0">
-                          <a:solidFill>
-                            <a:srgbClr val="1B211D"/>
-                          </a:solidFill>
-                        </a:rPr>
-                        <a:t>0</a:t>
-                      </a:r>
-                      <a:endParaRPr lang="en-US" sz="950" dirty="0"/>
-                    </a:p>
-                  </a:txBody>
-                  <a:tcPr marL="27432" marR="27432" marT="27432" marB="27432" anchor="ctr">
-                    <a:lnL w="9525" cap="flat" cmpd="sng" algn="ctr">
-                      <a:solidFill>
-                        <a:srgbClr val="B9B4A6"/>
-                      </a:solidFill>
-                      <a:prstDash val="solid"/>
-                      <a:round/>
-                      <a:headEnd type="none" w="med" len="med"/>
-                      <a:tailEnd type="none" w="med" len="med"/>
-                    </a:lnL>
-                    <a:lnR w="9525" cap="flat" cmpd="sng" algn="ctr">
-                      <a:solidFill>
-                        <a:srgbClr val="B9B4A6"/>
-                      </a:solidFill>
-                      <a:prstDash val="solid"/>
-                      <a:round/>
-                      <a:headEnd type="none" w="med" len="med"/>
-                      <a:tailEnd type="none" w="med" len="med"/>
-                    </a:lnR>
-                    <a:lnT w="9525" cap="flat" cmpd="sng" algn="ctr">
-                      <a:solidFill>
-                        <a:srgbClr val="B9B4A6"/>
-                      </a:solidFill>
-                      <a:prstDash val="solid"/>
-                      <a:round/>
-                      <a:headEnd type="none" w="med" len="med"/>
-                      <a:tailEnd type="none" w="med" len="med"/>
-                    </a:lnT>
-                    <a:lnB w="9525" cap="flat" cmpd="sng" algn="ctr">
-                      <a:solidFill>
-                        <a:srgbClr val="B9B4A6"/>
-                      </a:solidFill>
-                      <a:prstDash val="solid"/>
-                      <a:round/>
-                      <a:headEnd type="none" w="med" len="med"/>
-                      <a:tailEnd type="none" w="med" len="med"/>
-                    </a:lnB>
-                    <a:solidFill>
-                      <a:srgbClr val="EEF3EF"/>
-                    </a:solidFill>
-                  </a:tcPr>
-                </a:tc>
-                <a:tc>
-                  <a:txBody>
-                    <a:bodyPr/>
-                    <a:lstStyle/>
-                    <a:p>
-                      <a:pPr algn="ctr" indent="0" marL="0">
-                        <a:buNone/>
-                      </a:pPr>
-                      <a:r>
-                        <a:rPr lang="en-US" sz="950" b="1" dirty="0">
-                          <a:solidFill>
-                            <a:srgbClr val="1B211D"/>
-                          </a:solidFill>
-                        </a:rPr>
-                        <a:t>1</a:t>
-                      </a:r>
-                      <a:endParaRPr lang="en-US" sz="950" dirty="0"/>
-                    </a:p>
-                  </a:txBody>
-                  <a:tcPr marL="27432" marR="27432" marT="27432" marB="27432" anchor="ctr">
-                    <a:lnL w="9525" cap="flat" cmpd="sng" algn="ctr">
-                      <a:solidFill>
-                        <a:srgbClr val="B9B4A6"/>
-                      </a:solidFill>
-                      <a:prstDash val="solid"/>
-                      <a:round/>
-                      <a:headEnd type="none" w="med" len="med"/>
-                      <a:tailEnd type="none" w="med" len="med"/>
-                    </a:lnL>
-                    <a:lnR w="9525" cap="flat" cmpd="sng" algn="ctr">
-                      <a:solidFill>
-                        <a:srgbClr val="B9B4A6"/>
-                      </a:solidFill>
-                      <a:prstDash val="solid"/>
-                      <a:round/>
-                      <a:headEnd type="none" w="med" len="med"/>
-                      <a:tailEnd type="none" w="med" len="med"/>
-                    </a:lnR>
-                    <a:lnT w="9525" cap="flat" cmpd="sng" algn="ctr">
-                      <a:solidFill>
-                        <a:srgbClr val="B9B4A6"/>
-                      </a:solidFill>
-                      <a:prstDash val="solid"/>
-                      <a:round/>
-                      <a:headEnd type="none" w="med" len="med"/>
-                      <a:tailEnd type="none" w="med" len="med"/>
-                    </a:lnT>
-                    <a:lnB w="9525" cap="flat" cmpd="sng" algn="ctr">
-                      <a:solidFill>
-                        <a:srgbClr val="B9B4A6"/>
-                      </a:solidFill>
-                      <a:prstDash val="solid"/>
-                      <a:round/>
-                      <a:headEnd type="none" w="med" len="med"/>
-                      <a:tailEnd type="none" w="med" len="med"/>
-                    </a:lnB>
-                    <a:solidFill>
-                      <a:srgbClr val="EEF3EF"/>
-                    </a:solidFill>
-                  </a:tcPr>
-                </a:tc>
-                <a:tc>
-                  <a:txBody>
-                    <a:bodyPr/>
-                    <a:lstStyle/>
-                    <a:p>
-                      <a:pPr algn="ctr" indent="0" marL="0">
-                        <a:buNone/>
-                      </a:pPr>
-                      <a:r>
-                        <a:rPr lang="en-US" sz="950" b="1" dirty="0">
-                          <a:solidFill>
-                            <a:srgbClr val="1B211D"/>
-                          </a:solidFill>
-                        </a:rPr>
-                        <a:t>2</a:t>
-                      </a:r>
-                      <a:endParaRPr lang="en-US" sz="950" dirty="0"/>
-                    </a:p>
-                  </a:txBody>
-                  <a:tcPr marL="27432" marR="27432" marT="27432" marB="27432" anchor="ctr">
-                    <a:lnL w="9525" cap="flat" cmpd="sng" algn="ctr">
-                      <a:solidFill>
-                        <a:srgbClr val="B9B4A6"/>
-                      </a:solidFill>
-                      <a:prstDash val="solid"/>
-                      <a:round/>
-                      <a:headEnd type="none" w="med" len="med"/>
-                      <a:tailEnd type="none" w="med" len="med"/>
-                    </a:lnL>
-                    <a:lnR w="9525" cap="flat" cmpd="sng" algn="ctr">
-                      <a:solidFill>
-                        <a:srgbClr val="B9B4A6"/>
-                      </a:solidFill>
-                      <a:prstDash val="solid"/>
-                      <a:round/>
-                      <a:headEnd type="none" w="med" len="med"/>
-                      <a:tailEnd type="none" w="med" len="med"/>
-                    </a:lnR>
-                    <a:lnT w="9525" cap="flat" cmpd="sng" algn="ctr">
-                      <a:solidFill>
-                        <a:srgbClr val="B9B4A6"/>
-                      </a:solidFill>
-                      <a:prstDash val="solid"/>
-                      <a:round/>
-                      <a:headEnd type="none" w="med" len="med"/>
-                      <a:tailEnd type="none" w="med" len="med"/>
-                    </a:lnT>
-                    <a:lnB w="9525" cap="flat" cmpd="sng" algn="ctr">
-                      <a:solidFill>
-                        <a:srgbClr val="B9B4A6"/>
-                      </a:solidFill>
-                      <a:prstDash val="solid"/>
-                      <a:round/>
-                      <a:headEnd type="none" w="med" len="med"/>
-                      <a:tailEnd type="none" w="med" len="med"/>
-                    </a:lnB>
-                    <a:solidFill>
-                      <a:srgbClr val="EEF3EF"/>
-                    </a:solidFill>
-                  </a:tcPr>
-                </a:tc>
-                <a:tc>
-                  <a:txBody>
-                    <a:bodyPr/>
-                    <a:lstStyle/>
-                    <a:p>
-                      <a:pPr algn="ctr" indent="0" marL="0">
-                        <a:buNone/>
-                      </a:pPr>
-                      <a:r>
-                        <a:rPr lang="en-US" sz="950" b="1" dirty="0">
-                          <a:solidFill>
-                            <a:srgbClr val="1B211D"/>
-                          </a:solidFill>
-                        </a:rPr>
-                        <a:t>3</a:t>
-                      </a:r>
-                      <a:endParaRPr lang="en-US" sz="950" dirty="0"/>
-                    </a:p>
-                  </a:txBody>
-                  <a:tcPr marL="27432" marR="27432" marT="27432" marB="27432" anchor="ctr">
-                    <a:lnL w="9525" cap="flat" cmpd="sng" algn="ctr">
-                      <a:solidFill>
-                        <a:srgbClr val="B9B4A6"/>
-                      </a:solidFill>
-                      <a:prstDash val="solid"/>
-                      <a:round/>
-                      <a:headEnd type="none" w="med" len="med"/>
-                      <a:tailEnd type="none" w="med" len="med"/>
-                    </a:lnL>
-                    <a:lnR w="9525" cap="flat" cmpd="sng" algn="ctr">
-                      <a:solidFill>
-                        <a:srgbClr val="B9B4A6"/>
-                      </a:solidFill>
-                      <a:prstDash val="solid"/>
-                      <a:round/>
-                      <a:headEnd type="none" w="med" len="med"/>
-                      <a:tailEnd type="none" w="med" len="med"/>
-                    </a:lnR>
-                    <a:lnT w="9525" cap="flat" cmpd="sng" algn="ctr">
-                      <a:solidFill>
-                        <a:srgbClr val="B9B4A6"/>
-                      </a:solidFill>
-                      <a:prstDash val="solid"/>
-                      <a:round/>
-                      <a:headEnd type="none" w="med" len="med"/>
-                      <a:tailEnd type="none" w="med" len="med"/>
-                    </a:lnT>
-                    <a:lnB w="9525" cap="flat" cmpd="sng" algn="ctr">
-                      <a:solidFill>
-                        <a:srgbClr val="B9B4A6"/>
-                      </a:solidFill>
-                      <a:prstDash val="solid"/>
-                      <a:round/>
-                      <a:headEnd type="none" w="med" len="med"/>
-                      <a:tailEnd type="none" w="med" len="med"/>
-                    </a:lnB>
-                    <a:solidFill>
-                      <a:srgbClr val="EEF3EF"/>
-                    </a:solidFill>
-                  </a:tcPr>
-                </a:tc>
-                <a:tc>
-                  <a:txBody>
-                    <a:bodyPr/>
-                    <a:lstStyle/>
-                    <a:p>
-                      <a:pPr algn="ctr" indent="0" marL="0">
-                        <a:buNone/>
-                      </a:pPr>
-                      <a:r>
-                        <a:rPr lang="en-US" sz="950" b="1" dirty="0">
-                          <a:solidFill>
-                            <a:srgbClr val="1B211D"/>
-                          </a:solidFill>
-                        </a:rPr>
-                        <a:t>4</a:t>
-                      </a:r>
-                      <a:endParaRPr lang="en-US" sz="950" dirty="0"/>
-                    </a:p>
-                  </a:txBody>
-                  <a:tcPr marL="27432" marR="27432" marT="27432" marB="27432" anchor="ctr">
-                    <a:lnL w="9525" cap="flat" cmpd="sng" algn="ctr">
-                      <a:solidFill>
-                        <a:srgbClr val="B9B4A6"/>
-                      </a:solidFill>
-                      <a:prstDash val="solid"/>
-                      <a:round/>
-                      <a:headEnd type="none" w="med" len="med"/>
-                      <a:tailEnd type="none" w="med" len="med"/>
-                    </a:lnL>
-                    <a:lnR w="9525" cap="flat" cmpd="sng" algn="ctr">
-                      <a:solidFill>
-                        <a:srgbClr val="B9B4A6"/>
-                      </a:solidFill>
-                      <a:prstDash val="solid"/>
-                      <a:round/>
-                      <a:headEnd type="none" w="med" len="med"/>
-                      <a:tailEnd type="none" w="med" len="med"/>
-                    </a:lnR>
-                    <a:lnT w="9525" cap="flat" cmpd="sng" algn="ctr">
-                      <a:solidFill>
-                        <a:srgbClr val="B9B4A6"/>
-                      </a:solidFill>
-                      <a:prstDash val="solid"/>
-                      <a:round/>
-                      <a:headEnd type="none" w="med" len="med"/>
-                      <a:tailEnd type="none" w="med" len="med"/>
-                    </a:lnT>
-                    <a:lnB w="9525" cap="flat" cmpd="sng" algn="ctr">
-                      <a:solidFill>
-                        <a:srgbClr val="B9B4A6"/>
-                      </a:solidFill>
-                      <a:prstDash val="solid"/>
-                      <a:round/>
-                      <a:headEnd type="none" w="med" len="med"/>
-                      <a:tailEnd type="none" w="med" len="med"/>
-                    </a:lnB>
-                    <a:solidFill>
-                      <a:srgbClr val="EEF3EF"/>
-                    </a:solidFill>
-                  </a:tcPr>
-                </a:tc>
-                <a:tc>
-                  <a:txBody>
-                    <a:bodyPr/>
-                    <a:lstStyle/>
-                    <a:p>
-                      <a:pPr algn="ctr" indent="0" marL="0">
-                        <a:buNone/>
-                      </a:pPr>
-                      <a:r>
-                        <a:rPr lang="en-US" sz="950" b="1" dirty="0">
-                          <a:solidFill>
-                            <a:srgbClr val="1B211D"/>
-                          </a:solidFill>
-                        </a:rPr>
-                        <a:t>합계</a:t>
-                      </a:r>
-                      <a:endParaRPr lang="en-US" sz="950" dirty="0"/>
-                    </a:p>
-                  </a:txBody>
-                  <a:tcPr marL="27432" marR="27432" marT="27432" marB="27432" anchor="ctr">
-                    <a:lnL w="9525" cap="flat" cmpd="sng" algn="ctr">
-                      <a:solidFill>
-                        <a:srgbClr val="B9B4A6"/>
-                      </a:solidFill>
-                      <a:prstDash val="solid"/>
-                      <a:round/>
-                      <a:headEnd type="none" w="med" len="med"/>
-                      <a:tailEnd type="none" w="med" len="med"/>
-                    </a:lnL>
-                    <a:lnR w="9525" cap="flat" cmpd="sng" algn="ctr">
-                      <a:solidFill>
-                        <a:srgbClr val="B9B4A6"/>
-                      </a:solidFill>
-                      <a:prstDash val="solid"/>
-                      <a:round/>
-                      <a:headEnd type="none" w="med" len="med"/>
-                      <a:tailEnd type="none" w="med" len="med"/>
-                    </a:lnR>
-                    <a:lnT w="9525" cap="flat" cmpd="sng" algn="ctr">
-                      <a:solidFill>
-                        <a:srgbClr val="B9B4A6"/>
-                      </a:solidFill>
-                      <a:prstDash val="solid"/>
-                      <a:round/>
-                      <a:headEnd type="none" w="med" len="med"/>
-                      <a:tailEnd type="none" w="med" len="med"/>
-                    </a:lnT>
-                    <a:lnB w="9525" cap="flat" cmpd="sng" algn="ctr">
-                      <a:solidFill>
-                        <a:srgbClr val="B9B4A6"/>
-                      </a:solidFill>
-                      <a:prstDash val="solid"/>
-                      <a:round/>
-                      <a:headEnd type="none" w="med" len="med"/>
-                      <a:tailEnd type="none" w="med" len="med"/>
-                    </a:lnB>
-                    <a:solidFill>
-                      <a:srgbClr val="EEF3EF"/>
-                    </a:solidFill>
-                  </a:tcPr>
-                </a:tc>
-              </a:tr>
-              <a:tr h="274320">
-                <a:tc>
-                  <a:txBody>
-                    <a:bodyPr/>
-                    <a:lstStyle/>
-                    <a:p>
-                      <a:pPr algn="ctr" indent="0" marL="0">
-                        <a:buNone/>
-                      </a:pPr>
-                      <a:r>
-                        <a:rPr lang="en-US" sz="950" dirty="0">
-                          <a:solidFill>
-                            <a:srgbClr val="1B211D"/>
-                          </a:solidFill>
-                        </a:rPr>
-                        <a:t>P(X = x)</a:t>
-                      </a:r>
-                      <a:endParaRPr lang="en-US" sz="950" dirty="0"/>
-                    </a:p>
-                  </a:txBody>
-                  <a:tcPr marL="27432" marR="27432" marT="27432" marB="27432" anchor="ctr">
-                    <a:lnL w="9525" cap="flat" cmpd="sng" algn="ctr">
-                      <a:solidFill>
-                        <a:srgbClr val="B9B4A6"/>
-                      </a:solidFill>
-                      <a:prstDash val="solid"/>
-                      <a:round/>
-                      <a:headEnd type="none" w="med" len="med"/>
-                      <a:tailEnd type="none" w="med" len="med"/>
-                    </a:lnL>
-                    <a:lnR w="9525" cap="flat" cmpd="sng" algn="ctr">
-                      <a:solidFill>
-                        <a:srgbClr val="B9B4A6"/>
-                      </a:solidFill>
-                      <a:prstDash val="solid"/>
-                      <a:round/>
-                      <a:headEnd type="none" w="med" len="med"/>
-                      <a:tailEnd type="none" w="med" len="med"/>
-                    </a:lnR>
-                    <a:lnT w="9525" cap="flat" cmpd="sng" algn="ctr">
-                      <a:solidFill>
-                        <a:srgbClr val="B9B4A6"/>
-                      </a:solidFill>
-                      <a:prstDash val="solid"/>
-                      <a:round/>
-                      <a:headEnd type="none" w="med" len="med"/>
-                      <a:tailEnd type="none" w="med" len="med"/>
-                    </a:lnT>
-                    <a:lnB w="9525" cap="flat" cmpd="sng" algn="ctr">
-                      <a:solidFill>
-                        <a:srgbClr val="B9B4A6"/>
-                      </a:solidFill>
-                      <a:prstDash val="solid"/>
-                      <a:round/>
-                      <a:headEnd type="none" w="med" len="med"/>
-                      <a:tailEnd type="none" w="med" len="med"/>
-                    </a:lnB>
-                  </a:tcPr>
-                </a:tc>
-                <a:tc>
-                  <a:txBody>
-                    <a:bodyPr/>
-                    <a:lstStyle/>
-                    <a:p>
-                      <a:pPr algn="ctr" indent="0" marL="0">
-                        <a:buNone/>
-                      </a:pPr>
-                      <a:r>
-                        <a:rPr lang="en-US" sz="950" dirty="0">
-                          <a:solidFill>
-                            <a:srgbClr val="1B211D"/>
-                          </a:solidFill>
-                        </a:rPr>
-                        <a:t>0.090</a:t>
-                      </a:r>
-                      <a:endParaRPr lang="en-US" sz="950" dirty="0"/>
-                    </a:p>
-                  </a:txBody>
-                  <a:tcPr marL="27432" marR="27432" marT="27432" marB="27432" anchor="ctr">
-                    <a:lnL w="9525" cap="flat" cmpd="sng" algn="ctr">
-                      <a:solidFill>
-                        <a:srgbClr val="B9B4A6"/>
-                      </a:solidFill>
-                      <a:prstDash val="solid"/>
-                      <a:round/>
-                      <a:headEnd type="none" w="med" len="med"/>
-                      <a:tailEnd type="none" w="med" len="med"/>
-                    </a:lnL>
-                    <a:lnR w="9525" cap="flat" cmpd="sng" algn="ctr">
-                      <a:solidFill>
-                        <a:srgbClr val="B9B4A6"/>
-                      </a:solidFill>
-                      <a:prstDash val="solid"/>
-                      <a:round/>
-                      <a:headEnd type="none" w="med" len="med"/>
-                      <a:tailEnd type="none" w="med" len="med"/>
-                    </a:lnR>
-                    <a:lnT w="9525" cap="flat" cmpd="sng" algn="ctr">
-                      <a:solidFill>
-                        <a:srgbClr val="B9B4A6"/>
-                      </a:solidFill>
-                      <a:prstDash val="solid"/>
-                      <a:round/>
-                      <a:headEnd type="none" w="med" len="med"/>
-                      <a:tailEnd type="none" w="med" len="med"/>
-                    </a:lnT>
-                    <a:lnB w="9525" cap="flat" cmpd="sng" algn="ctr">
-                      <a:solidFill>
-                        <a:srgbClr val="B9B4A6"/>
-                      </a:solidFill>
-                      <a:prstDash val="solid"/>
-                      <a:round/>
-                      <a:headEnd type="none" w="med" len="med"/>
-                      <a:tailEnd type="none" w="med" len="med"/>
-                    </a:lnB>
-                  </a:tcPr>
-                </a:tc>
-                <a:tc>
-                  <a:txBody>
-                    <a:bodyPr/>
-                    <a:lstStyle/>
-                    <a:p>
-                      <a:pPr algn="ctr" indent="0" marL="0">
-                        <a:buNone/>
-                      </a:pPr>
-                      <a:r>
-                        <a:rPr lang="en-US" sz="950" dirty="0">
-                          <a:solidFill>
-                            <a:srgbClr val="1B211D"/>
-                          </a:solidFill>
-                        </a:rPr>
-                        <a:t>0.297</a:t>
-                      </a:r>
-                      <a:endParaRPr lang="en-US" sz="950" dirty="0"/>
-                    </a:p>
-                  </a:txBody>
-                  <a:tcPr marL="27432" marR="27432" marT="27432" marB="27432" anchor="ctr">
-                    <a:lnL w="9525" cap="flat" cmpd="sng" algn="ctr">
-                      <a:solidFill>
-                        <a:srgbClr val="B9B4A6"/>
-                      </a:solidFill>
-                      <a:prstDash val="solid"/>
-                      <a:round/>
-                      <a:headEnd type="none" w="med" len="med"/>
-                      <a:tailEnd type="none" w="med" len="med"/>
-                    </a:lnL>
-                    <a:lnR w="9525" cap="flat" cmpd="sng" algn="ctr">
-                      <a:solidFill>
-                        <a:srgbClr val="B9B4A6"/>
-                      </a:solidFill>
-                      <a:prstDash val="solid"/>
-                      <a:round/>
-                      <a:headEnd type="none" w="med" len="med"/>
-                      <a:tailEnd type="none" w="med" len="med"/>
-                    </a:lnR>
-                    <a:lnT w="9525" cap="flat" cmpd="sng" algn="ctr">
-                      <a:solidFill>
-                        <a:srgbClr val="B9B4A6"/>
-                      </a:solidFill>
-                      <a:prstDash val="solid"/>
-                      <a:round/>
-                      <a:headEnd type="none" w="med" len="med"/>
-                      <a:tailEnd type="none" w="med" len="med"/>
-                    </a:lnT>
-                    <a:lnB w="9525" cap="flat" cmpd="sng" algn="ctr">
-                      <a:solidFill>
-                        <a:srgbClr val="B9B4A6"/>
-                      </a:solidFill>
-                      <a:prstDash val="solid"/>
-                      <a:round/>
-                      <a:headEnd type="none" w="med" len="med"/>
-                      <a:tailEnd type="none" w="med" len="med"/>
-                    </a:lnB>
-                  </a:tcPr>
-                </a:tc>
-                <a:tc>
-                  <a:txBody>
-                    <a:bodyPr/>
-                    <a:lstStyle/>
-                    <a:p>
-                      <a:pPr algn="ctr" indent="0" marL="0">
-                        <a:buNone/>
-                      </a:pPr>
-                      <a:r>
-                        <a:rPr lang="en-US" sz="950" dirty="0">
-                          <a:solidFill>
-                            <a:srgbClr val="1B211D"/>
-                          </a:solidFill>
-                        </a:rPr>
-                        <a:t>0.368</a:t>
-                      </a:r>
-                      <a:endParaRPr lang="en-US" sz="950" dirty="0"/>
-                    </a:p>
-                  </a:txBody>
-                  <a:tcPr marL="27432" marR="27432" marT="27432" marB="27432" anchor="ctr">
-                    <a:lnL w="9525" cap="flat" cmpd="sng" algn="ctr">
-                      <a:solidFill>
-                        <a:srgbClr val="B9B4A6"/>
-                      </a:solidFill>
-                      <a:prstDash val="solid"/>
-                      <a:round/>
-                      <a:headEnd type="none" w="med" len="med"/>
-                      <a:tailEnd type="none" w="med" len="med"/>
-                    </a:lnL>
-                    <a:lnR w="9525" cap="flat" cmpd="sng" algn="ctr">
-                      <a:solidFill>
-                        <a:srgbClr val="B9B4A6"/>
-                      </a:solidFill>
-                      <a:prstDash val="solid"/>
-                      <a:round/>
-                      <a:headEnd type="none" w="med" len="med"/>
-                      <a:tailEnd type="none" w="med" len="med"/>
-                    </a:lnR>
-                    <a:lnT w="9525" cap="flat" cmpd="sng" algn="ctr">
-                      <a:solidFill>
-                        <a:srgbClr val="B9B4A6"/>
-                      </a:solidFill>
-                      <a:prstDash val="solid"/>
-                      <a:round/>
-                      <a:headEnd type="none" w="med" len="med"/>
-                      <a:tailEnd type="none" w="med" len="med"/>
-                    </a:lnT>
-                    <a:lnB w="9525" cap="flat" cmpd="sng" algn="ctr">
-                      <a:solidFill>
-                        <a:srgbClr val="B9B4A6"/>
-                      </a:solidFill>
-                      <a:prstDash val="solid"/>
-                      <a:round/>
-                      <a:headEnd type="none" w="med" len="med"/>
-                      <a:tailEnd type="none" w="med" len="med"/>
-                    </a:lnB>
-                  </a:tcPr>
-                </a:tc>
-                <a:tc>
-                  <a:txBody>
-                    <a:bodyPr/>
-                    <a:lstStyle/>
-                    <a:p>
-                      <a:pPr algn="ctr" indent="0" marL="0">
-                        <a:buNone/>
-                      </a:pPr>
-                      <a:r>
-                        <a:rPr lang="en-US" sz="950" dirty="0">
-                          <a:solidFill>
-                            <a:srgbClr val="1B211D"/>
-                          </a:solidFill>
-                        </a:rPr>
-                        <a:t>0.203</a:t>
-                      </a:r>
-                      <a:endParaRPr lang="en-US" sz="950" dirty="0"/>
-                    </a:p>
-                  </a:txBody>
-                  <a:tcPr marL="27432" marR="27432" marT="27432" marB="27432" anchor="ctr">
-                    <a:lnL w="9525" cap="flat" cmpd="sng" algn="ctr">
-                      <a:solidFill>
-                        <a:srgbClr val="B9B4A6"/>
-                      </a:solidFill>
-                      <a:prstDash val="solid"/>
-                      <a:round/>
-                      <a:headEnd type="none" w="med" len="med"/>
-                      <a:tailEnd type="none" w="med" len="med"/>
-                    </a:lnL>
-                    <a:lnR w="9525" cap="flat" cmpd="sng" algn="ctr">
-                      <a:solidFill>
-                        <a:srgbClr val="B9B4A6"/>
-                      </a:solidFill>
-                      <a:prstDash val="solid"/>
-                      <a:round/>
-                      <a:headEnd type="none" w="med" len="med"/>
-                      <a:tailEnd type="none" w="med" len="med"/>
-                    </a:lnR>
-                    <a:lnT w="9525" cap="flat" cmpd="sng" algn="ctr">
-                      <a:solidFill>
-                        <a:srgbClr val="B9B4A6"/>
-                      </a:solidFill>
-                      <a:prstDash val="solid"/>
-                      <a:round/>
-                      <a:headEnd type="none" w="med" len="med"/>
-                      <a:tailEnd type="none" w="med" len="med"/>
-                    </a:lnT>
-                    <a:lnB w="9525" cap="flat" cmpd="sng" algn="ctr">
-                      <a:solidFill>
-                        <a:srgbClr val="B9B4A6"/>
-                      </a:solidFill>
-                      <a:prstDash val="solid"/>
-                      <a:round/>
-                      <a:headEnd type="none" w="med" len="med"/>
-                      <a:tailEnd type="none" w="med" len="med"/>
-                    </a:lnB>
-                  </a:tcPr>
-                </a:tc>
-                <a:tc>
-                  <a:txBody>
-                    <a:bodyPr/>
-                    <a:lstStyle/>
-                    <a:p>
-                      <a:pPr algn="ctr" indent="0" marL="0">
-                        <a:buNone/>
-                      </a:pPr>
-                      <a:r>
-                        <a:rPr lang="en-US" sz="950" dirty="0">
-                          <a:solidFill>
-                            <a:srgbClr val="1B211D"/>
-                          </a:solidFill>
-                        </a:rPr>
-                        <a:t>0.042</a:t>
-                      </a:r>
-                      <a:endParaRPr lang="en-US" sz="950" dirty="0"/>
-                    </a:p>
-                  </a:txBody>
-                  <a:tcPr marL="27432" marR="27432" marT="27432" marB="27432" anchor="ctr">
-                    <a:lnL w="9525" cap="flat" cmpd="sng" algn="ctr">
-                      <a:solidFill>
-                        <a:srgbClr val="B9B4A6"/>
-                      </a:solidFill>
-                      <a:prstDash val="solid"/>
-                      <a:round/>
-                      <a:headEnd type="none" w="med" len="med"/>
-                      <a:tailEnd type="none" w="med" len="med"/>
-                    </a:lnL>
-                    <a:lnR w="9525" cap="flat" cmpd="sng" algn="ctr">
-                      <a:solidFill>
-                        <a:srgbClr val="B9B4A6"/>
-                      </a:solidFill>
-                      <a:prstDash val="solid"/>
-                      <a:round/>
-                      <a:headEnd type="none" w="med" len="med"/>
-                      <a:tailEnd type="none" w="med" len="med"/>
-                    </a:lnR>
-                    <a:lnT w="9525" cap="flat" cmpd="sng" algn="ctr">
-                      <a:solidFill>
-                        <a:srgbClr val="B9B4A6"/>
-                      </a:solidFill>
-                      <a:prstDash val="solid"/>
-                      <a:round/>
-                      <a:headEnd type="none" w="med" len="med"/>
-                      <a:tailEnd type="none" w="med" len="med"/>
-                    </a:lnT>
-                    <a:lnB w="9525" cap="flat" cmpd="sng" algn="ctr">
-                      <a:solidFill>
-                        <a:srgbClr val="B9B4A6"/>
-                      </a:solidFill>
-                      <a:prstDash val="solid"/>
-                      <a:round/>
-                      <a:headEnd type="none" w="med" len="med"/>
-                      <a:tailEnd type="none" w="med" len="med"/>
-                    </a:lnB>
-                  </a:tcPr>
-                </a:tc>
-                <a:tc>
-                  <a:txBody>
-                    <a:bodyPr/>
-                    <a:lstStyle/>
-                    <a:p>
-                      <a:pPr algn="ctr" indent="0" marL="0">
-                        <a:buNone/>
-                      </a:pPr>
-                      <a:r>
-                        <a:rPr lang="en-US" sz="950" dirty="0">
-                          <a:solidFill>
-                            <a:srgbClr val="1B211D"/>
-                          </a:solidFill>
-                        </a:rPr>
-                        <a:t>1</a:t>
-                      </a:r>
-                      <a:endParaRPr lang="en-US" sz="950" dirty="0"/>
-                    </a:p>
-                  </a:txBody>
-                  <a:tcPr marL="27432" marR="27432" marT="27432" marB="27432" anchor="ctr">
-                    <a:lnL w="9525" cap="flat" cmpd="sng" algn="ctr">
-                      <a:solidFill>
-                        <a:srgbClr val="B9B4A6"/>
-                      </a:solidFill>
-                      <a:prstDash val="solid"/>
-                      <a:round/>
-                      <a:headEnd type="none" w="med" len="med"/>
-                      <a:tailEnd type="none" w="med" len="med"/>
-                    </a:lnL>
-                    <a:lnR w="9525" cap="flat" cmpd="sng" algn="ctr">
-                      <a:solidFill>
-                        <a:srgbClr val="B9B4A6"/>
-                      </a:solidFill>
-                      <a:prstDash val="solid"/>
-                      <a:round/>
-                      <a:headEnd type="none" w="med" len="med"/>
-                      <a:tailEnd type="none" w="med" len="med"/>
-                    </a:lnR>
-                    <a:lnT w="9525" cap="flat" cmpd="sng" algn="ctr">
-                      <a:solidFill>
-                        <a:srgbClr val="B9B4A6"/>
-                      </a:solidFill>
-                      <a:prstDash val="solid"/>
-                      <a:round/>
-                      <a:headEnd type="none" w="med" len="med"/>
-                      <a:tailEnd type="none" w="med" len="med"/>
-                    </a:lnT>
-                    <a:lnB w="9525" cap="flat" cmpd="sng" algn="ctr">
-                      <a:solidFill>
-                        <a:srgbClr val="B9B4A6"/>
-                      </a:solidFill>
-                      <a:prstDash val="solid"/>
-                      <a:round/>
-                      <a:headEnd type="none" w="med" len="med"/>
-                      <a:tailEnd type="none" w="med" len="med"/>
-                    </a:lnB>
-                  </a:tcPr>
-                </a:tc>
-              </a:tr>
-            </a:tbl>
-          </a:graphicData>
-        </a:graphic>
-      </p:graphicFrame>
-      <p:sp>
-        <p:nvSpPr>
-          <p:cNvPr id="8" name="확률분포표 기댓값"/>
-          <p:cNvSpPr txBox="1"/>
-          <p:nvPr/>
-        </p:nvSpPr>
-        <p:spPr>
-          <a:xfrm>
-            <a:off x="4663440" y="2084832"/>
-            <a:ext cx="4023360" cy="457200"/>
-          </a:xfrm>
-          <a:prstGeom prst="rect">
-            <a:avLst/>
-          </a:prstGeom>
-          <a:noFill/>
-          <a:ln/>
-        </p:spPr>
-        <p:txBody>
-          <a:bodyPr wrap="square" lIns="0" tIns="0" rIns="0" bIns="0" rtlCol="0" anchor="ctr"/>
-          <a:lstStyle/>
-          <a:p>
-            <a:pPr indent="0" marL="0">
-              <a:buNone/>
-            </a:pPr>
-            <a:r>
-              <a:rPr lang="en-US" sz="950" dirty="0">
-                <a:solidFill>
-                  <a:schemeClr val="accent3"/>
-                </a:solidFill>
-              </a:rPr>
-              <a:t>기댓값 4 × 0.453 ≈ 1.8명. 4명이 밥을 먹으면 평균 두 명 가까이는 아침을 거른 채다</a:t>
-            </a:r>
-            <a:endParaRPr lang="en-US" sz="950" dirty="0"/>
-          </a:p>
-        </p:txBody>
-      </p:sp>
-      <p:sp>
-        <p:nvSpPr>
-          <p:cNvPr id="9" name="해석 카드 1"/>
+          <p:cNvPr id="6" name="해석 카드 1"/>
           <p:cNvSpPr/>
           <p:nvPr/>
         </p:nvSpPr>
@@ -9032,7 +8088,7 @@
       </p:sp>
       <p:sp>
         <p:nvSpPr>
-          <p:cNvPr id="10" name="해석 라벨 1"/>
+          <p:cNvPr id="7" name="해석 라벨 1"/>
           <p:cNvSpPr txBox="1"/>
           <p:nvPr/>
         </p:nvSpPr>
@@ -9068,7 +8124,7 @@
       </p:sp>
       <p:sp>
         <p:nvSpPr>
-          <p:cNvPr id="11" name="해석 1"/>
+          <p:cNvPr id="8" name="해석 1"/>
           <p:cNvSpPr txBox="1"/>
           <p:nvPr/>
         </p:nvSpPr>
@@ -9106,7 +8162,7 @@
       </p:sp>
       <p:sp>
         <p:nvSpPr>
-          <p:cNvPr id="12" name="해석 카드 2"/>
+          <p:cNvPr id="9" name="해석 카드 2"/>
           <p:cNvSpPr/>
           <p:nvPr/>
         </p:nvSpPr>
@@ -9133,7 +8189,7 @@
       </p:sp>
       <p:sp>
         <p:nvSpPr>
-          <p:cNvPr id="13" name="해석 라벨 2"/>
+          <p:cNvPr id="10" name="해석 라벨 2"/>
           <p:cNvSpPr txBox="1"/>
           <p:nvPr/>
         </p:nvSpPr>
@@ -9161,7 +8217,7 @@
                   <a:schemeClr val="tx2"/>
                 </a:solidFill>
               </a:rPr>
-              <a:t>② 왜 그렇게 되었을까, 내 의견</a:t>
+              <a:t>② 의견 또는 추측</a:t>
             </a:r>
             <a:endParaRPr lang="en-US" sz="1000" dirty="0"/>
           </a:p>
@@ -9169,7 +8225,7 @@
       </p:sp>
       <p:sp>
         <p:nvSpPr>
-          <p:cNvPr id="14" name="해석 2"/>
+          <p:cNvPr id="11" name="해석 2"/>
           <p:cNvSpPr txBox="1"/>
           <p:nvPr/>
         </p:nvSpPr>
@@ -9199,7 +8255,7 @@
                   <a:schemeClr val="tx1"/>
                 </a:solidFill>
               </a:rPr>
-              <a:t>잠이 부족해 아침에 먹기보다 자는 쪽을 택한다. 늦은 취침(학원·스마트폰)과 이른 등교가 겹친다</a:t>
+              <a:t>잠이 부족해 아침보다 잠을 택한다고 본다. 아침을 거르고 잠도 모자란 학생은 오전 수업 집중이 떨어져 성적에도 영향이 있을 것이라고 추측한다</a:t>
             </a:r>
             <a:endParaRPr lang="en-US" sz="950" dirty="0"/>
           </a:p>
@@ -9207,7 +8263,7 @@
       </p:sp>
       <p:sp>
         <p:nvSpPr>
-          <p:cNvPr id="15" name="해석 카드 3"/>
+          <p:cNvPr id="12" name="해석 카드 3"/>
           <p:cNvSpPr/>
           <p:nvPr/>
         </p:nvSpPr>
@@ -9234,7 +8290,7 @@
       </p:sp>
       <p:sp>
         <p:nvSpPr>
-          <p:cNvPr id="16" name="해석 라벨 3"/>
+          <p:cNvPr id="13" name="해석 라벨 3"/>
           <p:cNvSpPr txBox="1"/>
           <p:nvPr/>
         </p:nvSpPr>
@@ -9262,7 +8318,7 @@
                   <a:schemeClr val="tx2"/>
                 </a:solidFill>
               </a:rPr>
-              <a:t>③ 내 의견의 근거</a:t>
+              <a:t>③ 의견·추측의 근거</a:t>
             </a:r>
             <a:endParaRPr lang="en-US" sz="1000" dirty="0"/>
           </a:p>
@@ -9270,7 +8326,7 @@
       </p:sp>
       <p:sp>
         <p:nvSpPr>
-          <p:cNvPr id="17" name="해석 3"/>
+          <p:cNvPr id="14" name="해석 3"/>
           <p:cNvSpPr txBox="1"/>
           <p:nvPr/>
         </p:nvSpPr>
@@ -9300,7 +8356,7 @@
                   <a:schemeClr val="tx1"/>
                 </a:solidFill>
               </a:rPr>
-              <a:t>같은 조사의 '주관적 수면충족률'(2024): 남 27.1%, 여 16.5%. 결식률이 높은 여학생이 수면충족률도 낮다</a:t>
+              <a:t>같은 조사(2024): 주중 평균 수면 남 6.5시간, 여 5.9시간(권장 8~10시간), 수면충족률 남 27.1%, 여 16.5%. 농촌진흥청 설문(2002): 아침을 매일 먹은 학생 수능 평균 294점, 주 2일 이하 275점(400점 만점)</a:t>
             </a:r>
             <a:endParaRPr lang="en-US" sz="950" dirty="0"/>
           </a:p>
@@ -9594,7 +8650,7 @@
                   <a:schemeClr val="tx1"/>
                 </a:solidFill>
               </a:rPr>
-              <a:t>꺾은선은 '해마다 어떻게 변했나'를 보여 준다</a:t>
+              <a:t>꺾은선은 '해마다 어떻게 변했나'를 보여 준다. 확률분포표는 쓰지 않았다(그래프로 충분)</a:t>
             </a:r>
             <a:endParaRPr lang="en-US" sz="1050" dirty="0"/>
           </a:p>
@@ -9657,7 +8713,7 @@
                   <a:schemeClr val="tx2"/>
                 </a:solidFill>
               </a:rPr>
-              <a:t>확률분포표를 이렇게 만든 이유</a:t>
+              <a:t>의견과 근거를 잇는 법</a:t>
             </a:r>
             <a:endParaRPr lang="en-US" sz="1150" dirty="0"/>
           </a:p>
@@ -9699,7 +8755,7 @@
                   <a:schemeClr val="tx1"/>
                 </a:solidFill>
               </a:rPr>
-              <a:t>공개 자료는 '5일 이상 결식 비율'뿐이고 0~7일 분포는 원시자료(신청 필요)에만 있다</a:t>
+              <a:t>②는 가공한 숫자를 보고 든 추측: '잠이 부족해 거른다, 학습에도 영향'</a:t>
             </a:r>
             <a:endParaRPr lang="en-US" sz="1050" dirty="0"/>
           </a:p>
@@ -9717,7 +8773,7 @@
                   <a:schemeClr val="tx1"/>
                 </a:solidFill>
               </a:rPr>
-              <a:t>주 4일 이하 / 5일 이상 두 칸뿐이면 표가 싱거우므로, 이항분포 B(4, 0.453)로 4명 모둠의 결식 학생 수 분포를 만들었다</a:t>
+              <a:t>③은 그 추측을 받치는 다른 숫자: 수면 시간·충족률, 아침식사와 수능 점수</a:t>
             </a:r>
             <a:endParaRPr lang="en-US" sz="1050" dirty="0"/>
           </a:p>
@@ -9735,7 +8791,7 @@
                   <a:schemeClr val="tx1"/>
                 </a:solidFill>
               </a:rPr>
-              <a:t>기댓값 1.8명 (교과: 이항분포·기댓값)</a:t>
+              <a:t>추측과 근거가 같은 이야기를 해야 한다</a:t>
             </a:r>
             <a:endParaRPr lang="en-US" sz="1050" dirty="0"/>
           </a:p>
@@ -9840,7 +8896,7 @@
                   <a:schemeClr val="tx1"/>
                 </a:solidFill>
               </a:rPr>
-              <a:t>같은 지표 목록의 '주관적 수면충족률'</a:t>
+              <a:t>수면 지표: 결식률과 같은 지표 목록(kdca.go.kr/yhs). 2024년 결과 보도자료에도 나온다</a:t>
             </a:r>
             <a:endParaRPr lang="en-US" sz="1050" dirty="0"/>
           </a:p>
@@ -9858,7 +8914,7 @@
                   <a:schemeClr val="tx1"/>
                 </a:solidFill>
               </a:rPr>
-              <a:t>뜻: 최근 7일 수면이 피로 회복에 충분하다고 답한 비율</a:t>
+              <a:t>아침식사·수능: 농촌진흥청·다음 설문(2002. 7. 발표), 농촌진흥청 자료 '아침밥 먹으면 왜 좋을까?'(rda.go.kr)</a:t>
             </a:r>
             <a:endParaRPr lang="en-US" sz="1050" dirty="0"/>
           </a:p>
@@ -9876,7 +8932,7 @@
                   <a:schemeClr val="tx1"/>
                 </a:solidFill>
               </a:rPr>
-              <a:t>2024년 결과 보도자료(질병관리청)에도 나온다</a:t>
+              <a:t>권장 수면 8~10시간: 미국수면재단(thensf.org)</a:t>
             </a:r>
             <a:endParaRPr lang="en-US" sz="1050" dirty="0"/>
           </a:p>
@@ -9981,7 +9037,7 @@
                   <a:schemeClr val="tx1"/>
                 </a:solidFill>
               </a:rPr>
-              <a:t>2-④ 그래프 또는 확률분포표(둘 다 있음)</a:t>
+              <a:t>늘고 준 것을 숫자로 표현했는가(①)</a:t>
             </a:r>
             <a:endParaRPr lang="en-US" sz="1050" dirty="0"/>
           </a:p>
@@ -9999,7 +9055,7 @@
                   <a:schemeClr val="tx1"/>
                 </a:solidFill>
               </a:rPr>
-              <a:t>3-① 두 시점·차이(%p)  3-② 의견</a:t>
+              <a:t>가공된 자료로 의견 도출 또는 추측을 했는가(②)</a:t>
             </a:r>
             <a:endParaRPr lang="en-US" sz="1050" dirty="0"/>
           </a:p>
@@ -10017,7 +9073,7 @@
                   <a:schemeClr val="tx1"/>
                 </a:solidFill>
               </a:rPr>
-              <a:t>3-③ 같은 조사의 다른 지표를 출처와 함께 근거로</a:t>
+              <a:t>의견·추측의 근거가 있는가(③, 출처와 함께)</a:t>
             </a:r>
             <a:endParaRPr lang="en-US" sz="1050" dirty="0"/>
           </a:p>
@@ -10287,7 +9343,7 @@
                   <a:schemeClr val="tx1"/>
                 </a:solidFill>
               </a:rPr>
-              <a:t>아침 결식은 10명 중 4명을 넘고(2025년 여학생 45.3%, 남학생 41.9%) 5년째 늘었으며, 잠이 부족한 집단일수록 높다.</a:t>
+              <a:t>아침 결식은 10명 중 4명을 넘고(2025년 여학생 45.3%, 남학생 41.9%) 5년째 늘었다. 잠은 권장(8~10시간)보다 2시간 넘게 모자란다(주중 남 6.5, 여 5.9시간).</a:t>
             </a:r>
             <a:endParaRPr lang="en-US" sz="1300" dirty="0"/>
           </a:p>
@@ -10350,7 +9406,7 @@
                   <a:schemeClr val="tx2"/>
                 </a:solidFill>
               </a:rPr>
-              <a:t>그래서 나의 주장</a:t>
+              <a:t>통계 분석</a:t>
             </a:r>
             <a:endParaRPr lang="en-US" sz="1100" dirty="0"/>
           </a:p>
@@ -10388,7 +9444,7 @@
                   <a:schemeClr val="tx1"/>
                 </a:solidFill>
               </a:rPr>
-              <a:t>'집에서 먹고 오라'는 교육은 잠을 더 줄이라는 말이다. 등교 후 10분 안에 먹을 수 있는 아침(간편식)을 학교가 마련해야 한다.</a:t>
+              <a:t>결식은 잠 부족과 같이 움직인다. 아침을 매일 먹은 학생이 주 2일 이하 먹은 학생보다 수능 평균이 19점 높았다(2002년 설문, 상관관계). 잠과 아침은 따로가 아니라 한 묶음의 생활 습관이고, 둘 다 학습과 이어진다.</a:t>
             </a:r>
             <a:endParaRPr lang="en-US" sz="1300" dirty="0"/>
           </a:p>
@@ -10451,7 +9507,7 @@
                   <a:schemeClr val="tx2"/>
                 </a:solidFill>
               </a:rPr>
-              <a:t>제안</a:t>
+              <a:t>결론</a:t>
             </a:r>
             <a:endParaRPr lang="en-US" sz="1100" dirty="0"/>
           </a:p>
@@ -10489,7 +9545,7 @@
                   <a:schemeClr val="tx1"/>
                 </a:solidFill>
               </a:rPr>
-              <a:t>아침은 학업과도 이어진다. 농촌진흥청 설문(2002년, 대학 1·2학년 3,612명)에서 고교 때 아침을 매일 먹은 응답자의 수능 평균은 294점, 주 2일 이하는 275점이었다(400점 만점). 2학년이 240명이면 45%인 약 108명이 대상이다. 한 학기 시범 운영 뒤 결식률과 지각·조퇴를 비교해 효과를 숫자로 확인하자.</a:t>
+              <a:t>우리 반부터 '11시 취침, 7시간 수면, 10분 아침'을 2주 실천하고, 실천 전후 오전 수업 집중도와 지각을 비교해 보자. 나는 간호학과 진학을 희망하며, 환자의 생활 습관을 이렇게 숫자로 상담하는 간호사가 되고 싶다.</a:t>
             </a:r>
             <a:endParaRPr lang="en-US" sz="1300" dirty="0"/>
           </a:p>
@@ -10765,7 +9821,7 @@
                   <a:schemeClr val="tx1"/>
                 </a:solidFill>
               </a:rPr>
-              <a:t>보여 준 것(숫자) → 주장 → 제안, 세 문장</a:t>
+              <a:t>통계가 보여 준 것(숫자) → 통계 분석(숫자를 어떻게 읽었나) → 결론(그래서 무엇을 하나)</a:t>
             </a:r>
             <a:endParaRPr lang="en-US" sz="1050" dirty="0"/>
           </a:p>
@@ -10783,7 +9839,7 @@
                   <a:schemeClr val="tx1"/>
                 </a:solidFill>
               </a:rPr>
-              <a:t>제안에는 학교 규모로 환산한 숫자를 넣는다(240명 → 약 108명)</a:t>
+              <a:t>학교가 해 주는 것이 아니라 내가·우리 반이 할 수 있는 일로 끝낸다</a:t>
             </a:r>
             <a:endParaRPr lang="en-US" sz="1050" dirty="0"/>
           </a:p>
@@ -10924,7 +9980,7 @@
                   <a:schemeClr val="tx1"/>
                 </a:solidFill>
               </a:rPr>
-              <a:t>오래된 자기보고 조사라 상관관계다. 2017년 청소년건강행태조사를 분석한 논문(한국가정의학회지, 2019)도 같은 방향</a:t>
+              <a:t>오래된 자기보고 조사라 상관관계다. 2017년 청소년건강행태조사 분석 논문(한국가정의학회지, 2019)도 같은 방향</a:t>
             </a:r>
             <a:endParaRPr lang="en-US" sz="1050" dirty="0"/>
           </a:p>
@@ -10987,7 +10043,7 @@
                   <a:schemeClr val="tx2"/>
                 </a:solidFill>
               </a:rPr>
-              <a:t>궁금증 대신 실행</a:t>
+              <a:t>실천 가능한 결론</a:t>
             </a:r>
             <a:endParaRPr lang="en-US" sz="1150" dirty="0"/>
           </a:p>
@@ -11029,7 +10085,7 @@
                   <a:schemeClr val="tx1"/>
                 </a:solidFill>
               </a:rPr>
-              <a:t>'더 찾아보고 싶다'로 끝내지 않는다</a:t>
+              <a:t>'2주 실천 + 전후 비교'처럼 바로 할 수 있고 숫자로 확인할 수 있는 것</a:t>
             </a:r>
             <a:endParaRPr lang="en-US" sz="1050" dirty="0"/>
           </a:p>
@@ -11047,7 +10103,7 @@
                   <a:schemeClr val="tx1"/>
                 </a:solidFill>
               </a:rPr>
-              <a:t>할 일을 적는다: 한 학기 시범 운영, 전후 비교(결식률·지각·조퇴·수면 시간)</a:t>
+              <a:t>전후 비교 항목: 결식 일수, 오전 집중도(자기 평가), 지각</a:t>
             </a:r>
             <a:endParaRPr lang="en-US" sz="1050" dirty="0"/>
           </a:p>

--- a/docs/2026-2학기-통계독서탐구-수행평가/발표예시-간호.pptx
+++ b/docs/2026-2학기-통계독서탐구-수행평가/발표예시-간호.pptx
@@ -114,7 +114,7 @@
   <p:extLst>
     <p:ext uri="{521415D9-36F7-43E2-AB2F-B90AF26B5E84}">
       <p14:sectionLst xmlns:p14="http://schemas.microsoft.com/office/powerpoint/2010/main">
-        <p14:section name="발표" id="{49f0fe88-6029-5082-dc47-046f7dd61d0f}">
+        <p14:section name="발표" id="{25a3fe32-ac87-73d6-1491-1688794096fe}">
           <p14:sldIdLst>
             <p14:sldId id="256"/>
             <p14:sldId id="257"/>
@@ -2727,7 +2727,7 @@
                   <a:schemeClr val="tx1"/>
                 </a:solidFill>
               </a:rPr>
-              <a:t>의사인 저자는 느낌 대신 숫자로 보라고 한다. '아침을 먹어야 공부가 잘된다'는 말이 숫자로도 맞는지 확인했다</a:t>
+              <a:t>느낌 대신 숫자로 보라, 표본이 어떻게 뽑혔는지 확인하라는 조언을 따라 5년치 숫자를 나란히 놓고 표본조사임을 확인했다</a:t>
             </a:r>
             <a:endParaRPr lang="en-US" sz="1150" dirty="0"/>
           </a:p>
@@ -3003,7 +3003,7 @@
                   <a:schemeClr val="tx1"/>
                 </a:solidFill>
               </a:rPr>
-              <a:t>주장 한 문장과 참고 도서 한 권</a:t>
+              <a:t>통계로 받친 주장 한 문장 + 통계 활동에 조언을 얻은 책 한 권</a:t>
             </a:r>
             <a:endParaRPr lang="en-US" sz="1050" dirty="0"/>
           </a:p>
@@ -3102,7 +3102,7 @@
                   <a:schemeClr val="tx2"/>
                 </a:solidFill>
               </a:rPr>
-              <a:t>책과의 연결</a:t>
+              <a:t>책에서 얻은 조언 (통계 활동용)</a:t>
             </a:r>
             <a:endParaRPr lang="en-US" sz="1150" dirty="0"/>
           </a:p>
@@ -3144,7 +3144,7 @@
                   <a:schemeClr val="tx1"/>
                 </a:solidFill>
               </a:rPr>
-              <a:t>로슬링은 의사·통계학자. '느낌 대신 숫자'</a:t>
+              <a:t>조언 1: 느낌 대신 숫자로 보라 → 3장에서 5년치 숫자를 나란히 놓고 비교</a:t>
             </a:r>
             <a:endParaRPr lang="en-US" sz="1050" dirty="0"/>
           </a:p>
@@ -3162,7 +3162,7 @@
                   <a:schemeClr val="tx1"/>
                 </a:solidFill>
               </a:rPr>
-              <a:t>'아침을 먹어야 공부가 잘된다'는 말을 숫자로 검증하는 것이 탐구의 출발점</a:t>
+              <a:t>조언 2: 표본으로 전체를 말할 때는 표본이 어떻게 뽑혔는지 확인하라 → 2장에서 표본조사임을 확인</a:t>
             </a:r>
             <a:endParaRPr lang="en-US" sz="1050" dirty="0"/>
           </a:p>
@@ -3180,7 +3180,7 @@
                   <a:schemeClr val="tx1"/>
                 </a:solidFill>
               </a:rPr>
-              <a:t>책의 '표본을 전체로 말할 때 조심'은 2장의 표본조사와 이어진다</a:t>
+              <a:t>주장은 책이 아니라 통계(결식률·수면 지표)에서 나왔다</a:t>
             </a:r>
             <a:endParaRPr lang="en-US" sz="1050" dirty="0"/>
           </a:p>
@@ -3408,7 +3408,7 @@
                   <a:schemeClr val="tx1"/>
                 </a:solidFill>
               </a:rPr>
-              <a:t>1번 도서 20점: 도서명·저자 + 책을 어떻게 썼는지 핵심</a:t>
+              <a:t>1번 도서 20점: 도서명·저자 + 통계 활동에 얻은 조언</a:t>
             </a:r>
             <a:endParaRPr lang="en-US" sz="1050" dirty="0"/>
           </a:p>

--- a/docs/2026-2학기-통계독서탐구-수행평가/발표예시-간호.pptx
+++ b/docs/2026-2학기-통계독서탐구-수행평가/발표예시-간호.pptx
@@ -9,13 +9,9 @@
     <p:sldId id="257" r:id="rId3"/>
     <p:sldId id="258" r:id="rId4"/>
     <p:sldId id="259" r:id="rId5"/>
-    <p:sldId id="260" r:id="rId6"/>
-    <p:sldId id="261" r:id="rId7"/>
-    <p:sldId id="262" r:id="rId8"/>
-    <p:sldId id="263" r:id="rId9"/>
   </p:sldIdLst>
   <p:notesMasterIdLst>
-    <p:notesMasterId r:id="rId10"/>
+    <p:notesMasterId r:id="rId6"/>
   </p:notesMasterIdLst>
   <p:sldSz cx="9144000" cy="5143500"/>
   <p:notesSz cx="5143500" cy="9144000"/>
@@ -114,16 +110,12 @@
   <p:extLst>
     <p:ext uri="{521415D9-36F7-43E2-AB2F-B90AF26B5E84}">
       <p14:sectionLst xmlns:p14="http://schemas.microsoft.com/office/powerpoint/2010/main">
-        <p14:section name="발표" id="{25a3fe32-ac87-73d6-1491-1688794096fe}">
+        <p14:section name="발표" id="{0bba5a8d-b678-0d70-0b3c-82d7a7ee680a}">
           <p14:sldIdLst>
             <p14:sldId id="256"/>
             <p14:sldId id="257"/>
             <p14:sldId id="258"/>
             <p14:sldId id="259"/>
-            <p14:sldId id="260"/>
-            <p14:sldId id="261"/>
-            <p14:sldId id="262"/>
-            <p14:sldId id="263"/>
           </p14:sldIdLst>
         </p14:section>
       </p14:sectionLst>
@@ -1267,358 +1259,6 @@
             <a:fld id="{F7021451-1387-4CA6-816F-3879F97B5CBC}" type="slidenum">
               <a:rPr lang="en-US"/>
               <a:t>4</a:t>
-            </a:fld>
-            <a:endParaRPr lang="en-US"/>
-          </a:p>
-        </p:txBody>
-      </p:sp>
-    </p:spTree>
-    <p:extLst>
-      <p:ext uri="{BB962C8B-B14F-4D97-AF65-F5344CB8AC3E}">
-        <p14:creationId xmlns:p14="http://schemas.microsoft.com/office/powerpoint/2010/main" val="1024086991"/>
-      </p:ext>
-    </p:extLst>
-  </p:cSld>
-  <p:clrMapOvr>
-    <a:masterClrMapping/>
-  </p:clrMapOvr>
-</p:notes>
-</file>
-
-<file path=ppt/notesSlides/notesSlide5.xml><?xml version="1.0" encoding="utf-8"?>
-<p:notes xmlns:a="http://schemas.openxmlformats.org/drawingml/2006/main" xmlns:r="http://schemas.openxmlformats.org/officeDocument/2006/relationships" xmlns:p="http://schemas.openxmlformats.org/presentationml/2006/main">
-  <p:cSld>
-    <p:spTree>
-      <p:nvGrpSpPr>
-        <p:cNvPr id="1" name=""/>
-        <p:cNvGrpSpPr/>
-        <p:nvPr/>
-      </p:nvGrpSpPr>
-      <p:grpSpPr>
-        <a:xfrm>
-          <a:off x="0" y="0"/>
-          <a:ext cx="0" cy="0"/>
-          <a:chOff x="0" y="0"/>
-          <a:chExt cx="0" cy="0"/>
-        </a:xfrm>
-      </p:grpSpPr>
-      <p:sp>
-        <p:nvSpPr>
-          <p:cNvPr id="2" name="Slide Image Placeholder 1"/>
-          <p:cNvSpPr>
-            <a:spLocks noGrp="1" noRot="1" noChangeAspect="1"/>
-          </p:cNvSpPr>
-          <p:nvPr>
-            <p:ph type="sldImg"/>
-          </p:nvPr>
-        </p:nvSpPr>
-        <p:spPr/>
-      </p:sp>
-      <p:sp>
-        <p:nvSpPr>
-          <p:cNvPr id="3" name="Notes Placeholder 2"/>
-          <p:cNvSpPr>
-            <a:spLocks noGrp="1"/>
-          </p:cNvSpPr>
-          <p:nvPr>
-            <p:ph type="body" idx="1"/>
-          </p:nvPr>
-        </p:nvSpPr>
-        <p:spPr/>
-        <p:txBody>
-          <a:bodyPr/>
-          <a:lstStyle/>
-          <a:p>
-            <a:r>
-              <a:rPr lang="en-US" dirty="0"/>
-              <a:t/>
-            </a:r>
-            <a:endParaRPr lang="en-US" dirty="0"/>
-          </a:p>
-        </p:txBody>
-      </p:sp>
-      <p:sp>
-        <p:nvSpPr>
-          <p:cNvPr id="4" name="Slide Number Placeholder 3"/>
-          <p:cNvSpPr>
-            <a:spLocks noGrp="1"/>
-          </p:cNvSpPr>
-          <p:nvPr>
-            <p:ph type="sldNum" sz="quarter" idx="10"/>
-          </p:nvPr>
-        </p:nvSpPr>
-        <p:spPr/>
-        <p:txBody>
-          <a:bodyPr/>
-          <a:lstStyle/>
-          <a:p>
-            <a:fld id="{F7021451-1387-4CA6-816F-3879F97B5CBC}" type="slidenum">
-              <a:rPr lang="en-US"/>
-              <a:t>5</a:t>
-            </a:fld>
-            <a:endParaRPr lang="en-US"/>
-          </a:p>
-        </p:txBody>
-      </p:sp>
-    </p:spTree>
-    <p:extLst>
-      <p:ext uri="{BB962C8B-B14F-4D97-AF65-F5344CB8AC3E}">
-        <p14:creationId xmlns:p14="http://schemas.microsoft.com/office/powerpoint/2010/main" val="1024086991"/>
-      </p:ext>
-    </p:extLst>
-  </p:cSld>
-  <p:clrMapOvr>
-    <a:masterClrMapping/>
-  </p:clrMapOvr>
-</p:notes>
-</file>
-
-<file path=ppt/notesSlides/notesSlide6.xml><?xml version="1.0" encoding="utf-8"?>
-<p:notes xmlns:a="http://schemas.openxmlformats.org/drawingml/2006/main" xmlns:r="http://schemas.openxmlformats.org/officeDocument/2006/relationships" xmlns:p="http://schemas.openxmlformats.org/presentationml/2006/main">
-  <p:cSld>
-    <p:spTree>
-      <p:nvGrpSpPr>
-        <p:cNvPr id="1" name=""/>
-        <p:cNvGrpSpPr/>
-        <p:nvPr/>
-      </p:nvGrpSpPr>
-      <p:grpSpPr>
-        <a:xfrm>
-          <a:off x="0" y="0"/>
-          <a:ext cx="0" cy="0"/>
-          <a:chOff x="0" y="0"/>
-          <a:chExt cx="0" cy="0"/>
-        </a:xfrm>
-      </p:grpSpPr>
-      <p:sp>
-        <p:nvSpPr>
-          <p:cNvPr id="2" name="Slide Image Placeholder 1"/>
-          <p:cNvSpPr>
-            <a:spLocks noGrp="1" noRot="1" noChangeAspect="1"/>
-          </p:cNvSpPr>
-          <p:nvPr>
-            <p:ph type="sldImg"/>
-          </p:nvPr>
-        </p:nvSpPr>
-        <p:spPr/>
-      </p:sp>
-      <p:sp>
-        <p:nvSpPr>
-          <p:cNvPr id="3" name="Notes Placeholder 2"/>
-          <p:cNvSpPr>
-            <a:spLocks noGrp="1"/>
-          </p:cNvSpPr>
-          <p:nvPr>
-            <p:ph type="body" idx="1"/>
-          </p:nvPr>
-        </p:nvSpPr>
-        <p:spPr/>
-        <p:txBody>
-          <a:bodyPr/>
-          <a:lstStyle/>
-          <a:p>
-            <a:r>
-              <a:rPr lang="en-US" dirty="0"/>
-              <a:t/>
-            </a:r>
-            <a:endParaRPr lang="en-US" dirty="0"/>
-          </a:p>
-        </p:txBody>
-      </p:sp>
-      <p:sp>
-        <p:nvSpPr>
-          <p:cNvPr id="4" name="Slide Number Placeholder 3"/>
-          <p:cNvSpPr>
-            <a:spLocks noGrp="1"/>
-          </p:cNvSpPr>
-          <p:nvPr>
-            <p:ph type="sldNum" sz="quarter" idx="10"/>
-          </p:nvPr>
-        </p:nvSpPr>
-        <p:spPr/>
-        <p:txBody>
-          <a:bodyPr/>
-          <a:lstStyle/>
-          <a:p>
-            <a:fld id="{F7021451-1387-4CA6-816F-3879F97B5CBC}" type="slidenum">
-              <a:rPr lang="en-US"/>
-              <a:t>6</a:t>
-            </a:fld>
-            <a:endParaRPr lang="en-US"/>
-          </a:p>
-        </p:txBody>
-      </p:sp>
-    </p:spTree>
-    <p:extLst>
-      <p:ext uri="{BB962C8B-B14F-4D97-AF65-F5344CB8AC3E}">
-        <p14:creationId xmlns:p14="http://schemas.microsoft.com/office/powerpoint/2010/main" val="1024086991"/>
-      </p:ext>
-    </p:extLst>
-  </p:cSld>
-  <p:clrMapOvr>
-    <a:masterClrMapping/>
-  </p:clrMapOvr>
-</p:notes>
-</file>
-
-<file path=ppt/notesSlides/notesSlide7.xml><?xml version="1.0" encoding="utf-8"?>
-<p:notes xmlns:a="http://schemas.openxmlformats.org/drawingml/2006/main" xmlns:r="http://schemas.openxmlformats.org/officeDocument/2006/relationships" xmlns:p="http://schemas.openxmlformats.org/presentationml/2006/main">
-  <p:cSld>
-    <p:spTree>
-      <p:nvGrpSpPr>
-        <p:cNvPr id="1" name=""/>
-        <p:cNvGrpSpPr/>
-        <p:nvPr/>
-      </p:nvGrpSpPr>
-      <p:grpSpPr>
-        <a:xfrm>
-          <a:off x="0" y="0"/>
-          <a:ext cx="0" cy="0"/>
-          <a:chOff x="0" y="0"/>
-          <a:chExt cx="0" cy="0"/>
-        </a:xfrm>
-      </p:grpSpPr>
-      <p:sp>
-        <p:nvSpPr>
-          <p:cNvPr id="2" name="Slide Image Placeholder 1"/>
-          <p:cNvSpPr>
-            <a:spLocks noGrp="1" noRot="1" noChangeAspect="1"/>
-          </p:cNvSpPr>
-          <p:nvPr>
-            <p:ph type="sldImg"/>
-          </p:nvPr>
-        </p:nvSpPr>
-        <p:spPr/>
-      </p:sp>
-      <p:sp>
-        <p:nvSpPr>
-          <p:cNvPr id="3" name="Notes Placeholder 2"/>
-          <p:cNvSpPr>
-            <a:spLocks noGrp="1"/>
-          </p:cNvSpPr>
-          <p:nvPr>
-            <p:ph type="body" idx="1"/>
-          </p:nvPr>
-        </p:nvSpPr>
-        <p:spPr/>
-        <p:txBody>
-          <a:bodyPr/>
-          <a:lstStyle/>
-          <a:p>
-            <a:r>
-              <a:rPr lang="en-US" dirty="0"/>
-              <a:t/>
-            </a:r>
-            <a:endParaRPr lang="en-US" dirty="0"/>
-          </a:p>
-        </p:txBody>
-      </p:sp>
-      <p:sp>
-        <p:nvSpPr>
-          <p:cNvPr id="4" name="Slide Number Placeholder 3"/>
-          <p:cNvSpPr>
-            <a:spLocks noGrp="1"/>
-          </p:cNvSpPr>
-          <p:nvPr>
-            <p:ph type="sldNum" sz="quarter" idx="10"/>
-          </p:nvPr>
-        </p:nvSpPr>
-        <p:spPr/>
-        <p:txBody>
-          <a:bodyPr/>
-          <a:lstStyle/>
-          <a:p>
-            <a:fld id="{F7021451-1387-4CA6-816F-3879F97B5CBC}" type="slidenum">
-              <a:rPr lang="en-US"/>
-              <a:t>7</a:t>
-            </a:fld>
-            <a:endParaRPr lang="en-US"/>
-          </a:p>
-        </p:txBody>
-      </p:sp>
-    </p:spTree>
-    <p:extLst>
-      <p:ext uri="{BB962C8B-B14F-4D97-AF65-F5344CB8AC3E}">
-        <p14:creationId xmlns:p14="http://schemas.microsoft.com/office/powerpoint/2010/main" val="1024086991"/>
-      </p:ext>
-    </p:extLst>
-  </p:cSld>
-  <p:clrMapOvr>
-    <a:masterClrMapping/>
-  </p:clrMapOvr>
-</p:notes>
-</file>
-
-<file path=ppt/notesSlides/notesSlide8.xml><?xml version="1.0" encoding="utf-8"?>
-<p:notes xmlns:a="http://schemas.openxmlformats.org/drawingml/2006/main" xmlns:r="http://schemas.openxmlformats.org/officeDocument/2006/relationships" xmlns:p="http://schemas.openxmlformats.org/presentationml/2006/main">
-  <p:cSld>
-    <p:spTree>
-      <p:nvGrpSpPr>
-        <p:cNvPr id="1" name=""/>
-        <p:cNvGrpSpPr/>
-        <p:nvPr/>
-      </p:nvGrpSpPr>
-      <p:grpSpPr>
-        <a:xfrm>
-          <a:off x="0" y="0"/>
-          <a:ext cx="0" cy="0"/>
-          <a:chOff x="0" y="0"/>
-          <a:chExt cx="0" cy="0"/>
-        </a:xfrm>
-      </p:grpSpPr>
-      <p:sp>
-        <p:nvSpPr>
-          <p:cNvPr id="2" name="Slide Image Placeholder 1"/>
-          <p:cNvSpPr>
-            <a:spLocks noGrp="1" noRot="1" noChangeAspect="1"/>
-          </p:cNvSpPr>
-          <p:nvPr>
-            <p:ph type="sldImg"/>
-          </p:nvPr>
-        </p:nvSpPr>
-        <p:spPr/>
-      </p:sp>
-      <p:sp>
-        <p:nvSpPr>
-          <p:cNvPr id="3" name="Notes Placeholder 2"/>
-          <p:cNvSpPr>
-            <a:spLocks noGrp="1"/>
-          </p:cNvSpPr>
-          <p:nvPr>
-            <p:ph type="body" idx="1"/>
-          </p:nvPr>
-        </p:nvSpPr>
-        <p:spPr/>
-        <p:txBody>
-          <a:bodyPr/>
-          <a:lstStyle/>
-          <a:p>
-            <a:r>
-              <a:rPr lang="en-US" dirty="0"/>
-              <a:t/>
-            </a:r>
-            <a:endParaRPr lang="en-US" dirty="0"/>
-          </a:p>
-        </p:txBody>
-      </p:sp>
-      <p:sp>
-        <p:nvSpPr>
-          <p:cNvPr id="4" name="Slide Number Placeholder 3"/>
-          <p:cNvSpPr>
-            <a:spLocks noGrp="1"/>
-          </p:cNvSpPr>
-          <p:nvPr>
-            <p:ph type="sldNum" sz="quarter" idx="10"/>
-          </p:nvPr>
-        </p:nvSpPr>
-        <p:spPr/>
-        <p:txBody>
-          <a:bodyPr/>
-          <a:lstStyle/>
-          <a:p>
-            <a:fld id="{F7021451-1387-4CA6-816F-3879F97B5CBC}" type="slidenum">
-              <a:rPr lang="en-US"/>
-              <a:t>8</a:t>
             </a:fld>
             <a:endParaRPr lang="en-US"/>
           </a:p>
@@ -2835,705 +2475,6 @@
                   <a:schemeClr val="tx2"/>
                 </a:solidFill>
               </a:rPr>
-              <a:t>1장 설명 · 핵심 요약</a:t>
-            </a:r>
-            <a:endParaRPr lang="en-US" sz="2400" dirty="0"/>
-          </a:p>
-        </p:txBody>
-      </p:sp>
-      <p:sp>
-        <p:nvSpPr>
-          <p:cNvPr id="3" name="설명 배지 1"/>
-          <p:cNvSpPr/>
-          <p:nvPr/>
-        </p:nvSpPr>
-        <p:spPr>
-          <a:xfrm>
-            <a:off x="457200" y="384048"/>
-            <a:ext cx="420624" cy="329184"/>
-          </a:xfrm>
-          <a:prstGeom prst="roundRect">
-            <a:avLst>
-              <a:gd name="adj" fmla="val 22222"/>
-            </a:avLst>
-          </a:prstGeom>
-          <a:solidFill>
-            <a:schemeClr val="accent1"/>
-          </a:solidFill>
-          <a:ln w="12700">
-            <a:solidFill>
-              <a:schemeClr val="accent1"/>
-            </a:solidFill>
-            <a:prstDash val="solid"/>
-          </a:ln>
-        </p:spPr>
-      </p:sp>
-      <p:sp>
-        <p:nvSpPr>
-          <p:cNvPr id="4" name="설명 배지 글자 1"/>
-          <p:cNvSpPr txBox="1"/>
-          <p:nvPr/>
-        </p:nvSpPr>
-        <p:spPr>
-          <a:xfrm>
-            <a:off x="457200" y="384048"/>
-            <a:ext cx="420624" cy="329184"/>
-          </a:xfrm>
-          <a:prstGeom prst="rect">
-            <a:avLst/>
-          </a:prstGeom>
-          <a:noFill/>
-          <a:ln/>
-        </p:spPr>
-        <p:txBody>
-          <a:bodyPr wrap="square" lIns="0" tIns="0" rIns="0" bIns="0" rtlCol="0" anchor="ctr"/>
-          <a:lstStyle/>
-          <a:p>
-            <a:pPr algn="ctr" indent="0" marL="0">
-              <a:buNone/>
-            </a:pPr>
-            <a:r>
-              <a:rPr lang="en-US" sz="1000" b="1" dirty="0">
-                <a:solidFill>
-                  <a:schemeClr val="bg1"/>
-                </a:solidFill>
-              </a:rPr>
-              <a:t>설명</a:t>
-            </a:r>
-            <a:endParaRPr lang="en-US" sz="1000" dirty="0"/>
-          </a:p>
-        </p:txBody>
-      </p:sp>
-      <p:sp>
-        <p:nvSpPr>
-          <p:cNvPr id="5" name="설명 카드 1-1"/>
-          <p:cNvSpPr/>
-          <p:nvPr/>
-        </p:nvSpPr>
-        <p:spPr>
-          <a:xfrm>
-            <a:off x="457200" y="960120"/>
-            <a:ext cx="4023360" cy="1691640"/>
-          </a:xfrm>
-          <a:prstGeom prst="roundRect">
-            <a:avLst>
-              <a:gd name="adj" fmla="val 3243"/>
-            </a:avLst>
-          </a:prstGeom>
-          <a:solidFill>
-            <a:srgbClr val="FFFFFF"/>
-          </a:solidFill>
-          <a:ln w="9525">
-            <a:solidFill>
-              <a:srgbClr val="DCE5DF"/>
-            </a:solidFill>
-            <a:prstDash val="solid"/>
-          </a:ln>
-        </p:spPr>
-      </p:sp>
-      <p:sp>
-        <p:nvSpPr>
-          <p:cNvPr id="6" name="설명 제목 1-1"/>
-          <p:cNvSpPr txBox="1"/>
-          <p:nvPr/>
-        </p:nvSpPr>
-        <p:spPr>
-          <a:xfrm>
-            <a:off x="621792" y="1051560"/>
-            <a:ext cx="3657600" cy="274320"/>
-          </a:xfrm>
-          <a:prstGeom prst="rect">
-            <a:avLst/>
-          </a:prstGeom>
-          <a:noFill/>
-          <a:ln/>
-        </p:spPr>
-        <p:txBody>
-          <a:bodyPr wrap="square" lIns="0" tIns="0" rIns="0" bIns="0" rtlCol="0" anchor="ctr"/>
-          <a:lstStyle/>
-          <a:p>
-            <a:pPr indent="0" marL="0">
-              <a:buNone/>
-            </a:pPr>
-            <a:r>
-              <a:rPr lang="en-US" sz="1150" b="1" dirty="0">
-                <a:solidFill>
-                  <a:schemeClr val="tx2"/>
-                </a:solidFill>
-              </a:rPr>
-              <a:t>이 장이 보여 주는 것</a:t>
-            </a:r>
-            <a:endParaRPr lang="en-US" sz="1150" dirty="0"/>
-          </a:p>
-        </p:txBody>
-      </p:sp>
-      <p:sp>
-        <p:nvSpPr>
-          <p:cNvPr id="7" name="설명 내용 1-1"/>
-          <p:cNvSpPr txBox="1"/>
-          <p:nvPr/>
-        </p:nvSpPr>
-        <p:spPr>
-          <a:xfrm>
-            <a:off x="621792" y="1344168"/>
-            <a:ext cx="3703320" cy="1234440"/>
-          </a:xfrm>
-          <a:prstGeom prst="rect">
-            <a:avLst/>
-          </a:prstGeom>
-          <a:noFill/>
-          <a:ln/>
-        </p:spPr>
-        <p:txBody>
-          <a:bodyPr wrap="square" lIns="0" tIns="0" rIns="0" bIns="0" rtlCol="0" anchor="t">
-            <a:normAutofit/>
-          </a:bodyPr>
-          <a:lstStyle/>
-          <a:p>
-            <a:pPr marL="342900" indent="-342900">
-              <a:spcAft>
-                <a:spcPts val="300"/>
-              </a:spcAft>
-              <a:buSzPct val="100000"/>
-              <a:buChar char="•"/>
-            </a:pPr>
-            <a:r>
-              <a:rPr lang="en-US" sz="1050" dirty="0">
-                <a:solidFill>
-                  <a:schemeClr val="tx1"/>
-                </a:solidFill>
-              </a:rPr>
-              <a:t>통계로 받친 주장 한 문장 + 통계 활동에 조언을 얻은 책 한 권</a:t>
-            </a:r>
-            <a:endParaRPr lang="en-US" sz="1050" dirty="0"/>
-          </a:p>
-          <a:p>
-            <a:pPr marL="342900" indent="-342900">
-              <a:spcAft>
-                <a:spcPts val="300"/>
-              </a:spcAft>
-              <a:buSzPct val="100000"/>
-              <a:buChar char="•"/>
-            </a:pPr>
-            <a:r>
-              <a:rPr lang="en-US" sz="1050" dirty="0">
-                <a:solidFill>
-                  <a:schemeClr val="tx1"/>
-                </a:solidFill>
-              </a:rPr>
-              <a:t>주장은 통계로 확인할 수 있고, 내가 실천할 수 있는 것으로</a:t>
-            </a:r>
-            <a:endParaRPr lang="en-US" sz="1050" dirty="0"/>
-          </a:p>
-          <a:p>
-            <a:pPr marL="342900" indent="-342900">
-              <a:spcAft>
-                <a:spcPts val="300"/>
-              </a:spcAft>
-              <a:buSzPct val="100000"/>
-              <a:buChar char="•"/>
-            </a:pPr>
-            <a:r>
-              <a:rPr lang="en-US" sz="1050" dirty="0">
-                <a:solidFill>
-                  <a:schemeClr val="tx1"/>
-                </a:solidFill>
-              </a:rPr>
-              <a:t>진로(간호사)와 자료(청소년 생활 습관), 학습을 한 줄로 잇는다</a:t>
-            </a:r>
-            <a:endParaRPr lang="en-US" sz="1050" dirty="0"/>
-          </a:p>
-        </p:txBody>
-      </p:sp>
-      <p:sp>
-        <p:nvSpPr>
-          <p:cNvPr id="8" name="설명 카드 1-2"/>
-          <p:cNvSpPr/>
-          <p:nvPr/>
-        </p:nvSpPr>
-        <p:spPr>
-          <a:xfrm>
-            <a:off x="4663440" y="960120"/>
-            <a:ext cx="4023360" cy="1691640"/>
-          </a:xfrm>
-          <a:prstGeom prst="roundRect">
-            <a:avLst>
-              <a:gd name="adj" fmla="val 3243"/>
-            </a:avLst>
-          </a:prstGeom>
-          <a:solidFill>
-            <a:srgbClr val="FFFFFF"/>
-          </a:solidFill>
-          <a:ln w="9525">
-            <a:solidFill>
-              <a:srgbClr val="DCE5DF"/>
-            </a:solidFill>
-            <a:prstDash val="solid"/>
-          </a:ln>
-        </p:spPr>
-      </p:sp>
-      <p:sp>
-        <p:nvSpPr>
-          <p:cNvPr id="9" name="설명 제목 1-2"/>
-          <p:cNvSpPr txBox="1"/>
-          <p:nvPr/>
-        </p:nvSpPr>
-        <p:spPr>
-          <a:xfrm>
-            <a:off x="4828032" y="1051560"/>
-            <a:ext cx="3657600" cy="274320"/>
-          </a:xfrm>
-          <a:prstGeom prst="rect">
-            <a:avLst/>
-          </a:prstGeom>
-          <a:noFill/>
-          <a:ln/>
-        </p:spPr>
-        <p:txBody>
-          <a:bodyPr wrap="square" lIns="0" tIns="0" rIns="0" bIns="0" rtlCol="0" anchor="ctr"/>
-          <a:lstStyle/>
-          <a:p>
-            <a:pPr indent="0" marL="0">
-              <a:buNone/>
-            </a:pPr>
-            <a:r>
-              <a:rPr lang="en-US" sz="1150" b="1" dirty="0">
-                <a:solidFill>
-                  <a:schemeClr val="tx2"/>
-                </a:solidFill>
-              </a:rPr>
-              <a:t>책에서 얻은 조언 (통계 활동용)</a:t>
-            </a:r>
-            <a:endParaRPr lang="en-US" sz="1150" dirty="0"/>
-          </a:p>
-        </p:txBody>
-      </p:sp>
-      <p:sp>
-        <p:nvSpPr>
-          <p:cNvPr id="10" name="설명 내용 1-2"/>
-          <p:cNvSpPr txBox="1"/>
-          <p:nvPr/>
-        </p:nvSpPr>
-        <p:spPr>
-          <a:xfrm>
-            <a:off x="4828032" y="1344168"/>
-            <a:ext cx="3703320" cy="1234440"/>
-          </a:xfrm>
-          <a:prstGeom prst="rect">
-            <a:avLst/>
-          </a:prstGeom>
-          <a:noFill/>
-          <a:ln/>
-        </p:spPr>
-        <p:txBody>
-          <a:bodyPr wrap="square" lIns="0" tIns="0" rIns="0" bIns="0" rtlCol="0" anchor="t">
-            <a:normAutofit/>
-          </a:bodyPr>
-          <a:lstStyle/>
-          <a:p>
-            <a:pPr marL="342900" indent="-342900">
-              <a:spcAft>
-                <a:spcPts val="300"/>
-              </a:spcAft>
-              <a:buSzPct val="100000"/>
-              <a:buChar char="•"/>
-            </a:pPr>
-            <a:r>
-              <a:rPr lang="en-US" sz="1050" dirty="0">
-                <a:solidFill>
-                  <a:schemeClr val="tx1"/>
-                </a:solidFill>
-              </a:rPr>
-              <a:t>조언 1: 느낌 대신 숫자로 보라 → 3장에서 5년치 숫자를 나란히 놓고 비교</a:t>
-            </a:r>
-            <a:endParaRPr lang="en-US" sz="1050" dirty="0"/>
-          </a:p>
-          <a:p>
-            <a:pPr marL="342900" indent="-342900">
-              <a:spcAft>
-                <a:spcPts val="300"/>
-              </a:spcAft>
-              <a:buSzPct val="100000"/>
-              <a:buChar char="•"/>
-            </a:pPr>
-            <a:r>
-              <a:rPr lang="en-US" sz="1050" dirty="0">
-                <a:solidFill>
-                  <a:schemeClr val="tx1"/>
-                </a:solidFill>
-              </a:rPr>
-              <a:t>조언 2: 표본으로 전체를 말할 때는 표본이 어떻게 뽑혔는지 확인하라 → 2장에서 표본조사임을 확인</a:t>
-            </a:r>
-            <a:endParaRPr lang="en-US" sz="1050" dirty="0"/>
-          </a:p>
-          <a:p>
-            <a:pPr marL="342900" indent="-342900">
-              <a:spcAft>
-                <a:spcPts val="300"/>
-              </a:spcAft>
-              <a:buSzPct val="100000"/>
-              <a:buChar char="•"/>
-            </a:pPr>
-            <a:r>
-              <a:rPr lang="en-US" sz="1050" dirty="0">
-                <a:solidFill>
-                  <a:schemeClr val="tx1"/>
-                </a:solidFill>
-              </a:rPr>
-              <a:t>주장은 책이 아니라 통계(결식률·수면 지표)에서 나왔다</a:t>
-            </a:r>
-            <a:endParaRPr lang="en-US" sz="1050" dirty="0"/>
-          </a:p>
-        </p:txBody>
-      </p:sp>
-      <p:sp>
-        <p:nvSpPr>
-          <p:cNvPr id="11" name="설명 카드 1-3"/>
-          <p:cNvSpPr/>
-          <p:nvPr/>
-        </p:nvSpPr>
-        <p:spPr>
-          <a:xfrm>
-            <a:off x="457200" y="2788920"/>
-            <a:ext cx="4023360" cy="1691640"/>
-          </a:xfrm>
-          <a:prstGeom prst="roundRect">
-            <a:avLst>
-              <a:gd name="adj" fmla="val 3243"/>
-            </a:avLst>
-          </a:prstGeom>
-          <a:solidFill>
-            <a:srgbClr val="FFFFFF"/>
-          </a:solidFill>
-          <a:ln w="9525">
-            <a:solidFill>
-              <a:srgbClr val="DCE5DF"/>
-            </a:solidFill>
-            <a:prstDash val="solid"/>
-          </a:ln>
-        </p:spPr>
-      </p:sp>
-      <p:sp>
-        <p:nvSpPr>
-          <p:cNvPr id="12" name="설명 제목 1-3"/>
-          <p:cNvSpPr txBox="1"/>
-          <p:nvPr/>
-        </p:nvSpPr>
-        <p:spPr>
-          <a:xfrm>
-            <a:off x="621792" y="2880360"/>
-            <a:ext cx="3657600" cy="274320"/>
-          </a:xfrm>
-          <a:prstGeom prst="rect">
-            <a:avLst/>
-          </a:prstGeom>
-          <a:noFill/>
-          <a:ln/>
-        </p:spPr>
-        <p:txBody>
-          <a:bodyPr wrap="square" lIns="0" tIns="0" rIns="0" bIns="0" rtlCol="0" anchor="ctr"/>
-          <a:lstStyle/>
-          <a:p>
-            <a:pPr indent="0" marL="0">
-              <a:buNone/>
-            </a:pPr>
-            <a:r>
-              <a:rPr lang="en-US" sz="1150" b="1" dirty="0">
-                <a:solidFill>
-                  <a:schemeClr val="tx2"/>
-                </a:solidFill>
-              </a:rPr>
-              <a:t>실제로 읽을 분량</a:t>
-            </a:r>
-            <a:endParaRPr lang="en-US" sz="1150" dirty="0"/>
-          </a:p>
-        </p:txBody>
-      </p:sp>
-      <p:sp>
-        <p:nvSpPr>
-          <p:cNvPr id="13" name="설명 내용 1-3"/>
-          <p:cNvSpPr txBox="1"/>
-          <p:nvPr/>
-        </p:nvSpPr>
-        <p:spPr>
-          <a:xfrm>
-            <a:off x="621792" y="3172968"/>
-            <a:ext cx="3703320" cy="1234440"/>
-          </a:xfrm>
-          <a:prstGeom prst="rect">
-            <a:avLst/>
-          </a:prstGeom>
-          <a:noFill/>
-          <a:ln/>
-        </p:spPr>
-        <p:txBody>
-          <a:bodyPr wrap="square" lIns="0" tIns="0" rIns="0" bIns="0" rtlCol="0" anchor="t">
-            <a:normAutofit/>
-          </a:bodyPr>
-          <a:lstStyle/>
-          <a:p>
-            <a:pPr marL="342900" indent="-342900">
-              <a:spcAft>
-                <a:spcPts val="300"/>
-              </a:spcAft>
-              <a:buSzPct val="100000"/>
-              <a:buChar char="•"/>
-            </a:pPr>
-            <a:r>
-              <a:rPr lang="en-US" sz="1050" dirty="0">
-                <a:solidFill>
-                  <a:schemeClr val="tx1"/>
-                </a:solidFill>
-              </a:rPr>
-              <a:t>1장과 '부정 본능' 부분만 읽어도 된다</a:t>
-            </a:r>
-            <a:endParaRPr lang="en-US" sz="1050" dirty="0"/>
-          </a:p>
-          <a:p>
-            <a:pPr marL="342900" indent="-342900">
-              <a:spcAft>
-                <a:spcPts val="300"/>
-              </a:spcAft>
-              <a:buSzPct val="100000"/>
-              <a:buChar char="•"/>
-            </a:pPr>
-            <a:r>
-              <a:rPr lang="en-US" sz="1050" dirty="0">
-                <a:solidFill>
-                  <a:schemeClr val="tx1"/>
-                </a:solidFill>
-              </a:rPr>
-              <a:t>학교 도서관에 있는 책. 통계·데이터를 다룬 다른 책도 가능</a:t>
-            </a:r>
-            <a:endParaRPr lang="en-US" sz="1050" dirty="0"/>
-          </a:p>
-        </p:txBody>
-      </p:sp>
-      <p:sp>
-        <p:nvSpPr>
-          <p:cNvPr id="14" name="설명 카드 1-4"/>
-          <p:cNvSpPr/>
-          <p:nvPr/>
-        </p:nvSpPr>
-        <p:spPr>
-          <a:xfrm>
-            <a:off x="4663440" y="2788920"/>
-            <a:ext cx="4023360" cy="1691640"/>
-          </a:xfrm>
-          <a:prstGeom prst="roundRect">
-            <a:avLst>
-              <a:gd name="adj" fmla="val 3243"/>
-            </a:avLst>
-          </a:prstGeom>
-          <a:solidFill>
-            <a:srgbClr val="FFFFFF"/>
-          </a:solidFill>
-          <a:ln w="9525">
-            <a:solidFill>
-              <a:srgbClr val="DCE5DF"/>
-            </a:solidFill>
-            <a:prstDash val="solid"/>
-          </a:ln>
-        </p:spPr>
-      </p:sp>
-      <p:sp>
-        <p:nvSpPr>
-          <p:cNvPr id="15" name="설명 제목 1-4"/>
-          <p:cNvSpPr txBox="1"/>
-          <p:nvPr/>
-        </p:nvSpPr>
-        <p:spPr>
-          <a:xfrm>
-            <a:off x="4828032" y="2880360"/>
-            <a:ext cx="3657600" cy="274320"/>
-          </a:xfrm>
-          <a:prstGeom prst="rect">
-            <a:avLst/>
-          </a:prstGeom>
-          <a:noFill/>
-          <a:ln/>
-        </p:spPr>
-        <p:txBody>
-          <a:bodyPr wrap="square" lIns="0" tIns="0" rIns="0" bIns="0" rtlCol="0" anchor="ctr"/>
-          <a:lstStyle/>
-          <a:p>
-            <a:pPr indent="0" marL="0">
-              <a:buNone/>
-            </a:pPr>
-            <a:r>
-              <a:rPr lang="en-US" sz="1150" b="1" dirty="0">
-                <a:solidFill>
-                  <a:schemeClr val="tx2"/>
-                </a:solidFill>
-              </a:rPr>
-              <a:t>채점 연결</a:t>
-            </a:r>
-            <a:endParaRPr lang="en-US" sz="1150" dirty="0"/>
-          </a:p>
-        </p:txBody>
-      </p:sp>
-      <p:sp>
-        <p:nvSpPr>
-          <p:cNvPr id="16" name="설명 내용 1-4"/>
-          <p:cNvSpPr txBox="1"/>
-          <p:nvPr/>
-        </p:nvSpPr>
-        <p:spPr>
-          <a:xfrm>
-            <a:off x="4828032" y="3172968"/>
-            <a:ext cx="3703320" cy="1234440"/>
-          </a:xfrm>
-          <a:prstGeom prst="rect">
-            <a:avLst/>
-          </a:prstGeom>
-          <a:noFill/>
-          <a:ln/>
-        </p:spPr>
-        <p:txBody>
-          <a:bodyPr wrap="square" lIns="0" tIns="0" rIns="0" bIns="0" rtlCol="0" anchor="t">
-            <a:normAutofit/>
-          </a:bodyPr>
-          <a:lstStyle/>
-          <a:p>
-            <a:pPr marL="342900" indent="-342900">
-              <a:spcAft>
-                <a:spcPts val="300"/>
-              </a:spcAft>
-              <a:buSzPct val="100000"/>
-              <a:buChar char="•"/>
-            </a:pPr>
-            <a:r>
-              <a:rPr lang="en-US" sz="1050" dirty="0">
-                <a:solidFill>
-                  <a:schemeClr val="tx1"/>
-                </a:solidFill>
-              </a:rPr>
-              <a:t>1번 도서 20점: 도서명·저자 + 통계 활동에 얻은 조언</a:t>
-            </a:r>
-            <a:endParaRPr lang="en-US" sz="1050" dirty="0"/>
-          </a:p>
-          <a:p>
-            <a:pPr marL="342900" indent="-342900">
-              <a:spcAft>
-                <a:spcPts val="300"/>
-              </a:spcAft>
-              <a:buSzPct val="100000"/>
-              <a:buChar char="•"/>
-            </a:pPr>
-            <a:r>
-              <a:rPr lang="en-US" sz="1050" dirty="0">
-                <a:solidFill>
-                  <a:schemeClr val="tx1"/>
-                </a:solidFill>
-              </a:rPr>
-              <a:t>책 소개만 쓰면 15점, 도서명·저자만 있으면 5점</a:t>
-            </a:r>
-            <a:endParaRPr lang="en-US" sz="1050" dirty="0"/>
-          </a:p>
-        </p:txBody>
-      </p:sp>
-      <p:sp>
-        <p:nvSpPr>
-          <p:cNvPr id="25" name="Slide Number Placeholder 0"/>
-          <p:cNvSpPr>
-            <a:spLocks noGrp="1"/>
-          </p:cNvSpPr>
-          <p:nvPr>
-            <p:ph type="sldNum" sz="quarter" idx="4294967295"/>
-          </p:nvPr>
-        </p:nvSpPr>
-        <p:spPr>
-          <a:xfrm>
-            <a:off x="8229600" y="4754880"/>
-            <a:ext cx="457200" cy="228600"/>
-          </a:xfrm>
-          <a:prstGeom prst="rect">
-            <a:avLst/>
-          </a:prstGeom>
-          <a:extLst>
-            <a:ext uri="{C572A759-6A51-4108-AA02-DFA0A04FC94B}">
-              <ma14:wrappingTextBoxFlag xmlns:ma14="http://schemas.microsoft.com/office/mac/drawingml/2011/main" val="0"/>
-            </a:ext>
-          </a:extLst>
-        </p:spPr>
-        <p:txBody>
-          <a:bodyPr/>
-          <a:lstStyle>
-            <a:lvl1pPr>
-              <a:defRPr sz="900">
-                <a:solidFill>
-                  <a:srgbClr val="6B6759"/>
-                </a:solidFill>
-              </a:defRPr>
-            </a:lvl1pPr>
-          </a:lstStyle>
-          <a:p>
-            <a:pPr algn="r"/>
-            <a:fld id="{F7021451-1387-4CA6-816F-3879F97B5CBC}" type="slidenum">
-              <a:rPr b="0" lang="en-US"/>
-              <a:t>2</a:t>
-            </a:fld>
-            <a:endParaRPr lang="en-US"/>
-          </a:p>
-        </p:txBody>
-      </p:sp>
-    </p:spTree>
-  </p:cSld>
-  <p:clrMapOvr>
-    <a:masterClrMapping/>
-  </p:clrMapOvr>
-</p:sld>
-</file>
-
-<file path=ppt/slides/slide3.xml><?xml version="1.0" encoding="utf-8"?>
-<p:sld xmlns:a="http://schemas.openxmlformats.org/drawingml/2006/main" xmlns:r="http://schemas.openxmlformats.org/officeDocument/2006/relationships" xmlns:p="http://schemas.openxmlformats.org/presentationml/2006/main">
-  <p:cSld name="Slide 3">
-    <p:spTree>
-      <p:nvGrpSpPr>
-        <p:cNvPr id="1" name=""/>
-        <p:cNvGrpSpPr/>
-        <p:nvPr/>
-      </p:nvGrpSpPr>
-      <p:grpSpPr>
-        <a:xfrm>
-          <a:off x="0" y="0"/>
-          <a:ext cx="0" cy="0"/>
-          <a:chOff x="0" y="0"/>
-          <a:chExt cx="0" cy="0"/>
-        </a:xfrm>
-      </p:grpSpPr>
-      <p:sp>
-        <p:nvSpPr>
-          <p:cNvPr id="2" name="Text 0"/>
-          <p:cNvSpPr/>
-          <p:nvPr>
-            <p:ph idx="100" type="title" hasCustomPrompt="1"/>
-          </p:nvPr>
-        </p:nvSpPr>
-        <p:spPr>
-          <a:xfrm>
-            <a:off x="960120" y="274320"/>
-            <a:ext cx="7726680" cy="548640"/>
-          </a:xfrm>
-          <a:prstGeom prst="rect">
-            <a:avLst/>
-          </a:prstGeom>
-          <a:noFill/>
-          <a:ln/>
-        </p:spPr>
-        <p:txBody>
-          <a:bodyPr wrap="square" lIns="0" tIns="0" rIns="0" bIns="0" rtlCol="0" anchor="ctr"/>
-          <a:lstStyle/>
-          <a:p>
-            <a:pPr algn="l" indent="0" marL="0">
-              <a:buNone/>
-            </a:pPr>
-            <a:r>
-              <a:rPr lang="en-US" sz="2400" b="1" dirty="0">
-                <a:solidFill>
-                  <a:schemeClr val="tx2"/>
-                </a:solidFill>
-              </a:rPr>
               <a:t>자료 출처와 내가 만든 표</a:t>
             </a:r>
             <a:endParaRPr lang="en-US" sz="2400" dirty="0"/>
@@ -3741,7 +2682,7 @@
       </p:sp>
       <p:graphicFrame>
         <p:nvGraphicFramePr>
-          <p:cNvPr id="4" name="원자료 표"/>
+          <p:cNvPr id="3" name="원자료 표"/>
           <p:cNvGraphicFramePr>
             <a:graphicFrameLocks noGrp="1"/>
           </p:cNvGraphicFramePr>
@@ -6003,7 +4944,7 @@
       </p:sp>
       <p:graphicFrame>
         <p:nvGraphicFramePr>
-          <p:cNvPr id="7" name="내가 만든 표"/>
+          <p:cNvPr id="5" name="내가 만든 표"/>
           <p:cNvGraphicFramePr>
             <a:graphicFrameLocks noGrp="1"/>
           </p:cNvGraphicFramePr>
@@ -7178,7 +6119,7 @@
             <a:pPr algn="r"/>
             <a:fld id="{F7021451-1387-4CA6-816F-3879F97B5CBC}" type="slidenum">
               <a:rPr b="0" lang="en-US"/>
-              <a:t>3</a:t>
+              <a:t>2</a:t>
             </a:fld>
             <a:endParaRPr lang="en-US"/>
           </a:p>
@@ -7192,744 +6133,9 @@
 </p:sld>
 </file>
 
-<file path=ppt/slides/slide4.xml><?xml version="1.0" encoding="utf-8"?>
+<file path=ppt/slides/slide3.xml><?xml version="1.0" encoding="utf-8"?>
 <p:sld xmlns:a="http://schemas.openxmlformats.org/drawingml/2006/main" xmlns:r="http://schemas.openxmlformats.org/officeDocument/2006/relationships" xmlns:p="http://schemas.openxmlformats.org/presentationml/2006/main">
-  <p:cSld name="Slide 4">
-    <p:spTree>
-      <p:nvGrpSpPr>
-        <p:cNvPr id="1" name=""/>
-        <p:cNvGrpSpPr/>
-        <p:nvPr/>
-      </p:nvGrpSpPr>
-      <p:grpSpPr>
-        <a:xfrm>
-          <a:off x="0" y="0"/>
-          <a:ext cx="0" cy="0"/>
-          <a:chOff x="0" y="0"/>
-          <a:chExt cx="0" cy="0"/>
-        </a:xfrm>
-      </p:grpSpPr>
-      <p:sp>
-        <p:nvSpPr>
-          <p:cNvPr id="2" name="Text 0"/>
-          <p:cNvSpPr/>
-          <p:nvPr>
-            <p:ph idx="100" type="title" hasCustomPrompt="1"/>
-          </p:nvPr>
-        </p:nvSpPr>
-        <p:spPr>
-          <a:xfrm>
-            <a:off x="960120" y="274320"/>
-            <a:ext cx="7726680" cy="548640"/>
-          </a:xfrm>
-          <a:prstGeom prst="rect">
-            <a:avLst/>
-          </a:prstGeom>
-          <a:noFill/>
-          <a:ln/>
-        </p:spPr>
-        <p:txBody>
-          <a:bodyPr wrap="square" lIns="0" tIns="0" rIns="0" bIns="0" rtlCol="0" anchor="ctr"/>
-          <a:lstStyle/>
-          <a:p>
-            <a:pPr algn="l" indent="0" marL="0">
-              <a:buNone/>
-            </a:pPr>
-            <a:r>
-              <a:rPr lang="en-US" sz="2400" b="1" dirty="0">
-                <a:solidFill>
-                  <a:schemeClr val="tx2"/>
-                </a:solidFill>
-              </a:rPr>
-              <a:t>2장 설명 · 핵심 요약</a:t>
-            </a:r>
-            <a:endParaRPr lang="en-US" sz="2400" dirty="0"/>
-          </a:p>
-        </p:txBody>
-      </p:sp>
-      <p:sp>
-        <p:nvSpPr>
-          <p:cNvPr id="3" name="설명 배지 2"/>
-          <p:cNvSpPr/>
-          <p:nvPr/>
-        </p:nvSpPr>
-        <p:spPr>
-          <a:xfrm>
-            <a:off x="457200" y="384048"/>
-            <a:ext cx="420624" cy="329184"/>
-          </a:xfrm>
-          <a:prstGeom prst="roundRect">
-            <a:avLst>
-              <a:gd name="adj" fmla="val 22222"/>
-            </a:avLst>
-          </a:prstGeom>
-          <a:solidFill>
-            <a:schemeClr val="accent1"/>
-          </a:solidFill>
-          <a:ln w="12700">
-            <a:solidFill>
-              <a:schemeClr val="accent1"/>
-            </a:solidFill>
-            <a:prstDash val="solid"/>
-          </a:ln>
-        </p:spPr>
-      </p:sp>
-      <p:sp>
-        <p:nvSpPr>
-          <p:cNvPr id="4" name="설명 배지 글자 2"/>
-          <p:cNvSpPr txBox="1"/>
-          <p:nvPr/>
-        </p:nvSpPr>
-        <p:spPr>
-          <a:xfrm>
-            <a:off x="457200" y="384048"/>
-            <a:ext cx="420624" cy="329184"/>
-          </a:xfrm>
-          <a:prstGeom prst="rect">
-            <a:avLst/>
-          </a:prstGeom>
-          <a:noFill/>
-          <a:ln/>
-        </p:spPr>
-        <p:txBody>
-          <a:bodyPr wrap="square" lIns="0" tIns="0" rIns="0" bIns="0" rtlCol="0" anchor="ctr"/>
-          <a:lstStyle/>
-          <a:p>
-            <a:pPr algn="ctr" indent="0" marL="0">
-              <a:buNone/>
-            </a:pPr>
-            <a:r>
-              <a:rPr lang="en-US" sz="1000" b="1" dirty="0">
-                <a:solidFill>
-                  <a:schemeClr val="bg1"/>
-                </a:solidFill>
-              </a:rPr>
-              <a:t>설명</a:t>
-            </a:r>
-            <a:endParaRPr lang="en-US" sz="1000" dirty="0"/>
-          </a:p>
-        </p:txBody>
-      </p:sp>
-      <p:sp>
-        <p:nvSpPr>
-          <p:cNvPr id="5" name="설명 카드 2-1"/>
-          <p:cNvSpPr/>
-          <p:nvPr/>
-        </p:nvSpPr>
-        <p:spPr>
-          <a:xfrm>
-            <a:off x="457200" y="960120"/>
-            <a:ext cx="4023360" cy="1691640"/>
-          </a:xfrm>
-          <a:prstGeom prst="roundRect">
-            <a:avLst>
-              <a:gd name="adj" fmla="val 3243"/>
-            </a:avLst>
-          </a:prstGeom>
-          <a:solidFill>
-            <a:srgbClr val="FFFFFF"/>
-          </a:solidFill>
-          <a:ln w="9525">
-            <a:solidFill>
-              <a:srgbClr val="DCE5DF"/>
-            </a:solidFill>
-            <a:prstDash val="solid"/>
-          </a:ln>
-        </p:spPr>
-      </p:sp>
-      <p:sp>
-        <p:nvSpPr>
-          <p:cNvPr id="6" name="설명 제목 2-1"/>
-          <p:cNvSpPr txBox="1"/>
-          <p:nvPr/>
-        </p:nvSpPr>
-        <p:spPr>
-          <a:xfrm>
-            <a:off x="621792" y="1051560"/>
-            <a:ext cx="3657600" cy="274320"/>
-          </a:xfrm>
-          <a:prstGeom prst="rect">
-            <a:avLst/>
-          </a:prstGeom>
-          <a:noFill/>
-          <a:ln/>
-        </p:spPr>
-        <p:txBody>
-          <a:bodyPr wrap="square" lIns="0" tIns="0" rIns="0" bIns="0" rtlCol="0" anchor="ctr"/>
-          <a:lstStyle/>
-          <a:p>
-            <a:pPr indent="0" marL="0">
-              <a:buNone/>
-            </a:pPr>
-            <a:r>
-              <a:rPr lang="en-US" sz="1150" b="1" dirty="0">
-                <a:solidFill>
-                  <a:schemeClr val="tx2"/>
-                </a:solidFill>
-              </a:rPr>
-              <a:t>실재하는 자료다</a:t>
-            </a:r>
-            <a:endParaRPr lang="en-US" sz="1150" dirty="0"/>
-          </a:p>
-        </p:txBody>
-      </p:sp>
-      <p:sp>
-        <p:nvSpPr>
-          <p:cNvPr id="7" name="설명 내용 2-1"/>
-          <p:cNvSpPr txBox="1"/>
-          <p:nvPr/>
-        </p:nvSpPr>
-        <p:spPr>
-          <a:xfrm>
-            <a:off x="621792" y="1344168"/>
-            <a:ext cx="3703320" cy="1234440"/>
-          </a:xfrm>
-          <a:prstGeom prst="rect">
-            <a:avLst/>
-          </a:prstGeom>
-          <a:noFill/>
-          <a:ln/>
-        </p:spPr>
-        <p:txBody>
-          <a:bodyPr wrap="square" lIns="0" tIns="0" rIns="0" bIns="0" rtlCol="0" anchor="t">
-            <a:normAutofit/>
-          </a:bodyPr>
-          <a:lstStyle/>
-          <a:p>
-            <a:pPr marL="342900" indent="-342900">
-              <a:spcAft>
-                <a:spcPts val="300"/>
-              </a:spcAft>
-              <a:buSzPct val="100000"/>
-              <a:buChar char="•"/>
-            </a:pPr>
-            <a:r>
-              <a:rPr lang="en-US" sz="1050" dirty="0">
-                <a:solidFill>
-                  <a:schemeClr val="tx1"/>
-                </a:solidFill>
-              </a:rPr>
-              <a:t>질병관리청이 2005년부터 매년 하는 국가승인통계</a:t>
-            </a:r>
-            <a:endParaRPr lang="en-US" sz="1050" dirty="0"/>
-          </a:p>
-          <a:p>
-            <a:pPr marL="342900" indent="-342900">
-              <a:spcAft>
-                <a:spcPts val="300"/>
-              </a:spcAft>
-              <a:buSzPct val="100000"/>
-              <a:buChar char="•"/>
-            </a:pPr>
-            <a:r>
-              <a:rPr lang="en-US" sz="1050" dirty="0">
-                <a:solidFill>
-                  <a:schemeClr val="tx1"/>
-                </a:solidFill>
-              </a:rPr>
-              <a:t>대상 중1~고3(만 12~18세), 전국 800개교 약 6만 명</a:t>
-            </a:r>
-            <a:endParaRPr lang="en-US" sz="1050" dirty="0"/>
-          </a:p>
-          <a:p>
-            <a:pPr marL="342900" indent="-342900">
-              <a:spcAft>
-                <a:spcPts val="300"/>
-              </a:spcAft>
-              <a:buSzPct val="100000"/>
-              <a:buChar char="•"/>
-            </a:pPr>
-            <a:r>
-              <a:rPr lang="en-US" sz="1050" dirty="0">
-                <a:solidFill>
-                  <a:schemeClr val="tx1"/>
-                </a:solidFill>
-              </a:rPr>
-              <a:t>익명 온라인 조사이므로 표본조사다</a:t>
-            </a:r>
-            <a:endParaRPr lang="en-US" sz="1050" dirty="0"/>
-          </a:p>
-        </p:txBody>
-      </p:sp>
-      <p:sp>
-        <p:nvSpPr>
-          <p:cNvPr id="8" name="설명 카드 2-2"/>
-          <p:cNvSpPr/>
-          <p:nvPr/>
-        </p:nvSpPr>
-        <p:spPr>
-          <a:xfrm>
-            <a:off x="4663440" y="960120"/>
-            <a:ext cx="4023360" cy="1691640"/>
-          </a:xfrm>
-          <a:prstGeom prst="roundRect">
-            <a:avLst>
-              <a:gd name="adj" fmla="val 3243"/>
-            </a:avLst>
-          </a:prstGeom>
-          <a:solidFill>
-            <a:srgbClr val="FFFFFF"/>
-          </a:solidFill>
-          <a:ln w="9525">
-            <a:solidFill>
-              <a:srgbClr val="DCE5DF"/>
-            </a:solidFill>
-            <a:prstDash val="solid"/>
-          </a:ln>
-        </p:spPr>
-      </p:sp>
-      <p:sp>
-        <p:nvSpPr>
-          <p:cNvPr id="9" name="설명 제목 2-2"/>
-          <p:cNvSpPr txBox="1"/>
-          <p:nvPr/>
-        </p:nvSpPr>
-        <p:spPr>
-          <a:xfrm>
-            <a:off x="4828032" y="1051560"/>
-            <a:ext cx="3657600" cy="274320"/>
-          </a:xfrm>
-          <a:prstGeom prst="rect">
-            <a:avLst/>
-          </a:prstGeom>
-          <a:noFill/>
-          <a:ln/>
-        </p:spPr>
-        <p:txBody>
-          <a:bodyPr wrap="square" lIns="0" tIns="0" rIns="0" bIns="0" rtlCol="0" anchor="ctr"/>
-          <a:lstStyle/>
-          <a:p>
-            <a:pPr indent="0" marL="0">
-              <a:buNone/>
-            </a:pPr>
-            <a:r>
-              <a:rPr lang="en-US" sz="1150" b="1" dirty="0">
-                <a:solidFill>
-                  <a:schemeClr val="tx2"/>
-                </a:solidFill>
-              </a:rPr>
-              <a:t>얻는 길 (링크)</a:t>
-            </a:r>
-            <a:endParaRPr lang="en-US" sz="1150" dirty="0"/>
-          </a:p>
-        </p:txBody>
-      </p:sp>
-      <p:sp>
-        <p:nvSpPr>
-          <p:cNvPr id="10" name="설명 내용 2-2"/>
-          <p:cNvSpPr txBox="1"/>
-          <p:nvPr/>
-        </p:nvSpPr>
-        <p:spPr>
-          <a:xfrm>
-            <a:off x="4828032" y="1344168"/>
-            <a:ext cx="3703320" cy="1234440"/>
-          </a:xfrm>
-          <a:prstGeom prst="rect">
-            <a:avLst/>
-          </a:prstGeom>
-          <a:noFill/>
-          <a:ln/>
-        </p:spPr>
-        <p:txBody>
-          <a:bodyPr wrap="square" lIns="0" tIns="0" rIns="0" bIns="0" rtlCol="0" anchor="t">
-            <a:normAutofit/>
-          </a:bodyPr>
-          <a:lstStyle/>
-          <a:p>
-            <a:pPr marL="342900" indent="-342900">
-              <a:spcAft>
-                <a:spcPts val="300"/>
-              </a:spcAft>
-              <a:buSzPct val="100000"/>
-              <a:buChar char="•"/>
-            </a:pPr>
-            <a:r>
-              <a:rPr lang="en-US" sz="1050" dirty="0">
-                <a:solidFill>
-                  <a:schemeClr val="tx1"/>
-                </a:solidFill>
-              </a:rPr>
-              <a:t>kosis.kr → 국내통계 → 보건 → 청소년건강행태조사 → 아침식사 결식률</a:t>
-            </a:r>
-            <a:endParaRPr lang="en-US" sz="1050" dirty="0"/>
-          </a:p>
-          <a:p>
-            <a:pPr marL="342900" indent="-342900">
-              <a:spcAft>
-                <a:spcPts val="300"/>
-              </a:spcAft>
-              <a:buSzPct val="100000"/>
-              <a:buChar char="•"/>
-            </a:pPr>
-            <a:r>
-              <a:rPr lang="en-US" sz="1050" dirty="0">
-                <a:solidFill>
-                  <a:schemeClr val="tx1"/>
-                </a:solidFill>
-              </a:rPr>
-              <a:t>kdca.go.kr/yhs → 통계 메뉴 (같은 표, 엑셀 내려받기)</a:t>
-            </a:r>
-            <a:endParaRPr lang="en-US" sz="1050" dirty="0"/>
-          </a:p>
-          <a:p>
-            <a:pPr marL="342900" indent="-342900">
-              <a:spcAft>
-                <a:spcPts val="300"/>
-              </a:spcAft>
-              <a:buSzPct val="100000"/>
-              <a:buChar char="•"/>
-            </a:pPr>
-            <a:r>
-              <a:rPr lang="en-US" sz="1050" dirty="0">
-                <a:solidFill>
-                  <a:schemeClr val="tx1"/>
-                </a:solidFill>
-              </a:rPr>
-              <a:t>수면 지표(주중 평균 수면시간, 주관적 수면충족률)도 같은 목록에 있다</a:t>
-            </a:r>
-            <a:endParaRPr lang="en-US" sz="1050" dirty="0"/>
-          </a:p>
-        </p:txBody>
-      </p:sp>
-      <p:sp>
-        <p:nvSpPr>
-          <p:cNvPr id="11" name="설명 카드 2-3"/>
-          <p:cNvSpPr/>
-          <p:nvPr/>
-        </p:nvSpPr>
-        <p:spPr>
-          <a:xfrm>
-            <a:off x="457200" y="2788920"/>
-            <a:ext cx="4023360" cy="1691640"/>
-          </a:xfrm>
-          <a:prstGeom prst="roundRect">
-            <a:avLst>
-              <a:gd name="adj" fmla="val 3243"/>
-            </a:avLst>
-          </a:prstGeom>
-          <a:solidFill>
-            <a:srgbClr val="FFFFFF"/>
-          </a:solidFill>
-          <a:ln w="9525">
-            <a:solidFill>
-              <a:srgbClr val="DCE5DF"/>
-            </a:solidFill>
-            <a:prstDash val="solid"/>
-          </a:ln>
-        </p:spPr>
-      </p:sp>
-      <p:sp>
-        <p:nvSpPr>
-          <p:cNvPr id="12" name="설명 제목 2-3"/>
-          <p:cNvSpPr txBox="1"/>
-          <p:nvPr/>
-        </p:nvSpPr>
-        <p:spPr>
-          <a:xfrm>
-            <a:off x="621792" y="2880360"/>
-            <a:ext cx="3657600" cy="274320"/>
-          </a:xfrm>
-          <a:prstGeom prst="rect">
-            <a:avLst/>
-          </a:prstGeom>
-          <a:noFill/>
-          <a:ln/>
-        </p:spPr>
-        <p:txBody>
-          <a:bodyPr wrap="square" lIns="0" tIns="0" rIns="0" bIns="0" rtlCol="0" anchor="ctr"/>
-          <a:lstStyle/>
-          <a:p>
-            <a:pPr indent="0" marL="0">
-              <a:buNone/>
-            </a:pPr>
-            <a:r>
-              <a:rPr lang="en-US" sz="1150" b="1" dirty="0">
-                <a:solidFill>
-                  <a:schemeClr val="tx2"/>
-                </a:solidFill>
-              </a:rPr>
-              <a:t>원자료 → 가공</a:t>
-            </a:r>
-            <a:endParaRPr lang="en-US" sz="1150" dirty="0"/>
-          </a:p>
-        </p:txBody>
-      </p:sp>
-      <p:sp>
-        <p:nvSpPr>
-          <p:cNvPr id="13" name="설명 내용 2-3"/>
-          <p:cNvSpPr txBox="1"/>
-          <p:nvPr/>
-        </p:nvSpPr>
-        <p:spPr>
-          <a:xfrm>
-            <a:off x="621792" y="3172968"/>
-            <a:ext cx="3703320" cy="1234440"/>
-          </a:xfrm>
-          <a:prstGeom prst="rect">
-            <a:avLst/>
-          </a:prstGeom>
-          <a:noFill/>
-          <a:ln/>
-        </p:spPr>
-        <p:txBody>
-          <a:bodyPr wrap="square" lIns="0" tIns="0" rIns="0" bIns="0" rtlCol="0" anchor="t">
-            <a:normAutofit/>
-          </a:bodyPr>
-          <a:lstStyle/>
-          <a:p>
-            <a:pPr marL="342900" indent="-342900">
-              <a:spcAft>
-                <a:spcPts val="300"/>
-              </a:spcAft>
-              <a:buSzPct val="100000"/>
-              <a:buChar char="•"/>
-            </a:pPr>
-            <a:r>
-              <a:rPr lang="en-US" sz="1050" dirty="0">
-                <a:solidFill>
-                  <a:schemeClr val="tx1"/>
-                </a:solidFill>
-              </a:rPr>
-              <a:t>원자료: 연도(2005~) × 구분(전체·남·여·학교급·학년·시도)</a:t>
-            </a:r>
-            <a:endParaRPr lang="en-US" sz="1050" dirty="0"/>
-          </a:p>
-          <a:p>
-            <a:pPr marL="342900" indent="-342900">
-              <a:spcAft>
-                <a:spcPts val="300"/>
-              </a:spcAft>
-              <a:buSzPct val="100000"/>
-              <a:buChar char="•"/>
-            </a:pPr>
-            <a:r>
-              <a:rPr lang="en-US" sz="1050" dirty="0">
-                <a:solidFill>
-                  <a:schemeClr val="tx1"/>
-                </a:solidFill>
-              </a:rPr>
-              <a:t>남·여 두 줄, 최근 5년만 골라 옮김</a:t>
-            </a:r>
-            <a:endParaRPr lang="en-US" sz="1050" dirty="0"/>
-          </a:p>
-          <a:p>
-            <a:pPr marL="342900" indent="-342900">
-              <a:spcAft>
-                <a:spcPts val="300"/>
-              </a:spcAft>
-              <a:buSzPct val="100000"/>
-              <a:buChar char="•"/>
-            </a:pPr>
-            <a:r>
-              <a:rPr lang="en-US" sz="1050" dirty="0">
-                <a:solidFill>
-                  <a:schemeClr val="tx1"/>
-                </a:solidFill>
-              </a:rPr>
-              <a:t>뜻: 최근 7일 중 아침을 5일 이상 안 먹은 학생의 비율</a:t>
-            </a:r>
-            <a:endParaRPr lang="en-US" sz="1050" dirty="0"/>
-          </a:p>
-        </p:txBody>
-      </p:sp>
-      <p:sp>
-        <p:nvSpPr>
-          <p:cNvPr id="14" name="설명 카드 2-4"/>
-          <p:cNvSpPr/>
-          <p:nvPr/>
-        </p:nvSpPr>
-        <p:spPr>
-          <a:xfrm>
-            <a:off x="4663440" y="2788920"/>
-            <a:ext cx="4023360" cy="1691640"/>
-          </a:xfrm>
-          <a:prstGeom prst="roundRect">
-            <a:avLst>
-              <a:gd name="adj" fmla="val 3243"/>
-            </a:avLst>
-          </a:prstGeom>
-          <a:solidFill>
-            <a:srgbClr val="FFFFFF"/>
-          </a:solidFill>
-          <a:ln w="9525">
-            <a:solidFill>
-              <a:srgbClr val="DCE5DF"/>
-            </a:solidFill>
-            <a:prstDash val="solid"/>
-          </a:ln>
-        </p:spPr>
-      </p:sp>
-      <p:sp>
-        <p:nvSpPr>
-          <p:cNvPr id="15" name="설명 제목 2-4"/>
-          <p:cNvSpPr txBox="1"/>
-          <p:nvPr/>
-        </p:nvSpPr>
-        <p:spPr>
-          <a:xfrm>
-            <a:off x="4828032" y="2880360"/>
-            <a:ext cx="3657600" cy="274320"/>
-          </a:xfrm>
-          <a:prstGeom prst="rect">
-            <a:avLst/>
-          </a:prstGeom>
-          <a:noFill/>
-          <a:ln/>
-        </p:spPr>
-        <p:txBody>
-          <a:bodyPr wrap="square" lIns="0" tIns="0" rIns="0" bIns="0" rtlCol="0" anchor="ctr"/>
-          <a:lstStyle/>
-          <a:p>
-            <a:pPr indent="0" marL="0">
-              <a:buNone/>
-            </a:pPr>
-            <a:r>
-              <a:rPr lang="en-US" sz="1150" b="1" dirty="0">
-                <a:solidFill>
-                  <a:schemeClr val="tx2"/>
-                </a:solidFill>
-              </a:rPr>
-              <a:t>채점 연결</a:t>
-            </a:r>
-            <a:endParaRPr lang="en-US" sz="1150" dirty="0"/>
-          </a:p>
-        </p:txBody>
-      </p:sp>
-      <p:sp>
-        <p:nvSpPr>
-          <p:cNvPr id="16" name="설명 내용 2-4"/>
-          <p:cNvSpPr txBox="1"/>
-          <p:nvPr/>
-        </p:nvSpPr>
-        <p:spPr>
-          <a:xfrm>
-            <a:off x="4828032" y="3172968"/>
-            <a:ext cx="3703320" cy="1234440"/>
-          </a:xfrm>
-          <a:prstGeom prst="rect">
-            <a:avLst/>
-          </a:prstGeom>
-          <a:noFill/>
-          <a:ln/>
-        </p:spPr>
-        <p:txBody>
-          <a:bodyPr wrap="square" lIns="0" tIns="0" rIns="0" bIns="0" rtlCol="0" anchor="t">
-            <a:normAutofit/>
-          </a:bodyPr>
-          <a:lstStyle/>
-          <a:p>
-            <a:pPr marL="342900" indent="-342900">
-              <a:spcAft>
-                <a:spcPts val="300"/>
-              </a:spcAft>
-              <a:buSzPct val="100000"/>
-              <a:buChar char="•"/>
-            </a:pPr>
-            <a:r>
-              <a:rPr lang="en-US" sz="1050" dirty="0">
-                <a:solidFill>
-                  <a:schemeClr val="tx1"/>
-                </a:solidFill>
-              </a:rPr>
-              <a:t>출처(기관·조사 이름·링크)를 표현했는가</a:t>
-            </a:r>
-            <a:endParaRPr lang="en-US" sz="1050" dirty="0"/>
-          </a:p>
-          <a:p>
-            <a:pPr marL="342900" indent="-342900">
-              <a:spcAft>
-                <a:spcPts val="300"/>
-              </a:spcAft>
-              <a:buSzPct val="100000"/>
-              <a:buChar char="•"/>
-            </a:pPr>
-            <a:r>
-              <a:rPr lang="en-US" sz="1050" dirty="0">
-                <a:solidFill>
-                  <a:schemeClr val="tx1"/>
-                </a:solidFill>
-              </a:rPr>
-              <a:t>모두 조사인지 일부 조사인지 밝혔는가(표본조사)</a:t>
-            </a:r>
-            <a:endParaRPr lang="en-US" sz="1050" dirty="0"/>
-          </a:p>
-          <a:p>
-            <a:pPr marL="342900" indent="-342900">
-              <a:spcAft>
-                <a:spcPts val="300"/>
-              </a:spcAft>
-              <a:buSzPct val="100000"/>
-              <a:buChar char="•"/>
-            </a:pPr>
-            <a:r>
-              <a:rPr lang="en-US" sz="1050" dirty="0">
-                <a:solidFill>
-                  <a:schemeClr val="tx1"/>
-                </a:solidFill>
-              </a:rPr>
-              <a:t>가공 전·후를 함께 보여 신뢰도를 높였는가</a:t>
-            </a:r>
-            <a:endParaRPr lang="en-US" sz="1050" dirty="0"/>
-          </a:p>
-        </p:txBody>
-      </p:sp>
-      <p:sp>
-        <p:nvSpPr>
-          <p:cNvPr id="25" name="Slide Number Placeholder 0"/>
-          <p:cNvSpPr>
-            <a:spLocks noGrp="1"/>
-          </p:cNvSpPr>
-          <p:nvPr>
-            <p:ph type="sldNum" sz="quarter" idx="4294967295"/>
-          </p:nvPr>
-        </p:nvSpPr>
-        <p:spPr>
-          <a:xfrm>
-            <a:off x="8229600" y="4754880"/>
-            <a:ext cx="457200" cy="228600"/>
-          </a:xfrm>
-          <a:prstGeom prst="rect">
-            <a:avLst/>
-          </a:prstGeom>
-          <a:extLst>
-            <a:ext uri="{C572A759-6A51-4108-AA02-DFA0A04FC94B}">
-              <ma14:wrappingTextBoxFlag xmlns:ma14="http://schemas.microsoft.com/office/mac/drawingml/2011/main" val="0"/>
-            </a:ext>
-          </a:extLst>
-        </p:spPr>
-        <p:txBody>
-          <a:bodyPr/>
-          <a:lstStyle>
-            <a:lvl1pPr>
-              <a:defRPr sz="900">
-                <a:solidFill>
-                  <a:srgbClr val="6B6759"/>
-                </a:solidFill>
-              </a:defRPr>
-            </a:lvl1pPr>
-          </a:lstStyle>
-          <a:p>
-            <a:pPr algn="r"/>
-            <a:fld id="{F7021451-1387-4CA6-816F-3879F97B5CBC}" type="slidenum">
-              <a:rPr b="0" lang="en-US"/>
-              <a:t>4</a:t>
-            </a:fld>
-            <a:endParaRPr lang="en-US"/>
-          </a:p>
-        </p:txBody>
-      </p:sp>
-    </p:spTree>
-  </p:cSld>
-  <p:clrMapOvr>
-    <a:masterClrMapping/>
-  </p:clrMapOvr>
-</p:sld>
-</file>
-
-<file path=ppt/slides/slide5.xml><?xml version="1.0" encoding="utf-8"?>
-<p:sld xmlns:a="http://schemas.openxmlformats.org/drawingml/2006/main" xmlns:r="http://schemas.openxmlformats.org/officeDocument/2006/relationships" xmlns:p="http://schemas.openxmlformats.org/presentationml/2006/main">
-  <p:cSld name="Slide 5">
+  <p:cSld name="Slide 3">
     <p:spTree>
       <p:nvGrpSpPr>
         <p:cNvPr id="1" name=""/>
@@ -8401,7 +6607,7 @@
             <a:pPr algn="r"/>
             <a:fld id="{F7021451-1387-4CA6-816F-3879F97B5CBC}" type="slidenum">
               <a:rPr b="0" lang="en-US"/>
-              <a:t>5</a:t>
+              <a:t>3</a:t>
             </a:fld>
             <a:endParaRPr lang="en-US"/>
           </a:p>
@@ -8415,726 +6621,9 @@
 </p:sld>
 </file>
 
-<file path=ppt/slides/slide6.xml><?xml version="1.0" encoding="utf-8"?>
+<file path=ppt/slides/slide4.xml><?xml version="1.0" encoding="utf-8"?>
 <p:sld xmlns:a="http://schemas.openxmlformats.org/drawingml/2006/main" xmlns:r="http://schemas.openxmlformats.org/officeDocument/2006/relationships" xmlns:p="http://schemas.openxmlformats.org/presentationml/2006/main">
-  <p:cSld name="Slide 6">
-    <p:spTree>
-      <p:nvGrpSpPr>
-        <p:cNvPr id="1" name=""/>
-        <p:cNvGrpSpPr/>
-        <p:nvPr/>
-      </p:nvGrpSpPr>
-      <p:grpSpPr>
-        <a:xfrm>
-          <a:off x="0" y="0"/>
-          <a:ext cx="0" cy="0"/>
-          <a:chOff x="0" y="0"/>
-          <a:chExt cx="0" cy="0"/>
-        </a:xfrm>
-      </p:grpSpPr>
-      <p:sp>
-        <p:nvSpPr>
-          <p:cNvPr id="2" name="Text 0"/>
-          <p:cNvSpPr/>
-          <p:nvPr>
-            <p:ph idx="100" type="title" hasCustomPrompt="1"/>
-          </p:nvPr>
-        </p:nvSpPr>
-        <p:spPr>
-          <a:xfrm>
-            <a:off x="960120" y="274320"/>
-            <a:ext cx="7726680" cy="548640"/>
-          </a:xfrm>
-          <a:prstGeom prst="rect">
-            <a:avLst/>
-          </a:prstGeom>
-          <a:noFill/>
-          <a:ln/>
-        </p:spPr>
-        <p:txBody>
-          <a:bodyPr wrap="square" lIns="0" tIns="0" rIns="0" bIns="0" rtlCol="0" anchor="ctr"/>
-          <a:lstStyle/>
-          <a:p>
-            <a:pPr algn="l" indent="0" marL="0">
-              <a:buNone/>
-            </a:pPr>
-            <a:r>
-              <a:rPr lang="en-US" sz="2400" b="1" dirty="0">
-                <a:solidFill>
-                  <a:schemeClr val="tx2"/>
-                </a:solidFill>
-              </a:rPr>
-              <a:t>3장 설명 · 핵심 요약</a:t>
-            </a:r>
-            <a:endParaRPr lang="en-US" sz="2400" dirty="0"/>
-          </a:p>
-        </p:txBody>
-      </p:sp>
-      <p:sp>
-        <p:nvSpPr>
-          <p:cNvPr id="3" name="설명 배지 3"/>
-          <p:cNvSpPr/>
-          <p:nvPr/>
-        </p:nvSpPr>
-        <p:spPr>
-          <a:xfrm>
-            <a:off x="457200" y="384048"/>
-            <a:ext cx="420624" cy="329184"/>
-          </a:xfrm>
-          <a:prstGeom prst="roundRect">
-            <a:avLst>
-              <a:gd name="adj" fmla="val 22222"/>
-            </a:avLst>
-          </a:prstGeom>
-          <a:solidFill>
-            <a:schemeClr val="accent1"/>
-          </a:solidFill>
-          <a:ln w="12700">
-            <a:solidFill>
-              <a:schemeClr val="accent1"/>
-            </a:solidFill>
-            <a:prstDash val="solid"/>
-          </a:ln>
-        </p:spPr>
-      </p:sp>
-      <p:sp>
-        <p:nvSpPr>
-          <p:cNvPr id="4" name="설명 배지 글자 3"/>
-          <p:cNvSpPr txBox="1"/>
-          <p:nvPr/>
-        </p:nvSpPr>
-        <p:spPr>
-          <a:xfrm>
-            <a:off x="457200" y="384048"/>
-            <a:ext cx="420624" cy="329184"/>
-          </a:xfrm>
-          <a:prstGeom prst="rect">
-            <a:avLst/>
-          </a:prstGeom>
-          <a:noFill/>
-          <a:ln/>
-        </p:spPr>
-        <p:txBody>
-          <a:bodyPr wrap="square" lIns="0" tIns="0" rIns="0" bIns="0" rtlCol="0" anchor="ctr"/>
-          <a:lstStyle/>
-          <a:p>
-            <a:pPr algn="ctr" indent="0" marL="0">
-              <a:buNone/>
-            </a:pPr>
-            <a:r>
-              <a:rPr lang="en-US" sz="1000" b="1" dirty="0">
-                <a:solidFill>
-                  <a:schemeClr val="bg1"/>
-                </a:solidFill>
-              </a:rPr>
-              <a:t>설명</a:t>
-            </a:r>
-            <a:endParaRPr lang="en-US" sz="1000" dirty="0"/>
-          </a:p>
-        </p:txBody>
-      </p:sp>
-      <p:sp>
-        <p:nvSpPr>
-          <p:cNvPr id="5" name="설명 카드 3-1"/>
-          <p:cNvSpPr/>
-          <p:nvPr/>
-        </p:nvSpPr>
-        <p:spPr>
-          <a:xfrm>
-            <a:off x="457200" y="960120"/>
-            <a:ext cx="4023360" cy="1691640"/>
-          </a:xfrm>
-          <a:prstGeom prst="roundRect">
-            <a:avLst>
-              <a:gd name="adj" fmla="val 3243"/>
-            </a:avLst>
-          </a:prstGeom>
-          <a:solidFill>
-            <a:srgbClr val="FFFFFF"/>
-          </a:solidFill>
-          <a:ln w="9525">
-            <a:solidFill>
-              <a:srgbClr val="DCE5DF"/>
-            </a:solidFill>
-            <a:prstDash val="solid"/>
-          </a:ln>
-        </p:spPr>
-      </p:sp>
-      <p:sp>
-        <p:nvSpPr>
-          <p:cNvPr id="6" name="설명 제목 3-1"/>
-          <p:cNvSpPr txBox="1"/>
-          <p:nvPr/>
-        </p:nvSpPr>
-        <p:spPr>
-          <a:xfrm>
-            <a:off x="621792" y="1051560"/>
-            <a:ext cx="3657600" cy="274320"/>
-          </a:xfrm>
-          <a:prstGeom prst="rect">
-            <a:avLst/>
-          </a:prstGeom>
-          <a:noFill/>
-          <a:ln/>
-        </p:spPr>
-        <p:txBody>
-          <a:bodyPr wrap="square" lIns="0" tIns="0" rIns="0" bIns="0" rtlCol="0" anchor="ctr"/>
-          <a:lstStyle/>
-          <a:p>
-            <a:pPr indent="0" marL="0">
-              <a:buNone/>
-            </a:pPr>
-            <a:r>
-              <a:rPr lang="en-US" sz="1150" b="1" dirty="0">
-                <a:solidFill>
-                  <a:schemeClr val="tx2"/>
-                </a:solidFill>
-              </a:rPr>
-              <a:t>그래프</a:t>
-            </a:r>
-            <a:endParaRPr lang="en-US" sz="1150" dirty="0"/>
-          </a:p>
-        </p:txBody>
-      </p:sp>
-      <p:sp>
-        <p:nvSpPr>
-          <p:cNvPr id="7" name="설명 내용 3-1"/>
-          <p:cNvSpPr txBox="1"/>
-          <p:nvPr/>
-        </p:nvSpPr>
-        <p:spPr>
-          <a:xfrm>
-            <a:off x="621792" y="1344168"/>
-            <a:ext cx="3703320" cy="1234440"/>
-          </a:xfrm>
-          <a:prstGeom prst="rect">
-            <a:avLst/>
-          </a:prstGeom>
-          <a:noFill/>
-          <a:ln/>
-        </p:spPr>
-        <p:txBody>
-          <a:bodyPr wrap="square" lIns="0" tIns="0" rIns="0" bIns="0" rtlCol="0" anchor="t">
-            <a:normAutofit/>
-          </a:bodyPr>
-          <a:lstStyle/>
-          <a:p>
-            <a:pPr marL="342900" indent="-342900">
-              <a:spcAft>
-                <a:spcPts val="300"/>
-              </a:spcAft>
-              <a:buSzPct val="100000"/>
-              <a:buChar char="•"/>
-            </a:pPr>
-            <a:r>
-              <a:rPr lang="en-US" sz="1050" dirty="0">
-                <a:solidFill>
-                  <a:schemeClr val="tx1"/>
-                </a:solidFill>
-              </a:rPr>
-              <a:t>계열이 둘이라 색과 범례로 구분, 세로축 0~50%</a:t>
-            </a:r>
-            <a:endParaRPr lang="en-US" sz="1050" dirty="0"/>
-          </a:p>
-          <a:p>
-            <a:pPr marL="342900" indent="-342900">
-              <a:spcAft>
-                <a:spcPts val="300"/>
-              </a:spcAft>
-              <a:buSzPct val="100000"/>
-              <a:buChar char="•"/>
-            </a:pPr>
-            <a:r>
-              <a:rPr lang="en-US" sz="1050" dirty="0">
-                <a:solidFill>
-                  <a:schemeClr val="tx1"/>
-                </a:solidFill>
-              </a:rPr>
-              <a:t>꺾은선은 '해마다 어떻게 변했나'를 보여 준다. 확률분포표는 쓰지 않았다(그래프로 충분)</a:t>
-            </a:r>
-            <a:endParaRPr lang="en-US" sz="1050" dirty="0"/>
-          </a:p>
-        </p:txBody>
-      </p:sp>
-      <p:sp>
-        <p:nvSpPr>
-          <p:cNvPr id="8" name="설명 카드 3-2"/>
-          <p:cNvSpPr/>
-          <p:nvPr/>
-        </p:nvSpPr>
-        <p:spPr>
-          <a:xfrm>
-            <a:off x="4663440" y="960120"/>
-            <a:ext cx="4023360" cy="1691640"/>
-          </a:xfrm>
-          <a:prstGeom prst="roundRect">
-            <a:avLst>
-              <a:gd name="adj" fmla="val 3243"/>
-            </a:avLst>
-          </a:prstGeom>
-          <a:solidFill>
-            <a:srgbClr val="FFFFFF"/>
-          </a:solidFill>
-          <a:ln w="9525">
-            <a:solidFill>
-              <a:srgbClr val="DCE5DF"/>
-            </a:solidFill>
-            <a:prstDash val="solid"/>
-          </a:ln>
-        </p:spPr>
-      </p:sp>
-      <p:sp>
-        <p:nvSpPr>
-          <p:cNvPr id="9" name="설명 제목 3-2"/>
-          <p:cNvSpPr txBox="1"/>
-          <p:nvPr/>
-        </p:nvSpPr>
-        <p:spPr>
-          <a:xfrm>
-            <a:off x="4828032" y="1051560"/>
-            <a:ext cx="3657600" cy="274320"/>
-          </a:xfrm>
-          <a:prstGeom prst="rect">
-            <a:avLst/>
-          </a:prstGeom>
-          <a:noFill/>
-          <a:ln/>
-        </p:spPr>
-        <p:txBody>
-          <a:bodyPr wrap="square" lIns="0" tIns="0" rIns="0" bIns="0" rtlCol="0" anchor="ctr"/>
-          <a:lstStyle/>
-          <a:p>
-            <a:pPr indent="0" marL="0">
-              <a:buNone/>
-            </a:pPr>
-            <a:r>
-              <a:rPr lang="en-US" sz="1150" b="1" dirty="0">
-                <a:solidFill>
-                  <a:schemeClr val="tx2"/>
-                </a:solidFill>
-              </a:rPr>
-              <a:t>의견과 근거를 잇는 법</a:t>
-            </a:r>
-            <a:endParaRPr lang="en-US" sz="1150" dirty="0"/>
-          </a:p>
-        </p:txBody>
-      </p:sp>
-      <p:sp>
-        <p:nvSpPr>
-          <p:cNvPr id="10" name="설명 내용 3-2"/>
-          <p:cNvSpPr txBox="1"/>
-          <p:nvPr/>
-        </p:nvSpPr>
-        <p:spPr>
-          <a:xfrm>
-            <a:off x="4828032" y="1344168"/>
-            <a:ext cx="3703320" cy="1234440"/>
-          </a:xfrm>
-          <a:prstGeom prst="rect">
-            <a:avLst/>
-          </a:prstGeom>
-          <a:noFill/>
-          <a:ln/>
-        </p:spPr>
-        <p:txBody>
-          <a:bodyPr wrap="square" lIns="0" tIns="0" rIns="0" bIns="0" rtlCol="0" anchor="t">
-            <a:normAutofit/>
-          </a:bodyPr>
-          <a:lstStyle/>
-          <a:p>
-            <a:pPr marL="342900" indent="-342900">
-              <a:spcAft>
-                <a:spcPts val="300"/>
-              </a:spcAft>
-              <a:buSzPct val="100000"/>
-              <a:buChar char="•"/>
-            </a:pPr>
-            <a:r>
-              <a:rPr lang="en-US" sz="1050" dirty="0">
-                <a:solidFill>
-                  <a:schemeClr val="tx1"/>
-                </a:solidFill>
-              </a:rPr>
-              <a:t>②는 가공한 숫자를 보고 든 추측: '잠이 부족해 거른다, 학습에도 영향'</a:t>
-            </a:r>
-            <a:endParaRPr lang="en-US" sz="1050" dirty="0"/>
-          </a:p>
-          <a:p>
-            <a:pPr marL="342900" indent="-342900">
-              <a:spcAft>
-                <a:spcPts val="300"/>
-              </a:spcAft>
-              <a:buSzPct val="100000"/>
-              <a:buChar char="•"/>
-            </a:pPr>
-            <a:r>
-              <a:rPr lang="en-US" sz="1050" dirty="0">
-                <a:solidFill>
-                  <a:schemeClr val="tx1"/>
-                </a:solidFill>
-              </a:rPr>
-              <a:t>③은 그 추측을 받치는 다른 숫자: 수면 시간·충족률, 아침식사와 수능 점수</a:t>
-            </a:r>
-            <a:endParaRPr lang="en-US" sz="1050" dirty="0"/>
-          </a:p>
-          <a:p>
-            <a:pPr marL="342900" indent="-342900">
-              <a:spcAft>
-                <a:spcPts val="300"/>
-              </a:spcAft>
-              <a:buSzPct val="100000"/>
-              <a:buChar char="•"/>
-            </a:pPr>
-            <a:r>
-              <a:rPr lang="en-US" sz="1050" dirty="0">
-                <a:solidFill>
-                  <a:schemeClr val="tx1"/>
-                </a:solidFill>
-              </a:rPr>
-              <a:t>추측과 근거가 같은 이야기를 해야 한다</a:t>
-            </a:r>
-            <a:endParaRPr lang="en-US" sz="1050" dirty="0"/>
-          </a:p>
-        </p:txBody>
-      </p:sp>
-      <p:sp>
-        <p:nvSpPr>
-          <p:cNvPr id="11" name="설명 카드 3-3"/>
-          <p:cNvSpPr/>
-          <p:nvPr/>
-        </p:nvSpPr>
-        <p:spPr>
-          <a:xfrm>
-            <a:off x="457200" y="2788920"/>
-            <a:ext cx="4023360" cy="1691640"/>
-          </a:xfrm>
-          <a:prstGeom prst="roundRect">
-            <a:avLst>
-              <a:gd name="adj" fmla="val 3243"/>
-            </a:avLst>
-          </a:prstGeom>
-          <a:solidFill>
-            <a:srgbClr val="FFFFFF"/>
-          </a:solidFill>
-          <a:ln w="9525">
-            <a:solidFill>
-              <a:srgbClr val="DCE5DF"/>
-            </a:solidFill>
-            <a:prstDash val="solid"/>
-          </a:ln>
-        </p:spPr>
-      </p:sp>
-      <p:sp>
-        <p:nvSpPr>
-          <p:cNvPr id="12" name="설명 제목 3-3"/>
-          <p:cNvSpPr txBox="1"/>
-          <p:nvPr/>
-        </p:nvSpPr>
-        <p:spPr>
-          <a:xfrm>
-            <a:off x="621792" y="2880360"/>
-            <a:ext cx="3657600" cy="274320"/>
-          </a:xfrm>
-          <a:prstGeom prst="rect">
-            <a:avLst/>
-          </a:prstGeom>
-          <a:noFill/>
-          <a:ln/>
-        </p:spPr>
-        <p:txBody>
-          <a:bodyPr wrap="square" lIns="0" tIns="0" rIns="0" bIns="0" rtlCol="0" anchor="ctr"/>
-          <a:lstStyle/>
-          <a:p>
-            <a:pPr indent="0" marL="0">
-              <a:buNone/>
-            </a:pPr>
-            <a:r>
-              <a:rPr lang="en-US" sz="1150" b="1" dirty="0">
-                <a:solidFill>
-                  <a:schemeClr val="tx2"/>
-                </a:solidFill>
-              </a:rPr>
-              <a:t>근거 자료는 어디서</a:t>
-            </a:r>
-            <a:endParaRPr lang="en-US" sz="1150" dirty="0"/>
-          </a:p>
-        </p:txBody>
-      </p:sp>
-      <p:sp>
-        <p:nvSpPr>
-          <p:cNvPr id="13" name="설명 내용 3-3"/>
-          <p:cNvSpPr txBox="1"/>
-          <p:nvPr/>
-        </p:nvSpPr>
-        <p:spPr>
-          <a:xfrm>
-            <a:off x="621792" y="3172968"/>
-            <a:ext cx="3703320" cy="1234440"/>
-          </a:xfrm>
-          <a:prstGeom prst="rect">
-            <a:avLst/>
-          </a:prstGeom>
-          <a:noFill/>
-          <a:ln/>
-        </p:spPr>
-        <p:txBody>
-          <a:bodyPr wrap="square" lIns="0" tIns="0" rIns="0" bIns="0" rtlCol="0" anchor="t">
-            <a:normAutofit/>
-          </a:bodyPr>
-          <a:lstStyle/>
-          <a:p>
-            <a:pPr marL="342900" indent="-342900">
-              <a:spcAft>
-                <a:spcPts val="300"/>
-              </a:spcAft>
-              <a:buSzPct val="100000"/>
-              <a:buChar char="•"/>
-            </a:pPr>
-            <a:r>
-              <a:rPr lang="en-US" sz="1050" dirty="0">
-                <a:solidFill>
-                  <a:schemeClr val="tx1"/>
-                </a:solidFill>
-              </a:rPr>
-              <a:t>수면 지표: 결식률과 같은 지표 목록(kdca.go.kr/yhs). 2024년 결과 보도자료에도 나온다</a:t>
-            </a:r>
-            <a:endParaRPr lang="en-US" sz="1050" dirty="0"/>
-          </a:p>
-          <a:p>
-            <a:pPr marL="342900" indent="-342900">
-              <a:spcAft>
-                <a:spcPts val="300"/>
-              </a:spcAft>
-              <a:buSzPct val="100000"/>
-              <a:buChar char="•"/>
-            </a:pPr>
-            <a:r>
-              <a:rPr lang="en-US" sz="1050" dirty="0">
-                <a:solidFill>
-                  <a:schemeClr val="tx1"/>
-                </a:solidFill>
-              </a:rPr>
-              <a:t>아침식사·수능: 농촌진흥청·다음 설문(2002. 7. 발표), 농촌진흥청 자료 '아침밥 먹으면 왜 좋을까?'(rda.go.kr)</a:t>
-            </a:r>
-            <a:endParaRPr lang="en-US" sz="1050" dirty="0"/>
-          </a:p>
-          <a:p>
-            <a:pPr marL="342900" indent="-342900">
-              <a:spcAft>
-                <a:spcPts val="300"/>
-              </a:spcAft>
-              <a:buSzPct val="100000"/>
-              <a:buChar char="•"/>
-            </a:pPr>
-            <a:r>
-              <a:rPr lang="en-US" sz="1050" dirty="0">
-                <a:solidFill>
-                  <a:schemeClr val="tx1"/>
-                </a:solidFill>
-              </a:rPr>
-              <a:t>권장 수면 8~10시간: 미국수면재단(thensf.org)</a:t>
-            </a:r>
-            <a:endParaRPr lang="en-US" sz="1050" dirty="0"/>
-          </a:p>
-        </p:txBody>
-      </p:sp>
-      <p:sp>
-        <p:nvSpPr>
-          <p:cNvPr id="14" name="설명 카드 3-4"/>
-          <p:cNvSpPr/>
-          <p:nvPr/>
-        </p:nvSpPr>
-        <p:spPr>
-          <a:xfrm>
-            <a:off x="4663440" y="2788920"/>
-            <a:ext cx="4023360" cy="1691640"/>
-          </a:xfrm>
-          <a:prstGeom prst="roundRect">
-            <a:avLst>
-              <a:gd name="adj" fmla="val 3243"/>
-            </a:avLst>
-          </a:prstGeom>
-          <a:solidFill>
-            <a:srgbClr val="FFFFFF"/>
-          </a:solidFill>
-          <a:ln w="9525">
-            <a:solidFill>
-              <a:srgbClr val="DCE5DF"/>
-            </a:solidFill>
-            <a:prstDash val="solid"/>
-          </a:ln>
-        </p:spPr>
-      </p:sp>
-      <p:sp>
-        <p:nvSpPr>
-          <p:cNvPr id="15" name="설명 제목 3-4"/>
-          <p:cNvSpPr txBox="1"/>
-          <p:nvPr/>
-        </p:nvSpPr>
-        <p:spPr>
-          <a:xfrm>
-            <a:off x="4828032" y="2880360"/>
-            <a:ext cx="3657600" cy="274320"/>
-          </a:xfrm>
-          <a:prstGeom prst="rect">
-            <a:avLst/>
-          </a:prstGeom>
-          <a:noFill/>
-          <a:ln/>
-        </p:spPr>
-        <p:txBody>
-          <a:bodyPr wrap="square" lIns="0" tIns="0" rIns="0" bIns="0" rtlCol="0" anchor="ctr"/>
-          <a:lstStyle/>
-          <a:p>
-            <a:pPr indent="0" marL="0">
-              <a:buNone/>
-            </a:pPr>
-            <a:r>
-              <a:rPr lang="en-US" sz="1150" b="1" dirty="0">
-                <a:solidFill>
-                  <a:schemeClr val="tx2"/>
-                </a:solidFill>
-              </a:rPr>
-              <a:t>채점 연결</a:t>
-            </a:r>
-            <a:endParaRPr lang="en-US" sz="1150" dirty="0"/>
-          </a:p>
-        </p:txBody>
-      </p:sp>
-      <p:sp>
-        <p:nvSpPr>
-          <p:cNvPr id="16" name="설명 내용 3-4"/>
-          <p:cNvSpPr txBox="1"/>
-          <p:nvPr/>
-        </p:nvSpPr>
-        <p:spPr>
-          <a:xfrm>
-            <a:off x="4828032" y="3172968"/>
-            <a:ext cx="3703320" cy="1234440"/>
-          </a:xfrm>
-          <a:prstGeom prst="rect">
-            <a:avLst/>
-          </a:prstGeom>
-          <a:noFill/>
-          <a:ln/>
-        </p:spPr>
-        <p:txBody>
-          <a:bodyPr wrap="square" lIns="0" tIns="0" rIns="0" bIns="0" rtlCol="0" anchor="t">
-            <a:normAutofit/>
-          </a:bodyPr>
-          <a:lstStyle/>
-          <a:p>
-            <a:pPr marL="342900" indent="-342900">
-              <a:spcAft>
-                <a:spcPts val="300"/>
-              </a:spcAft>
-              <a:buSzPct val="100000"/>
-              <a:buChar char="•"/>
-            </a:pPr>
-            <a:r>
-              <a:rPr lang="en-US" sz="1050" dirty="0">
-                <a:solidFill>
-                  <a:schemeClr val="tx1"/>
-                </a:solidFill>
-              </a:rPr>
-              <a:t>늘고 준 것을 숫자로 표현했는가(①)</a:t>
-            </a:r>
-            <a:endParaRPr lang="en-US" sz="1050" dirty="0"/>
-          </a:p>
-          <a:p>
-            <a:pPr marL="342900" indent="-342900">
-              <a:spcAft>
-                <a:spcPts val="300"/>
-              </a:spcAft>
-              <a:buSzPct val="100000"/>
-              <a:buChar char="•"/>
-            </a:pPr>
-            <a:r>
-              <a:rPr lang="en-US" sz="1050" dirty="0">
-                <a:solidFill>
-                  <a:schemeClr val="tx1"/>
-                </a:solidFill>
-              </a:rPr>
-              <a:t>가공된 자료로 의견 도출 또는 추측을 했는가(②)</a:t>
-            </a:r>
-            <a:endParaRPr lang="en-US" sz="1050" dirty="0"/>
-          </a:p>
-          <a:p>
-            <a:pPr marL="342900" indent="-342900">
-              <a:spcAft>
-                <a:spcPts val="300"/>
-              </a:spcAft>
-              <a:buSzPct val="100000"/>
-              <a:buChar char="•"/>
-            </a:pPr>
-            <a:r>
-              <a:rPr lang="en-US" sz="1050" dirty="0">
-                <a:solidFill>
-                  <a:schemeClr val="tx1"/>
-                </a:solidFill>
-              </a:rPr>
-              <a:t>의견·추측의 근거가 있는가(③, 출처와 함께)</a:t>
-            </a:r>
-            <a:endParaRPr lang="en-US" sz="1050" dirty="0"/>
-          </a:p>
-        </p:txBody>
-      </p:sp>
-      <p:sp>
-        <p:nvSpPr>
-          <p:cNvPr id="25" name="Slide Number Placeholder 0"/>
-          <p:cNvSpPr>
-            <a:spLocks noGrp="1"/>
-          </p:cNvSpPr>
-          <p:nvPr>
-            <p:ph type="sldNum" sz="quarter" idx="4294967295"/>
-          </p:nvPr>
-        </p:nvSpPr>
-        <p:spPr>
-          <a:xfrm>
-            <a:off x="8229600" y="4754880"/>
-            <a:ext cx="457200" cy="228600"/>
-          </a:xfrm>
-          <a:prstGeom prst="rect">
-            <a:avLst/>
-          </a:prstGeom>
-          <a:extLst>
-            <a:ext uri="{C572A759-6A51-4108-AA02-DFA0A04FC94B}">
-              <ma14:wrappingTextBoxFlag xmlns:ma14="http://schemas.microsoft.com/office/mac/drawingml/2011/main" val="0"/>
-            </a:ext>
-          </a:extLst>
-        </p:spPr>
-        <p:txBody>
-          <a:bodyPr/>
-          <a:lstStyle>
-            <a:lvl1pPr>
-              <a:defRPr sz="900">
-                <a:solidFill>
-                  <a:srgbClr val="6B6759"/>
-                </a:solidFill>
-              </a:defRPr>
-            </a:lvl1pPr>
-          </a:lstStyle>
-          <a:p>
-            <a:pPr algn="r"/>
-            <a:fld id="{F7021451-1387-4CA6-816F-3879F97B5CBC}" type="slidenum">
-              <a:rPr b="0" lang="en-US"/>
-              <a:t>6</a:t>
-            </a:fld>
-            <a:endParaRPr lang="en-US"/>
-          </a:p>
-        </p:txBody>
-      </p:sp>
-    </p:spTree>
-  </p:cSld>
-  <p:clrMapOvr>
-    <a:masterClrMapping/>
-  </p:clrMapOvr>
-</p:sld>
-</file>
-
-<file path=ppt/slides/slide7.xml><?xml version="1.0" encoding="utf-8"?>
-<p:sld xmlns:a="http://schemas.openxmlformats.org/drawingml/2006/main" xmlns:r="http://schemas.openxmlformats.org/officeDocument/2006/relationships" xmlns:p="http://schemas.openxmlformats.org/presentationml/2006/main">
-  <p:cSld name="Slide 7">
+  <p:cSld name="Slide 4">
     <p:spTree>
       <p:nvGrpSpPr>
         <p:cNvPr id="1" name=""/>
@@ -9343,7 +6832,7 @@
                   <a:schemeClr val="tx1"/>
                 </a:solidFill>
               </a:rPr>
-              <a:t>아침 결식은 10명 중 4명을 넘고(2025년 여학생 45.3%, 남학생 41.9%) 5년째 늘었다. 잠은 권장(8~10시간)보다 2시간 넘게 모자란다(주중 남 6.5, 여 5.9시간).</a:t>
+              <a:t>아침을 거르는 고등학생이 5년째 늘었다(2025년 여학생 45.3%, 남학생 41.9%). 이대로면 곧 절반을 넘는다.</a:t>
             </a:r>
             <a:endParaRPr lang="en-US" sz="1300" dirty="0"/>
           </a:p>
@@ -9444,7 +6933,7 @@
                   <a:schemeClr val="tx1"/>
                 </a:solidFill>
               </a:rPr>
-              <a:t>결식은 잠 부족과 같이 움직인다. 아침을 매일 먹은 학생이 주 2일 이하 먹은 학생보다 수능 평균이 19점 높았다(2002년 설문, 상관관계). 잠과 아침은 따로가 아니라 한 묶음의 생활 습관이고, 둘 다 학습과 이어진다.</a:t>
+              <a:t>아침은 학습과 이어진다. 아침을 매일 먹은 학생의 수능 평균이 주 2일 이하보다 19점 높았다(농촌진흥청 2002). 거르는 이유는 잠 부족이라고 본다. 주중 수면이 남 6.5, 여 5.9시간으로 권장 8~10시간에 못 미친다.</a:t>
             </a:r>
             <a:endParaRPr lang="en-US" sz="1300" dirty="0"/>
           </a:p>
@@ -9545,7 +7034,7 @@
                   <a:schemeClr val="tx1"/>
                 </a:solidFill>
               </a:rPr>
-              <a:t>우리 반부터 '11시 취침, 7시간 수면, 10분 아침'을 2주 실천하고, 실천 전후 오전 수업 집중도와 지각을 비교해 보자. 나는 간호학과 진학을 희망하며, 환자의 생활 습관을 이렇게 숫자로 상담하는 간호사가 되고 싶다.</a:t>
+              <a:t>올바른 수면 습관을 들이고 아침을 빠짐없이 먹어야 학습에 도움이 된다. 우리 반부터 '11시 취침, 7시간 수면, 10분 아침'을 2주 실천하고 전후를 비교해 보자.</a:t>
             </a:r>
             <a:endParaRPr lang="en-US" sz="1300" dirty="0"/>
           </a:p>
@@ -9590,688 +7079,7 @@
             <a:pPr algn="r"/>
             <a:fld id="{F7021451-1387-4CA6-816F-3879F97B5CBC}" type="slidenum">
               <a:rPr b="0" lang="en-US"/>
-              <a:t>7</a:t>
-            </a:fld>
-            <a:endParaRPr lang="en-US"/>
-          </a:p>
-        </p:txBody>
-      </p:sp>
-    </p:spTree>
-  </p:cSld>
-  <p:clrMapOvr>
-    <a:masterClrMapping/>
-  </p:clrMapOvr>
-</p:sld>
-</file>
-
-<file path=ppt/slides/slide8.xml><?xml version="1.0" encoding="utf-8"?>
-<p:sld xmlns:a="http://schemas.openxmlformats.org/drawingml/2006/main" xmlns:r="http://schemas.openxmlformats.org/officeDocument/2006/relationships" xmlns:p="http://schemas.openxmlformats.org/presentationml/2006/main">
-  <p:cSld name="Slide 8">
-    <p:spTree>
-      <p:nvGrpSpPr>
-        <p:cNvPr id="1" name=""/>
-        <p:cNvGrpSpPr/>
-        <p:nvPr/>
-      </p:nvGrpSpPr>
-      <p:grpSpPr>
-        <a:xfrm>
-          <a:off x="0" y="0"/>
-          <a:ext cx="0" cy="0"/>
-          <a:chOff x="0" y="0"/>
-          <a:chExt cx="0" cy="0"/>
-        </a:xfrm>
-      </p:grpSpPr>
-      <p:sp>
-        <p:nvSpPr>
-          <p:cNvPr id="2" name="Text 0"/>
-          <p:cNvSpPr/>
-          <p:nvPr>
-            <p:ph idx="100" type="title" hasCustomPrompt="1"/>
-          </p:nvPr>
-        </p:nvSpPr>
-        <p:spPr>
-          <a:xfrm>
-            <a:off x="960120" y="274320"/>
-            <a:ext cx="7726680" cy="548640"/>
-          </a:xfrm>
-          <a:prstGeom prst="rect">
-            <a:avLst/>
-          </a:prstGeom>
-          <a:noFill/>
-          <a:ln/>
-        </p:spPr>
-        <p:txBody>
-          <a:bodyPr wrap="square" lIns="0" tIns="0" rIns="0" bIns="0" rtlCol="0" anchor="ctr"/>
-          <a:lstStyle/>
-          <a:p>
-            <a:pPr algn="l" indent="0" marL="0">
-              <a:buNone/>
-            </a:pPr>
-            <a:r>
-              <a:rPr lang="en-US" sz="2400" b="1" dirty="0">
-                <a:solidFill>
-                  <a:schemeClr val="tx2"/>
-                </a:solidFill>
-              </a:rPr>
-              <a:t>4장 설명 · 핵심 요약</a:t>
-            </a:r>
-            <a:endParaRPr lang="en-US" sz="2400" dirty="0"/>
-          </a:p>
-        </p:txBody>
-      </p:sp>
-      <p:sp>
-        <p:nvSpPr>
-          <p:cNvPr id="3" name="설명 배지 4"/>
-          <p:cNvSpPr/>
-          <p:nvPr/>
-        </p:nvSpPr>
-        <p:spPr>
-          <a:xfrm>
-            <a:off x="457200" y="384048"/>
-            <a:ext cx="420624" cy="329184"/>
-          </a:xfrm>
-          <a:prstGeom prst="roundRect">
-            <a:avLst>
-              <a:gd name="adj" fmla="val 22222"/>
-            </a:avLst>
-          </a:prstGeom>
-          <a:solidFill>
-            <a:schemeClr val="accent1"/>
-          </a:solidFill>
-          <a:ln w="12700">
-            <a:solidFill>
-              <a:schemeClr val="accent1"/>
-            </a:solidFill>
-            <a:prstDash val="solid"/>
-          </a:ln>
-        </p:spPr>
-      </p:sp>
-      <p:sp>
-        <p:nvSpPr>
-          <p:cNvPr id="4" name="설명 배지 글자 4"/>
-          <p:cNvSpPr txBox="1"/>
-          <p:nvPr/>
-        </p:nvSpPr>
-        <p:spPr>
-          <a:xfrm>
-            <a:off x="457200" y="384048"/>
-            <a:ext cx="420624" cy="329184"/>
-          </a:xfrm>
-          <a:prstGeom prst="rect">
-            <a:avLst/>
-          </a:prstGeom>
-          <a:noFill/>
-          <a:ln/>
-        </p:spPr>
-        <p:txBody>
-          <a:bodyPr wrap="square" lIns="0" tIns="0" rIns="0" bIns="0" rtlCol="0" anchor="ctr"/>
-          <a:lstStyle/>
-          <a:p>
-            <a:pPr algn="ctr" indent="0" marL="0">
-              <a:buNone/>
-            </a:pPr>
-            <a:r>
-              <a:rPr lang="en-US" sz="1000" b="1" dirty="0">
-                <a:solidFill>
-                  <a:schemeClr val="bg1"/>
-                </a:solidFill>
-              </a:rPr>
-              <a:t>설명</a:t>
-            </a:r>
-            <a:endParaRPr lang="en-US" sz="1000" dirty="0"/>
-          </a:p>
-        </p:txBody>
-      </p:sp>
-      <p:sp>
-        <p:nvSpPr>
-          <p:cNvPr id="5" name="설명 카드 4-1"/>
-          <p:cNvSpPr/>
-          <p:nvPr/>
-        </p:nvSpPr>
-        <p:spPr>
-          <a:xfrm>
-            <a:off x="457200" y="960120"/>
-            <a:ext cx="4023360" cy="1691640"/>
-          </a:xfrm>
-          <a:prstGeom prst="roundRect">
-            <a:avLst>
-              <a:gd name="adj" fmla="val 3243"/>
-            </a:avLst>
-          </a:prstGeom>
-          <a:solidFill>
-            <a:srgbClr val="FFFFFF"/>
-          </a:solidFill>
-          <a:ln w="9525">
-            <a:solidFill>
-              <a:srgbClr val="DCE5DF"/>
-            </a:solidFill>
-            <a:prstDash val="solid"/>
-          </a:ln>
-        </p:spPr>
-      </p:sp>
-      <p:sp>
-        <p:nvSpPr>
-          <p:cNvPr id="6" name="설명 제목 4-1"/>
-          <p:cNvSpPr txBox="1"/>
-          <p:nvPr/>
-        </p:nvSpPr>
-        <p:spPr>
-          <a:xfrm>
-            <a:off x="621792" y="1051560"/>
-            <a:ext cx="3657600" cy="274320"/>
-          </a:xfrm>
-          <a:prstGeom prst="rect">
-            <a:avLst/>
-          </a:prstGeom>
-          <a:noFill/>
-          <a:ln/>
-        </p:spPr>
-        <p:txBody>
-          <a:bodyPr wrap="square" lIns="0" tIns="0" rIns="0" bIns="0" rtlCol="0" anchor="ctr"/>
-          <a:lstStyle/>
-          <a:p>
-            <a:pPr indent="0" marL="0">
-              <a:buNone/>
-            </a:pPr>
-            <a:r>
-              <a:rPr lang="en-US" sz="1150" b="1" dirty="0">
-                <a:solidFill>
-                  <a:schemeClr val="tx2"/>
-                </a:solidFill>
-              </a:rPr>
-              <a:t>결론의 구조</a:t>
-            </a:r>
-            <a:endParaRPr lang="en-US" sz="1150" dirty="0"/>
-          </a:p>
-        </p:txBody>
-      </p:sp>
-      <p:sp>
-        <p:nvSpPr>
-          <p:cNvPr id="7" name="설명 내용 4-1"/>
-          <p:cNvSpPr txBox="1"/>
-          <p:nvPr/>
-        </p:nvSpPr>
-        <p:spPr>
-          <a:xfrm>
-            <a:off x="621792" y="1344168"/>
-            <a:ext cx="3703320" cy="1234440"/>
-          </a:xfrm>
-          <a:prstGeom prst="rect">
-            <a:avLst/>
-          </a:prstGeom>
-          <a:noFill/>
-          <a:ln/>
-        </p:spPr>
-        <p:txBody>
-          <a:bodyPr wrap="square" lIns="0" tIns="0" rIns="0" bIns="0" rtlCol="0" anchor="t">
-            <a:normAutofit/>
-          </a:bodyPr>
-          <a:lstStyle/>
-          <a:p>
-            <a:pPr marL="342900" indent="-342900">
-              <a:spcAft>
-                <a:spcPts val="300"/>
-              </a:spcAft>
-              <a:buSzPct val="100000"/>
-              <a:buChar char="•"/>
-            </a:pPr>
-            <a:r>
-              <a:rPr lang="en-US" sz="1050" dirty="0">
-                <a:solidFill>
-                  <a:schemeClr val="tx1"/>
-                </a:solidFill>
-              </a:rPr>
-              <a:t>통계가 보여 준 것(숫자) → 통계 분석(숫자를 어떻게 읽었나) → 결론(그래서 무엇을 하나)</a:t>
-            </a:r>
-            <a:endParaRPr lang="en-US" sz="1050" dirty="0"/>
-          </a:p>
-          <a:p>
-            <a:pPr marL="342900" indent="-342900">
-              <a:spcAft>
-                <a:spcPts val="300"/>
-              </a:spcAft>
-              <a:buSzPct val="100000"/>
-              <a:buChar char="•"/>
-            </a:pPr>
-            <a:r>
-              <a:rPr lang="en-US" sz="1050" dirty="0">
-                <a:solidFill>
-                  <a:schemeClr val="tx1"/>
-                </a:solidFill>
-              </a:rPr>
-              <a:t>학교가 해 주는 것이 아니라 내가·우리 반이 할 수 있는 일로 끝낸다</a:t>
-            </a:r>
-            <a:endParaRPr lang="en-US" sz="1050" dirty="0"/>
-          </a:p>
-        </p:txBody>
-      </p:sp>
-      <p:sp>
-        <p:nvSpPr>
-          <p:cNvPr id="8" name="설명 카드 4-2"/>
-          <p:cNvSpPr/>
-          <p:nvPr/>
-        </p:nvSpPr>
-        <p:spPr>
-          <a:xfrm>
-            <a:off x="4663440" y="960120"/>
-            <a:ext cx="4023360" cy="1691640"/>
-          </a:xfrm>
-          <a:prstGeom prst="roundRect">
-            <a:avLst>
-              <a:gd name="adj" fmla="val 3243"/>
-            </a:avLst>
-          </a:prstGeom>
-          <a:solidFill>
-            <a:srgbClr val="FFFFFF"/>
-          </a:solidFill>
-          <a:ln w="9525">
-            <a:solidFill>
-              <a:srgbClr val="DCE5DF"/>
-            </a:solidFill>
-            <a:prstDash val="solid"/>
-          </a:ln>
-        </p:spPr>
-      </p:sp>
-      <p:sp>
-        <p:nvSpPr>
-          <p:cNvPr id="9" name="설명 제목 4-2"/>
-          <p:cNvSpPr txBox="1"/>
-          <p:nvPr/>
-        </p:nvSpPr>
-        <p:spPr>
-          <a:xfrm>
-            <a:off x="4828032" y="1051560"/>
-            <a:ext cx="3657600" cy="274320"/>
-          </a:xfrm>
-          <a:prstGeom prst="rect">
-            <a:avLst/>
-          </a:prstGeom>
-          <a:noFill/>
-          <a:ln/>
-        </p:spPr>
-        <p:txBody>
-          <a:bodyPr wrap="square" lIns="0" tIns="0" rIns="0" bIns="0" rtlCol="0" anchor="ctr"/>
-          <a:lstStyle/>
-          <a:p>
-            <a:pPr indent="0" marL="0">
-              <a:buNone/>
-            </a:pPr>
-            <a:r>
-              <a:rPr lang="en-US" sz="1150" b="1" dirty="0">
-                <a:solidFill>
-                  <a:schemeClr val="tx2"/>
-                </a:solidFill>
-              </a:rPr>
-              <a:t>효과 통계의 출처와 한계</a:t>
-            </a:r>
-            <a:endParaRPr lang="en-US" sz="1150" dirty="0"/>
-          </a:p>
-        </p:txBody>
-      </p:sp>
-      <p:sp>
-        <p:nvSpPr>
-          <p:cNvPr id="10" name="설명 내용 4-2"/>
-          <p:cNvSpPr txBox="1"/>
-          <p:nvPr/>
-        </p:nvSpPr>
-        <p:spPr>
-          <a:xfrm>
-            <a:off x="4828032" y="1344168"/>
-            <a:ext cx="3703320" cy="1234440"/>
-          </a:xfrm>
-          <a:prstGeom prst="rect">
-            <a:avLst/>
-          </a:prstGeom>
-          <a:noFill/>
-          <a:ln/>
-        </p:spPr>
-        <p:txBody>
-          <a:bodyPr wrap="square" lIns="0" tIns="0" rIns="0" bIns="0" rtlCol="0" anchor="t">
-            <a:normAutofit/>
-          </a:bodyPr>
-          <a:lstStyle/>
-          <a:p>
-            <a:pPr marL="342900" indent="-342900">
-              <a:spcAft>
-                <a:spcPts val="300"/>
-              </a:spcAft>
-              <a:buSzPct val="100000"/>
-              <a:buChar char="•"/>
-            </a:pPr>
-            <a:r>
-              <a:rPr lang="en-US" sz="1050" dirty="0">
-                <a:solidFill>
-                  <a:schemeClr val="tx1"/>
-                </a:solidFill>
-              </a:rPr>
-              <a:t>농촌진흥청·다음 설문(2002. 7. 발표): 대학 1·2학년 3,612명에게 고교 때 아침 식사 습관과 수능 점수를 물음</a:t>
-            </a:r>
-            <a:endParaRPr lang="en-US" sz="1050" dirty="0"/>
-          </a:p>
-          <a:p>
-            <a:pPr marL="342900" indent="-342900">
-              <a:spcAft>
-                <a:spcPts val="300"/>
-              </a:spcAft>
-              <a:buSzPct val="100000"/>
-              <a:buChar char="•"/>
-            </a:pPr>
-            <a:r>
-              <a:rPr lang="en-US" sz="1050" dirty="0">
-                <a:solidFill>
-                  <a:schemeClr val="tx1"/>
-                </a:solidFill>
-              </a:rPr>
-              <a:t>매일 먹음 294점 vs 주 2일 이하 275점(400점 만점), 내신 평균 3.7 vs 4.4등급</a:t>
-            </a:r>
-            <a:endParaRPr lang="en-US" sz="1050" dirty="0"/>
-          </a:p>
-          <a:p>
-            <a:pPr marL="342900" indent="-342900">
-              <a:spcAft>
-                <a:spcPts val="300"/>
-              </a:spcAft>
-              <a:buSzPct val="100000"/>
-              <a:buChar char="•"/>
-            </a:pPr>
-            <a:r>
-              <a:rPr lang="en-US" sz="1050" dirty="0">
-                <a:solidFill>
-                  <a:schemeClr val="tx1"/>
-                </a:solidFill>
-              </a:rPr>
-              <a:t>오래된 자기보고 조사라 상관관계다. 2017년 청소년건강행태조사 분석 논문(한국가정의학회지, 2019)도 같은 방향</a:t>
-            </a:r>
-            <a:endParaRPr lang="en-US" sz="1050" dirty="0"/>
-          </a:p>
-        </p:txBody>
-      </p:sp>
-      <p:sp>
-        <p:nvSpPr>
-          <p:cNvPr id="11" name="설명 카드 4-3"/>
-          <p:cNvSpPr/>
-          <p:nvPr/>
-        </p:nvSpPr>
-        <p:spPr>
-          <a:xfrm>
-            <a:off x="457200" y="2788920"/>
-            <a:ext cx="4023360" cy="1691640"/>
-          </a:xfrm>
-          <a:prstGeom prst="roundRect">
-            <a:avLst>
-              <a:gd name="adj" fmla="val 3243"/>
-            </a:avLst>
-          </a:prstGeom>
-          <a:solidFill>
-            <a:srgbClr val="FFFFFF"/>
-          </a:solidFill>
-          <a:ln w="9525">
-            <a:solidFill>
-              <a:srgbClr val="DCE5DF"/>
-            </a:solidFill>
-            <a:prstDash val="solid"/>
-          </a:ln>
-        </p:spPr>
-      </p:sp>
-      <p:sp>
-        <p:nvSpPr>
-          <p:cNvPr id="12" name="설명 제목 4-3"/>
-          <p:cNvSpPr txBox="1"/>
-          <p:nvPr/>
-        </p:nvSpPr>
-        <p:spPr>
-          <a:xfrm>
-            <a:off x="621792" y="2880360"/>
-            <a:ext cx="3657600" cy="274320"/>
-          </a:xfrm>
-          <a:prstGeom prst="rect">
-            <a:avLst/>
-          </a:prstGeom>
-          <a:noFill/>
-          <a:ln/>
-        </p:spPr>
-        <p:txBody>
-          <a:bodyPr wrap="square" lIns="0" tIns="0" rIns="0" bIns="0" rtlCol="0" anchor="ctr"/>
-          <a:lstStyle/>
-          <a:p>
-            <a:pPr indent="0" marL="0">
-              <a:buNone/>
-            </a:pPr>
-            <a:r>
-              <a:rPr lang="en-US" sz="1150" b="1" dirty="0">
-                <a:solidFill>
-                  <a:schemeClr val="tx2"/>
-                </a:solidFill>
-              </a:rPr>
-              <a:t>실천 가능한 결론</a:t>
-            </a:r>
-            <a:endParaRPr lang="en-US" sz="1150" dirty="0"/>
-          </a:p>
-        </p:txBody>
-      </p:sp>
-      <p:sp>
-        <p:nvSpPr>
-          <p:cNvPr id="13" name="설명 내용 4-3"/>
-          <p:cNvSpPr txBox="1"/>
-          <p:nvPr/>
-        </p:nvSpPr>
-        <p:spPr>
-          <a:xfrm>
-            <a:off x="621792" y="3172968"/>
-            <a:ext cx="3703320" cy="1234440"/>
-          </a:xfrm>
-          <a:prstGeom prst="rect">
-            <a:avLst/>
-          </a:prstGeom>
-          <a:noFill/>
-          <a:ln/>
-        </p:spPr>
-        <p:txBody>
-          <a:bodyPr wrap="square" lIns="0" tIns="0" rIns="0" bIns="0" rtlCol="0" anchor="t">
-            <a:normAutofit/>
-          </a:bodyPr>
-          <a:lstStyle/>
-          <a:p>
-            <a:pPr marL="342900" indent="-342900">
-              <a:spcAft>
-                <a:spcPts val="300"/>
-              </a:spcAft>
-              <a:buSzPct val="100000"/>
-              <a:buChar char="•"/>
-            </a:pPr>
-            <a:r>
-              <a:rPr lang="en-US" sz="1050" dirty="0">
-                <a:solidFill>
-                  <a:schemeClr val="tx1"/>
-                </a:solidFill>
-              </a:rPr>
-              <a:t>'2주 실천 + 전후 비교'처럼 바로 할 수 있고 숫자로 확인할 수 있는 것</a:t>
-            </a:r>
-            <a:endParaRPr lang="en-US" sz="1050" dirty="0"/>
-          </a:p>
-          <a:p>
-            <a:pPr marL="342900" indent="-342900">
-              <a:spcAft>
-                <a:spcPts val="300"/>
-              </a:spcAft>
-              <a:buSzPct val="100000"/>
-              <a:buChar char="•"/>
-            </a:pPr>
-            <a:r>
-              <a:rPr lang="en-US" sz="1050" dirty="0">
-                <a:solidFill>
-                  <a:schemeClr val="tx1"/>
-                </a:solidFill>
-              </a:rPr>
-              <a:t>전후 비교 항목: 결식 일수, 오전 집중도(자기 평가), 지각</a:t>
-            </a:r>
-            <a:endParaRPr lang="en-US" sz="1050" dirty="0"/>
-          </a:p>
-        </p:txBody>
-      </p:sp>
-      <p:sp>
-        <p:nvSpPr>
-          <p:cNvPr id="14" name="설명 카드 4-4"/>
-          <p:cNvSpPr/>
-          <p:nvPr/>
-        </p:nvSpPr>
-        <p:spPr>
-          <a:xfrm>
-            <a:off x="4663440" y="2788920"/>
-            <a:ext cx="4023360" cy="1691640"/>
-          </a:xfrm>
-          <a:prstGeom prst="roundRect">
-            <a:avLst>
-              <a:gd name="adj" fmla="val 3243"/>
-            </a:avLst>
-          </a:prstGeom>
-          <a:solidFill>
-            <a:srgbClr val="FFFFFF"/>
-          </a:solidFill>
-          <a:ln w="9525">
-            <a:solidFill>
-              <a:srgbClr val="DCE5DF"/>
-            </a:solidFill>
-            <a:prstDash val="solid"/>
-          </a:ln>
-        </p:spPr>
-      </p:sp>
-      <p:sp>
-        <p:nvSpPr>
-          <p:cNvPr id="15" name="설명 제목 4-4"/>
-          <p:cNvSpPr txBox="1"/>
-          <p:nvPr/>
-        </p:nvSpPr>
-        <p:spPr>
-          <a:xfrm>
-            <a:off x="4828032" y="2880360"/>
-            <a:ext cx="3657600" cy="274320"/>
-          </a:xfrm>
-          <a:prstGeom prst="rect">
-            <a:avLst/>
-          </a:prstGeom>
-          <a:noFill/>
-          <a:ln/>
-        </p:spPr>
-        <p:txBody>
-          <a:bodyPr wrap="square" lIns="0" tIns="0" rIns="0" bIns="0" rtlCol="0" anchor="ctr"/>
-          <a:lstStyle/>
-          <a:p>
-            <a:pPr indent="0" marL="0">
-              <a:buNone/>
-            </a:pPr>
-            <a:r>
-              <a:rPr lang="en-US" sz="1150" b="1" dirty="0">
-                <a:solidFill>
-                  <a:schemeClr val="tx2"/>
-                </a:solidFill>
-              </a:rPr>
-              <a:t>채점 연결</a:t>
-            </a:r>
-            <a:endParaRPr lang="en-US" sz="1150" dirty="0"/>
-          </a:p>
-        </p:txBody>
-      </p:sp>
-      <p:sp>
-        <p:nvSpPr>
-          <p:cNvPr id="16" name="설명 내용 4-4"/>
-          <p:cNvSpPr txBox="1"/>
-          <p:nvPr/>
-        </p:nvSpPr>
-        <p:spPr>
-          <a:xfrm>
-            <a:off x="4828032" y="3172968"/>
-            <a:ext cx="3703320" cy="1234440"/>
-          </a:xfrm>
-          <a:prstGeom prst="rect">
-            <a:avLst/>
-          </a:prstGeom>
-          <a:noFill/>
-          <a:ln/>
-        </p:spPr>
-        <p:txBody>
-          <a:bodyPr wrap="square" lIns="0" tIns="0" rIns="0" bIns="0" rtlCol="0" anchor="t">
-            <a:normAutofit/>
-          </a:bodyPr>
-          <a:lstStyle/>
-          <a:p>
-            <a:pPr marL="342900" indent="-342900">
-              <a:spcAft>
-                <a:spcPts val="300"/>
-              </a:spcAft>
-              <a:buSzPct val="100000"/>
-              <a:buChar char="•"/>
-            </a:pPr>
-            <a:r>
-              <a:rPr lang="en-US" sz="1050" dirty="0">
-                <a:solidFill>
-                  <a:schemeClr val="tx1"/>
-                </a:solidFill>
-              </a:rPr>
-              <a:t>4번 발표 20점: 출처·표·그래프·해석이 모두 나오고 결론이 자세할 때</a:t>
-            </a:r>
-            <a:endParaRPr lang="en-US" sz="1050" dirty="0"/>
-          </a:p>
-          <a:p>
-            <a:pPr marL="342900" indent="-342900">
-              <a:spcAft>
-                <a:spcPts val="300"/>
-              </a:spcAft>
-              <a:buSzPct val="100000"/>
-              <a:buChar char="•"/>
-            </a:pPr>
-            <a:r>
-              <a:rPr lang="en-US" sz="1050" dirty="0">
-                <a:solidFill>
-                  <a:schemeClr val="tx1"/>
-                </a:solidFill>
-              </a:rPr>
-              <a:t>결론이 한 문장이면 15점, 제작·해석이 빠지면 10점</a:t>
-            </a:r>
-            <a:endParaRPr lang="en-US" sz="1050" dirty="0"/>
-          </a:p>
-        </p:txBody>
-      </p:sp>
-      <p:sp>
-        <p:nvSpPr>
-          <p:cNvPr id="25" name="Slide Number Placeholder 0"/>
-          <p:cNvSpPr>
-            <a:spLocks noGrp="1"/>
-          </p:cNvSpPr>
-          <p:nvPr>
-            <p:ph type="sldNum" sz="quarter" idx="4294967295"/>
-          </p:nvPr>
-        </p:nvSpPr>
-        <p:spPr>
-          <a:xfrm>
-            <a:off x="8229600" y="4754880"/>
-            <a:ext cx="457200" cy="228600"/>
-          </a:xfrm>
-          <a:prstGeom prst="rect">
-            <a:avLst/>
-          </a:prstGeom>
-          <a:extLst>
-            <a:ext uri="{C572A759-6A51-4108-AA02-DFA0A04FC94B}">
-              <ma14:wrappingTextBoxFlag xmlns:ma14="http://schemas.microsoft.com/office/mac/drawingml/2011/main" val="0"/>
-            </a:ext>
-          </a:extLst>
-        </p:spPr>
-        <p:txBody>
-          <a:bodyPr/>
-          <a:lstStyle>
-            <a:lvl1pPr>
-              <a:defRPr sz="900">
-                <a:solidFill>
-                  <a:srgbClr val="6B6759"/>
-                </a:solidFill>
-              </a:defRPr>
-            </a:lvl1pPr>
-          </a:lstStyle>
-          <a:p>
-            <a:pPr algn="r"/>
-            <a:fld id="{F7021451-1387-4CA6-816F-3879F97B5CBC}" type="slidenum">
-              <a:rPr b="0" lang="en-US"/>
-              <a:t>8</a:t>
+              <a:t>4</a:t>
             </a:fld>
             <a:endParaRPr lang="en-US"/>
           </a:p>
